--- a/slides/datasets-in-10-minutes-bustm.pptx
+++ b/slides/datasets-in-10-minutes-bustm.pptx
@@ -30,8 +30,6 @@
     <p:sldId id="278" r:id="rId28"/>
     <p:sldId id="279" r:id="rId29"/>
     <p:sldId id="280" r:id="rId30"/>
-    <p:sldId id="281" r:id="rId31"/>
-    <p:sldId id="282" r:id="rId32"/>
     <p:sldId id="283" r:id="rId33"/>
     <p:sldId id="284" r:id="rId34"/>
     <p:sldId id="285" r:id="rId35"/>
@@ -47,13 +45,8 @@
     <p:sldId id="295" r:id="rId45"/>
     <p:sldId id="296" r:id="rId46"/>
     <p:sldId id="297" r:id="rId47"/>
-    <p:sldId id="298" r:id="rId48"/>
-    <p:sldId id="299" r:id="rId49"/>
-    <p:sldId id="300" r:id="rId50"/>
-    <p:sldId id="301" r:id="rId51"/>
     <p:sldId id="302" r:id="rId52"/>
     <p:sldId id="303" r:id="rId53"/>
-    <p:sldId id="304" r:id="rId54"/>
     <p:sldId id="305" r:id="rId55"/>
     <p:sldId id="306" r:id="rId56"/>
     <p:sldId id="307" r:id="rId57"/>
@@ -7581,714 +7574,6 @@
       </p:sp>
       <p:sp>
         <p:nvSpPr>
-          <p:cNvPr id="4" name="Rounded Rectangle 3"/>
-          <p:cNvSpPr/>
-          <p:nvPr/>
-        </p:nvSpPr>
-        <p:spPr>
-          <a:xfrm>
-            <a:off x="594360" y="1737360"/>
-            <a:ext cx="2423160" cy="1371600"/>
-          </a:xfrm>
-          <a:prstGeom prst="roundRect">
-            <a:avLst/>
-          </a:prstGeom>
-          <a:solidFill>
-            <a:srgbClr val="EBEDEB"/>
-          </a:solidFill>
-          <a:ln>
-            <a:noFill/>
-          </a:ln>
-        </p:spPr>
-        <p:style>
-          <a:lnRef idx="1">
-            <a:schemeClr val="accent1"/>
-          </a:lnRef>
-          <a:fillRef idx="3">
-            <a:schemeClr val="accent1"/>
-          </a:fillRef>
-          <a:effectRef idx="2">
-            <a:schemeClr val="accent1"/>
-          </a:effectRef>
-          <a:fontRef idx="minor">
-            <a:schemeClr val="lt1"/>
-          </a:fontRef>
-        </p:style>
-        <p:txBody>
-          <a:bodyPr rtlCol="0" anchor="ctr"/>
-          <a:lstStyle/>
-          <a:p>
-            <a:pPr algn="ctr"/>
-          </a:p>
-        </p:txBody>
-      </p:sp>
-      <p:sp>
-        <p:nvSpPr>
-          <p:cNvPr id="5" name="TextBox 4"/>
-          <p:cNvSpPr txBox="1"/>
-          <p:nvPr/>
-        </p:nvSpPr>
-        <p:spPr>
-          <a:xfrm>
-            <a:off x="704088" y="1874519"/>
-            <a:ext cx="2203704" cy="292608"/>
-          </a:xfrm>
-          <a:prstGeom prst="rect">
-            <a:avLst/>
-          </a:prstGeom>
-          <a:noFill/>
-        </p:spPr>
-        <p:txBody>
-          <a:bodyPr wrap="square" lIns="0" rIns="0" tIns="0" bIns="0">
-            <a:noAutofit/>
-          </a:bodyPr>
-          <a:lstStyle/>
-          <a:p>
-            <a:pPr algn="l">
-              <a:lnSpc>
-                <a:spcPts val="2457"/>
-              </a:lnSpc>
-              <a:spcBef>
-                <a:spcPts val="0"/>
-              </a:spcBef>
-              <a:spcAft>
-                <a:spcPts val="0"/>
-              </a:spcAft>
-              <a:buNone/>
-              <a:defRPr sz="2100" b="0">
-                <a:solidFill>
-                  <a:srgbClr val="303437"/>
-                </a:solidFill>
-                <a:latin typeface="Noto Sans"/>
-              </a:defRPr>
-            </a:pPr>
-            <a:r>
-              <a:rPr sz="2100" b="1" lang="ja-JP" altLang="en-US">
-                <a:solidFill>
-                  <a:srgbClr val="303437"/>
-                </a:solidFill>
-                <a:latin typeface="Noto Sans"/>
-                <a:ea typeface="Noto Sans CJK JP"/>
-                <a:cs typeface="Noto Sans"/>
-              </a:rPr>
-              <a:t>小布助手</a:t>
-            </a:r>
-          </a:p>
-        </p:txBody>
-      </p:sp>
-      <p:sp>
-        <p:nvSpPr>
-          <p:cNvPr id="6" name="TextBox 5"/>
-          <p:cNvSpPr txBox="1"/>
-          <p:nvPr/>
-        </p:nvSpPr>
-        <p:spPr>
-          <a:xfrm>
-            <a:off x="704088" y="2322576"/>
-            <a:ext cx="2203704" cy="640080"/>
-          </a:xfrm>
-          <a:prstGeom prst="rect">
-            <a:avLst/>
-          </a:prstGeom>
-          <a:noFill/>
-        </p:spPr>
-        <p:txBody>
-          <a:bodyPr wrap="square" lIns="0" rIns="0" tIns="0" bIns="0">
-            <a:noAutofit/>
-          </a:bodyPr>
-          <a:lstStyle/>
-          <a:p>
-            <a:pPr algn="l">
-              <a:lnSpc>
-                <a:spcPts val="1989"/>
-              </a:lnSpc>
-              <a:spcBef>
-                <a:spcPts val="0"/>
-              </a:spcBef>
-              <a:spcAft>
-                <a:spcPts val="0"/>
-              </a:spcAft>
-              <a:buNone/>
-              <a:defRPr sz="1700" b="0">
-                <a:solidFill>
-                  <a:srgbClr val="303437"/>
-                </a:solidFill>
-                <a:latin typeface="Noto Sans"/>
-              </a:defRPr>
-            </a:pPr>
-            <a:r>
-              <a:rPr sz="1700" b="0" lang="ja-JP" altLang="en-US">
-                <a:solidFill>
-                  <a:srgbClr val="303437"/>
-                </a:solidFill>
-                <a:latin typeface="Noto Sans"/>
-                <a:ea typeface="Noto Sans CJK JP"/>
-                <a:cs typeface="Noto Sans"/>
-              </a:rPr>
-              <a:t>発話の意味を照合し</a:t>
-            </a:r>
-          </a:p>
-          <a:p>
-            <a:pPr algn="l">
-              <a:lnSpc>
-                <a:spcPts val="1989"/>
-              </a:lnSpc>
-              <a:spcBef>
-                <a:spcPts val="0"/>
-              </a:spcBef>
-              <a:spcAft>
-                <a:spcPts val="0"/>
-              </a:spcAft>
-              <a:buNone/>
-              <a:defRPr sz="1700" b="0">
-                <a:solidFill>
-                  <a:srgbClr val="303437"/>
-                </a:solidFill>
-                <a:latin typeface="Noto Sans"/>
-              </a:defRPr>
-            </a:pPr>
-            <a:r>
-              <a:rPr sz="1700" b="0" lang="ja-JP" altLang="en-US">
-                <a:solidFill>
-                  <a:srgbClr val="303437"/>
-                </a:solidFill>
-                <a:latin typeface="Noto Sans"/>
-                <a:ea typeface="Noto Sans CJK JP"/>
-                <a:cs typeface="Noto Sans"/>
-              </a:rPr>
-              <a:t>意図認識に利用</a:t>
-            </a:r>
-          </a:p>
-        </p:txBody>
-      </p:sp>
-      <p:sp>
-        <p:nvSpPr>
-          <p:cNvPr id="7" name="TextBox 6"/>
-          <p:cNvSpPr txBox="1"/>
-          <p:nvPr/>
-        </p:nvSpPr>
-        <p:spPr>
-          <a:xfrm>
-            <a:off x="3063240" y="2286000"/>
-            <a:ext cx="274320" cy="365760"/>
-          </a:xfrm>
-          <a:prstGeom prst="rect">
-            <a:avLst/>
-          </a:prstGeom>
-          <a:noFill/>
-        </p:spPr>
-        <p:txBody>
-          <a:bodyPr wrap="square" lIns="0" rIns="0" tIns="0" bIns="0">
-            <a:noAutofit/>
-          </a:bodyPr>
-          <a:lstStyle/>
-          <a:p>
-            <a:pPr algn="l">
-              <a:lnSpc>
-                <a:spcPts val="2340"/>
-              </a:lnSpc>
-              <a:spcBef>
-                <a:spcPts val="0"/>
-              </a:spcBef>
-              <a:spcAft>
-                <a:spcPts val="0"/>
-              </a:spcAft>
-              <a:buNone/>
-              <a:defRPr sz="2000" b="0">
-                <a:solidFill>
-                  <a:srgbClr val="303437"/>
-                </a:solidFill>
-                <a:latin typeface="Noto Sans"/>
-              </a:defRPr>
-            </a:pPr>
-            <a:r>
-              <a:rPr sz="2000" b="0" lang="ja-JP" altLang="en-US">
-                <a:solidFill>
-                  <a:srgbClr val="303437"/>
-                </a:solidFill>
-                <a:latin typeface="Noto Sans"/>
-                <a:ea typeface="Noto Sans CJK JP"/>
-                <a:cs typeface="Noto Sans"/>
-              </a:rPr>
-              <a:t>→</a:t>
-            </a:r>
-          </a:p>
-        </p:txBody>
-      </p:sp>
-      <p:sp>
-        <p:nvSpPr>
-          <p:cNvPr id="8" name="Rounded Rectangle 7"/>
-          <p:cNvSpPr/>
-          <p:nvPr/>
-        </p:nvSpPr>
-        <p:spPr>
-          <a:xfrm>
-            <a:off x="3355848" y="1737360"/>
-            <a:ext cx="2423160" cy="1371600"/>
-          </a:xfrm>
-          <a:prstGeom prst="roundRect">
-            <a:avLst/>
-          </a:prstGeom>
-          <a:solidFill>
-            <a:srgbClr val="EBEDEB"/>
-          </a:solidFill>
-          <a:ln>
-            <a:noFill/>
-          </a:ln>
-        </p:spPr>
-        <p:style>
-          <a:lnRef idx="1">
-            <a:schemeClr val="accent1"/>
-          </a:lnRef>
-          <a:fillRef idx="3">
-            <a:schemeClr val="accent1"/>
-          </a:fillRef>
-          <a:effectRef idx="2">
-            <a:schemeClr val="accent1"/>
-          </a:effectRef>
-          <a:fontRef idx="minor">
-            <a:schemeClr val="lt1"/>
-          </a:fontRef>
-        </p:style>
-        <p:txBody>
-          <a:bodyPr rtlCol="0" anchor="ctr"/>
-          <a:lstStyle/>
-          <a:p>
-            <a:pPr algn="ctr"/>
-          </a:p>
-        </p:txBody>
-      </p:sp>
-      <p:sp>
-        <p:nvSpPr>
-          <p:cNvPr id="9" name="TextBox 8"/>
-          <p:cNvSpPr txBox="1"/>
-          <p:nvPr/>
-        </p:nvSpPr>
-        <p:spPr>
-          <a:xfrm>
-            <a:off x="3465576" y="1874519"/>
-            <a:ext cx="2203704" cy="292608"/>
-          </a:xfrm>
-          <a:prstGeom prst="rect">
-            <a:avLst/>
-          </a:prstGeom>
-          <a:noFill/>
-        </p:spPr>
-        <p:txBody>
-          <a:bodyPr wrap="square" lIns="0" rIns="0" tIns="0" bIns="0">
-            <a:noAutofit/>
-          </a:bodyPr>
-          <a:lstStyle/>
-          <a:p>
-            <a:pPr algn="l">
-              <a:lnSpc>
-                <a:spcPts val="2457"/>
-              </a:lnSpc>
-              <a:spcBef>
-                <a:spcPts val="0"/>
-              </a:spcBef>
-              <a:spcAft>
-                <a:spcPts val="0"/>
-              </a:spcAft>
-              <a:buNone/>
-              <a:defRPr sz="2100" b="0">
-                <a:solidFill>
-                  <a:srgbClr val="303437"/>
-                </a:solidFill>
-                <a:latin typeface="Noto Sans"/>
-              </a:defRPr>
-            </a:pPr>
-            <a:r>
-              <a:rPr sz="2100" b="1" lang="ja-JP" altLang="en-US">
-                <a:solidFill>
-                  <a:srgbClr val="303437"/>
-                </a:solidFill>
-                <a:latin typeface="Noto Sans"/>
-                <a:ea typeface="Noto Sans CJK JP"/>
-                <a:cs typeface="Noto Sans"/>
-              </a:rPr>
-              <a:t>BUSTM</a:t>
-            </a:r>
-          </a:p>
-        </p:txBody>
-      </p:sp>
-      <p:sp>
-        <p:nvSpPr>
-          <p:cNvPr id="10" name="TextBox 9"/>
-          <p:cNvSpPr txBox="1"/>
-          <p:nvPr/>
-        </p:nvSpPr>
-        <p:spPr>
-          <a:xfrm>
-            <a:off x="3465576" y="2322576"/>
-            <a:ext cx="2203704" cy="640080"/>
-          </a:xfrm>
-          <a:prstGeom prst="rect">
-            <a:avLst/>
-          </a:prstGeom>
-          <a:noFill/>
-        </p:spPr>
-        <p:txBody>
-          <a:bodyPr wrap="square" lIns="0" rIns="0" tIns="0" bIns="0">
-            <a:noAutofit/>
-          </a:bodyPr>
-          <a:lstStyle/>
-          <a:p>
-            <a:pPr algn="l">
-              <a:lnSpc>
-                <a:spcPts val="1989"/>
-              </a:lnSpc>
-              <a:spcBef>
-                <a:spcPts val="0"/>
-              </a:spcBef>
-              <a:spcAft>
-                <a:spcPts val="0"/>
-              </a:spcAft>
-              <a:buNone/>
-              <a:defRPr sz="1700" b="0">
-                <a:solidFill>
-                  <a:srgbClr val="303437"/>
-                </a:solidFill>
-                <a:latin typeface="Noto Sans"/>
-              </a:defRPr>
-            </a:pPr>
-            <a:r>
-              <a:rPr sz="1700" b="0" lang="ja-JP" altLang="en-US">
-                <a:solidFill>
-                  <a:srgbClr val="303437"/>
-                </a:solidFill>
-                <a:latin typeface="Noto Sans"/>
-                <a:ea typeface="Noto Sans CJK JP"/>
-                <a:cs typeface="Noto Sans"/>
-              </a:rPr>
-              <a:t>口語の短い発話を</a:t>
-            </a:r>
-          </a:p>
-          <a:p>
-            <a:pPr algn="l">
-              <a:lnSpc>
-                <a:spcPts val="1989"/>
-              </a:lnSpc>
-              <a:spcBef>
-                <a:spcPts val="0"/>
-              </a:spcBef>
-              <a:spcAft>
-                <a:spcPts val="0"/>
-              </a:spcAft>
-              <a:buNone/>
-              <a:defRPr sz="1700" b="0">
-                <a:solidFill>
-                  <a:srgbClr val="303437"/>
-                </a:solidFill>
-                <a:latin typeface="Noto Sans"/>
-              </a:defRPr>
-            </a:pPr>
-            <a:r>
-              <a:rPr sz="1700" b="0" lang="ja-JP" altLang="en-US">
-                <a:solidFill>
-                  <a:srgbClr val="303437"/>
-                </a:solidFill>
-                <a:latin typeface="Noto Sans"/>
-                <a:ea typeface="Noto Sans CJK JP"/>
-                <a:cs typeface="Noto Sans"/>
-              </a:rPr>
-              <a:t>二つずつ組にする</a:t>
-            </a:r>
-          </a:p>
-        </p:txBody>
-      </p:sp>
-      <p:sp>
-        <p:nvSpPr>
-          <p:cNvPr id="11" name="TextBox 10"/>
-          <p:cNvSpPr txBox="1"/>
-          <p:nvPr/>
-        </p:nvSpPr>
-        <p:spPr>
-          <a:xfrm>
-            <a:off x="5824728" y="2286000"/>
-            <a:ext cx="274320" cy="365760"/>
-          </a:xfrm>
-          <a:prstGeom prst="rect">
-            <a:avLst/>
-          </a:prstGeom>
-          <a:noFill/>
-        </p:spPr>
-        <p:txBody>
-          <a:bodyPr wrap="square" lIns="0" rIns="0" tIns="0" bIns="0">
-            <a:noAutofit/>
-          </a:bodyPr>
-          <a:lstStyle/>
-          <a:p>
-            <a:pPr algn="l">
-              <a:lnSpc>
-                <a:spcPts val="2340"/>
-              </a:lnSpc>
-              <a:spcBef>
-                <a:spcPts val="0"/>
-              </a:spcBef>
-              <a:spcAft>
-                <a:spcPts val="0"/>
-              </a:spcAft>
-              <a:buNone/>
-              <a:defRPr sz="2000" b="0">
-                <a:solidFill>
-                  <a:srgbClr val="303437"/>
-                </a:solidFill>
-                <a:latin typeface="Noto Sans"/>
-              </a:defRPr>
-            </a:pPr>
-            <a:r>
-              <a:rPr sz="2000" b="0" lang="ja-JP" altLang="en-US">
-                <a:solidFill>
-                  <a:srgbClr val="303437"/>
-                </a:solidFill>
-                <a:latin typeface="Noto Sans"/>
-                <a:ea typeface="Noto Sans CJK JP"/>
-                <a:cs typeface="Noto Sans"/>
-              </a:rPr>
-              <a:t>→</a:t>
-            </a:r>
-          </a:p>
-        </p:txBody>
-      </p:sp>
-      <p:sp>
-        <p:nvSpPr>
-          <p:cNvPr id="12" name="Rounded Rectangle 11"/>
-          <p:cNvSpPr/>
-          <p:nvPr/>
-        </p:nvSpPr>
-        <p:spPr>
-          <a:xfrm>
-            <a:off x="6117336" y="1737360"/>
-            <a:ext cx="2423160" cy="1371600"/>
-          </a:xfrm>
-          <a:prstGeom prst="roundRect">
-            <a:avLst/>
-          </a:prstGeom>
-          <a:solidFill>
-            <a:srgbClr val="EBEDEB"/>
-          </a:solidFill>
-          <a:ln>
-            <a:noFill/>
-          </a:ln>
-        </p:spPr>
-        <p:style>
-          <a:lnRef idx="1">
-            <a:schemeClr val="accent1"/>
-          </a:lnRef>
-          <a:fillRef idx="3">
-            <a:schemeClr val="accent1"/>
-          </a:fillRef>
-          <a:effectRef idx="2">
-            <a:schemeClr val="accent1"/>
-          </a:effectRef>
-          <a:fontRef idx="minor">
-            <a:schemeClr val="lt1"/>
-          </a:fontRef>
-        </p:style>
-        <p:txBody>
-          <a:bodyPr rtlCol="0" anchor="ctr"/>
-          <a:lstStyle/>
-          <a:p>
-            <a:pPr algn="ctr"/>
-          </a:p>
-        </p:txBody>
-      </p:sp>
-      <p:sp>
-        <p:nvSpPr>
-          <p:cNvPr id="13" name="TextBox 12"/>
-          <p:cNvSpPr txBox="1"/>
-          <p:nvPr/>
-        </p:nvSpPr>
-        <p:spPr>
-          <a:xfrm>
-            <a:off x="6227064" y="1874519"/>
-            <a:ext cx="2203704" cy="292608"/>
-          </a:xfrm>
-          <a:prstGeom prst="rect">
-            <a:avLst/>
-          </a:prstGeom>
-          <a:noFill/>
-        </p:spPr>
-        <p:txBody>
-          <a:bodyPr wrap="square" lIns="0" rIns="0" tIns="0" bIns="0">
-            <a:noAutofit/>
-          </a:bodyPr>
-          <a:lstStyle/>
-          <a:p>
-            <a:pPr algn="l">
-              <a:lnSpc>
-                <a:spcPts val="2457"/>
-              </a:lnSpc>
-              <a:spcBef>
-                <a:spcPts val="0"/>
-              </a:spcBef>
-              <a:spcAft>
-                <a:spcPts val="0"/>
-              </a:spcAft>
-              <a:buNone/>
-              <a:defRPr sz="2100" b="0">
-                <a:solidFill>
-                  <a:srgbClr val="303437"/>
-                </a:solidFill>
-                <a:latin typeface="Noto Sans"/>
-              </a:defRPr>
-            </a:pPr>
-            <a:r>
-              <a:rPr sz="2100" b="1" lang="ja-JP" altLang="en-US">
-                <a:solidFill>
-                  <a:srgbClr val="303437"/>
-                </a:solidFill>
-                <a:latin typeface="Noto Sans"/>
-                <a:ea typeface="Noto Sans CJK JP"/>
-                <a:cs typeface="Noto Sans"/>
-              </a:rPr>
-              <a:t>FewCLUE</a:t>
-            </a:r>
-          </a:p>
-        </p:txBody>
-      </p:sp>
-      <p:sp>
-        <p:nvSpPr>
-          <p:cNvPr id="14" name="TextBox 13"/>
-          <p:cNvSpPr txBox="1"/>
-          <p:nvPr/>
-        </p:nvSpPr>
-        <p:spPr>
-          <a:xfrm>
-            <a:off x="6227064" y="2322576"/>
-            <a:ext cx="2203704" cy="640080"/>
-          </a:xfrm>
-          <a:prstGeom prst="rect">
-            <a:avLst/>
-          </a:prstGeom>
-          <a:noFill/>
-        </p:spPr>
-        <p:txBody>
-          <a:bodyPr wrap="square" lIns="0" rIns="0" tIns="0" bIns="0">
-            <a:noAutofit/>
-          </a:bodyPr>
-          <a:lstStyle/>
-          <a:p>
-            <a:pPr algn="l">
-              <a:lnSpc>
-                <a:spcPts val="1989"/>
-              </a:lnSpc>
-              <a:spcBef>
-                <a:spcPts val="0"/>
-              </a:spcBef>
-              <a:spcAft>
-                <a:spcPts val="0"/>
-              </a:spcAft>
-              <a:buNone/>
-              <a:defRPr sz="1700" b="0">
-                <a:solidFill>
-                  <a:srgbClr val="303437"/>
-                </a:solidFill>
-                <a:latin typeface="Noto Sans"/>
-              </a:defRPr>
-            </a:pPr>
-            <a:r>
-              <a:rPr sz="1700" b="0" lang="ja-JP" altLang="en-US">
-                <a:solidFill>
-                  <a:srgbClr val="303437"/>
-                </a:solidFill>
-                <a:latin typeface="Noto Sans"/>
-                <a:ea typeface="Noto Sans CJK JP"/>
-                <a:cs typeface="Noto Sans"/>
-              </a:rPr>
-              <a:t>32件の学習例で</a:t>
-            </a:r>
-          </a:p>
-          <a:p>
-            <a:pPr algn="l">
-              <a:lnSpc>
-                <a:spcPts val="1989"/>
-              </a:lnSpc>
-              <a:spcBef>
-                <a:spcPts val="0"/>
-              </a:spcBef>
-              <a:spcAft>
-                <a:spcPts val="0"/>
-              </a:spcAft>
-              <a:buNone/>
-              <a:defRPr sz="1700" b="0">
-                <a:solidFill>
-                  <a:srgbClr val="303437"/>
-                </a:solidFill>
-                <a:latin typeface="Noto Sans"/>
-              </a:defRPr>
-            </a:pPr>
-            <a:r>
-              <a:rPr sz="1700" b="0" lang="ja-JP" altLang="en-US">
-                <a:solidFill>
-                  <a:srgbClr val="303437"/>
-                </a:solidFill>
-                <a:latin typeface="Noto Sans"/>
-                <a:ea typeface="Noto Sans CJK JP"/>
-                <a:cs typeface="Noto Sans"/>
-              </a:rPr>
-              <a:t>意味の一致を学ぶ</a:t>
-            </a:r>
-          </a:p>
-        </p:txBody>
-      </p:sp>
-      <p:sp>
-        <p:nvSpPr>
-          <p:cNvPr id="15" name="TextBox 14"/>
-          <p:cNvSpPr txBox="1"/>
-          <p:nvPr/>
-        </p:nvSpPr>
-        <p:spPr>
-          <a:xfrm>
-            <a:off x="640080" y="3566160"/>
-            <a:ext cx="7772400" cy="731520"/>
-          </a:xfrm>
-          <a:prstGeom prst="rect">
-            <a:avLst/>
-          </a:prstGeom>
-          <a:noFill/>
-        </p:spPr>
-        <p:txBody>
-          <a:bodyPr wrap="square" lIns="0" rIns="0" tIns="0" bIns="0">
-            <a:noAutofit/>
-          </a:bodyPr>
-          <a:lstStyle/>
-          <a:p>
-            <a:pPr algn="l">
-              <a:lnSpc>
-                <a:spcPts val="2340"/>
-              </a:lnSpc>
-              <a:spcBef>
-                <a:spcPts val="0"/>
-              </a:spcBef>
-              <a:spcAft>
-                <a:spcPts val="0"/>
-              </a:spcAft>
-              <a:buNone/>
-              <a:defRPr sz="2000" b="0">
-                <a:solidFill>
-                  <a:srgbClr val="303437"/>
-                </a:solidFill>
-                <a:latin typeface="Noto Sans"/>
-              </a:defRPr>
-            </a:pPr>
-            <a:r>
-              <a:rPr sz="2000" b="0" lang="ja-JP" altLang="en-US">
-                <a:solidFill>
-                  <a:srgbClr val="303437"/>
-                </a:solidFill>
-                <a:latin typeface="Noto Sans"/>
-                <a:ea typeface="Noto Sans CJK JP"/>
-                <a:cs typeface="Noto Sans"/>
-              </a:rPr>
-              <a:t>スマートフォンやIoT機器への依頼・質問を含む。意図のカテゴリ名を出すのではなく、二つの発話が同じ意味かを二値で判定する。</a:t>
-            </a:r>
-          </a:p>
-        </p:txBody>
-      </p:sp>
-      <p:sp>
-        <p:nvSpPr>
           <p:cNvPr id="16" name="sources"/>
           <p:cNvSpPr txBox="1"/>
           <p:nvPr/>
@@ -8360,6 +7645,77 @@
                 <a:hlinkClick r:id="rId2"/>
               </a:rPr>
               <a:t>https://github.com/xiaobu-coai/BUSTM</a:t>
+            </a:r>
+          </a:p>
+        </p:txBody>
+      </p:sp>
+      <p:sp>
+        <p:nvSpPr>
+          <p:cNvPr id="17" name="TextBox 16"/>
+          <p:cNvSpPr txBox="1"/>
+          <p:nvPr/>
+        </p:nvSpPr>
+        <p:spPr>
+          <a:xfrm>
+            <a:off x="640080" y="1508760"/>
+            <a:ext cx="7863840" cy="2880360"/>
+          </a:xfrm>
+          <a:prstGeom prst="rect">
+            <a:avLst/>
+          </a:prstGeom>
+          <a:noFill/>
+        </p:spPr>
+        <p:txBody>
+          <a:bodyPr wrap="square">
+            <a:spAutoFit/>
+          </a:bodyPr>
+          <a:lstStyle/>
+          <a:p>
+            <a:pPr>
+              <a:lnSpc>
+                <a:spcPct val="119000"/>
+              </a:lnSpc>
+              <a:spcAft>
+                <a:spcPts val="1400"/>
+              </a:spcAft>
+              <a:defRPr sz="2100">
+                <a:latin typeface="Noto Sans CJK JP"/>
+              </a:defRPr>
+            </a:pPr>
+            <a:r>
+              <a:t>小布助手は、スマートフォンやIoT機器に対する依頼・質問の意図を認識する。</a:t>
+            </a:r>
+          </a:p>
+          <a:p>
+            <a:pPr>
+              <a:lnSpc>
+                <a:spcPct val="119000"/>
+              </a:lnSpc>
+              <a:spcAft>
+                <a:spcPts val="1400"/>
+              </a:spcAft>
+              <a:defRPr sz="2100">
+                <a:latin typeface="Noto Sans CJK JP"/>
+              </a:defRPr>
+            </a:pPr>
+            <a:r>
+              <a:t>BUSTMは、このような短い口語の発話を二つずつ組にし、意味が一致するかをラベルで示す。</a:t>
+            </a:r>
+          </a:p>
+          <a:p>
+            <a:pPr>
+              <a:lnSpc>
+                <a:spcPct val="119000"/>
+              </a:lnSpc>
+              <a:spcAft>
+                <a:spcPts val="1400"/>
+              </a:spcAft>
+              <a:defRPr sz="2100">
+                <a:latin typeface="Noto Sans CJK JP"/>
+              </a:defRPr>
+            </a:pPr>
+            <a:r>
+              <a:t>FewCLUEは、32件の学習例を使う少数例学習の課題としてBUSTMを採用した。</a:t>
             </a:r>
           </a:p>
         </p:txBody>
@@ -8478,7 +7834,7 @@
                 <a:ea typeface="Noto Sans CJK JP"/>
                 <a:cs typeface="Noto Sans"/>
               </a:rPr>
-              <a:t>教師ありデータを大量に用意しにくい実務上の課題を受け、OPPOは2021年にBUSTMを公開した。FewCLUEは中国語の少数例学習を比べる九つの課題の一つに採用した。</a:t>
+              <a:t>教師ありデータを大量に用意しにくい実務上の課題を受け、OPPOは2021年にBUSTMを公開した。FewCLUEは、中国語の少数例学習を比べる九つの課題の一つに採用した。</a:t>
             </a:r>
           </a:p>
           <a:p>
@@ -8508,7 +7864,7 @@
                 <a:ea typeface="Noto Sans CJK JP"/>
                 <a:cs typeface="Noto Sans"/>
               </a:rPr>
-              <a:t>FewCLUEでは、ラベルが三種類以下の課題に合計32件の学習例を用意する。BUSTMの32件は各ラベル32件ではなく、二つのラベルを合わせた件数。</a:t>
+              <a:t>BUSTMでは、意味が一致する対と一致しない対を合わせて32件の学習例を用いる。</a:t>
             </a:r>
           </a:p>
         </p:txBody>
@@ -9825,7 +9181,7 @@
                 <a:ea typeface="Noto Sans CJK JP"/>
                 <a:cs typeface="Noto Sans"/>
               </a:rPr>
-              <a:t>train_few_allとdev_few_allは各160行。五つの小集合をまとめた配布で、それぞれ異なる発話対は156種類。</a:t>
+              <a:t>train_few_allとdev_few_allは、五つの小集合をまとめた各160件の配布。</a:t>
             </a:r>
           </a:p>
         </p:txBody>
@@ -9879,7 +9235,7 @@
                 <a:ea typeface="Noto Sans CJK JP"/>
                 <a:cs typeface="Noto Sans"/>
               </a:rPr>
-              <a:t>[1] Xu et al. (2021). FewCLUE: A Chinese Few-shot Learning Evaluation Benchmark. arXiv:2107.07498v2.</a:t>
+              <a:t>[1] Xu et al. (2021). FewCLUE: A Chinese Few-shot Learning Evaluation Benchmark. arXiv:2107.07498v2.  </a:t>
             </a:r>
             <a:r>
               <a:rPr sz="810" b="0" lang="ja-JP" altLang="en-US">
@@ -9889,9 +9245,27 @@
                 <a:latin typeface="Noto Sans"/>
                 <a:ea typeface="Noto Sans CJK JP"/>
                 <a:cs typeface="Noto Sans"/>
-              </a:rPr>
-              <a:t>  </a:t>
-            </a:r>
+                <a:hlinkClick r:id="rId2"/>
+              </a:rPr>
+              <a:t>https://arxiv.org/abs/2107.07498</a:t>
+            </a:r>
+          </a:p>
+          <a:p>
+            <a:pPr>
+              <a:lnSpc>
+                <a:spcPts val="940"/>
+              </a:lnSpc>
+              <a:spcAft>
+                <a:spcPts val="140"/>
+              </a:spcAft>
+              <a:buNone/>
+              <a:defRPr sz="810" b="0">
+                <a:solidFill>
+                  <a:srgbClr val="303437"/>
+                </a:solidFill>
+                <a:latin typeface="Noto Sans"/>
+              </a:defRPr>
+            </a:pPr>
             <a:r>
               <a:rPr sz="810" b="0" lang="ja-JP" altLang="en-US">
                 <a:solidFill>
@@ -9900,27 +9274,9 @@
                 <a:latin typeface="Noto Sans"/>
                 <a:ea typeface="Noto Sans CJK JP"/>
                 <a:cs typeface="Noto Sans"/>
-                <a:hlinkClick r:id="rId2"/>
-              </a:rPr>
-              <a:t>https://arxiv.org/abs/2107.07498</a:t>
-            </a:r>
-          </a:p>
-          <a:p>
-            <a:pPr>
-              <a:lnSpc>
-                <a:spcPts val="940"/>
-              </a:lnSpc>
-              <a:spcAft>
-                <a:spcPts val="140"/>
-              </a:spcAft>
-              <a:buNone/>
-              <a:defRPr sz="810" b="0">
-                <a:solidFill>
-                  <a:srgbClr val="303437"/>
-                </a:solidFill>
-                <a:latin typeface="Noto Sans"/>
-              </a:defRPr>
-            </a:pPr>
+              </a:rPr>
+              <a:t>[2] CLUE team (2021). FewCLUE — BUSTM.  </a:t>
+            </a:r>
             <a:r>
               <a:rPr sz="810" b="0" lang="ja-JP" altLang="en-US">
                 <a:solidFill>
@@ -9929,34 +9285,9 @@
                 <a:latin typeface="Noto Sans"/>
                 <a:ea typeface="Noto Sans CJK JP"/>
                 <a:cs typeface="Noto Sans"/>
-              </a:rPr>
-              <a:t>[2] CLUE team. FewCLUE / BUSTM 公式配布、commit 62a02c6f31cf32814cfe522f78ef088228840f8d、2026-10-18参照。</a:t>
-            </a:r>
-          </a:p>
-          <a:p>
-            <a:pPr>
-              <a:lnSpc>
-                <a:spcPts val="940"/>
-              </a:lnSpc>
-              <a:buNone/>
-              <a:defRPr sz="810" b="0">
-                <a:solidFill>
-                  <a:srgbClr val="303437"/>
-                </a:solidFill>
-                <a:latin typeface="Noto Sans"/>
-              </a:defRPr>
-            </a:pPr>
-            <a:r>
-              <a:rPr sz="810" b="0" lang="ja-JP" altLang="en-US">
-                <a:solidFill>
-                  <a:srgbClr val="626669"/>
-                </a:solidFill>
-                <a:latin typeface="Noto Sans"/>
-                <a:ea typeface="Noto Sans CJK JP"/>
-                <a:cs typeface="Noto Sans"/>
-                <a:hlinkClick r:id="rId3"/>
-              </a:rPr>
-              <a:t>https://github.com/CLUEbenchmark/FewCLUE/tree/62a02c6f31cf32814cfe522f78ef088228840f8d/datasets/bustm</a:t>
+                <a:hlinkClick r:id="rId4"/>
+              </a:rPr>
+              <a:t>https://github.com/CLUEbenchmark/FewCLUE/tree/main/datasets/bustm</a:t>
             </a:r>
           </a:p>
         </p:txBody>
@@ -10105,7 +9436,7 @@
                 <a:ea typeface="Noto Sans CJK JP"/>
                 <a:cs typeface="Noto Sans"/>
               </a:rPr>
-              <a:t>複数の学習・開発組を用意することで、少数の例の選ばれ方による揺れを調べる。コンテスト第2段階では0〜4とallの六つの学習条件ごとにtestへの予測を提出する。</a:t>
+              <a:t>学習・開発には五つの組があり、少数の例の選ばれ方による性能の揺れを調べられる。コンテスト第2段階では、五つの組とそれらをまとめたallの計六つの学習条件で評価した。</a:t>
             </a:r>
           </a:p>
         </p:txBody>
@@ -10207,22 +9538,8 @@
                 <a:ea typeface="Noto Sans CJK JP"/>
                 <a:cs typeface="Noto Sans"/>
               </a:rPr>
-              <a:t>[1] CLUE team. FewCLUE README、公式の実験・提出・配布条件。</a:t>
-            </a:r>
-          </a:p>
-          <a:p>
-            <a:pPr>
-              <a:lnSpc>
-                <a:spcPts val="940"/>
-              </a:lnSpc>
-              <a:buNone/>
-              <a:defRPr sz="810" b="0">
-                <a:solidFill>
-                  <a:srgbClr val="303437"/>
-                </a:solidFill>
-                <a:latin typeface="Noto Sans"/>
-              </a:defRPr>
-            </a:pPr>
+              <a:t>[1] CLUE team (2021). FewCLUE — README.  </a:t>
+            </a:r>
             <a:r>
               <a:rPr sz="810" b="0" lang="ja-JP" altLang="en-US">
                 <a:solidFill>
@@ -10231,9 +9548,9 @@
                 <a:latin typeface="Noto Sans"/>
                 <a:ea typeface="Noto Sans CJK JP"/>
                 <a:cs typeface="Noto Sans"/>
-                <a:hlinkClick r:id="rId2"/>
-              </a:rPr>
-              <a:t>https://github.com/CLUEbenchmark/FewCLUE/blob/62a02c6f31cf32814cfe522f78ef088228840f8d/README.md</a:t>
+                <a:hlinkClick r:id="rId3"/>
+              </a:rPr>
+              <a:t>https://github.com/CLUEbenchmark/FewCLUE/blob/main/README.md</a:t>
             </a:r>
           </a:p>
         </p:txBody>
@@ -10299,7 +9616,7 @@
                 <a:ea typeface="Noto Sans CJK JP"/>
                 <a:cs typeface="Noto Sans"/>
               </a:rPr>
-              <a:t>一行に二つの発話と文字列の正解を持つ</a:t>
+              <a:t>1行に二つの発話と正解ラベルを収める</a:t>
             </a:r>
           </a:p>
         </p:txBody>
@@ -10628,7 +9945,7 @@
                 <a:ea typeface="Noto Sans CJK JP"/>
                 <a:cs typeface="Noto Sans"/>
               </a:rPr>
-              <a:t>train_few_all.jsonの36行。labelは文字列の"0"または"1"。testとunlabeledにはlabel欄がない。idはファイルをまたいで一意とは限らない。</a:t>
+              <a:t>sentence1とsentence2が二つの発話。labelは文字列の"0"（不一致）または"1"（一致）。</a:t>
             </a:r>
           </a:p>
         </p:txBody>
@@ -10682,22 +9999,8 @@
                 <a:ea typeface="Noto Sans CJK JP"/>
                 <a:cs typeface="Noto Sans"/>
               </a:rPr>
-              <a:t>[1] CLUE team. FewCLUE / BUSTM 公式配布、commit 62a02c6f31cf32814cfe522f78ef088228840f8d、2026-10-18参照。</a:t>
-            </a:r>
-          </a:p>
-          <a:p>
-            <a:pPr>
-              <a:lnSpc>
-                <a:spcPts val="940"/>
-              </a:lnSpc>
-              <a:buNone/>
-              <a:defRPr sz="810" b="0">
-                <a:solidFill>
-                  <a:srgbClr val="303437"/>
-                </a:solidFill>
-                <a:latin typeface="Noto Sans"/>
-              </a:defRPr>
-            </a:pPr>
+              <a:t>[1] CLUE team (2021). FewCLUE — BUSTM.  </a:t>
+            </a:r>
             <a:r>
               <a:rPr sz="810" b="0" lang="ja-JP" altLang="en-US">
                 <a:solidFill>
@@ -10706,9 +10009,9 @@
                 <a:latin typeface="Noto Sans"/>
                 <a:ea typeface="Noto Sans CJK JP"/>
                 <a:cs typeface="Noto Sans"/>
-                <a:hlinkClick r:id="rId2"/>
-              </a:rPr>
-              <a:t>https://github.com/CLUEbenchmark/FewCLUE/tree/62a02c6f31cf32814cfe522f78ef088228840f8d/datasets/bustm</a:t>
+                <a:hlinkClick r:id="rId3"/>
+              </a:rPr>
+              <a:t>https://github.com/CLUEbenchmark/FewCLUE/tree/main/datasets/bustm</a:t>
             </a:r>
           </a:p>
         </p:txBody>
@@ -11758,7 +11061,7 @@
                 <a:ea typeface="Noto Sans CJK JP"/>
                 <a:cs typeface="Noto Sans"/>
               </a:rPr>
-              <a:t>固定版の全レコードを集計。学習の5組は、それぞれ必ず16対16になるわけではない。</a:t>
+              <a:t>学習・開発のラベルの割合は、組ごとに異なる。</a:t>
             </a:r>
           </a:p>
         </p:txBody>
@@ -11812,22 +11115,8 @@
                 <a:ea typeface="Noto Sans CJK JP"/>
                 <a:cs typeface="Noto Sans"/>
               </a:rPr>
-              <a:t>[1] CLUE team. FewCLUE / BUSTM 公式配布、commit 62a02c6f31cf32814cfe522f78ef088228840f8d、2026-10-18参照。</a:t>
-            </a:r>
-          </a:p>
-          <a:p>
-            <a:pPr>
-              <a:lnSpc>
-                <a:spcPts val="940"/>
-              </a:lnSpc>
-              <a:buNone/>
-              <a:defRPr sz="810" b="0">
-                <a:solidFill>
-                  <a:srgbClr val="303437"/>
-                </a:solidFill>
-                <a:latin typeface="Noto Sans"/>
-              </a:defRPr>
-            </a:pPr>
+              <a:t>[1] CLUE team (2021). FewCLUE — BUSTM.  </a:t>
+            </a:r>
             <a:r>
               <a:rPr sz="810" b="0" lang="ja-JP" altLang="en-US">
                 <a:solidFill>
@@ -11836,9 +11125,9 @@
                 <a:latin typeface="Noto Sans"/>
                 <a:ea typeface="Noto Sans CJK JP"/>
                 <a:cs typeface="Noto Sans"/>
-                <a:hlinkClick r:id="rId2"/>
-              </a:rPr>
-              <a:t>https://github.com/CLUEbenchmark/FewCLUE/tree/62a02c6f31cf32814cfe522f78ef088228840f8d/datasets/bustm</a:t>
+                <a:hlinkClick r:id="rId3"/>
+              </a:rPr>
+              <a:t>https://github.com/CLUEbenchmark/FewCLUE/tree/main/datasets/bustm</a:t>
             </a:r>
           </a:p>
         </p:txBody>
@@ -12018,7 +11307,7 @@
                 <a:ea typeface="Noto Sans CJK JP"/>
                 <a:cs typeface="Noto Sans"/>
               </a:rPr>
-              <a:t>Accuracyは、配布ラベルと一致した対の割合</a:t>
+              <a:t>正解率は、ラベルを正しく予測した発話対の割合</a:t>
             </a:r>
           </a:p>
         </p:txBody>
@@ -12071,7 +11360,7 @@
                 <a:ea typeface="Noto Sans CJK JP"/>
                 <a:cs typeface="Noto Sans"/>
               </a:rPr>
-              <a:t>二つの発話から0または1を予測し、正解ラベルと一致した件数を評価件数で割る。test_publicの1,772対では、いつも同じラベルを出すだけなら886対が正しく、正解率は50%。</a:t>
+              <a:t>二つの発話から0または1を予測し、正解ラベルと一致した件数を、評価した発話対の数で割る。</a:t>
             </a:r>
           </a:p>
           <a:p>
@@ -12101,7 +11390,7 @@
                 <a:ea typeface="Noto Sans CJK JP"/>
                 <a:cs typeface="Noto Sans"/>
               </a:rPr>
-              <a:t>意味が近く見える対にも、配布ラベルが0の例がある。正解率を再現するときは元のラベルを使い、解釈だけで正解を付け替えない。</a:t>
+              <a:t>公開テストは1,772対で、二つのラベルが同数ある。いつも同じラベルを予測する方法の正解率は50%。</a:t>
             </a:r>
           </a:p>
         </p:txBody>
@@ -12203,7 +11492,7 @@
                 <a:ea typeface="Noto Sans CJK JP"/>
                 <a:cs typeface="Noto Sans"/>
               </a:rPr>
-              <a:t>[1] Xu et al. (2021). FewCLUE: A Chinese Few-shot Learning Evaluation Benchmark. arXiv:2107.07498v2.</a:t>
+              <a:t>[1] Xu et al. (2021). FewCLUE: A Chinese Few-shot Learning Evaluation Benchmark. arXiv:2107.07498v2.  </a:t>
             </a:r>
             <a:r>
               <a:rPr sz="810" b="0" lang="ja-JP" altLang="en-US">
@@ -12213,9 +11502,27 @@
                 <a:latin typeface="Noto Sans"/>
                 <a:ea typeface="Noto Sans CJK JP"/>
                 <a:cs typeface="Noto Sans"/>
-              </a:rPr>
-              <a:t>  </a:t>
-            </a:r>
+                <a:hlinkClick r:id="rId2"/>
+              </a:rPr>
+              <a:t>https://arxiv.org/abs/2107.07498</a:t>
+            </a:r>
+          </a:p>
+          <a:p>
+            <a:pPr>
+              <a:lnSpc>
+                <a:spcPts val="940"/>
+              </a:lnSpc>
+              <a:spcAft>
+                <a:spcPts val="140"/>
+              </a:spcAft>
+              <a:buNone/>
+              <a:defRPr sz="810" b="0">
+                <a:solidFill>
+                  <a:srgbClr val="303437"/>
+                </a:solidFill>
+                <a:latin typeface="Noto Sans"/>
+              </a:defRPr>
+            </a:pPr>
             <a:r>
               <a:rPr sz="810" b="0" lang="ja-JP" altLang="en-US">
                 <a:solidFill>
@@ -12224,27 +11531,9 @@
                 <a:latin typeface="Noto Sans"/>
                 <a:ea typeface="Noto Sans CJK JP"/>
                 <a:cs typeface="Noto Sans"/>
-                <a:hlinkClick r:id="rId2"/>
-              </a:rPr>
-              <a:t>https://arxiv.org/abs/2107.07498</a:t>
-            </a:r>
-          </a:p>
-          <a:p>
-            <a:pPr>
-              <a:lnSpc>
-                <a:spcPts val="940"/>
-              </a:lnSpc>
-              <a:spcAft>
-                <a:spcPts val="140"/>
-              </a:spcAft>
-              <a:buNone/>
-              <a:defRPr sz="810" b="0">
-                <a:solidFill>
-                  <a:srgbClr val="303437"/>
-                </a:solidFill>
-                <a:latin typeface="Noto Sans"/>
-              </a:defRPr>
-            </a:pPr>
+              </a:rPr>
+              <a:t>[2] CLUE team (2021). FewCLUE — BUSTM.  </a:t>
+            </a:r>
             <a:r>
               <a:rPr sz="810" b="0" lang="ja-JP" altLang="en-US">
                 <a:solidFill>
@@ -12253,34 +11542,9 @@
                 <a:latin typeface="Noto Sans"/>
                 <a:ea typeface="Noto Sans CJK JP"/>
                 <a:cs typeface="Noto Sans"/>
-              </a:rPr>
-              <a:t>[2] CLUE team. FewCLUE / BUSTM 公式配布、commit 62a02c6f31cf32814cfe522f78ef088228840f8d、2026-10-18参照。</a:t>
-            </a:r>
-          </a:p>
-          <a:p>
-            <a:pPr>
-              <a:lnSpc>
-                <a:spcPts val="940"/>
-              </a:lnSpc>
-              <a:buNone/>
-              <a:defRPr sz="810" b="0">
-                <a:solidFill>
-                  <a:srgbClr val="303437"/>
-                </a:solidFill>
-                <a:latin typeface="Noto Sans"/>
-              </a:defRPr>
-            </a:pPr>
-            <a:r>
-              <a:rPr sz="810" b="0" lang="ja-JP" altLang="en-US">
-                <a:solidFill>
-                  <a:srgbClr val="626669"/>
-                </a:solidFill>
-                <a:latin typeface="Noto Sans"/>
-                <a:ea typeface="Noto Sans CJK JP"/>
-                <a:cs typeface="Noto Sans"/>
-                <a:hlinkClick r:id="rId3"/>
-              </a:rPr>
-              <a:t>https://github.com/CLUEbenchmark/FewCLUE/tree/62a02c6f31cf32814cfe522f78ef088228840f8d/datasets/bustm</a:t>
+                <a:hlinkClick r:id="rId4"/>
+              </a:rPr>
+              <a:t>https://github.com/CLUEbenchmark/FewCLUE/tree/main/datasets/bustm</a:t>
             </a:r>
           </a:p>
         </p:txBody>
@@ -13264,7 +12528,7 @@
                 <a:ea typeface="Noto Sans CJK JP"/>
                 <a:cs typeface="Noto Sans"/>
               </a:rPr>
-              <a:t>[1] Xu et al. (2021). FewCLUE: A Chinese Few-shot Learning Evaluation Benchmark. arXiv:2107.07498v2.</a:t>
+              <a:t>[1] Xu et al. (2021). FewCLUE: A Chinese Few-shot Learning Evaluation Benchmark. arXiv:2107.07498v2.  </a:t>
             </a:r>
             <a:r>
               <a:rPr sz="810" b="0" lang="ja-JP" altLang="en-US">
@@ -13274,9 +12538,27 @@
                 <a:latin typeface="Noto Sans"/>
                 <a:ea typeface="Noto Sans CJK JP"/>
                 <a:cs typeface="Noto Sans"/>
-              </a:rPr>
-              <a:t>  </a:t>
-            </a:r>
+                <a:hlinkClick r:id="rId2"/>
+              </a:rPr>
+              <a:t>https://arxiv.org/abs/2107.07498</a:t>
+            </a:r>
+          </a:p>
+          <a:p>
+            <a:pPr>
+              <a:lnSpc>
+                <a:spcPts val="940"/>
+              </a:lnSpc>
+              <a:spcAft>
+                <a:spcPts val="140"/>
+              </a:spcAft>
+              <a:buNone/>
+              <a:defRPr sz="810" b="0">
+                <a:solidFill>
+                  <a:srgbClr val="303437"/>
+                </a:solidFill>
+                <a:latin typeface="Noto Sans"/>
+              </a:defRPr>
+            </a:pPr>
             <a:r>
               <a:rPr sz="810" b="0" lang="ja-JP" altLang="en-US">
                 <a:solidFill>
@@ -13285,27 +12567,9 @@
                 <a:latin typeface="Noto Sans"/>
                 <a:ea typeface="Noto Sans CJK JP"/>
                 <a:cs typeface="Noto Sans"/>
-                <a:hlinkClick r:id="rId2"/>
-              </a:rPr>
-              <a:t>https://arxiv.org/abs/2107.07498</a:t>
-            </a:r>
-          </a:p>
-          <a:p>
-            <a:pPr>
-              <a:lnSpc>
-                <a:spcPts val="940"/>
-              </a:lnSpc>
-              <a:spcAft>
-                <a:spcPts val="140"/>
-              </a:spcAft>
-              <a:buNone/>
-              <a:defRPr sz="810" b="0">
-                <a:solidFill>
-                  <a:srgbClr val="303437"/>
-                </a:solidFill>
-                <a:latin typeface="Noto Sans"/>
-              </a:defRPr>
-            </a:pPr>
+              </a:rPr>
+              <a:t>[2] CLUE team (2021). FewCLUE — README.  </a:t>
+            </a:r>
             <a:r>
               <a:rPr sz="810" b="0" lang="ja-JP" altLang="en-US">
                 <a:solidFill>
@@ -13314,34 +12578,9 @@
                 <a:latin typeface="Noto Sans"/>
                 <a:ea typeface="Noto Sans CJK JP"/>
                 <a:cs typeface="Noto Sans"/>
-              </a:rPr>
-              <a:t>[2] CLUE team. FewCLUE README、公式の実験・提出・配布条件。</a:t>
-            </a:r>
-          </a:p>
-          <a:p>
-            <a:pPr>
-              <a:lnSpc>
-                <a:spcPts val="940"/>
-              </a:lnSpc>
-              <a:buNone/>
-              <a:defRPr sz="810" b="0">
-                <a:solidFill>
-                  <a:srgbClr val="303437"/>
-                </a:solidFill>
-                <a:latin typeface="Noto Sans"/>
-              </a:defRPr>
-            </a:pPr>
-            <a:r>
-              <a:rPr sz="810" b="0" lang="ja-JP" altLang="en-US">
-                <a:solidFill>
-                  <a:srgbClr val="626669"/>
-                </a:solidFill>
-                <a:latin typeface="Noto Sans"/>
-                <a:ea typeface="Noto Sans CJK JP"/>
-                <a:cs typeface="Noto Sans"/>
-                <a:hlinkClick r:id="rId3"/>
-              </a:rPr>
-              <a:t>https://github.com/CLUEbenchmark/FewCLUE/blob/62a02c6f31cf32814cfe522f78ef088228840f8d/README.md</a:t>
+                <a:hlinkClick r:id="rId4"/>
+              </a:rPr>
+              <a:t>https://github.com/CLUEbenchmark/FewCLUE/blob/main/README.md</a:t>
             </a:r>
           </a:p>
         </p:txBody>
@@ -13705,7 +12944,7 @@
                 <a:ea typeface="Noto Sans CJK JP"/>
                 <a:cs typeface="Noto Sans"/>
               </a:rPr>
-              <a:t>EFLは各課題を含意判定へ直す方式。中国語へ翻訳した自然言語推論データCMNLIで先に学習し、その後に少数例で微調整する。追加学習の条件も含めて結果を読む。</a:t>
+              <a:t>EFLは各課題を含意判定へ直す方式。中国語へ翻訳した自然言語推論データCMNLIで先に学習し、その後に少数例で微調整する。</a:t>
             </a:r>
           </a:p>
         </p:txBody>
@@ -14819,7 +14058,7 @@
                 <a:ea typeface="Noto Sans CJK JP"/>
                 <a:cs typeface="Noto Sans"/>
               </a:rPr>
-              <a:t>BUSTM Accuracy (%)。RoBERTa側はchinese_roberta_wwm_extを基盤に使う。異なる基盤で、同じ手法が常に同じ改善を生むとは限らない。</a:t>
+              <a:t>BUSTMの正解率（%）。RoBERTa側はchinese_roberta_wwm_extを使用。EFLの結果は、基盤モデルによって71.8%と54.6%に分かれる。</a:t>
             </a:r>
           </a:p>
         </p:txBody>
@@ -15015,7 +14254,7 @@
                 <a:ea typeface="Noto Sans CJK JP"/>
                 <a:cs typeface="Noto Sans"/>
               </a:rPr>
-              <a:t>新しく加えた課題の人間評価では、まず開発例30〜50件を解き、正解と比べて議論する。その後、各注釈者がテスト例100件を解く手順を用いた。BUSTMの公表正解率は88%。</a:t>
+              <a:t>人間評価では、開発例30〜50件で正解と照らして議論した後、各注釈者がテスト例100件を解いた。BUSTMで報告された正解率は88%。</a:t>
             </a:r>
           </a:p>
           <a:p>
@@ -15045,7 +14284,7 @@
                 <a:ea typeface="Noto Sans CJK JP"/>
                 <a:cs typeface="Noto Sans"/>
               </a:rPr>
-              <a:t>人間評価の100問という単位は、モデルを評価する公開テスト全件とは異なる。少数例学習の性能を、人間の意味判断の到達水準と比較するための結果。</a:t>
+              <a:t>モデルの公開テスト1,772件に対し、人間は各100問で評価した結果である。</a:t>
             </a:r>
           </a:p>
         </p:txBody>
@@ -15503,7 +14742,7 @@
                 <a:ea typeface="Noto Sans CJK JP"/>
                 <a:cs typeface="Noto Sans"/>
               </a:rPr>
-              <a:t>PET実装はtrainの指定組で学習し、dev_few_allの正解率でモデルを選び、test_publicで評価する。</a:t>
+              <a:t>二つの発話をつなぐ文の穴を埋め、「同じ意味」か「異なる意味」かを予測する。</a:t>
             </a:r>
           </a:p>
         </p:txBody>
@@ -15573,6 +14812,17 @@
                 <a:latin typeface="Noto Sans"/>
               </a:defRPr>
             </a:pPr>
+            <a:r>
+              <a:rPr sz="810" b="0" lang="ja-JP" altLang="en-US">
+                <a:solidFill>
+                  <a:srgbClr val="626669"/>
+                </a:solidFill>
+                <a:latin typeface="Noto Sans"/>
+                <a:ea typeface="Noto Sans CJK JP"/>
+                <a:cs typeface="Noto Sans"/>
+              </a:rPr>
+              <a:t/>
+            </a:r>
             <a:r>
               <a:rPr sz="810" b="0" lang="ja-JP" altLang="en-US">
                 <a:solidFill>
@@ -15816,7 +15066,7 @@
                 <a:ea typeface="Noto Sans CJK JP"/>
                 <a:cs typeface="Noto Sans"/>
               </a:rPr>
-              <a:t>2023年のCLEVAは、CLUEとFewCLUEの発話対を二択形式に直し、同じことを述べているかを正解率で評価する。短い発話の下位課題short_utteranceとしてBUSTMを扱う。</a:t>
+              <a:t>2023年のCLEVAは、CLUEとFewCLUEの発話対を二択形式に直し、同じことを述べているかを正解率で評価する。短い発話の課題にBUSTMを用いる。</a:t>
             </a:r>
           </a:p>
           <a:p>
@@ -15846,7 +15096,37 @@
                 <a:ea typeface="Noto Sans CJK JP"/>
                 <a:cs typeface="Noto Sans"/>
               </a:rPr>
-              <a:t>公開論文の掲載例は、実例1の「怒りっぽいか」を尋ねる二つの発話と一致する。元データではtrain_few_allの36行、train_1の4行にある。</a:t>
+              <a:t>実例1の「怒りっぽいか」を尋ねる二つの発話は、CLEVA論文にも掲載されている。HELMにも同課題の評価実装が公開されている。</a:t>
+            </a:r>
+          </a:p>
+          <a:p>
+            <a:pPr marL="457200" indent="-355600">
+              <a:lnSpc>
+                <a:spcPts val="2379"/>
+              </a:lnSpc>
+              <a:spcAft>
+                <a:spcPts val="0"/>
+              </a:spcAft>
+              <a:buSzPct val="66500"/>
+              <a:buFont typeface="Noto Sans CJK JP"/>
+              <a:buChar char="●"/>
+              <a:defRPr sz="2000" b="0">
+                <a:solidFill>
+                  <a:srgbClr val="303437"/>
+                </a:solidFill>
+                <a:latin typeface="Noto Sans"/>
+              </a:defRPr>
+            </a:pPr>
+            <a:r>
+              <a:rPr sz="2000" b="0" lang="ja-JP" altLang="en-US">
+                <a:solidFill>
+                  <a:srgbClr val="303437"/>
+                </a:solidFill>
+                <a:latin typeface="Noto Sans"/>
+                <a:ea typeface="Noto Sans CJK JP"/>
+                <a:cs typeface="Noto Sans"/>
+              </a:rPr>
+              <a:t>CLEVAが評価に使ったBUSTMの問題数は、公開説明には記されていない。</a:t>
             </a:r>
           </a:p>
         </p:txBody>
@@ -15972,1086 +15252,6 @@
                 <a:hlinkClick r:id="rId2"/>
               </a:rPr>
               <a:t>https://aclanthology.org/2023.emnlp-demo.17/</a:t>
-            </a:r>
-          </a:p>
-        </p:txBody>
-      </p:sp>
-    </p:spTree>
-  </p:cSld>
-  <p:clrMapOvr>
-    <a:masterClrMapping/>
-  </p:clrMapOvr>
-</p:sld>
-</file>
-
-<file path=ppt/slides/slide26.xml><?xml version="1.0" encoding="utf-8"?>
-<p:sld xmlns:a="http://schemas.openxmlformats.org/drawingml/2006/main" xmlns:p="http://schemas.openxmlformats.org/presentationml/2006/main" xmlns:r="http://schemas.openxmlformats.org/officeDocument/2006/relationships">
-  <p:cSld>
-    <p:spTree>
-      <p:nvGrpSpPr>
-        <p:cNvPr id="1" name=""/>
-        <p:cNvGrpSpPr/>
-        <p:nvPr/>
-      </p:nvGrpSpPr>
-      <p:grpSpPr/>
-      <p:sp>
-        <p:nvSpPr>
-          <p:cNvPr id="2" name="Title 1"/>
-          <p:cNvSpPr>
-            <a:spLocks noGrp="1"/>
-          </p:cNvSpPr>
-          <p:nvPr>
-            <p:ph type="title"/>
-          </p:nvPr>
-        </p:nvSpPr>
-        <p:spPr>
-          <a:xfrm>
-            <a:off x="468172" y="650138"/>
-            <a:ext cx="8206740" cy="616305"/>
-          </a:xfrm>
-        </p:spPr>
-        <p:txBody>
-          <a:bodyPr wrap="square" lIns="0" rIns="0" tIns="0" bIns="0">
-            <a:noAutofit/>
-          </a:bodyPr>
-          <a:lstStyle/>
-          <a:p>
-            <a:pPr algn="l">
-              <a:lnSpc>
-                <a:spcPct val="110000"/>
-              </a:lnSpc>
-              <a:buNone/>
-              <a:defRPr sz="2800" b="0">
-                <a:solidFill>
-                  <a:srgbClr val="303437"/>
-                </a:solidFill>
-                <a:latin typeface="Noto Sans"/>
-              </a:defRPr>
-            </a:pPr>
-            <a:r>
-              <a:rPr sz="2800" b="1" lang="ja-JP" altLang="en-US">
-                <a:solidFill>
-                  <a:srgbClr val="303437"/>
-                </a:solidFill>
-                <a:latin typeface="Noto Sans"/>
-                <a:ea typeface="Noto Sans CJK JP"/>
-                <a:cs typeface="Noto Sans"/>
-              </a:rPr>
-              <a:t>HELMには実装があり、公開実行は0件</a:t>
-            </a:r>
-          </a:p>
-        </p:txBody>
-      </p:sp>
-      <p:sp>
-        <p:nvSpPr>
-          <p:cNvPr id="3" name="Text Placeholder 2"/>
-          <p:cNvSpPr>
-            <a:spLocks noGrp="1"/>
-          </p:cNvSpPr>
-          <p:nvPr>
-            <p:ph type="body" idx="1"/>
-          </p:nvPr>
-        </p:nvSpPr>
-        <p:spPr>
-          <a:xfrm>
-            <a:off x="594360" y="1463040"/>
-            <a:ext cx="7955279" cy="3044952"/>
-          </a:xfrm>
-        </p:spPr>
-        <p:txBody>
-          <a:bodyPr wrap="square" tIns="91440" bIns="91440">
-            <a:noAutofit/>
-          </a:bodyPr>
-          <a:lstStyle/>
-          <a:p>
-            <a:pPr marL="457200" indent="-355600">
-              <a:lnSpc>
-                <a:spcPts val="2379"/>
-              </a:lnSpc>
-              <a:spcAft>
-                <a:spcPts val="700"/>
-              </a:spcAft>
-              <a:buSzPct val="66500"/>
-              <a:buFont typeface="Noto Sans CJK JP"/>
-              <a:buChar char="●"/>
-              <a:defRPr sz="2000" b="0">
-                <a:solidFill>
-                  <a:srgbClr val="303437"/>
-                </a:solidFill>
-                <a:latin typeface="Noto Sans"/>
-              </a:defRPr>
-            </a:pPr>
-            <a:r>
-              <a:rPr sz="2000" b="0" lang="ja-JP" altLang="en-US">
-                <a:solidFill>
-                  <a:srgbClr val="303437"/>
-                </a:solidFill>
-                <a:latin typeface="Noto Sans"/>
-                <a:ea typeface="Noto Sans CJK JP"/>
-                <a:cs typeface="Noto Sans"/>
-              </a:rPr>
-              <a:t>HELM v0.4.0のCLEVAParaphraseIdentificationScenarioは、実例4の「好きかどうか」を尋ねる対を掲載する。元ラベル0は、二択のA「不是」（いいえ）へ対応する。</a:t>
-            </a:r>
-          </a:p>
-          <a:p>
-            <a:pPr marL="457200" indent="-355600">
-              <a:lnSpc>
-                <a:spcPts val="2379"/>
-              </a:lnSpc>
-              <a:spcAft>
-                <a:spcPts val="0"/>
-              </a:spcAft>
-              <a:buSzPct val="66500"/>
-              <a:buFont typeface="Noto Sans CJK JP"/>
-              <a:buChar char="●"/>
-              <a:defRPr sz="2000" b="0">
-                <a:solidFill>
-                  <a:srgbClr val="303437"/>
-                </a:solidFill>
-                <a:latin typeface="Noto Sans"/>
-              </a:defRPr>
-            </a:pPr>
-            <a:r>
-              <a:rPr sz="2000" b="0" lang="ja-JP" altLang="en-US">
-                <a:solidFill>
-                  <a:srgbClr val="303437"/>
-                </a:solidFill>
-                <a:latin typeface="Noto Sans"/>
-                <a:ea typeface="Noto Sans CJK JP"/>
-                <a:cs typeface="Noto Sans"/>
-              </a:rPr>
-              <a:t>short_utteranceにはprompt_id 0〜5の六つの設定がある。Classic v0.4.0公開run_specs全8,526件にはCLEVA実行がなく、実際の得点や提示例数、生成条件は確認できない。</a:t>
-            </a:r>
-          </a:p>
-        </p:txBody>
-      </p:sp>
-      <p:sp>
-        <p:nvSpPr>
-          <p:cNvPr id="4" name="Title 3"/>
-          <p:cNvSpPr>
-            <a:spLocks noGrp="1"/>
-          </p:cNvSpPr>
-          <p:nvPr>
-            <p:ph type="title" idx="2"/>
-          </p:nvPr>
-        </p:nvSpPr>
-        <p:spPr>
-          <a:xfrm>
-            <a:off x="75895" y="0"/>
-            <a:ext cx="8115300" cy="480060"/>
-          </a:xfrm>
-        </p:spPr>
-        <p:txBody>
-          <a:bodyPr wrap="square" lIns="0" rIns="0" tIns="0" bIns="0" anchor="ctr">
-            <a:noAutofit/>
-          </a:bodyPr>
-          <a:lstStyle/>
-          <a:p>
-            <a:pPr algn="l">
-              <a:lnSpc>
-                <a:spcPct val="110000"/>
-              </a:lnSpc>
-              <a:buNone/>
-              <a:defRPr sz="1400" b="0">
-                <a:solidFill>
-                  <a:srgbClr val="303437"/>
-                </a:solidFill>
-                <a:latin typeface="Noto Sans"/>
-              </a:defRPr>
-            </a:pPr>
-            <a:r>
-              <a:rPr sz="1400" b="1" lang="ja-JP" altLang="en-US">
-                <a:solidFill>
-                  <a:srgbClr val="FFFEF8"/>
-                </a:solidFill>
-                <a:latin typeface="Noto Sans"/>
-                <a:ea typeface="Noto Sans CJK JP"/>
-                <a:cs typeface="Noto Sans"/>
-              </a:rPr>
-              <a:t>4. CLEVAでの利用と公開範囲</a:t>
-            </a:r>
-          </a:p>
-        </p:txBody>
-      </p:sp>
-      <p:sp>
-        <p:nvSpPr>
-          <p:cNvPr id="5" name="sources"/>
-          <p:cNvSpPr txBox="1"/>
-          <p:nvPr/>
-        </p:nvSpPr>
-        <p:spPr>
-          <a:xfrm>
-            <a:off x="502920" y="4700016"/>
-            <a:ext cx="8183879" cy="530352"/>
-          </a:xfrm>
-          <a:prstGeom prst="rect">
-            <a:avLst/>
-          </a:prstGeom>
-          <a:noFill/>
-        </p:spPr>
-        <p:txBody>
-          <a:bodyPr wrap="square" lIns="0" rIns="0" tIns="0" bIns="0">
-            <a:noAutofit/>
-          </a:bodyPr>
-          <a:lstStyle/>
-          <a:p>
-            <a:pPr algn="l">
-              <a:lnSpc>
-                <a:spcPts val="940"/>
-              </a:lnSpc>
-              <a:spcBef>
-                <a:spcPts val="0"/>
-              </a:spcBef>
-              <a:spcAft>
-                <a:spcPts val="140"/>
-              </a:spcAft>
-              <a:buNone/>
-              <a:defRPr sz="810" b="0">
-                <a:solidFill>
-                  <a:srgbClr val="303437"/>
-                </a:solidFill>
-                <a:latin typeface="Noto Sans"/>
-              </a:defRPr>
-            </a:pPr>
-            <a:r>
-              <a:rPr sz="810" b="0" lang="ja-JP" altLang="en-US">
-                <a:solidFill>
-                  <a:srgbClr val="626669"/>
-                </a:solidFill>
-                <a:latin typeface="Noto Sans"/>
-                <a:ea typeface="Noto Sans CJK JP"/>
-                <a:cs typeface="Noto Sans"/>
-              </a:rPr>
-              <a:t>[1] Stanford CRFM. CLEVAParaphraseIdentificationScenario / Converter. HELM v0.4.0.</a:t>
-            </a:r>
-          </a:p>
-          <a:p>
-            <a:pPr>
-              <a:lnSpc>
-                <a:spcPts val="940"/>
-              </a:lnSpc>
-              <a:buNone/>
-              <a:defRPr sz="810" b="0">
-                <a:solidFill>
-                  <a:srgbClr val="303437"/>
-                </a:solidFill>
-                <a:latin typeface="Noto Sans"/>
-              </a:defRPr>
-            </a:pPr>
-            <a:r>
-              <a:rPr sz="810" b="0" lang="ja-JP" altLang="en-US">
-                <a:solidFill>
-                  <a:srgbClr val="626669"/>
-                </a:solidFill>
-                <a:latin typeface="Noto Sans"/>
-                <a:ea typeface="Noto Sans CJK JP"/>
-                <a:cs typeface="Noto Sans"/>
-                <a:hlinkClick r:id="rId2"/>
-              </a:rPr>
-              <a:t>https://github.com/stanford-crfm/helm/blob/v0.4.0/src/helm/benchmark/scenarios/cleva_scenario.py</a:t>
-            </a:r>
-          </a:p>
-        </p:txBody>
-      </p:sp>
-    </p:spTree>
-  </p:cSld>
-  <p:clrMapOvr>
-    <a:masterClrMapping/>
-  </p:clrMapOvr>
-</p:sld>
-</file>
-
-<file path=ppt/slides/slide27.xml><?xml version="1.0" encoding="utf-8"?>
-<p:sld xmlns:a="http://schemas.openxmlformats.org/drawingml/2006/main" xmlns:p="http://schemas.openxmlformats.org/presentationml/2006/main" xmlns:r="http://schemas.openxmlformats.org/officeDocument/2006/relationships">
-  <p:cSld>
-    <p:spTree>
-      <p:nvGrpSpPr>
-        <p:cNvPr id="1" name=""/>
-        <p:cNvGrpSpPr/>
-        <p:nvPr/>
-      </p:nvGrpSpPr>
-      <p:grpSpPr/>
-      <p:sp>
-        <p:nvSpPr>
-          <p:cNvPr id="2" name="Title 1"/>
-          <p:cNvSpPr>
-            <a:spLocks noGrp="1"/>
-          </p:cNvSpPr>
-          <p:nvPr>
-            <p:ph type="title"/>
-          </p:nvPr>
-        </p:nvSpPr>
-        <p:spPr>
-          <a:xfrm>
-            <a:off x="468172" y="650138"/>
-            <a:ext cx="8206740" cy="616305"/>
-          </a:xfrm>
-        </p:spPr>
-        <p:txBody>
-          <a:bodyPr wrap="square" lIns="0" rIns="0" tIns="0" bIns="0">
-            <a:noAutofit/>
-          </a:bodyPr>
-          <a:lstStyle/>
-          <a:p>
-            <a:pPr algn="l">
-              <a:lnSpc>
-                <a:spcPct val="110000"/>
-              </a:lnSpc>
-              <a:buNone/>
-              <a:defRPr sz="2800" b="0">
-                <a:solidFill>
-                  <a:srgbClr val="303437"/>
-                </a:solidFill>
-                <a:latin typeface="Noto Sans"/>
-              </a:defRPr>
-            </a:pPr>
-            <a:r>
-              <a:rPr sz="2800" b="1" lang="ja-JP" altLang="en-US">
-                <a:solidFill>
-                  <a:srgbClr val="303437"/>
-                </a:solidFill>
-                <a:latin typeface="Noto Sans"/>
-                <a:ea typeface="Noto Sans CJK JP"/>
-                <a:cs typeface="Noto Sans"/>
-              </a:rPr>
-              <a:t>元の配布と、CLEVAの採用集合は別の範囲</a:t>
-            </a:r>
-          </a:p>
-        </p:txBody>
-      </p:sp>
-      <p:sp>
-        <p:nvSpPr>
-          <p:cNvPr id="3" name="Title 2"/>
-          <p:cNvSpPr>
-            <a:spLocks noGrp="1"/>
-          </p:cNvSpPr>
-          <p:nvPr>
-            <p:ph type="title" idx="2"/>
-          </p:nvPr>
-        </p:nvSpPr>
-        <p:spPr>
-          <a:xfrm>
-            <a:off x="75895" y="0"/>
-            <a:ext cx="8115300" cy="480060"/>
-          </a:xfrm>
-        </p:spPr>
-        <p:txBody>
-          <a:bodyPr wrap="square" lIns="0" rIns="0" tIns="0" bIns="0" anchor="ctr">
-            <a:noAutofit/>
-          </a:bodyPr>
-          <a:lstStyle/>
-          <a:p>
-            <a:pPr algn="l">
-              <a:lnSpc>
-                <a:spcPct val="110000"/>
-              </a:lnSpc>
-              <a:buNone/>
-              <a:defRPr sz="1400" b="0">
-                <a:solidFill>
-                  <a:srgbClr val="303437"/>
-                </a:solidFill>
-                <a:latin typeface="Noto Sans"/>
-              </a:defRPr>
-            </a:pPr>
-            <a:r>
-              <a:rPr sz="1400" b="1" lang="ja-JP" altLang="en-US">
-                <a:solidFill>
-                  <a:srgbClr val="FFFEF8"/>
-                </a:solidFill>
-                <a:latin typeface="Noto Sans"/>
-                <a:ea typeface="Noto Sans CJK JP"/>
-                <a:cs typeface="Noto Sans"/>
-              </a:rPr>
-              <a:t>4. CLEVAでの利用と公開範囲</a:t>
-            </a:r>
-          </a:p>
-        </p:txBody>
-      </p:sp>
-      <p:graphicFrame>
-        <p:nvGraphicFramePr>
-          <p:cNvPr id="4" name="Table 3"/>
-          <p:cNvGraphicFramePr>
-            <a:graphicFrameLocks noGrp="1"/>
-          </p:cNvGraphicFramePr>
-          <p:nvPr/>
-        </p:nvGraphicFramePr>
-        <p:xfrm>
-          <a:off x="548640" y="1508760"/>
-          <a:ext cx="8046720" cy="2176272"/>
-        </p:xfrm>
-        <a:graphic>
-          <a:graphicData uri="http://schemas.openxmlformats.org/drawingml/2006/table">
-            <a:tbl>
-              <a:tblPr firstRow="0" bandRow="0"/>
-              <a:tblGrid>
-                <a:gridCol w="2286000"/>
-                <a:gridCol w="5760720"/>
-              </a:tblGrid>
-              <a:tr h="384048">
-                <a:tc>
-                  <a:txBody>
-                    <a:bodyPr wrap="square">
-                      <a:noAutofit/>
-                    </a:bodyPr>
-                    <a:lstStyle/>
-                    <a:p>
-                      <a:pPr algn="l">
-                        <a:lnSpc>
-                          <a:spcPts val="2070"/>
-                        </a:lnSpc>
-                        <a:buNone/>
-                        <a:defRPr sz="1800" b="0">
-                          <a:solidFill>
-                            <a:srgbClr val="303437"/>
-                          </a:solidFill>
-                          <a:latin typeface="Noto Sans"/>
-                        </a:defRPr>
-                      </a:pPr>
-                      <a:r>
-                        <a:rPr sz="1800" b="0" lang="ja-JP" altLang="en-US">
-                          <a:solidFill>
-                            <a:srgbClr val="303437"/>
-                          </a:solidFill>
-                          <a:latin typeface="Noto Sans"/>
-                          <a:ea typeface="Noto Sans CJK JP"/>
-                          <a:cs typeface="Noto Sans"/>
-                        </a:rPr>
-                        <a:t>対象</a:t>
-                      </a:r>
-                    </a:p>
-                  </a:txBody>
-                  <a:tcPr marL="63500" marR="63500" marT="38100" marB="38100" anchor="ctr">
-                    <a:lnL w="7620">
-                      <a:noFill/>
-                    </a:lnL>
-                    <a:lnR w="7620">
-                      <a:noFill/>
-                    </a:lnR>
-                    <a:lnT w="15240">
-                      <a:solidFill>
-                        <a:srgbClr val="626669"/>
-                      </a:solidFill>
-                      <a:prstDash val="solid"/>
-                    </a:lnT>
-                    <a:lnB w="7620">
-                      <a:solidFill>
-                        <a:srgbClr val="626669"/>
-                      </a:solidFill>
-                      <a:prstDash val="solid"/>
-                    </a:lnB>
-                    <a:solidFill>
-                      <a:srgbClr val="FFFEF8"/>
-                    </a:solidFill>
-                  </a:tcPr>
-                </a:tc>
-                <a:tc>
-                  <a:txBody>
-                    <a:bodyPr wrap="square">
-                      <a:noAutofit/>
-                    </a:bodyPr>
-                    <a:lstStyle/>
-                    <a:p>
-                      <a:pPr algn="l">
-                        <a:lnSpc>
-                          <a:spcPts val="2070"/>
-                        </a:lnSpc>
-                        <a:buNone/>
-                        <a:defRPr sz="1800" b="0">
-                          <a:solidFill>
-                            <a:srgbClr val="303437"/>
-                          </a:solidFill>
-                          <a:latin typeface="Noto Sans"/>
-                        </a:defRPr>
-                      </a:pPr>
-                      <a:r>
-                        <a:rPr sz="1800" b="0" lang="ja-JP" altLang="en-US">
-                          <a:solidFill>
-                            <a:srgbClr val="303437"/>
-                          </a:solidFill>
-                          <a:latin typeface="Noto Sans"/>
-                          <a:ea typeface="Noto Sans CJK JP"/>
-                          <a:cs typeface="Noto Sans"/>
-                        </a:rPr>
-                        <a:t>公開・確認できた範囲</a:t>
-                      </a:r>
-                    </a:p>
-                  </a:txBody>
-                  <a:tcPr marL="63500" marR="63500" marT="38100" marB="38100" anchor="ctr">
-                    <a:lnL w="7620">
-                      <a:noFill/>
-                    </a:lnL>
-                    <a:lnR w="7620">
-                      <a:noFill/>
-                    </a:lnR>
-                    <a:lnT w="15240">
-                      <a:solidFill>
-                        <a:srgbClr val="626669"/>
-                      </a:solidFill>
-                      <a:prstDash val="solid"/>
-                    </a:lnT>
-                    <a:lnB w="7620">
-                      <a:solidFill>
-                        <a:srgbClr val="626669"/>
-                      </a:solidFill>
-                      <a:prstDash val="solid"/>
-                    </a:lnB>
-                    <a:solidFill>
-                      <a:srgbClr val="FFFEF8"/>
-                    </a:solidFill>
-                  </a:tcPr>
-                </a:tc>
-              </a:tr>
-              <a:tr h="384048">
-                <a:tc>
-                  <a:txBody>
-                    <a:bodyPr wrap="square">
-                      <a:noAutofit/>
-                    </a:bodyPr>
-                    <a:lstStyle/>
-                    <a:p>
-                      <a:pPr algn="l">
-                        <a:lnSpc>
-                          <a:spcPts val="2070"/>
-                        </a:lnSpc>
-                        <a:buNone/>
-                        <a:defRPr sz="1800" b="0">
-                          <a:solidFill>
-                            <a:srgbClr val="303437"/>
-                          </a:solidFill>
-                          <a:latin typeface="Noto Sans"/>
-                        </a:defRPr>
-                      </a:pPr>
-                      <a:r>
-                        <a:rPr sz="1800" b="0" lang="ja-JP" altLang="en-US">
-                          <a:solidFill>
-                            <a:srgbClr val="303437"/>
-                          </a:solidFill>
-                          <a:latin typeface="Noto Sans"/>
-                          <a:ea typeface="Noto Sans CJK JP"/>
-                          <a:cs typeface="Noto Sans"/>
-                        </a:rPr>
-                        <a:t>BUSTM元データ</a:t>
-                      </a:r>
-                    </a:p>
-                  </a:txBody>
-                  <a:tcPr marL="63500" marR="63500" marT="38100" marB="38100" anchor="ctr">
-                    <a:lnL w="7620">
-                      <a:noFill/>
-                    </a:lnL>
-                    <a:lnR w="7620">
-                      <a:noFill/>
-                    </a:lnR>
-                    <a:lnT w="7620">
-                      <a:solidFill>
-                        <a:srgbClr val="626669"/>
-                      </a:solidFill>
-                      <a:prstDash val="solid"/>
-                    </a:lnT>
-                    <a:lnB w="7620">
-                      <a:noFill/>
-                    </a:lnB>
-                    <a:solidFill>
-                      <a:srgbClr val="FFFEF8"/>
-                    </a:solidFill>
-                  </a:tcPr>
-                </a:tc>
-                <a:tc>
-                  <a:txBody>
-                    <a:bodyPr wrap="square">
-                      <a:noAutofit/>
-                    </a:bodyPr>
-                    <a:lstStyle/>
-                    <a:p>
-                      <a:pPr algn="l">
-                        <a:lnSpc>
-                          <a:spcPts val="2070"/>
-                        </a:lnSpc>
-                        <a:buNone/>
-                        <a:defRPr sz="1800" b="0">
-                          <a:solidFill>
-                            <a:srgbClr val="303437"/>
-                          </a:solidFill>
-                          <a:latin typeface="Noto Sans"/>
-                        </a:defRPr>
-                      </a:pPr>
-                      <a:r>
-                        <a:rPr sz="1800" b="0" lang="ja-JP" altLang="en-US">
-                          <a:solidFill>
-                            <a:srgbClr val="303437"/>
-                          </a:solidFill>
-                          <a:latin typeface="Noto Sans"/>
-                          <a:ea typeface="Noto Sans CJK JP"/>
-                          <a:cs typeface="Noto Sans"/>
-                        </a:rPr>
-                        <a:t>公式が案内するFewCLUEの15ファイル</a:t>
-                      </a:r>
-                    </a:p>
-                  </a:txBody>
-                  <a:tcPr marL="63500" marR="63500" marT="38100" marB="38100" anchor="ctr">
-                    <a:lnL w="7620">
-                      <a:noFill/>
-                    </a:lnL>
-                    <a:lnR w="7620">
-                      <a:noFill/>
-                    </a:lnR>
-                    <a:lnT w="7620">
-                      <a:solidFill>
-                        <a:srgbClr val="626669"/>
-                      </a:solidFill>
-                      <a:prstDash val="solid"/>
-                    </a:lnT>
-                    <a:lnB w="7620">
-                      <a:noFill/>
-                    </a:lnB>
-                    <a:solidFill>
-                      <a:srgbClr val="FFFEF8"/>
-                    </a:solidFill>
-                  </a:tcPr>
-                </a:tc>
-              </a:tr>
-              <a:tr h="384048">
-                <a:tc>
-                  <a:txBody>
-                    <a:bodyPr wrap="square">
-                      <a:noAutofit/>
-                    </a:bodyPr>
-                    <a:lstStyle/>
-                    <a:p>
-                      <a:pPr algn="l">
-                        <a:lnSpc>
-                          <a:spcPts val="2070"/>
-                        </a:lnSpc>
-                        <a:buNone/>
-                        <a:defRPr sz="1800" b="0">
-                          <a:solidFill>
-                            <a:srgbClr val="303437"/>
-                          </a:solidFill>
-                          <a:latin typeface="Noto Sans"/>
-                        </a:defRPr>
-                      </a:pPr>
-                      <a:r>
-                        <a:rPr sz="1800" b="0" lang="ja-JP" altLang="en-US">
-                          <a:solidFill>
-                            <a:srgbClr val="303437"/>
-                          </a:solidFill>
-                          <a:latin typeface="Noto Sans"/>
-                          <a:ea typeface="Noto Sans CJK JP"/>
-                          <a:cs typeface="Noto Sans"/>
-                        </a:rPr>
-                        <a:t>CLEVA論文</a:t>
-                      </a:r>
-                    </a:p>
-                  </a:txBody>
-                  <a:tcPr marL="63500" marR="63500" marT="38100" marB="38100" anchor="ctr">
-                    <a:lnL w="7620">
-                      <a:noFill/>
-                    </a:lnL>
-                    <a:lnR w="7620">
-                      <a:noFill/>
-                    </a:lnR>
-                    <a:lnT w="7620">
-                      <a:noFill/>
-                    </a:lnT>
-                    <a:lnB w="7620">
-                      <a:noFill/>
-                    </a:lnB>
-                    <a:solidFill>
-                      <a:srgbClr val="FFFEF8"/>
-                    </a:solidFill>
-                  </a:tcPr>
-                </a:tc>
-                <a:tc>
-                  <a:txBody>
-                    <a:bodyPr wrap="square">
-                      <a:noAutofit/>
-                    </a:bodyPr>
-                    <a:lstStyle/>
-                    <a:p>
-                      <a:pPr algn="l">
-                        <a:lnSpc>
-                          <a:spcPts val="2070"/>
-                        </a:lnSpc>
-                        <a:buNone/>
-                        <a:defRPr sz="1800" b="0">
-                          <a:solidFill>
-                            <a:srgbClr val="303437"/>
-                          </a:solidFill>
-                          <a:latin typeface="Noto Sans"/>
-                        </a:defRPr>
-                      </a:pPr>
-                      <a:r>
-                        <a:rPr sz="1800" b="0" lang="ja-JP" altLang="en-US">
-                          <a:solidFill>
-                            <a:srgbClr val="303437"/>
-                          </a:solidFill>
-                          <a:latin typeface="Noto Sans"/>
-                          <a:ea typeface="Noto Sans CJK JP"/>
-                          <a:cs typeface="Noto Sans"/>
-                        </a:rPr>
-                        <a:t>言い換え判定の定義と、元データに一致する掲載例</a:t>
-                      </a:r>
-                    </a:p>
-                  </a:txBody>
-                  <a:tcPr marL="63500" marR="63500" marT="38100" marB="38100" anchor="ctr">
-                    <a:lnL w="7620">
-                      <a:noFill/>
-                    </a:lnL>
-                    <a:lnR w="7620">
-                      <a:noFill/>
-                    </a:lnR>
-                    <a:lnT w="7620">
-                      <a:noFill/>
-                    </a:lnT>
-                    <a:lnB w="7620">
-                      <a:noFill/>
-                    </a:lnB>
-                    <a:solidFill>
-                      <a:srgbClr val="FFFEF8"/>
-                    </a:solidFill>
-                  </a:tcPr>
-                </a:tc>
-              </a:tr>
-              <a:tr h="384048">
-                <a:tc>
-                  <a:txBody>
-                    <a:bodyPr wrap="square">
-                      <a:noAutofit/>
-                    </a:bodyPr>
-                    <a:lstStyle/>
-                    <a:p>
-                      <a:pPr algn="l">
-                        <a:lnSpc>
-                          <a:spcPts val="2070"/>
-                        </a:lnSpc>
-                        <a:buNone/>
-                        <a:defRPr sz="1800" b="0">
-                          <a:solidFill>
-                            <a:srgbClr val="303437"/>
-                          </a:solidFill>
-                          <a:latin typeface="Noto Sans"/>
-                        </a:defRPr>
-                      </a:pPr>
-                      <a:r>
-                        <a:rPr sz="1800" b="0" lang="ja-JP" altLang="en-US">
-                          <a:solidFill>
-                            <a:srgbClr val="303437"/>
-                          </a:solidFill>
-                          <a:latin typeface="Noto Sans"/>
-                          <a:ea typeface="Noto Sans CJK JP"/>
-                          <a:cs typeface="Noto Sans"/>
-                        </a:rPr>
-                        <a:t>HELM実装・設定</a:t>
-                      </a:r>
-                    </a:p>
-                  </a:txBody>
-                  <a:tcPr marL="63500" marR="63500" marT="38100" marB="38100" anchor="ctr">
-                    <a:lnL w="7620">
-                      <a:noFill/>
-                    </a:lnL>
-                    <a:lnR w="7620">
-                      <a:noFill/>
-                    </a:lnR>
-                    <a:lnT w="7620">
-                      <a:noFill/>
-                    </a:lnT>
-                    <a:lnB w="7620">
-                      <a:noFill/>
-                    </a:lnB>
-                    <a:solidFill>
-                      <a:srgbClr val="FFFEF8"/>
-                    </a:solidFill>
-                  </a:tcPr>
-                </a:tc>
-                <a:tc>
-                  <a:txBody>
-                    <a:bodyPr wrap="square">
-                      <a:noAutofit/>
-                    </a:bodyPr>
-                    <a:lstStyle/>
-                    <a:p>
-                      <a:pPr algn="l">
-                        <a:lnSpc>
-                          <a:spcPts val="2070"/>
-                        </a:lnSpc>
-                        <a:buNone/>
-                        <a:defRPr sz="1800" b="0">
-                          <a:solidFill>
-                            <a:srgbClr val="303437"/>
-                          </a:solidFill>
-                          <a:latin typeface="Noto Sans"/>
-                        </a:defRPr>
-                      </a:pPr>
-                      <a:r>
-                        <a:rPr sz="1800" b="0" lang="ja-JP" altLang="en-US">
-                          <a:solidFill>
-                            <a:srgbClr val="303437"/>
-                          </a:solidFill>
-                          <a:latin typeface="Noto Sans"/>
-                          <a:ea typeface="Noto Sans CJK JP"/>
-                          <a:cs typeface="Noto Sans"/>
-                        </a:rPr>
-                        <a:t>入力変換、二択の説明例、六つのprompt ID</a:t>
-                      </a:r>
-                    </a:p>
-                  </a:txBody>
-                  <a:tcPr marL="63500" marR="63500" marT="38100" marB="38100" anchor="ctr">
-                    <a:lnL w="7620">
-                      <a:noFill/>
-                    </a:lnL>
-                    <a:lnR w="7620">
-                      <a:noFill/>
-                    </a:lnR>
-                    <a:lnT w="7620">
-                      <a:noFill/>
-                    </a:lnT>
-                    <a:lnB w="7620">
-                      <a:noFill/>
-                    </a:lnB>
-                    <a:solidFill>
-                      <a:srgbClr val="FFFEF8"/>
-                    </a:solidFill>
-                  </a:tcPr>
-                </a:tc>
-              </a:tr>
-              <a:tr h="640080">
-                <a:tc>
-                  <a:txBody>
-                    <a:bodyPr wrap="square">
-                      <a:noAutofit/>
-                    </a:bodyPr>
-                    <a:lstStyle/>
-                    <a:p>
-                      <a:pPr algn="l">
-                        <a:lnSpc>
-                          <a:spcPts val="2070"/>
-                        </a:lnSpc>
-                        <a:buNone/>
-                        <a:defRPr sz="1800" b="0">
-                          <a:solidFill>
-                            <a:srgbClr val="303437"/>
-                          </a:solidFill>
-                          <a:latin typeface="Noto Sans"/>
-                        </a:defRPr>
-                      </a:pPr>
-                      <a:r>
-                        <a:rPr sz="1800" b="0" lang="ja-JP" altLang="en-US">
-                          <a:solidFill>
-                            <a:srgbClr val="303437"/>
-                          </a:solidFill>
-                          <a:latin typeface="Noto Sans"/>
-                          <a:ea typeface="Noto Sans CJK JP"/>
-                          <a:cs typeface="Noto Sans"/>
-                        </a:rPr>
-                        <a:t>CLEVA全採用集合</a:t>
-                      </a:r>
-                    </a:p>
-                  </a:txBody>
-                  <a:tcPr marL="63500" marR="63500" marT="38100" marB="38100" anchor="ctr">
-                    <a:lnL w="7620">
-                      <a:noFill/>
-                    </a:lnL>
-                    <a:lnR w="7620">
-                      <a:noFill/>
-                    </a:lnR>
-                    <a:lnT w="7620">
-                      <a:noFill/>
-                    </a:lnT>
-                    <a:lnB w="15240">
-                      <a:solidFill>
-                        <a:srgbClr val="626669"/>
-                      </a:solidFill>
-                      <a:prstDash val="solid"/>
-                    </a:lnB>
-                    <a:solidFill>
-                      <a:srgbClr val="FFFEF8"/>
-                    </a:solidFill>
-                  </a:tcPr>
-                </a:tc>
-                <a:tc>
-                  <a:txBody>
-                    <a:bodyPr wrap="square">
-                      <a:noAutofit/>
-                    </a:bodyPr>
-                    <a:lstStyle/>
-                    <a:p>
-                      <a:pPr algn="l">
-                        <a:lnSpc>
-                          <a:spcPts val="2070"/>
-                        </a:lnSpc>
-                        <a:buNone/>
-                        <a:defRPr sz="1800" b="0">
-                          <a:solidFill>
-                            <a:srgbClr val="303437"/>
-                          </a:solidFill>
-                          <a:latin typeface="Noto Sans"/>
-                        </a:defRPr>
-                      </a:pPr>
-                      <a:r>
-                        <a:rPr sz="1800" b="0" lang="ja-JP" altLang="en-US">
-                          <a:solidFill>
-                            <a:srgbClr val="303437"/>
-                          </a:solidFill>
-                          <a:latin typeface="Noto Sans"/>
-                          <a:ea typeface="Noto Sans CJK JP"/>
-                          <a:cs typeface="Noto Sans"/>
-                        </a:rPr>
-                        <a:t>外部評価ZIPは未取得。元配布との同一性は未確認。</a:t>
-                      </a:r>
-                    </a:p>
-                  </a:txBody>
-                  <a:tcPr marL="63500" marR="63500" marT="38100" marB="38100" anchor="ctr">
-                    <a:lnL w="7620">
-                      <a:noFill/>
-                    </a:lnL>
-                    <a:lnR w="7620">
-                      <a:noFill/>
-                    </a:lnR>
-                    <a:lnT w="7620">
-                      <a:noFill/>
-                    </a:lnT>
-                    <a:lnB w="15240">
-                      <a:solidFill>
-                        <a:srgbClr val="626669"/>
-                      </a:solidFill>
-                      <a:prstDash val="solid"/>
-                    </a:lnB>
-                    <a:solidFill>
-                      <a:srgbClr val="FFFEF8"/>
-                    </a:solidFill>
-                  </a:tcPr>
-                </a:tc>
-              </a:tr>
-            </a:tbl>
-          </a:graphicData>
-        </a:graphic>
-      </p:graphicFrame>
-      <p:sp>
-        <p:nvSpPr>
-          <p:cNvPr id="5" name="sources"/>
-          <p:cNvSpPr txBox="1"/>
-          <p:nvPr/>
-        </p:nvSpPr>
-        <p:spPr>
-          <a:xfrm>
-            <a:off x="502920" y="4517136"/>
-            <a:ext cx="8183879" cy="530352"/>
-          </a:xfrm>
-          <a:prstGeom prst="rect">
-            <a:avLst/>
-          </a:prstGeom>
-          <a:noFill/>
-        </p:spPr>
-        <p:txBody>
-          <a:bodyPr wrap="square" lIns="0" rIns="0" tIns="0" bIns="0">
-            <a:noAutofit/>
-          </a:bodyPr>
-          <a:lstStyle/>
-          <a:p>
-            <a:pPr algn="l">
-              <a:lnSpc>
-                <a:spcPts val="940"/>
-              </a:lnSpc>
-              <a:spcBef>
-                <a:spcPts val="0"/>
-              </a:spcBef>
-              <a:spcAft>
-                <a:spcPts val="140"/>
-              </a:spcAft>
-              <a:buNone/>
-              <a:defRPr sz="810" b="0">
-                <a:solidFill>
-                  <a:srgbClr val="303437"/>
-                </a:solidFill>
-                <a:latin typeface="Noto Sans"/>
-              </a:defRPr>
-            </a:pPr>
-            <a:r>
-              <a:rPr sz="810" b="0" lang="ja-JP" altLang="en-US">
-                <a:solidFill>
-                  <a:srgbClr val="626669"/>
-                </a:solidFill>
-                <a:latin typeface="Noto Sans"/>
-                <a:ea typeface="Noto Sans CJK JP"/>
-                <a:cs typeface="Noto Sans"/>
-              </a:rPr>
-              <a:t>[1] Li et al. (2023). CLEVA: Chinese Language Models EVAluation Platform. EMNLP: System Demonstrations.</a:t>
-            </a:r>
-            <a:r>
-              <a:rPr sz="810" b="0" lang="ja-JP" altLang="en-US">
-                <a:solidFill>
-                  <a:srgbClr val="626669"/>
-                </a:solidFill>
-                <a:latin typeface="Noto Sans"/>
-                <a:ea typeface="Noto Sans CJK JP"/>
-                <a:cs typeface="Noto Sans"/>
-              </a:rPr>
-              <a:t>  </a:t>
-            </a:r>
-            <a:r>
-              <a:rPr sz="810" b="0" lang="ja-JP" altLang="en-US">
-                <a:solidFill>
-                  <a:srgbClr val="626669"/>
-                </a:solidFill>
-                <a:latin typeface="Noto Sans"/>
-                <a:ea typeface="Noto Sans CJK JP"/>
-                <a:cs typeface="Noto Sans"/>
-                <a:hlinkClick r:id="rId2"/>
-              </a:rPr>
-              <a:t>https://aclanthology.org/2023.emnlp-demo.17/</a:t>
-            </a:r>
-          </a:p>
-          <a:p>
-            <a:pPr>
-              <a:lnSpc>
-                <a:spcPts val="940"/>
-              </a:lnSpc>
-              <a:spcAft>
-                <a:spcPts val="140"/>
-              </a:spcAft>
-              <a:buNone/>
-              <a:defRPr sz="810" b="0">
-                <a:solidFill>
-                  <a:srgbClr val="303437"/>
-                </a:solidFill>
-                <a:latin typeface="Noto Sans"/>
-              </a:defRPr>
-            </a:pPr>
-            <a:r>
-              <a:rPr sz="810" b="0" lang="ja-JP" altLang="en-US">
-                <a:solidFill>
-                  <a:srgbClr val="626669"/>
-                </a:solidFill>
-                <a:latin typeface="Noto Sans"/>
-                <a:ea typeface="Noto Sans CJK JP"/>
-                <a:cs typeface="Noto Sans"/>
-              </a:rPr>
-              <a:t>[2] Stanford CRFM. CLEVAParaphraseIdentificationScenario / Converter. HELM v0.4.0.</a:t>
-            </a:r>
-          </a:p>
-          <a:p>
-            <a:pPr>
-              <a:lnSpc>
-                <a:spcPts val="940"/>
-              </a:lnSpc>
-              <a:buNone/>
-              <a:defRPr sz="810" b="0">
-                <a:solidFill>
-                  <a:srgbClr val="303437"/>
-                </a:solidFill>
-                <a:latin typeface="Noto Sans"/>
-              </a:defRPr>
-            </a:pPr>
-            <a:r>
-              <a:rPr sz="810" b="0" lang="ja-JP" altLang="en-US">
-                <a:solidFill>
-                  <a:srgbClr val="626669"/>
-                </a:solidFill>
-                <a:latin typeface="Noto Sans"/>
-                <a:ea typeface="Noto Sans CJK JP"/>
-                <a:cs typeface="Noto Sans"/>
-                <a:hlinkClick r:id="rId3"/>
-              </a:rPr>
-              <a:t>https://github.com/stanford-crfm/helm/blob/v0.4.0/src/helm/benchmark/scenarios/cleva_scenario.py</a:t>
             </a:r>
           </a:p>
         </p:txBody>
@@ -17117,7 +15317,7 @@
                 <a:ea typeface="Noto Sans CJK JP"/>
                 <a:cs typeface="Noto Sans"/>
               </a:rPr>
-              <a:t>配布元は明確だが、利用許諾は確定していない</a:t>
+              <a:t>公式配布から入手でき、利用条件の確認が必要</a:t>
             </a:r>
           </a:p>
         </p:txBody>
@@ -17170,7 +15370,7 @@
                 <a:ea typeface="Noto Sans CJK JP"/>
                 <a:cs typeface="Noto Sans"/>
               </a:rPr>
-              <a:t>OPPOの公式リポジトリはFewCLUEのBUSTM配布を案内し、2021年のデータセット引用を示す。元の発話はアシスタント利用に由来する。</a:t>
+              <a:t>OPPOの公式リポジトリは、FewCLUEでのBUSTM配布を案内し、2021年のデータセットの引用方法を示している。</a:t>
             </a:r>
           </a:p>
           <a:p>
@@ -17200,7 +15400,7 @@
                 <a:ea typeface="Noto Sans CJK JP"/>
                 <a:cs typeface="Noto Sans"/>
               </a:rPr>
-              <a:t>取得したOPPOの固定ツリーにライセンスファイルはない。FewCLUEの固定READMEでもLicense欄は「追加中」となっている。公開されていることと、再配布や商用利用の許諾を同じものとして扱わない。</a:t>
+              <a:t>OPPOのリポジトリにはライセンスが明示されていない。FewCLUEのREADMEでも、ライセンス欄は「追加中」とされている。再利用・再配布の条件は配布元へ確認する。</a:t>
             </a:r>
           </a:p>
         </p:txBody>
@@ -17302,7 +15502,7 @@
                 <a:ea typeface="Noto Sans CJK JP"/>
                 <a:cs typeface="Noto Sans"/>
               </a:rPr>
-              <a:t>[1] OPPO XiaoBu Conversational-AI Center (2021). BUSTM: OPPO XiaoBu Dialogue Short Text Matching Dataset.</a:t>
+              <a:t>[1] OPPO XiaoBu Conversational-AI Center (2021). BUSTM: OPPO XiaoBu Dialogue Short Text Matching Dataset.  </a:t>
             </a:r>
             <a:r>
               <a:rPr sz="810" b="0" lang="ja-JP" altLang="en-US">
@@ -17312,9 +15512,27 @@
                 <a:latin typeface="Noto Sans"/>
                 <a:ea typeface="Noto Sans CJK JP"/>
                 <a:cs typeface="Noto Sans"/>
-              </a:rPr>
-              <a:t>  </a:t>
-            </a:r>
+                <a:hlinkClick r:id="rId2"/>
+              </a:rPr>
+              <a:t>https://github.com/xiaobu-coai/BUSTM</a:t>
+            </a:r>
+          </a:p>
+          <a:p>
+            <a:pPr>
+              <a:lnSpc>
+                <a:spcPts val="940"/>
+              </a:lnSpc>
+              <a:spcAft>
+                <a:spcPts val="140"/>
+              </a:spcAft>
+              <a:buNone/>
+              <a:defRPr sz="810" b="0">
+                <a:solidFill>
+                  <a:srgbClr val="303437"/>
+                </a:solidFill>
+                <a:latin typeface="Noto Sans"/>
+              </a:defRPr>
+            </a:pPr>
             <a:r>
               <a:rPr sz="810" b="0" lang="ja-JP" altLang="en-US">
                 <a:solidFill>
@@ -17323,27 +15541,9 @@
                 <a:latin typeface="Noto Sans"/>
                 <a:ea typeface="Noto Sans CJK JP"/>
                 <a:cs typeface="Noto Sans"/>
-                <a:hlinkClick r:id="rId2"/>
-              </a:rPr>
-              <a:t>https://github.com/xiaobu-coai/BUSTM</a:t>
-            </a:r>
-          </a:p>
-          <a:p>
-            <a:pPr>
-              <a:lnSpc>
-                <a:spcPts val="940"/>
-              </a:lnSpc>
-              <a:spcAft>
-                <a:spcPts val="140"/>
-              </a:spcAft>
-              <a:buNone/>
-              <a:defRPr sz="810" b="0">
-                <a:solidFill>
-                  <a:srgbClr val="303437"/>
-                </a:solidFill>
-                <a:latin typeface="Noto Sans"/>
-              </a:defRPr>
-            </a:pPr>
+              </a:rPr>
+              <a:t>[2] CLUE team (2021). FewCLUE — README.  </a:t>
+            </a:r>
             <a:r>
               <a:rPr sz="810" b="0" lang="ja-JP" altLang="en-US">
                 <a:solidFill>
@@ -17352,34 +15552,9 @@
                 <a:latin typeface="Noto Sans"/>
                 <a:ea typeface="Noto Sans CJK JP"/>
                 <a:cs typeface="Noto Sans"/>
-              </a:rPr>
-              <a:t>[2] CLUE team. FewCLUE README、公式の実験・提出・配布条件。</a:t>
-            </a:r>
-          </a:p>
-          <a:p>
-            <a:pPr>
-              <a:lnSpc>
-                <a:spcPts val="940"/>
-              </a:lnSpc>
-              <a:buNone/>
-              <a:defRPr sz="810" b="0">
-                <a:solidFill>
-                  <a:srgbClr val="303437"/>
-                </a:solidFill>
-                <a:latin typeface="Noto Sans"/>
-              </a:defRPr>
-            </a:pPr>
-            <a:r>
-              <a:rPr sz="810" b="0" lang="ja-JP" altLang="en-US">
-                <a:solidFill>
-                  <a:srgbClr val="626669"/>
-                </a:solidFill>
-                <a:latin typeface="Noto Sans"/>
-                <a:ea typeface="Noto Sans CJK JP"/>
-                <a:cs typeface="Noto Sans"/>
-                <a:hlinkClick r:id="rId3"/>
-              </a:rPr>
-              <a:t>https://github.com/CLUEbenchmark/FewCLUE/blob/62a02c6f31cf32814cfe522f78ef088228840f8d/README.md</a:t>
+                <a:hlinkClick r:id="rId4"/>
+              </a:rPr>
+              <a:t>https://github.com/CLUEbenchmark/FewCLUE/blob/main/README.md</a:t>
             </a:r>
           </a:p>
         </p:txBody>
@@ -17498,7 +15673,7 @@
                 <a:ea typeface="Noto Sans CJK JP"/>
                 <a:cs typeface="Noto Sans"/>
               </a:rPr>
-              <a:t>BUSTMは小布助手に由来する短い中国語発話対の二値判定データ。言い換え、異なる操作、時点や欲求の違いを扱い、学習・開発を各32件から始める。</a:t>
+              <a:t>BUSTMは、小布助手に由来する短い中国語発話対の二値判定データ。言い換え、異なる操作、時点や欲求の違いを扱い、学習・開発を各32件から始める。</a:t>
             </a:r>
           </a:p>
           <a:p>
@@ -17528,7 +15703,7 @@
                 <a:ea typeface="Noto Sans CJK JP"/>
                 <a:cs typeface="Noto Sans"/>
               </a:rPr>
-              <a:t>FewCLUEの公開テストは1,772件で、EFLの公表正解率は71.8%、人間評価は88%。CLEVAでの後利用を含め、正解付き元配布・提出用入力・未取得の採用集合を区別する。</a:t>
+              <a:t>FewCLUEの公開テストは1,772件。2021年のEFLの報告正解率は71.8%で、各100問を解いた人間評価は88%。後にCLEVAの短い発話の言い換え判定にも採用された。</a:t>
             </a:r>
           </a:p>
         </p:txBody>
@@ -18224,7 +16399,7 @@
                 <a:ea typeface="Noto Sans CJK JP"/>
                 <a:cs typeface="Noto Sans"/>
               </a:rPr>
-              <a:t>全ファイル・重複・形式の補足</a:t>
+              <a:t>入力の読み方と二択への変換</a:t>
             </a:r>
           </a:p>
           <a:p>
@@ -18368,7 +16543,7 @@
                 <a:ea typeface="Noto Sans CJK JP"/>
                 <a:cs typeface="Noto Sans"/>
               </a:rPr>
-              <a:t>実例4：語句が近い対でも、配布ラベルを読む</a:t>
+              <a:t>実例4：好意と問いかけを含む二つの発話</a:t>
             </a:r>
           </a:p>
         </p:txBody>
@@ -18904,7 +17079,7 @@
                 <a:ea typeface="Noto Sans CJK JP"/>
                 <a:cs typeface="Noto Sans"/>
               </a:rPr>
-              <a:t>二つの発話は近いが、配布ラベルは0。追加の対話文脈や注釈理由は配布されていない。</a:t>
+              <a:t>どちらも好意と問いかけを含むが、この対の正解ラベルは0。判断理由や対話履歴は付いていない。</a:t>
             </a:r>
           </a:p>
         </p:txBody>
@@ -18958,22 +17133,8 @@
                 <a:ea typeface="Noto Sans CJK JP"/>
                 <a:cs typeface="Noto Sans"/>
               </a:rPr>
-              <a:t>[1] CLUE team. FewCLUE / BUSTM 公式配布、commit 62a02c6f31cf32814cfe522f78ef088228840f8d、2026-10-18参照。 train_0.json:3行 / id=2</a:t>
-            </a:r>
-          </a:p>
-          <a:p>
-            <a:pPr>
-              <a:lnSpc>
-                <a:spcPts val="940"/>
-              </a:lnSpc>
-              <a:buNone/>
-              <a:defRPr sz="810" b="0">
-                <a:solidFill>
-                  <a:srgbClr val="303437"/>
-                </a:solidFill>
-                <a:latin typeface="Noto Sans"/>
-              </a:defRPr>
-            </a:pPr>
+              <a:t>[1] CLUE team (2021). FewCLUE — BUSTM.  </a:t>
+            </a:r>
             <a:r>
               <a:rPr sz="810" b="0" lang="ja-JP" altLang="en-US">
                 <a:solidFill>
@@ -18982,9 +17143,9 @@
                 <a:latin typeface="Noto Sans"/>
                 <a:ea typeface="Noto Sans CJK JP"/>
                 <a:cs typeface="Noto Sans"/>
-                <a:hlinkClick r:id="rId2"/>
-              </a:rPr>
-              <a:t>https://github.com/CLUEbenchmark/FewCLUE/tree/62a02c6f31cf32814cfe522f78ef088228840f8d/datasets/bustm</a:t>
+                <a:hlinkClick r:id="rId3"/>
+              </a:rPr>
+              <a:t>https://github.com/CLUEbenchmark/FewCLUE/tree/main/datasets/bustm</a:t>
             </a:r>
           </a:p>
         </p:txBody>
@@ -19640,22 +17801,8 @@
                 <a:ea typeface="Noto Sans CJK JP"/>
                 <a:cs typeface="Noto Sans"/>
               </a:rPr>
-              <a:t>[1] CLUE team. FewCLUE / BUSTM 公式配布、commit 62a02c6f31cf32814cfe522f78ef088228840f8d、2026-10-18参照。 test_public.json:19行 / id=408</a:t>
-            </a:r>
-          </a:p>
-          <a:p>
-            <a:pPr>
-              <a:lnSpc>
-                <a:spcPts val="940"/>
-              </a:lnSpc>
-              <a:buNone/>
-              <a:defRPr sz="810" b="0">
-                <a:solidFill>
-                  <a:srgbClr val="303437"/>
-                </a:solidFill>
-                <a:latin typeface="Noto Sans"/>
-              </a:defRPr>
-            </a:pPr>
+              <a:t>[1] CLUE team (2021). FewCLUE — BUSTM.  </a:t>
+            </a:r>
             <a:r>
               <a:rPr sz="810" b="0" lang="ja-JP" altLang="en-US">
                 <a:solidFill>
@@ -19664,9 +17811,9 @@
                 <a:latin typeface="Noto Sans"/>
                 <a:ea typeface="Noto Sans CJK JP"/>
                 <a:cs typeface="Noto Sans"/>
-                <a:hlinkClick r:id="rId2"/>
-              </a:rPr>
-              <a:t>https://github.com/CLUEbenchmark/FewCLUE/tree/62a02c6f31cf32814cfe522f78ef088228840f8d/datasets/bustm</a:t>
+                <a:hlinkClick r:id="rId3"/>
+              </a:rPr>
+              <a:t>https://github.com/CLUEbenchmark/FewCLUE/tree/main/datasets/bustm</a:t>
             </a:r>
           </a:p>
         </p:txBody>
@@ -20322,22 +18469,8 @@
                 <a:ea typeface="Noto Sans CJK JP"/>
                 <a:cs typeface="Noto Sans"/>
               </a:rPr>
-              <a:t>[1] CLUE team. FewCLUE / BUSTM 公式配布、commit 62a02c6f31cf32814cfe522f78ef088228840f8d、2026-10-18参照。 test_public.json:26行 / id=2274</a:t>
-            </a:r>
-          </a:p>
-          <a:p>
-            <a:pPr>
-              <a:lnSpc>
-                <a:spcPts val="940"/>
-              </a:lnSpc>
-              <a:buNone/>
-              <a:defRPr sz="810" b="0">
-                <a:solidFill>
-                  <a:srgbClr val="303437"/>
-                </a:solidFill>
-                <a:latin typeface="Noto Sans"/>
-              </a:defRPr>
-            </a:pPr>
+              <a:t>[1] CLUE team (2021). FewCLUE — BUSTM.  </a:t>
+            </a:r>
             <a:r>
               <a:rPr sz="810" b="0" lang="ja-JP" altLang="en-US">
                 <a:solidFill>
@@ -20346,9 +18479,9 @@
                 <a:latin typeface="Noto Sans"/>
                 <a:ea typeface="Noto Sans CJK JP"/>
                 <a:cs typeface="Noto Sans"/>
-                <a:hlinkClick r:id="rId2"/>
-              </a:rPr>
-              <a:t>https://github.com/CLUEbenchmark/FewCLUE/tree/62a02c6f31cf32814cfe522f78ef088228840f8d/datasets/bustm</a:t>
+                <a:hlinkClick r:id="rId3"/>
+              </a:rPr>
+              <a:t>https://github.com/CLUEbenchmark/FewCLUE/tree/main/datasets/bustm</a:t>
             </a:r>
           </a:p>
         </p:txBody>
@@ -21004,22 +19137,8 @@
                 <a:ea typeface="Noto Sans CJK JP"/>
                 <a:cs typeface="Noto Sans"/>
               </a:rPr>
-              <a:t>[1] CLUE team. FewCLUE / BUSTM 公式配布、commit 62a02c6f31cf32814cfe522f78ef088228840f8d、2026-10-18参照。 test_public.json:20行 / id=1336</a:t>
-            </a:r>
-          </a:p>
-          <a:p>
-            <a:pPr>
-              <a:lnSpc>
-                <a:spcPts val="940"/>
-              </a:lnSpc>
-              <a:buNone/>
-              <a:defRPr sz="810" b="0">
-                <a:solidFill>
-                  <a:srgbClr val="303437"/>
-                </a:solidFill>
-                <a:latin typeface="Noto Sans"/>
-              </a:defRPr>
-            </a:pPr>
+              <a:t>[1] CLUE team (2021). FewCLUE — BUSTM.  </a:t>
+            </a:r>
             <a:r>
               <a:rPr sz="810" b="0" lang="ja-JP" altLang="en-US">
                 <a:solidFill>
@@ -21028,9 +19147,9 @@
                 <a:latin typeface="Noto Sans"/>
                 <a:ea typeface="Noto Sans CJK JP"/>
                 <a:cs typeface="Noto Sans"/>
-                <a:hlinkClick r:id="rId2"/>
-              </a:rPr>
-              <a:t>https://github.com/CLUEbenchmark/FewCLUE/tree/62a02c6f31cf32814cfe522f78ef088228840f8d/datasets/bustm</a:t>
+                <a:hlinkClick r:id="rId3"/>
+              </a:rPr>
+              <a:t>https://github.com/CLUEbenchmark/FewCLUE/tree/main/datasets/bustm</a:t>
             </a:r>
           </a:p>
         </p:txBody>
@@ -21686,22 +19805,8 @@
                 <a:ea typeface="Noto Sans CJK JP"/>
                 <a:cs typeface="Noto Sans"/>
               </a:rPr>
-              <a:t>[1] CLUE team. FewCLUE / BUSTM 公式配布、commit 62a02c6f31cf32814cfe522f78ef088228840f8d、2026-10-18参照。 test_public.json:33行 / id=2126</a:t>
-            </a:r>
-          </a:p>
-          <a:p>
-            <a:pPr>
-              <a:lnSpc>
-                <a:spcPts val="940"/>
-              </a:lnSpc>
-              <a:buNone/>
-              <a:defRPr sz="810" b="0">
-                <a:solidFill>
-                  <a:srgbClr val="303437"/>
-                </a:solidFill>
-                <a:latin typeface="Noto Sans"/>
-              </a:defRPr>
-            </a:pPr>
+              <a:t>[1] CLUE team (2021). FewCLUE — BUSTM.  </a:t>
+            </a:r>
             <a:r>
               <a:rPr sz="810" b="0" lang="ja-JP" altLang="en-US">
                 <a:solidFill>
@@ -21710,9 +19815,9 @@
                 <a:latin typeface="Noto Sans"/>
                 <a:ea typeface="Noto Sans CJK JP"/>
                 <a:cs typeface="Noto Sans"/>
-                <a:hlinkClick r:id="rId2"/>
-              </a:rPr>
-              <a:t>https://github.com/CLUEbenchmark/FewCLUE/tree/62a02c6f31cf32814cfe522f78ef088228840f8d/datasets/bustm</a:t>
+                <a:hlinkClick r:id="rId3"/>
+              </a:rPr>
+              <a:t>https://github.com/CLUEbenchmark/FewCLUE/tree/main/datasets/bustm</a:t>
             </a:r>
           </a:p>
         </p:txBody>
@@ -22368,22 +20473,8 @@
                 <a:ea typeface="Noto Sans CJK JP"/>
                 <a:cs typeface="Noto Sans"/>
               </a:rPr>
-              <a:t>[1] CLUE team. FewCLUE / BUSTM 公式配布、commit 62a02c6f31cf32814cfe522f78ef088228840f8d、2026-10-18参照。 test_public.json:41行 / id=68</a:t>
-            </a:r>
-          </a:p>
-          <a:p>
-            <a:pPr>
-              <a:lnSpc>
-                <a:spcPts val="940"/>
-              </a:lnSpc>
-              <a:buNone/>
-              <a:defRPr sz="810" b="0">
-                <a:solidFill>
-                  <a:srgbClr val="303437"/>
-                </a:solidFill>
-                <a:latin typeface="Noto Sans"/>
-              </a:defRPr>
-            </a:pPr>
+              <a:t>[1] CLUE team (2021). FewCLUE — BUSTM.  </a:t>
+            </a:r>
             <a:r>
               <a:rPr sz="810" b="0" lang="ja-JP" altLang="en-US">
                 <a:solidFill>
@@ -22392,9 +20483,9 @@
                 <a:latin typeface="Noto Sans"/>
                 <a:ea typeface="Noto Sans CJK JP"/>
                 <a:cs typeface="Noto Sans"/>
-                <a:hlinkClick r:id="rId2"/>
-              </a:rPr>
-              <a:t>https://github.com/CLUEbenchmark/FewCLUE/tree/62a02c6f31cf32814cfe522f78ef088228840f8d/datasets/bustm</a:t>
+                <a:hlinkClick r:id="rId3"/>
+              </a:rPr>
+              <a:t>https://github.com/CLUEbenchmark/FewCLUE/tree/main/datasets/bustm</a:t>
             </a:r>
           </a:p>
         </p:txBody>
@@ -23050,22 +21141,8 @@
                 <a:ea typeface="Noto Sans CJK JP"/>
                 <a:cs typeface="Noto Sans"/>
               </a:rPr>
-              <a:t>[1] CLUE team. FewCLUE / BUSTM 公式配布、commit 62a02c6f31cf32814cfe522f78ef088228840f8d、2026-10-18参照。 test_public.json:54行 / id=2380</a:t>
-            </a:r>
-          </a:p>
-          <a:p>
-            <a:pPr>
-              <a:lnSpc>
-                <a:spcPts val="940"/>
-              </a:lnSpc>
-              <a:buNone/>
-              <a:defRPr sz="810" b="0">
-                <a:solidFill>
-                  <a:srgbClr val="303437"/>
-                </a:solidFill>
-                <a:latin typeface="Noto Sans"/>
-              </a:defRPr>
-            </a:pPr>
+              <a:t>[1] CLUE team (2021). FewCLUE — BUSTM.  </a:t>
+            </a:r>
             <a:r>
               <a:rPr sz="810" b="0" lang="ja-JP" altLang="en-US">
                 <a:solidFill>
@@ -23074,9 +21151,9 @@
                 <a:latin typeface="Noto Sans"/>
                 <a:ea typeface="Noto Sans CJK JP"/>
                 <a:cs typeface="Noto Sans"/>
-                <a:hlinkClick r:id="rId2"/>
-              </a:rPr>
-              <a:t>https://github.com/CLUEbenchmark/FewCLUE/tree/62a02c6f31cf32814cfe522f78ef088228840f8d/datasets/bustm</a:t>
+                <a:hlinkClick r:id="rId3"/>
+              </a:rPr>
+              <a:t>https://github.com/CLUEbenchmark/FewCLUE/tree/main/datasets/bustm</a:t>
             </a:r>
           </a:p>
         </p:txBody>
@@ -23732,22 +21809,8 @@
                 <a:ea typeface="Noto Sans CJK JP"/>
                 <a:cs typeface="Noto Sans"/>
               </a:rPr>
-              <a:t>[1] CLUE team. FewCLUE / BUSTM 公式配布、commit 62a02c6f31cf32814cfe522f78ef088228840f8d、2026-10-18参照。 test_public.json:53行 / id=2470</a:t>
-            </a:r>
-          </a:p>
-          <a:p>
-            <a:pPr>
-              <a:lnSpc>
-                <a:spcPts val="940"/>
-              </a:lnSpc>
-              <a:buNone/>
-              <a:defRPr sz="810" b="0">
-                <a:solidFill>
-                  <a:srgbClr val="303437"/>
-                </a:solidFill>
-                <a:latin typeface="Noto Sans"/>
-              </a:defRPr>
-            </a:pPr>
+              <a:t>[1] CLUE team (2021). FewCLUE — BUSTM.  </a:t>
+            </a:r>
             <a:r>
               <a:rPr sz="810" b="0" lang="ja-JP" altLang="en-US">
                 <a:solidFill>
@@ -23756,9 +21819,9 @@
                 <a:latin typeface="Noto Sans"/>
                 <a:ea typeface="Noto Sans CJK JP"/>
                 <a:cs typeface="Noto Sans"/>
-                <a:hlinkClick r:id="rId2"/>
-              </a:rPr>
-              <a:t>https://github.com/CLUEbenchmark/FewCLUE/tree/62a02c6f31cf32814cfe522f78ef088228840f8d/datasets/bustm</a:t>
+                <a:hlinkClick r:id="rId3"/>
+              </a:rPr>
+              <a:t>https://github.com/CLUEbenchmark/FewCLUE/tree/main/datasets/bustm</a:t>
             </a:r>
           </a:p>
         </p:txBody>
@@ -24528,22 +22591,8 @@
                 <a:ea typeface="Noto Sans CJK JP"/>
                 <a:cs typeface="Noto Sans"/>
               </a:rPr>
-              <a:t>[1] CLUE team. FewCLUE / BUSTM 公式配布、commit 62a02c6f31cf32814cfe522f78ef088228840f8d、2026-10-18参照。 test_public.json:12行 / id=510</a:t>
-            </a:r>
-          </a:p>
-          <a:p>
-            <a:pPr>
-              <a:lnSpc>
-                <a:spcPts val="940"/>
-              </a:lnSpc>
-              <a:buNone/>
-              <a:defRPr sz="810" b="0">
-                <a:solidFill>
-                  <a:srgbClr val="303437"/>
-                </a:solidFill>
-                <a:latin typeface="Noto Sans"/>
-              </a:defRPr>
-            </a:pPr>
+              <a:t>[1] CLUE team (2021). FewCLUE — BUSTM.  </a:t>
+            </a:r>
             <a:r>
               <a:rPr sz="810" b="0" lang="ja-JP" altLang="en-US">
                 <a:solidFill>
@@ -24552,9 +22601,9 @@
                 <a:latin typeface="Noto Sans"/>
                 <a:ea typeface="Noto Sans CJK JP"/>
                 <a:cs typeface="Noto Sans"/>
-                <a:hlinkClick r:id="rId2"/>
-              </a:rPr>
-              <a:t>https://github.com/CLUEbenchmark/FewCLUE/tree/62a02c6f31cf32814cfe522f78ef088228840f8d/datasets/bustm</a:t>
+                <a:hlinkClick r:id="rId3"/>
+              </a:rPr>
+              <a:t>https://github.com/CLUEbenchmark/FewCLUE/tree/main/datasets/bustm</a:t>
             </a:r>
           </a:p>
         </p:txBody>
@@ -25210,22 +23259,8 @@
                 <a:ea typeface="Noto Sans CJK JP"/>
                 <a:cs typeface="Noto Sans"/>
               </a:rPr>
-              <a:t>[1] CLUE team. FewCLUE / BUSTM 公式配布、commit 62a02c6f31cf32814cfe522f78ef088228840f8d、2026-10-18参照。 train_0.json:20行 / id=19</a:t>
-            </a:r>
-          </a:p>
-          <a:p>
-            <a:pPr>
-              <a:lnSpc>
-                <a:spcPts val="940"/>
-              </a:lnSpc>
-              <a:buNone/>
-              <a:defRPr sz="810" b="0">
-                <a:solidFill>
-                  <a:srgbClr val="303437"/>
-                </a:solidFill>
-                <a:latin typeface="Noto Sans"/>
-              </a:defRPr>
-            </a:pPr>
+              <a:t>[1] CLUE team (2021). FewCLUE — BUSTM.  </a:t>
+            </a:r>
             <a:r>
               <a:rPr sz="810" b="0" lang="ja-JP" altLang="en-US">
                 <a:solidFill>
@@ -25234,9 +23269,9 @@
                 <a:latin typeface="Noto Sans"/>
                 <a:ea typeface="Noto Sans CJK JP"/>
                 <a:cs typeface="Noto Sans"/>
-                <a:hlinkClick r:id="rId2"/>
-              </a:rPr>
-              <a:t>https://github.com/CLUEbenchmark/FewCLUE/tree/62a02c6f31cf32814cfe522f78ef088228840f8d/datasets/bustm</a:t>
+                <a:hlinkClick r:id="rId3"/>
+              </a:rPr>
+              <a:t>https://github.com/CLUEbenchmark/FewCLUE/tree/main/datasets/bustm</a:t>
             </a:r>
           </a:p>
         </p:txBody>
@@ -25302,7 +23337,7 @@
                 <a:ea typeface="Noto Sans CJK JP"/>
                 <a:cs typeface="Noto Sans"/>
               </a:rPr>
-              <a:t>全ファイル・重複・形式の補足</a:t>
+              <a:t>入力の読み方と二択への変換</a:t>
             </a:r>
           </a:p>
         </p:txBody>
@@ -25350,3947 +23385,7 @@
                 <a:ea typeface="Noto Sans CJK JP"/>
                 <a:cs typeface="Noto Sans"/>
               </a:rPr>
-              <a:t>Appendix: 2. 全ファイル・重複・形式の補足</a:t>
-            </a:r>
-          </a:p>
-        </p:txBody>
-      </p:sp>
-    </p:spTree>
-  </p:cSld>
-  <p:clrMapOvr>
-    <a:masterClrMapping/>
-  </p:clrMapOvr>
-</p:sld>
-</file>
-
-<file path=ppt/slides/slide43.xml><?xml version="1.0" encoding="utf-8"?>
-<p:sld xmlns:a="http://schemas.openxmlformats.org/drawingml/2006/main" xmlns:p="http://schemas.openxmlformats.org/presentationml/2006/main" xmlns:r="http://schemas.openxmlformats.org/officeDocument/2006/relationships">
-  <p:cSld>
-    <p:spTree>
-      <p:nvGrpSpPr>
-        <p:cNvPr id="1" name=""/>
-        <p:cNvGrpSpPr/>
-        <p:nvPr/>
-      </p:nvGrpSpPr>
-      <p:grpSpPr/>
-      <p:sp>
-        <p:nvSpPr>
-          <p:cNvPr id="2" name="Title 1"/>
-          <p:cNvSpPr>
-            <a:spLocks noGrp="1"/>
-          </p:cNvSpPr>
-          <p:nvPr>
-            <p:ph type="title"/>
-          </p:nvPr>
-        </p:nvSpPr>
-        <p:spPr>
-          <a:xfrm>
-            <a:off x="468172" y="650138"/>
-            <a:ext cx="8206740" cy="616305"/>
-          </a:xfrm>
-        </p:spPr>
-        <p:txBody>
-          <a:bodyPr wrap="square" lIns="0" rIns="0" tIns="0" bIns="0">
-            <a:noAutofit/>
-          </a:bodyPr>
-          <a:lstStyle/>
-          <a:p>
-            <a:pPr algn="l">
-              <a:lnSpc>
-                <a:spcPct val="110000"/>
-              </a:lnSpc>
-              <a:buNone/>
-              <a:defRPr sz="2800" b="0">
-                <a:solidFill>
-                  <a:srgbClr val="303437"/>
-                </a:solidFill>
-                <a:latin typeface="Noto Sans"/>
-              </a:defRPr>
-            </a:pPr>
-            <a:r>
-              <a:rPr sz="2800" b="1" lang="ja-JP" altLang="en-US">
-                <a:solidFill>
-                  <a:srgbClr val="303437"/>
-                </a:solidFill>
-                <a:latin typeface="Noto Sans"/>
-                <a:ea typeface="Noto Sans CJK JP"/>
-                <a:cs typeface="Noto Sans"/>
-              </a:rPr>
-              <a:t>学習の五つの小集合は各32行</a:t>
-            </a:r>
-          </a:p>
-        </p:txBody>
-      </p:sp>
-      <p:sp>
-        <p:nvSpPr>
-          <p:cNvPr id="3" name="Title 2"/>
-          <p:cNvSpPr>
-            <a:spLocks noGrp="1"/>
-          </p:cNvSpPr>
-          <p:nvPr>
-            <p:ph type="title" idx="2"/>
-          </p:nvPr>
-        </p:nvSpPr>
-        <p:spPr>
-          <a:xfrm>
-            <a:off x="75895" y="0"/>
-            <a:ext cx="8115300" cy="480060"/>
-          </a:xfrm>
-        </p:spPr>
-        <p:txBody>
-          <a:bodyPr wrap="square" lIns="0" rIns="0" tIns="0" bIns="0" anchor="ctr">
-            <a:noAutofit/>
-          </a:bodyPr>
-          <a:lstStyle/>
-          <a:p>
-            <a:pPr algn="l">
-              <a:lnSpc>
-                <a:spcPct val="110000"/>
-              </a:lnSpc>
-              <a:buNone/>
-              <a:defRPr sz="1400" b="0">
-                <a:solidFill>
-                  <a:srgbClr val="303437"/>
-                </a:solidFill>
-                <a:latin typeface="Noto Sans"/>
-              </a:defRPr>
-            </a:pPr>
-            <a:r>
-              <a:rPr sz="1400" b="1" lang="ja-JP" altLang="en-US">
-                <a:solidFill>
-                  <a:srgbClr val="FFFEF8"/>
-                </a:solidFill>
-                <a:latin typeface="Noto Sans"/>
-                <a:ea typeface="Noto Sans CJK JP"/>
-                <a:cs typeface="Noto Sans"/>
-              </a:rPr>
-              <a:t>Appendix: 2. 全ファイル・重複・形式の補足</a:t>
-            </a:r>
-          </a:p>
-        </p:txBody>
-      </p:sp>
-      <p:graphicFrame>
-        <p:nvGraphicFramePr>
-          <p:cNvPr id="4" name="Table 3"/>
-          <p:cNvGraphicFramePr>
-            <a:graphicFrameLocks noGrp="1"/>
-          </p:cNvGraphicFramePr>
-          <p:nvPr/>
-        </p:nvGraphicFramePr>
-        <p:xfrm>
-          <a:off x="548640" y="1508760"/>
-          <a:ext cx="8046720" cy="2438400"/>
-        </p:xfrm>
-        <a:graphic>
-          <a:graphicData uri="http://schemas.openxmlformats.org/drawingml/2006/table">
-            <a:tbl>
-              <a:tblPr firstRow="0" bandRow="0"/>
-              <a:tblGrid>
-                <a:gridCol w="3657600"/>
-                <a:gridCol w="2194560"/>
-                <a:gridCol w="2194560"/>
-              </a:tblGrid>
-              <a:tr h="406400">
-                <a:tc>
-                  <a:txBody>
-                    <a:bodyPr wrap="square">
-                      <a:noAutofit/>
-                    </a:bodyPr>
-                    <a:lstStyle/>
-                    <a:p>
-                      <a:pPr algn="l">
-                        <a:lnSpc>
-                          <a:spcPts val="2300"/>
-                        </a:lnSpc>
-                        <a:buNone/>
-                        <a:defRPr sz="2000" b="0">
-                          <a:solidFill>
-                            <a:srgbClr val="303437"/>
-                          </a:solidFill>
-                          <a:latin typeface="Noto Sans"/>
-                        </a:defRPr>
-                      </a:pPr>
-                      <a:r>
-                        <a:rPr sz="2000" b="0" lang="ja-JP" altLang="en-US">
-                          <a:solidFill>
-                            <a:srgbClr val="303437"/>
-                          </a:solidFill>
-                          <a:latin typeface="Noto Sans"/>
-                          <a:ea typeface="Noto Sans CJK JP"/>
-                          <a:cs typeface="Noto Sans"/>
-                        </a:rPr>
-                        <a:t>ファイル</a:t>
-                      </a:r>
-                    </a:p>
-                  </a:txBody>
-                  <a:tcPr marL="63500" marR="63500" marT="38100" marB="38100" anchor="ctr">
-                    <a:lnL w="7620">
-                      <a:noFill/>
-                    </a:lnL>
-                    <a:lnR w="7620">
-                      <a:noFill/>
-                    </a:lnR>
-                    <a:lnT w="15240">
-                      <a:solidFill>
-                        <a:srgbClr val="626669"/>
-                      </a:solidFill>
-                      <a:prstDash val="solid"/>
-                    </a:lnT>
-                    <a:lnB w="7620">
-                      <a:solidFill>
-                        <a:srgbClr val="626669"/>
-                      </a:solidFill>
-                      <a:prstDash val="solid"/>
-                    </a:lnB>
-                    <a:solidFill>
-                      <a:srgbClr val="FFFEF8"/>
-                    </a:solidFill>
-                  </a:tcPr>
-                </a:tc>
-                <a:tc>
-                  <a:txBody>
-                    <a:bodyPr wrap="square">
-                      <a:noAutofit/>
-                    </a:bodyPr>
-                    <a:lstStyle/>
-                    <a:p>
-                      <a:pPr algn="r">
-                        <a:lnSpc>
-                          <a:spcPts val="2300"/>
-                        </a:lnSpc>
-                        <a:buNone/>
-                        <a:defRPr sz="2000" b="0">
-                          <a:solidFill>
-                            <a:srgbClr val="303437"/>
-                          </a:solidFill>
-                          <a:latin typeface="Noto Sans"/>
-                        </a:defRPr>
-                      </a:pPr>
-                      <a:r>
-                        <a:rPr sz="2000" b="0" lang="ja-JP" altLang="en-US">
-                          <a:solidFill>
-                            <a:srgbClr val="303437"/>
-                          </a:solidFill>
-                          <a:latin typeface="Noto Sans"/>
-                          <a:ea typeface="Noto Sans CJK JP"/>
-                          <a:cs typeface="Noto Sans"/>
-                        </a:rPr>
-                        <a:t>0：不一致</a:t>
-                      </a:r>
-                    </a:p>
-                  </a:txBody>
-                  <a:tcPr marL="63500" marR="63500" marT="38100" marB="38100" anchor="ctr">
-                    <a:lnL w="7620">
-                      <a:noFill/>
-                    </a:lnL>
-                    <a:lnR w="7620">
-                      <a:noFill/>
-                    </a:lnR>
-                    <a:lnT w="15240">
-                      <a:solidFill>
-                        <a:srgbClr val="626669"/>
-                      </a:solidFill>
-                      <a:prstDash val="solid"/>
-                    </a:lnT>
-                    <a:lnB w="7620">
-                      <a:solidFill>
-                        <a:srgbClr val="626669"/>
-                      </a:solidFill>
-                      <a:prstDash val="solid"/>
-                    </a:lnB>
-                    <a:solidFill>
-                      <a:srgbClr val="FFFEF8"/>
-                    </a:solidFill>
-                  </a:tcPr>
-                </a:tc>
-                <a:tc>
-                  <a:txBody>
-                    <a:bodyPr wrap="square">
-                      <a:noAutofit/>
-                    </a:bodyPr>
-                    <a:lstStyle/>
-                    <a:p>
-                      <a:pPr algn="r">
-                        <a:lnSpc>
-                          <a:spcPts val="2300"/>
-                        </a:lnSpc>
-                        <a:buNone/>
-                        <a:defRPr sz="2000" b="0">
-                          <a:solidFill>
-                            <a:srgbClr val="303437"/>
-                          </a:solidFill>
-                          <a:latin typeface="Noto Sans"/>
-                        </a:defRPr>
-                      </a:pPr>
-                      <a:r>
-                        <a:rPr sz="2000" b="0" lang="ja-JP" altLang="en-US">
-                          <a:solidFill>
-                            <a:srgbClr val="303437"/>
-                          </a:solidFill>
-                          <a:latin typeface="Noto Sans"/>
-                          <a:ea typeface="Noto Sans CJK JP"/>
-                          <a:cs typeface="Noto Sans"/>
-                        </a:rPr>
-                        <a:t>1：一致</a:t>
-                      </a:r>
-                    </a:p>
-                  </a:txBody>
-                  <a:tcPr marL="63500" marR="63500" marT="38100" marB="38100" anchor="ctr">
-                    <a:lnL w="7620">
-                      <a:noFill/>
-                    </a:lnL>
-                    <a:lnR w="7620">
-                      <a:noFill/>
-                    </a:lnR>
-                    <a:lnT w="15240">
-                      <a:solidFill>
-                        <a:srgbClr val="626669"/>
-                      </a:solidFill>
-                      <a:prstDash val="solid"/>
-                    </a:lnT>
-                    <a:lnB w="7620">
-                      <a:solidFill>
-                        <a:srgbClr val="626669"/>
-                      </a:solidFill>
-                      <a:prstDash val="solid"/>
-                    </a:lnB>
-                    <a:solidFill>
-                      <a:srgbClr val="FFFEF8"/>
-                    </a:solidFill>
-                  </a:tcPr>
-                </a:tc>
-              </a:tr>
-              <a:tr h="406400">
-                <a:tc>
-                  <a:txBody>
-                    <a:bodyPr wrap="square">
-                      <a:noAutofit/>
-                    </a:bodyPr>
-                    <a:lstStyle/>
-                    <a:p>
-                      <a:pPr algn="l">
-                        <a:lnSpc>
-                          <a:spcPts val="2300"/>
-                        </a:lnSpc>
-                        <a:buNone/>
-                        <a:defRPr sz="2000" b="0">
-                          <a:solidFill>
-                            <a:srgbClr val="303437"/>
-                          </a:solidFill>
-                          <a:latin typeface="Noto Sans"/>
-                        </a:defRPr>
-                      </a:pPr>
-                      <a:r>
-                        <a:rPr sz="2000" b="0" lang="ja-JP" altLang="en-US">
-                          <a:solidFill>
-                            <a:srgbClr val="303437"/>
-                          </a:solidFill>
-                          <a:latin typeface="Noto Sans"/>
-                          <a:ea typeface="Noto Sans CJK JP"/>
-                          <a:cs typeface="Noto Sans"/>
-                        </a:rPr>
-                        <a:t>train_0.json</a:t>
-                      </a:r>
-                    </a:p>
-                  </a:txBody>
-                  <a:tcPr marL="63500" marR="63500" marT="38100" marB="38100" anchor="ctr">
-                    <a:lnL w="7620">
-                      <a:noFill/>
-                    </a:lnL>
-                    <a:lnR w="7620">
-                      <a:noFill/>
-                    </a:lnR>
-                    <a:lnT w="7620">
-                      <a:solidFill>
-                        <a:srgbClr val="626669"/>
-                      </a:solidFill>
-                      <a:prstDash val="solid"/>
-                    </a:lnT>
-                    <a:lnB w="7620">
-                      <a:noFill/>
-                    </a:lnB>
-                    <a:solidFill>
-                      <a:srgbClr val="FFFEF8"/>
-                    </a:solidFill>
-                  </a:tcPr>
-                </a:tc>
-                <a:tc>
-                  <a:txBody>
-                    <a:bodyPr wrap="square">
-                      <a:noAutofit/>
-                    </a:bodyPr>
-                    <a:lstStyle/>
-                    <a:p>
-                      <a:pPr algn="r">
-                        <a:lnSpc>
-                          <a:spcPts val="2300"/>
-                        </a:lnSpc>
-                        <a:buNone/>
-                        <a:defRPr sz="2000" b="0">
-                          <a:solidFill>
-                            <a:srgbClr val="303437"/>
-                          </a:solidFill>
-                          <a:latin typeface="Noto Sans"/>
-                        </a:defRPr>
-                      </a:pPr>
-                      <a:r>
-                        <a:rPr sz="2000" b="0" lang="ja-JP" altLang="en-US">
-                          <a:solidFill>
-                            <a:srgbClr val="303437"/>
-                          </a:solidFill>
-                          <a:latin typeface="Noto Sans"/>
-                          <a:ea typeface="Noto Sans CJK JP"/>
-                          <a:cs typeface="Noto Sans"/>
-                        </a:rPr>
-                        <a:t>16</a:t>
-                      </a:r>
-                    </a:p>
-                  </a:txBody>
-                  <a:tcPr marL="63500" marR="63500" marT="38100" marB="38100" anchor="ctr">
-                    <a:lnL w="7620">
-                      <a:noFill/>
-                    </a:lnL>
-                    <a:lnR w="7620">
-                      <a:noFill/>
-                    </a:lnR>
-                    <a:lnT w="7620">
-                      <a:solidFill>
-                        <a:srgbClr val="626669"/>
-                      </a:solidFill>
-                      <a:prstDash val="solid"/>
-                    </a:lnT>
-                    <a:lnB w="7620">
-                      <a:noFill/>
-                    </a:lnB>
-                    <a:solidFill>
-                      <a:srgbClr val="FFFEF8"/>
-                    </a:solidFill>
-                  </a:tcPr>
-                </a:tc>
-                <a:tc>
-                  <a:txBody>
-                    <a:bodyPr wrap="square">
-                      <a:noAutofit/>
-                    </a:bodyPr>
-                    <a:lstStyle/>
-                    <a:p>
-                      <a:pPr algn="r">
-                        <a:lnSpc>
-                          <a:spcPts val="2300"/>
-                        </a:lnSpc>
-                        <a:buNone/>
-                        <a:defRPr sz="2000" b="0">
-                          <a:solidFill>
-                            <a:srgbClr val="303437"/>
-                          </a:solidFill>
-                          <a:latin typeface="Noto Sans"/>
-                        </a:defRPr>
-                      </a:pPr>
-                      <a:r>
-                        <a:rPr sz="2000" b="0" lang="ja-JP" altLang="en-US">
-                          <a:solidFill>
-                            <a:srgbClr val="303437"/>
-                          </a:solidFill>
-                          <a:latin typeface="Noto Sans"/>
-                          <a:ea typeface="Noto Sans CJK JP"/>
-                          <a:cs typeface="Noto Sans"/>
-                        </a:rPr>
-                        <a:t>16</a:t>
-                      </a:r>
-                    </a:p>
-                  </a:txBody>
-                  <a:tcPr marL="63500" marR="63500" marT="38100" marB="38100" anchor="ctr">
-                    <a:lnL w="7620">
-                      <a:noFill/>
-                    </a:lnL>
-                    <a:lnR w="7620">
-                      <a:noFill/>
-                    </a:lnR>
-                    <a:lnT w="7620">
-                      <a:solidFill>
-                        <a:srgbClr val="626669"/>
-                      </a:solidFill>
-                      <a:prstDash val="solid"/>
-                    </a:lnT>
-                    <a:lnB w="7620">
-                      <a:noFill/>
-                    </a:lnB>
-                    <a:solidFill>
-                      <a:srgbClr val="FFFEF8"/>
-                    </a:solidFill>
-                  </a:tcPr>
-                </a:tc>
-              </a:tr>
-              <a:tr h="406400">
-                <a:tc>
-                  <a:txBody>
-                    <a:bodyPr wrap="square">
-                      <a:noAutofit/>
-                    </a:bodyPr>
-                    <a:lstStyle/>
-                    <a:p>
-                      <a:pPr algn="l">
-                        <a:lnSpc>
-                          <a:spcPts val="2300"/>
-                        </a:lnSpc>
-                        <a:buNone/>
-                        <a:defRPr sz="2000" b="0">
-                          <a:solidFill>
-                            <a:srgbClr val="303437"/>
-                          </a:solidFill>
-                          <a:latin typeface="Noto Sans"/>
-                        </a:defRPr>
-                      </a:pPr>
-                      <a:r>
-                        <a:rPr sz="2000" b="0" lang="ja-JP" altLang="en-US">
-                          <a:solidFill>
-                            <a:srgbClr val="303437"/>
-                          </a:solidFill>
-                          <a:latin typeface="Noto Sans"/>
-                          <a:ea typeface="Noto Sans CJK JP"/>
-                          <a:cs typeface="Noto Sans"/>
-                        </a:rPr>
-                        <a:t>train_1.json</a:t>
-                      </a:r>
-                    </a:p>
-                  </a:txBody>
-                  <a:tcPr marL="63500" marR="63500" marT="38100" marB="38100" anchor="ctr">
-                    <a:lnL w="7620">
-                      <a:noFill/>
-                    </a:lnL>
-                    <a:lnR w="7620">
-                      <a:noFill/>
-                    </a:lnR>
-                    <a:lnT w="7620">
-                      <a:noFill/>
-                    </a:lnT>
-                    <a:lnB w="7620">
-                      <a:noFill/>
-                    </a:lnB>
-                    <a:solidFill>
-                      <a:srgbClr val="FFFEF8"/>
-                    </a:solidFill>
-                  </a:tcPr>
-                </a:tc>
-                <a:tc>
-                  <a:txBody>
-                    <a:bodyPr wrap="square">
-                      <a:noAutofit/>
-                    </a:bodyPr>
-                    <a:lstStyle/>
-                    <a:p>
-                      <a:pPr algn="r">
-                        <a:lnSpc>
-                          <a:spcPts val="2300"/>
-                        </a:lnSpc>
-                        <a:buNone/>
-                        <a:defRPr sz="2000" b="0">
-                          <a:solidFill>
-                            <a:srgbClr val="303437"/>
-                          </a:solidFill>
-                          <a:latin typeface="Noto Sans"/>
-                        </a:defRPr>
-                      </a:pPr>
-                      <a:r>
-                        <a:rPr sz="2000" b="0" lang="ja-JP" altLang="en-US">
-                          <a:solidFill>
-                            <a:srgbClr val="303437"/>
-                          </a:solidFill>
-                          <a:latin typeface="Noto Sans"/>
-                          <a:ea typeface="Noto Sans CJK JP"/>
-                          <a:cs typeface="Noto Sans"/>
-                        </a:rPr>
-                        <a:t>18</a:t>
-                      </a:r>
-                    </a:p>
-                  </a:txBody>
-                  <a:tcPr marL="63500" marR="63500" marT="38100" marB="38100" anchor="ctr">
-                    <a:lnL w="7620">
-                      <a:noFill/>
-                    </a:lnL>
-                    <a:lnR w="7620">
-                      <a:noFill/>
-                    </a:lnR>
-                    <a:lnT w="7620">
-                      <a:noFill/>
-                    </a:lnT>
-                    <a:lnB w="7620">
-                      <a:noFill/>
-                    </a:lnB>
-                    <a:solidFill>
-                      <a:srgbClr val="FFFEF8"/>
-                    </a:solidFill>
-                  </a:tcPr>
-                </a:tc>
-                <a:tc>
-                  <a:txBody>
-                    <a:bodyPr wrap="square">
-                      <a:noAutofit/>
-                    </a:bodyPr>
-                    <a:lstStyle/>
-                    <a:p>
-                      <a:pPr algn="r">
-                        <a:lnSpc>
-                          <a:spcPts val="2300"/>
-                        </a:lnSpc>
-                        <a:buNone/>
-                        <a:defRPr sz="2000" b="0">
-                          <a:solidFill>
-                            <a:srgbClr val="303437"/>
-                          </a:solidFill>
-                          <a:latin typeface="Noto Sans"/>
-                        </a:defRPr>
-                      </a:pPr>
-                      <a:r>
-                        <a:rPr sz="2000" b="0" lang="ja-JP" altLang="en-US">
-                          <a:solidFill>
-                            <a:srgbClr val="303437"/>
-                          </a:solidFill>
-                          <a:latin typeface="Noto Sans"/>
-                          <a:ea typeface="Noto Sans CJK JP"/>
-                          <a:cs typeface="Noto Sans"/>
-                        </a:rPr>
-                        <a:t>14</a:t>
-                      </a:r>
-                    </a:p>
-                  </a:txBody>
-                  <a:tcPr marL="63500" marR="63500" marT="38100" marB="38100" anchor="ctr">
-                    <a:lnL w="7620">
-                      <a:noFill/>
-                    </a:lnL>
-                    <a:lnR w="7620">
-                      <a:noFill/>
-                    </a:lnR>
-                    <a:lnT w="7620">
-                      <a:noFill/>
-                    </a:lnT>
-                    <a:lnB w="7620">
-                      <a:noFill/>
-                    </a:lnB>
-                    <a:solidFill>
-                      <a:srgbClr val="FFFEF8"/>
-                    </a:solidFill>
-                  </a:tcPr>
-                </a:tc>
-              </a:tr>
-              <a:tr h="406400">
-                <a:tc>
-                  <a:txBody>
-                    <a:bodyPr wrap="square">
-                      <a:noAutofit/>
-                    </a:bodyPr>
-                    <a:lstStyle/>
-                    <a:p>
-                      <a:pPr algn="l">
-                        <a:lnSpc>
-                          <a:spcPts val="2300"/>
-                        </a:lnSpc>
-                        <a:buNone/>
-                        <a:defRPr sz="2000" b="0">
-                          <a:solidFill>
-                            <a:srgbClr val="303437"/>
-                          </a:solidFill>
-                          <a:latin typeface="Noto Sans"/>
-                        </a:defRPr>
-                      </a:pPr>
-                      <a:r>
-                        <a:rPr sz="2000" b="0" lang="ja-JP" altLang="en-US">
-                          <a:solidFill>
-                            <a:srgbClr val="303437"/>
-                          </a:solidFill>
-                          <a:latin typeface="Noto Sans"/>
-                          <a:ea typeface="Noto Sans CJK JP"/>
-                          <a:cs typeface="Noto Sans"/>
-                        </a:rPr>
-                        <a:t>train_2.json</a:t>
-                      </a:r>
-                    </a:p>
-                  </a:txBody>
-                  <a:tcPr marL="63500" marR="63500" marT="38100" marB="38100" anchor="ctr">
-                    <a:lnL w="7620">
-                      <a:noFill/>
-                    </a:lnL>
-                    <a:lnR w="7620">
-                      <a:noFill/>
-                    </a:lnR>
-                    <a:lnT w="7620">
-                      <a:noFill/>
-                    </a:lnT>
-                    <a:lnB w="7620">
-                      <a:noFill/>
-                    </a:lnB>
-                    <a:solidFill>
-                      <a:srgbClr val="FFFEF8"/>
-                    </a:solidFill>
-                  </a:tcPr>
-                </a:tc>
-                <a:tc>
-                  <a:txBody>
-                    <a:bodyPr wrap="square">
-                      <a:noAutofit/>
-                    </a:bodyPr>
-                    <a:lstStyle/>
-                    <a:p>
-                      <a:pPr algn="r">
-                        <a:lnSpc>
-                          <a:spcPts val="2300"/>
-                        </a:lnSpc>
-                        <a:buNone/>
-                        <a:defRPr sz="2000" b="0">
-                          <a:solidFill>
-                            <a:srgbClr val="303437"/>
-                          </a:solidFill>
-                          <a:latin typeface="Noto Sans"/>
-                        </a:defRPr>
-                      </a:pPr>
-                      <a:r>
-                        <a:rPr sz="2000" b="0" lang="ja-JP" altLang="en-US">
-                          <a:solidFill>
-                            <a:srgbClr val="303437"/>
-                          </a:solidFill>
-                          <a:latin typeface="Noto Sans"/>
-                          <a:ea typeface="Noto Sans CJK JP"/>
-                          <a:cs typeface="Noto Sans"/>
-                        </a:rPr>
-                        <a:t>21</a:t>
-                      </a:r>
-                    </a:p>
-                  </a:txBody>
-                  <a:tcPr marL="63500" marR="63500" marT="38100" marB="38100" anchor="ctr">
-                    <a:lnL w="7620">
-                      <a:noFill/>
-                    </a:lnL>
-                    <a:lnR w="7620">
-                      <a:noFill/>
-                    </a:lnR>
-                    <a:lnT w="7620">
-                      <a:noFill/>
-                    </a:lnT>
-                    <a:lnB w="7620">
-                      <a:noFill/>
-                    </a:lnB>
-                    <a:solidFill>
-                      <a:srgbClr val="FFFEF8"/>
-                    </a:solidFill>
-                  </a:tcPr>
-                </a:tc>
-                <a:tc>
-                  <a:txBody>
-                    <a:bodyPr wrap="square">
-                      <a:noAutofit/>
-                    </a:bodyPr>
-                    <a:lstStyle/>
-                    <a:p>
-                      <a:pPr algn="r">
-                        <a:lnSpc>
-                          <a:spcPts val="2300"/>
-                        </a:lnSpc>
-                        <a:buNone/>
-                        <a:defRPr sz="2000" b="0">
-                          <a:solidFill>
-                            <a:srgbClr val="303437"/>
-                          </a:solidFill>
-                          <a:latin typeface="Noto Sans"/>
-                        </a:defRPr>
-                      </a:pPr>
-                      <a:r>
-                        <a:rPr sz="2000" b="0" lang="ja-JP" altLang="en-US">
-                          <a:solidFill>
-                            <a:srgbClr val="303437"/>
-                          </a:solidFill>
-                          <a:latin typeface="Noto Sans"/>
-                          <a:ea typeface="Noto Sans CJK JP"/>
-                          <a:cs typeface="Noto Sans"/>
-                        </a:rPr>
-                        <a:t>11</a:t>
-                      </a:r>
-                    </a:p>
-                  </a:txBody>
-                  <a:tcPr marL="63500" marR="63500" marT="38100" marB="38100" anchor="ctr">
-                    <a:lnL w="7620">
-                      <a:noFill/>
-                    </a:lnL>
-                    <a:lnR w="7620">
-                      <a:noFill/>
-                    </a:lnR>
-                    <a:lnT w="7620">
-                      <a:noFill/>
-                    </a:lnT>
-                    <a:lnB w="7620">
-                      <a:noFill/>
-                    </a:lnB>
-                    <a:solidFill>
-                      <a:srgbClr val="FFFEF8"/>
-                    </a:solidFill>
-                  </a:tcPr>
-                </a:tc>
-              </a:tr>
-              <a:tr h="406400">
-                <a:tc>
-                  <a:txBody>
-                    <a:bodyPr wrap="square">
-                      <a:noAutofit/>
-                    </a:bodyPr>
-                    <a:lstStyle/>
-                    <a:p>
-                      <a:pPr algn="l">
-                        <a:lnSpc>
-                          <a:spcPts val="2300"/>
-                        </a:lnSpc>
-                        <a:buNone/>
-                        <a:defRPr sz="2000" b="0">
-                          <a:solidFill>
-                            <a:srgbClr val="303437"/>
-                          </a:solidFill>
-                          <a:latin typeface="Noto Sans"/>
-                        </a:defRPr>
-                      </a:pPr>
-                      <a:r>
-                        <a:rPr sz="2000" b="0" lang="ja-JP" altLang="en-US">
-                          <a:solidFill>
-                            <a:srgbClr val="303437"/>
-                          </a:solidFill>
-                          <a:latin typeface="Noto Sans"/>
-                          <a:ea typeface="Noto Sans CJK JP"/>
-                          <a:cs typeface="Noto Sans"/>
-                        </a:rPr>
-                        <a:t>train_3.json</a:t>
-                      </a:r>
-                    </a:p>
-                  </a:txBody>
-                  <a:tcPr marL="63500" marR="63500" marT="38100" marB="38100" anchor="ctr">
-                    <a:lnL w="7620">
-                      <a:noFill/>
-                    </a:lnL>
-                    <a:lnR w="7620">
-                      <a:noFill/>
-                    </a:lnR>
-                    <a:lnT w="7620">
-                      <a:noFill/>
-                    </a:lnT>
-                    <a:lnB w="7620">
-                      <a:noFill/>
-                    </a:lnB>
-                    <a:solidFill>
-                      <a:srgbClr val="FFFEF8"/>
-                    </a:solidFill>
-                  </a:tcPr>
-                </a:tc>
-                <a:tc>
-                  <a:txBody>
-                    <a:bodyPr wrap="square">
-                      <a:noAutofit/>
-                    </a:bodyPr>
-                    <a:lstStyle/>
-                    <a:p>
-                      <a:pPr algn="r">
-                        <a:lnSpc>
-                          <a:spcPts val="2300"/>
-                        </a:lnSpc>
-                        <a:buNone/>
-                        <a:defRPr sz="2000" b="0">
-                          <a:solidFill>
-                            <a:srgbClr val="303437"/>
-                          </a:solidFill>
-                          <a:latin typeface="Noto Sans"/>
-                        </a:defRPr>
-                      </a:pPr>
-                      <a:r>
-                        <a:rPr sz="2000" b="0" lang="ja-JP" altLang="en-US">
-                          <a:solidFill>
-                            <a:srgbClr val="303437"/>
-                          </a:solidFill>
-                          <a:latin typeface="Noto Sans"/>
-                          <a:ea typeface="Noto Sans CJK JP"/>
-                          <a:cs typeface="Noto Sans"/>
-                        </a:rPr>
-                        <a:t>18</a:t>
-                      </a:r>
-                    </a:p>
-                  </a:txBody>
-                  <a:tcPr marL="63500" marR="63500" marT="38100" marB="38100" anchor="ctr">
-                    <a:lnL w="7620">
-                      <a:noFill/>
-                    </a:lnL>
-                    <a:lnR w="7620">
-                      <a:noFill/>
-                    </a:lnR>
-                    <a:lnT w="7620">
-                      <a:noFill/>
-                    </a:lnT>
-                    <a:lnB w="7620">
-                      <a:noFill/>
-                    </a:lnB>
-                    <a:solidFill>
-                      <a:srgbClr val="FFFEF8"/>
-                    </a:solidFill>
-                  </a:tcPr>
-                </a:tc>
-                <a:tc>
-                  <a:txBody>
-                    <a:bodyPr wrap="square">
-                      <a:noAutofit/>
-                    </a:bodyPr>
-                    <a:lstStyle/>
-                    <a:p>
-                      <a:pPr algn="r">
-                        <a:lnSpc>
-                          <a:spcPts val="2300"/>
-                        </a:lnSpc>
-                        <a:buNone/>
-                        <a:defRPr sz="2000" b="0">
-                          <a:solidFill>
-                            <a:srgbClr val="303437"/>
-                          </a:solidFill>
-                          <a:latin typeface="Noto Sans"/>
-                        </a:defRPr>
-                      </a:pPr>
-                      <a:r>
-                        <a:rPr sz="2000" b="0" lang="ja-JP" altLang="en-US">
-                          <a:solidFill>
-                            <a:srgbClr val="303437"/>
-                          </a:solidFill>
-                          <a:latin typeface="Noto Sans"/>
-                          <a:ea typeface="Noto Sans CJK JP"/>
-                          <a:cs typeface="Noto Sans"/>
-                        </a:rPr>
-                        <a:t>14</a:t>
-                      </a:r>
-                    </a:p>
-                  </a:txBody>
-                  <a:tcPr marL="63500" marR="63500" marT="38100" marB="38100" anchor="ctr">
-                    <a:lnL w="7620">
-                      <a:noFill/>
-                    </a:lnL>
-                    <a:lnR w="7620">
-                      <a:noFill/>
-                    </a:lnR>
-                    <a:lnT w="7620">
-                      <a:noFill/>
-                    </a:lnT>
-                    <a:lnB w="7620">
-                      <a:noFill/>
-                    </a:lnB>
-                    <a:solidFill>
-                      <a:srgbClr val="FFFEF8"/>
-                    </a:solidFill>
-                  </a:tcPr>
-                </a:tc>
-              </a:tr>
-              <a:tr h="406400">
-                <a:tc>
-                  <a:txBody>
-                    <a:bodyPr wrap="square">
-                      <a:noAutofit/>
-                    </a:bodyPr>
-                    <a:lstStyle/>
-                    <a:p>
-                      <a:pPr algn="l">
-                        <a:lnSpc>
-                          <a:spcPts val="2300"/>
-                        </a:lnSpc>
-                        <a:buNone/>
-                        <a:defRPr sz="2000" b="0">
-                          <a:solidFill>
-                            <a:srgbClr val="303437"/>
-                          </a:solidFill>
-                          <a:latin typeface="Noto Sans"/>
-                        </a:defRPr>
-                      </a:pPr>
-                      <a:r>
-                        <a:rPr sz="2000" b="0" lang="ja-JP" altLang="en-US">
-                          <a:solidFill>
-                            <a:srgbClr val="303437"/>
-                          </a:solidFill>
-                          <a:latin typeface="Noto Sans"/>
-                          <a:ea typeface="Noto Sans CJK JP"/>
-                          <a:cs typeface="Noto Sans"/>
-                        </a:rPr>
-                        <a:t>train_4.json</a:t>
-                      </a:r>
-                    </a:p>
-                  </a:txBody>
-                  <a:tcPr marL="63500" marR="63500" marT="38100" marB="38100" anchor="ctr">
-                    <a:lnL w="7620">
-                      <a:noFill/>
-                    </a:lnL>
-                    <a:lnR w="7620">
-                      <a:noFill/>
-                    </a:lnR>
-                    <a:lnT w="7620">
-                      <a:noFill/>
-                    </a:lnT>
-                    <a:lnB w="15240">
-                      <a:solidFill>
-                        <a:srgbClr val="626669"/>
-                      </a:solidFill>
-                      <a:prstDash val="solid"/>
-                    </a:lnB>
-                    <a:solidFill>
-                      <a:srgbClr val="FFFEF8"/>
-                    </a:solidFill>
-                  </a:tcPr>
-                </a:tc>
-                <a:tc>
-                  <a:txBody>
-                    <a:bodyPr wrap="square">
-                      <a:noAutofit/>
-                    </a:bodyPr>
-                    <a:lstStyle/>
-                    <a:p>
-                      <a:pPr algn="r">
-                        <a:lnSpc>
-                          <a:spcPts val="2300"/>
-                        </a:lnSpc>
-                        <a:buNone/>
-                        <a:defRPr sz="2000" b="0">
-                          <a:solidFill>
-                            <a:srgbClr val="303437"/>
-                          </a:solidFill>
-                          <a:latin typeface="Noto Sans"/>
-                        </a:defRPr>
-                      </a:pPr>
-                      <a:r>
-                        <a:rPr sz="2000" b="0" lang="ja-JP" altLang="en-US">
-                          <a:solidFill>
-                            <a:srgbClr val="303437"/>
-                          </a:solidFill>
-                          <a:latin typeface="Noto Sans"/>
-                          <a:ea typeface="Noto Sans CJK JP"/>
-                          <a:cs typeface="Noto Sans"/>
-                        </a:rPr>
-                        <a:t>17</a:t>
-                      </a:r>
-                    </a:p>
-                  </a:txBody>
-                  <a:tcPr marL="63500" marR="63500" marT="38100" marB="38100" anchor="ctr">
-                    <a:lnL w="7620">
-                      <a:noFill/>
-                    </a:lnL>
-                    <a:lnR w="7620">
-                      <a:noFill/>
-                    </a:lnR>
-                    <a:lnT w="7620">
-                      <a:noFill/>
-                    </a:lnT>
-                    <a:lnB w="15240">
-                      <a:solidFill>
-                        <a:srgbClr val="626669"/>
-                      </a:solidFill>
-                      <a:prstDash val="solid"/>
-                    </a:lnB>
-                    <a:solidFill>
-                      <a:srgbClr val="FFFEF8"/>
-                    </a:solidFill>
-                  </a:tcPr>
-                </a:tc>
-                <a:tc>
-                  <a:txBody>
-                    <a:bodyPr wrap="square">
-                      <a:noAutofit/>
-                    </a:bodyPr>
-                    <a:lstStyle/>
-                    <a:p>
-                      <a:pPr algn="r">
-                        <a:lnSpc>
-                          <a:spcPts val="2300"/>
-                        </a:lnSpc>
-                        <a:buNone/>
-                        <a:defRPr sz="2000" b="0">
-                          <a:solidFill>
-                            <a:srgbClr val="303437"/>
-                          </a:solidFill>
-                          <a:latin typeface="Noto Sans"/>
-                        </a:defRPr>
-                      </a:pPr>
-                      <a:r>
-                        <a:rPr sz="2000" b="0" lang="ja-JP" altLang="en-US">
-                          <a:solidFill>
-                            <a:srgbClr val="303437"/>
-                          </a:solidFill>
-                          <a:latin typeface="Noto Sans"/>
-                          <a:ea typeface="Noto Sans CJK JP"/>
-                          <a:cs typeface="Noto Sans"/>
-                        </a:rPr>
-                        <a:t>15</a:t>
-                      </a:r>
-                    </a:p>
-                  </a:txBody>
-                  <a:tcPr marL="63500" marR="63500" marT="38100" marB="38100" anchor="ctr">
-                    <a:lnL w="7620">
-                      <a:noFill/>
-                    </a:lnL>
-                    <a:lnR w="7620">
-                      <a:noFill/>
-                    </a:lnR>
-                    <a:lnT w="7620">
-                      <a:noFill/>
-                    </a:lnT>
-                    <a:lnB w="15240">
-                      <a:solidFill>
-                        <a:srgbClr val="626669"/>
-                      </a:solidFill>
-                      <a:prstDash val="solid"/>
-                    </a:lnB>
-                    <a:solidFill>
-                      <a:srgbClr val="FFFEF8"/>
-                    </a:solidFill>
-                  </a:tcPr>
-                </a:tc>
-              </a:tr>
-            </a:tbl>
-          </a:graphicData>
-        </a:graphic>
-      </p:graphicFrame>
-      <p:sp>
-        <p:nvSpPr>
-          <p:cNvPr id="5" name="TextBox 4"/>
-          <p:cNvSpPr txBox="1"/>
-          <p:nvPr/>
-        </p:nvSpPr>
-        <p:spPr>
-          <a:xfrm>
-            <a:off x="594360" y="4075175"/>
-            <a:ext cx="7955279" cy="658368"/>
-          </a:xfrm>
-          <a:prstGeom prst="rect">
-            <a:avLst/>
-          </a:prstGeom>
-          <a:noFill/>
-        </p:spPr>
-        <p:txBody>
-          <a:bodyPr wrap="square" lIns="0" rIns="0" tIns="0" bIns="0">
-            <a:noAutofit/>
-          </a:bodyPr>
-          <a:lstStyle/>
-          <a:p>
-            <a:pPr algn="l">
-              <a:lnSpc>
-                <a:spcPts val="1813"/>
-              </a:lnSpc>
-              <a:spcBef>
-                <a:spcPts val="0"/>
-              </a:spcBef>
-              <a:spcAft>
-                <a:spcPts val="0"/>
-              </a:spcAft>
-              <a:buNone/>
-              <a:defRPr sz="1550" b="0">
-                <a:solidFill>
-                  <a:srgbClr val="303437"/>
-                </a:solidFill>
-                <a:latin typeface="Noto Sans"/>
-              </a:defRPr>
-            </a:pPr>
-            <a:r>
-              <a:rPr sz="1550" b="0" lang="ja-JP" altLang="en-US">
-                <a:solidFill>
-                  <a:srgbClr val="303437"/>
-                </a:solidFill>
-                <a:latin typeface="Noto Sans"/>
-                <a:ea typeface="Noto Sans CJK JP"/>
-                <a:cs typeface="Noto Sans"/>
-              </a:rPr>
-              <a:t>各ファイル32行・32種類。小集合のラベル比率は組ごとに異なる。</a:t>
-            </a:r>
-          </a:p>
-        </p:txBody>
-      </p:sp>
-      <p:sp>
-        <p:nvSpPr>
-          <p:cNvPr id="6" name="sources"/>
-          <p:cNvSpPr txBox="1"/>
-          <p:nvPr/>
-        </p:nvSpPr>
-        <p:spPr>
-          <a:xfrm>
-            <a:off x="502920" y="4700016"/>
-            <a:ext cx="8183879" cy="530352"/>
-          </a:xfrm>
-          <a:prstGeom prst="rect">
-            <a:avLst/>
-          </a:prstGeom>
-          <a:noFill/>
-        </p:spPr>
-        <p:txBody>
-          <a:bodyPr wrap="square" lIns="0" rIns="0" tIns="0" bIns="0">
-            <a:noAutofit/>
-          </a:bodyPr>
-          <a:lstStyle/>
-          <a:p>
-            <a:pPr algn="l">
-              <a:lnSpc>
-                <a:spcPts val="940"/>
-              </a:lnSpc>
-              <a:spcBef>
-                <a:spcPts val="0"/>
-              </a:spcBef>
-              <a:spcAft>
-                <a:spcPts val="140"/>
-              </a:spcAft>
-              <a:buNone/>
-              <a:defRPr sz="810" b="0">
-                <a:solidFill>
-                  <a:srgbClr val="303437"/>
-                </a:solidFill>
-                <a:latin typeface="Noto Sans"/>
-              </a:defRPr>
-            </a:pPr>
-            <a:r>
-              <a:rPr sz="810" b="0" lang="ja-JP" altLang="en-US">
-                <a:solidFill>
-                  <a:srgbClr val="626669"/>
-                </a:solidFill>
-                <a:latin typeface="Noto Sans"/>
-                <a:ea typeface="Noto Sans CJK JP"/>
-                <a:cs typeface="Noto Sans"/>
-              </a:rPr>
-              <a:t>[1] CLUE team. FewCLUE / BUSTM 公式配布、commit 62a02c6f31cf32814cfe522f78ef088228840f8d、2026-10-18参照。</a:t>
-            </a:r>
-          </a:p>
-          <a:p>
-            <a:pPr>
-              <a:lnSpc>
-                <a:spcPts val="940"/>
-              </a:lnSpc>
-              <a:buNone/>
-              <a:defRPr sz="810" b="0">
-                <a:solidFill>
-                  <a:srgbClr val="303437"/>
-                </a:solidFill>
-                <a:latin typeface="Noto Sans"/>
-              </a:defRPr>
-            </a:pPr>
-            <a:r>
-              <a:rPr sz="810" b="0" lang="ja-JP" altLang="en-US">
-                <a:solidFill>
-                  <a:srgbClr val="626669"/>
-                </a:solidFill>
-                <a:latin typeface="Noto Sans"/>
-                <a:ea typeface="Noto Sans CJK JP"/>
-                <a:cs typeface="Noto Sans"/>
-                <a:hlinkClick r:id="rId2"/>
-              </a:rPr>
-              <a:t>https://github.com/CLUEbenchmark/FewCLUE/tree/62a02c6f31cf32814cfe522f78ef088228840f8d/datasets/bustm</a:t>
-            </a:r>
-          </a:p>
-        </p:txBody>
-      </p:sp>
-    </p:spTree>
-  </p:cSld>
-  <p:clrMapOvr>
-    <a:masterClrMapping/>
-  </p:clrMapOvr>
-</p:sld>
-</file>
-
-<file path=ppt/slides/slide44.xml><?xml version="1.0" encoding="utf-8"?>
-<p:sld xmlns:a="http://schemas.openxmlformats.org/drawingml/2006/main" xmlns:p="http://schemas.openxmlformats.org/presentationml/2006/main" xmlns:r="http://schemas.openxmlformats.org/officeDocument/2006/relationships">
-  <p:cSld>
-    <p:spTree>
-      <p:nvGrpSpPr>
-        <p:cNvPr id="1" name=""/>
-        <p:cNvGrpSpPr/>
-        <p:nvPr/>
-      </p:nvGrpSpPr>
-      <p:grpSpPr/>
-      <p:sp>
-        <p:nvSpPr>
-          <p:cNvPr id="2" name="Title 1"/>
-          <p:cNvSpPr>
-            <a:spLocks noGrp="1"/>
-          </p:cNvSpPr>
-          <p:nvPr>
-            <p:ph type="title"/>
-          </p:nvPr>
-        </p:nvSpPr>
-        <p:spPr>
-          <a:xfrm>
-            <a:off x="468172" y="650138"/>
-            <a:ext cx="8206740" cy="616305"/>
-          </a:xfrm>
-        </p:spPr>
-        <p:txBody>
-          <a:bodyPr wrap="square" lIns="0" rIns="0" tIns="0" bIns="0">
-            <a:noAutofit/>
-          </a:bodyPr>
-          <a:lstStyle/>
-          <a:p>
-            <a:pPr algn="l">
-              <a:lnSpc>
-                <a:spcPct val="110000"/>
-              </a:lnSpc>
-              <a:buNone/>
-              <a:defRPr sz="2800" b="0">
-                <a:solidFill>
-                  <a:srgbClr val="303437"/>
-                </a:solidFill>
-                <a:latin typeface="Noto Sans"/>
-              </a:defRPr>
-            </a:pPr>
-            <a:r>
-              <a:rPr sz="2800" b="1" lang="ja-JP" altLang="en-US">
-                <a:solidFill>
-                  <a:srgbClr val="303437"/>
-                </a:solidFill>
-                <a:latin typeface="Noto Sans"/>
-                <a:ea typeface="Noto Sans CJK JP"/>
-                <a:cs typeface="Noto Sans"/>
-              </a:rPr>
-              <a:t>開発の五つの小集合は各32行</a:t>
-            </a:r>
-          </a:p>
-        </p:txBody>
-      </p:sp>
-      <p:sp>
-        <p:nvSpPr>
-          <p:cNvPr id="3" name="Title 2"/>
-          <p:cNvSpPr>
-            <a:spLocks noGrp="1"/>
-          </p:cNvSpPr>
-          <p:nvPr>
-            <p:ph type="title" idx="2"/>
-          </p:nvPr>
-        </p:nvSpPr>
-        <p:spPr>
-          <a:xfrm>
-            <a:off x="75895" y="0"/>
-            <a:ext cx="8115300" cy="480060"/>
-          </a:xfrm>
-        </p:spPr>
-        <p:txBody>
-          <a:bodyPr wrap="square" lIns="0" rIns="0" tIns="0" bIns="0" anchor="ctr">
-            <a:noAutofit/>
-          </a:bodyPr>
-          <a:lstStyle/>
-          <a:p>
-            <a:pPr algn="l">
-              <a:lnSpc>
-                <a:spcPct val="110000"/>
-              </a:lnSpc>
-              <a:buNone/>
-              <a:defRPr sz="1400" b="0">
-                <a:solidFill>
-                  <a:srgbClr val="303437"/>
-                </a:solidFill>
-                <a:latin typeface="Noto Sans"/>
-              </a:defRPr>
-            </a:pPr>
-            <a:r>
-              <a:rPr sz="1400" b="1" lang="ja-JP" altLang="en-US">
-                <a:solidFill>
-                  <a:srgbClr val="FFFEF8"/>
-                </a:solidFill>
-                <a:latin typeface="Noto Sans"/>
-                <a:ea typeface="Noto Sans CJK JP"/>
-                <a:cs typeface="Noto Sans"/>
-              </a:rPr>
-              <a:t>Appendix: 2. 全ファイル・重複・形式の補足</a:t>
-            </a:r>
-          </a:p>
-        </p:txBody>
-      </p:sp>
-      <p:graphicFrame>
-        <p:nvGraphicFramePr>
-          <p:cNvPr id="4" name="Table 3"/>
-          <p:cNvGraphicFramePr>
-            <a:graphicFrameLocks noGrp="1"/>
-          </p:cNvGraphicFramePr>
-          <p:nvPr/>
-        </p:nvGraphicFramePr>
-        <p:xfrm>
-          <a:off x="548640" y="1508760"/>
-          <a:ext cx="8046720" cy="2438400"/>
-        </p:xfrm>
-        <a:graphic>
-          <a:graphicData uri="http://schemas.openxmlformats.org/drawingml/2006/table">
-            <a:tbl>
-              <a:tblPr firstRow="0" bandRow="0"/>
-              <a:tblGrid>
-                <a:gridCol w="3657600"/>
-                <a:gridCol w="2194560"/>
-                <a:gridCol w="2194560"/>
-              </a:tblGrid>
-              <a:tr h="406400">
-                <a:tc>
-                  <a:txBody>
-                    <a:bodyPr wrap="square">
-                      <a:noAutofit/>
-                    </a:bodyPr>
-                    <a:lstStyle/>
-                    <a:p>
-                      <a:pPr algn="l">
-                        <a:lnSpc>
-                          <a:spcPts val="2300"/>
-                        </a:lnSpc>
-                        <a:buNone/>
-                        <a:defRPr sz="2000" b="0">
-                          <a:solidFill>
-                            <a:srgbClr val="303437"/>
-                          </a:solidFill>
-                          <a:latin typeface="Noto Sans"/>
-                        </a:defRPr>
-                      </a:pPr>
-                      <a:r>
-                        <a:rPr sz="2000" b="0" lang="ja-JP" altLang="en-US">
-                          <a:solidFill>
-                            <a:srgbClr val="303437"/>
-                          </a:solidFill>
-                          <a:latin typeface="Noto Sans"/>
-                          <a:ea typeface="Noto Sans CJK JP"/>
-                          <a:cs typeface="Noto Sans"/>
-                        </a:rPr>
-                        <a:t>ファイル</a:t>
-                      </a:r>
-                    </a:p>
-                  </a:txBody>
-                  <a:tcPr marL="63500" marR="63500" marT="38100" marB="38100" anchor="ctr">
-                    <a:lnL w="7620">
-                      <a:noFill/>
-                    </a:lnL>
-                    <a:lnR w="7620">
-                      <a:noFill/>
-                    </a:lnR>
-                    <a:lnT w="15240">
-                      <a:solidFill>
-                        <a:srgbClr val="626669"/>
-                      </a:solidFill>
-                      <a:prstDash val="solid"/>
-                    </a:lnT>
-                    <a:lnB w="7620">
-                      <a:solidFill>
-                        <a:srgbClr val="626669"/>
-                      </a:solidFill>
-                      <a:prstDash val="solid"/>
-                    </a:lnB>
-                    <a:solidFill>
-                      <a:srgbClr val="FFFEF8"/>
-                    </a:solidFill>
-                  </a:tcPr>
-                </a:tc>
-                <a:tc>
-                  <a:txBody>
-                    <a:bodyPr wrap="square">
-                      <a:noAutofit/>
-                    </a:bodyPr>
-                    <a:lstStyle/>
-                    <a:p>
-                      <a:pPr algn="r">
-                        <a:lnSpc>
-                          <a:spcPts val="2300"/>
-                        </a:lnSpc>
-                        <a:buNone/>
-                        <a:defRPr sz="2000" b="0">
-                          <a:solidFill>
-                            <a:srgbClr val="303437"/>
-                          </a:solidFill>
-                          <a:latin typeface="Noto Sans"/>
-                        </a:defRPr>
-                      </a:pPr>
-                      <a:r>
-                        <a:rPr sz="2000" b="0" lang="ja-JP" altLang="en-US">
-                          <a:solidFill>
-                            <a:srgbClr val="303437"/>
-                          </a:solidFill>
-                          <a:latin typeface="Noto Sans"/>
-                          <a:ea typeface="Noto Sans CJK JP"/>
-                          <a:cs typeface="Noto Sans"/>
-                        </a:rPr>
-                        <a:t>0：不一致</a:t>
-                      </a:r>
-                    </a:p>
-                  </a:txBody>
-                  <a:tcPr marL="63500" marR="63500" marT="38100" marB="38100" anchor="ctr">
-                    <a:lnL w="7620">
-                      <a:noFill/>
-                    </a:lnL>
-                    <a:lnR w="7620">
-                      <a:noFill/>
-                    </a:lnR>
-                    <a:lnT w="15240">
-                      <a:solidFill>
-                        <a:srgbClr val="626669"/>
-                      </a:solidFill>
-                      <a:prstDash val="solid"/>
-                    </a:lnT>
-                    <a:lnB w="7620">
-                      <a:solidFill>
-                        <a:srgbClr val="626669"/>
-                      </a:solidFill>
-                      <a:prstDash val="solid"/>
-                    </a:lnB>
-                    <a:solidFill>
-                      <a:srgbClr val="FFFEF8"/>
-                    </a:solidFill>
-                  </a:tcPr>
-                </a:tc>
-                <a:tc>
-                  <a:txBody>
-                    <a:bodyPr wrap="square">
-                      <a:noAutofit/>
-                    </a:bodyPr>
-                    <a:lstStyle/>
-                    <a:p>
-                      <a:pPr algn="r">
-                        <a:lnSpc>
-                          <a:spcPts val="2300"/>
-                        </a:lnSpc>
-                        <a:buNone/>
-                        <a:defRPr sz="2000" b="0">
-                          <a:solidFill>
-                            <a:srgbClr val="303437"/>
-                          </a:solidFill>
-                          <a:latin typeface="Noto Sans"/>
-                        </a:defRPr>
-                      </a:pPr>
-                      <a:r>
-                        <a:rPr sz="2000" b="0" lang="ja-JP" altLang="en-US">
-                          <a:solidFill>
-                            <a:srgbClr val="303437"/>
-                          </a:solidFill>
-                          <a:latin typeface="Noto Sans"/>
-                          <a:ea typeface="Noto Sans CJK JP"/>
-                          <a:cs typeface="Noto Sans"/>
-                        </a:rPr>
-                        <a:t>1：一致</a:t>
-                      </a:r>
-                    </a:p>
-                  </a:txBody>
-                  <a:tcPr marL="63500" marR="63500" marT="38100" marB="38100" anchor="ctr">
-                    <a:lnL w="7620">
-                      <a:noFill/>
-                    </a:lnL>
-                    <a:lnR w="7620">
-                      <a:noFill/>
-                    </a:lnR>
-                    <a:lnT w="15240">
-                      <a:solidFill>
-                        <a:srgbClr val="626669"/>
-                      </a:solidFill>
-                      <a:prstDash val="solid"/>
-                    </a:lnT>
-                    <a:lnB w="7620">
-                      <a:solidFill>
-                        <a:srgbClr val="626669"/>
-                      </a:solidFill>
-                      <a:prstDash val="solid"/>
-                    </a:lnB>
-                    <a:solidFill>
-                      <a:srgbClr val="FFFEF8"/>
-                    </a:solidFill>
-                  </a:tcPr>
-                </a:tc>
-              </a:tr>
-              <a:tr h="406400">
-                <a:tc>
-                  <a:txBody>
-                    <a:bodyPr wrap="square">
-                      <a:noAutofit/>
-                    </a:bodyPr>
-                    <a:lstStyle/>
-                    <a:p>
-                      <a:pPr algn="l">
-                        <a:lnSpc>
-                          <a:spcPts val="2300"/>
-                        </a:lnSpc>
-                        <a:buNone/>
-                        <a:defRPr sz="2000" b="0">
-                          <a:solidFill>
-                            <a:srgbClr val="303437"/>
-                          </a:solidFill>
-                          <a:latin typeface="Noto Sans"/>
-                        </a:defRPr>
-                      </a:pPr>
-                      <a:r>
-                        <a:rPr sz="2000" b="0" lang="ja-JP" altLang="en-US">
-                          <a:solidFill>
-                            <a:srgbClr val="303437"/>
-                          </a:solidFill>
-                          <a:latin typeface="Noto Sans"/>
-                          <a:ea typeface="Noto Sans CJK JP"/>
-                          <a:cs typeface="Noto Sans"/>
-                        </a:rPr>
-                        <a:t>dev_0.json</a:t>
-                      </a:r>
-                    </a:p>
-                  </a:txBody>
-                  <a:tcPr marL="63500" marR="63500" marT="38100" marB="38100" anchor="ctr">
-                    <a:lnL w="7620">
-                      <a:noFill/>
-                    </a:lnL>
-                    <a:lnR w="7620">
-                      <a:noFill/>
-                    </a:lnR>
-                    <a:lnT w="7620">
-                      <a:solidFill>
-                        <a:srgbClr val="626669"/>
-                      </a:solidFill>
-                      <a:prstDash val="solid"/>
-                    </a:lnT>
-                    <a:lnB w="7620">
-                      <a:noFill/>
-                    </a:lnB>
-                    <a:solidFill>
-                      <a:srgbClr val="FFFEF8"/>
-                    </a:solidFill>
-                  </a:tcPr>
-                </a:tc>
-                <a:tc>
-                  <a:txBody>
-                    <a:bodyPr wrap="square">
-                      <a:noAutofit/>
-                    </a:bodyPr>
-                    <a:lstStyle/>
-                    <a:p>
-                      <a:pPr algn="r">
-                        <a:lnSpc>
-                          <a:spcPts val="2300"/>
-                        </a:lnSpc>
-                        <a:buNone/>
-                        <a:defRPr sz="2000" b="0">
-                          <a:solidFill>
-                            <a:srgbClr val="303437"/>
-                          </a:solidFill>
-                          <a:latin typeface="Noto Sans"/>
-                        </a:defRPr>
-                      </a:pPr>
-                      <a:r>
-                        <a:rPr sz="2000" b="0" lang="ja-JP" altLang="en-US">
-                          <a:solidFill>
-                            <a:srgbClr val="303437"/>
-                          </a:solidFill>
-                          <a:latin typeface="Noto Sans"/>
-                          <a:ea typeface="Noto Sans CJK JP"/>
-                          <a:cs typeface="Noto Sans"/>
-                        </a:rPr>
-                        <a:t>15</a:t>
-                      </a:r>
-                    </a:p>
-                  </a:txBody>
-                  <a:tcPr marL="63500" marR="63500" marT="38100" marB="38100" anchor="ctr">
-                    <a:lnL w="7620">
-                      <a:noFill/>
-                    </a:lnL>
-                    <a:lnR w="7620">
-                      <a:noFill/>
-                    </a:lnR>
-                    <a:lnT w="7620">
-                      <a:solidFill>
-                        <a:srgbClr val="626669"/>
-                      </a:solidFill>
-                      <a:prstDash val="solid"/>
-                    </a:lnT>
-                    <a:lnB w="7620">
-                      <a:noFill/>
-                    </a:lnB>
-                    <a:solidFill>
-                      <a:srgbClr val="FFFEF8"/>
-                    </a:solidFill>
-                  </a:tcPr>
-                </a:tc>
-                <a:tc>
-                  <a:txBody>
-                    <a:bodyPr wrap="square">
-                      <a:noAutofit/>
-                    </a:bodyPr>
-                    <a:lstStyle/>
-                    <a:p>
-                      <a:pPr algn="r">
-                        <a:lnSpc>
-                          <a:spcPts val="2300"/>
-                        </a:lnSpc>
-                        <a:buNone/>
-                        <a:defRPr sz="2000" b="0">
-                          <a:solidFill>
-                            <a:srgbClr val="303437"/>
-                          </a:solidFill>
-                          <a:latin typeface="Noto Sans"/>
-                        </a:defRPr>
-                      </a:pPr>
-                      <a:r>
-                        <a:rPr sz="2000" b="0" lang="ja-JP" altLang="en-US">
-                          <a:solidFill>
-                            <a:srgbClr val="303437"/>
-                          </a:solidFill>
-                          <a:latin typeface="Noto Sans"/>
-                          <a:ea typeface="Noto Sans CJK JP"/>
-                          <a:cs typeface="Noto Sans"/>
-                        </a:rPr>
-                        <a:t>17</a:t>
-                      </a:r>
-                    </a:p>
-                  </a:txBody>
-                  <a:tcPr marL="63500" marR="63500" marT="38100" marB="38100" anchor="ctr">
-                    <a:lnL w="7620">
-                      <a:noFill/>
-                    </a:lnL>
-                    <a:lnR w="7620">
-                      <a:noFill/>
-                    </a:lnR>
-                    <a:lnT w="7620">
-                      <a:solidFill>
-                        <a:srgbClr val="626669"/>
-                      </a:solidFill>
-                      <a:prstDash val="solid"/>
-                    </a:lnT>
-                    <a:lnB w="7620">
-                      <a:noFill/>
-                    </a:lnB>
-                    <a:solidFill>
-                      <a:srgbClr val="FFFEF8"/>
-                    </a:solidFill>
-                  </a:tcPr>
-                </a:tc>
-              </a:tr>
-              <a:tr h="406400">
-                <a:tc>
-                  <a:txBody>
-                    <a:bodyPr wrap="square">
-                      <a:noAutofit/>
-                    </a:bodyPr>
-                    <a:lstStyle/>
-                    <a:p>
-                      <a:pPr algn="l">
-                        <a:lnSpc>
-                          <a:spcPts val="2300"/>
-                        </a:lnSpc>
-                        <a:buNone/>
-                        <a:defRPr sz="2000" b="0">
-                          <a:solidFill>
-                            <a:srgbClr val="303437"/>
-                          </a:solidFill>
-                          <a:latin typeface="Noto Sans"/>
-                        </a:defRPr>
-                      </a:pPr>
-                      <a:r>
-                        <a:rPr sz="2000" b="0" lang="ja-JP" altLang="en-US">
-                          <a:solidFill>
-                            <a:srgbClr val="303437"/>
-                          </a:solidFill>
-                          <a:latin typeface="Noto Sans"/>
-                          <a:ea typeface="Noto Sans CJK JP"/>
-                          <a:cs typeface="Noto Sans"/>
-                        </a:rPr>
-                        <a:t>dev_1.json</a:t>
-                      </a:r>
-                    </a:p>
-                  </a:txBody>
-                  <a:tcPr marL="63500" marR="63500" marT="38100" marB="38100" anchor="ctr">
-                    <a:lnL w="7620">
-                      <a:noFill/>
-                    </a:lnL>
-                    <a:lnR w="7620">
-                      <a:noFill/>
-                    </a:lnR>
-                    <a:lnT w="7620">
-                      <a:noFill/>
-                    </a:lnT>
-                    <a:lnB w="7620">
-                      <a:noFill/>
-                    </a:lnB>
-                    <a:solidFill>
-                      <a:srgbClr val="FFFEF8"/>
-                    </a:solidFill>
-                  </a:tcPr>
-                </a:tc>
-                <a:tc>
-                  <a:txBody>
-                    <a:bodyPr wrap="square">
-                      <a:noAutofit/>
-                    </a:bodyPr>
-                    <a:lstStyle/>
-                    <a:p>
-                      <a:pPr algn="r">
-                        <a:lnSpc>
-                          <a:spcPts val="2300"/>
-                        </a:lnSpc>
-                        <a:buNone/>
-                        <a:defRPr sz="2000" b="0">
-                          <a:solidFill>
-                            <a:srgbClr val="303437"/>
-                          </a:solidFill>
-                          <a:latin typeface="Noto Sans"/>
-                        </a:defRPr>
-                      </a:pPr>
-                      <a:r>
-                        <a:rPr sz="2000" b="0" lang="ja-JP" altLang="en-US">
-                          <a:solidFill>
-                            <a:srgbClr val="303437"/>
-                          </a:solidFill>
-                          <a:latin typeface="Noto Sans"/>
-                          <a:ea typeface="Noto Sans CJK JP"/>
-                          <a:cs typeface="Noto Sans"/>
-                        </a:rPr>
-                        <a:t>16</a:t>
-                      </a:r>
-                    </a:p>
-                  </a:txBody>
-                  <a:tcPr marL="63500" marR="63500" marT="38100" marB="38100" anchor="ctr">
-                    <a:lnL w="7620">
-                      <a:noFill/>
-                    </a:lnL>
-                    <a:lnR w="7620">
-                      <a:noFill/>
-                    </a:lnR>
-                    <a:lnT w="7620">
-                      <a:noFill/>
-                    </a:lnT>
-                    <a:lnB w="7620">
-                      <a:noFill/>
-                    </a:lnB>
-                    <a:solidFill>
-                      <a:srgbClr val="FFFEF8"/>
-                    </a:solidFill>
-                  </a:tcPr>
-                </a:tc>
-                <a:tc>
-                  <a:txBody>
-                    <a:bodyPr wrap="square">
-                      <a:noAutofit/>
-                    </a:bodyPr>
-                    <a:lstStyle/>
-                    <a:p>
-                      <a:pPr algn="r">
-                        <a:lnSpc>
-                          <a:spcPts val="2300"/>
-                        </a:lnSpc>
-                        <a:buNone/>
-                        <a:defRPr sz="2000" b="0">
-                          <a:solidFill>
-                            <a:srgbClr val="303437"/>
-                          </a:solidFill>
-                          <a:latin typeface="Noto Sans"/>
-                        </a:defRPr>
-                      </a:pPr>
-                      <a:r>
-                        <a:rPr sz="2000" b="0" lang="ja-JP" altLang="en-US">
-                          <a:solidFill>
-                            <a:srgbClr val="303437"/>
-                          </a:solidFill>
-                          <a:latin typeface="Noto Sans"/>
-                          <a:ea typeface="Noto Sans CJK JP"/>
-                          <a:cs typeface="Noto Sans"/>
-                        </a:rPr>
-                        <a:t>16</a:t>
-                      </a:r>
-                    </a:p>
-                  </a:txBody>
-                  <a:tcPr marL="63500" marR="63500" marT="38100" marB="38100" anchor="ctr">
-                    <a:lnL w="7620">
-                      <a:noFill/>
-                    </a:lnL>
-                    <a:lnR w="7620">
-                      <a:noFill/>
-                    </a:lnR>
-                    <a:lnT w="7620">
-                      <a:noFill/>
-                    </a:lnT>
-                    <a:lnB w="7620">
-                      <a:noFill/>
-                    </a:lnB>
-                    <a:solidFill>
-                      <a:srgbClr val="FFFEF8"/>
-                    </a:solidFill>
-                  </a:tcPr>
-                </a:tc>
-              </a:tr>
-              <a:tr h="406400">
-                <a:tc>
-                  <a:txBody>
-                    <a:bodyPr wrap="square">
-                      <a:noAutofit/>
-                    </a:bodyPr>
-                    <a:lstStyle/>
-                    <a:p>
-                      <a:pPr algn="l">
-                        <a:lnSpc>
-                          <a:spcPts val="2300"/>
-                        </a:lnSpc>
-                        <a:buNone/>
-                        <a:defRPr sz="2000" b="0">
-                          <a:solidFill>
-                            <a:srgbClr val="303437"/>
-                          </a:solidFill>
-                          <a:latin typeface="Noto Sans"/>
-                        </a:defRPr>
-                      </a:pPr>
-                      <a:r>
-                        <a:rPr sz="2000" b="0" lang="ja-JP" altLang="en-US">
-                          <a:solidFill>
-                            <a:srgbClr val="303437"/>
-                          </a:solidFill>
-                          <a:latin typeface="Noto Sans"/>
-                          <a:ea typeface="Noto Sans CJK JP"/>
-                          <a:cs typeface="Noto Sans"/>
-                        </a:rPr>
-                        <a:t>dev_2.json</a:t>
-                      </a:r>
-                    </a:p>
-                  </a:txBody>
-                  <a:tcPr marL="63500" marR="63500" marT="38100" marB="38100" anchor="ctr">
-                    <a:lnL w="7620">
-                      <a:noFill/>
-                    </a:lnL>
-                    <a:lnR w="7620">
-                      <a:noFill/>
-                    </a:lnR>
-                    <a:lnT w="7620">
-                      <a:noFill/>
-                    </a:lnT>
-                    <a:lnB w="7620">
-                      <a:noFill/>
-                    </a:lnB>
-                    <a:solidFill>
-                      <a:srgbClr val="FFFEF8"/>
-                    </a:solidFill>
-                  </a:tcPr>
-                </a:tc>
-                <a:tc>
-                  <a:txBody>
-                    <a:bodyPr wrap="square">
-                      <a:noAutofit/>
-                    </a:bodyPr>
-                    <a:lstStyle/>
-                    <a:p>
-                      <a:pPr algn="r">
-                        <a:lnSpc>
-                          <a:spcPts val="2300"/>
-                        </a:lnSpc>
-                        <a:buNone/>
-                        <a:defRPr sz="2000" b="0">
-                          <a:solidFill>
-                            <a:srgbClr val="303437"/>
-                          </a:solidFill>
-                          <a:latin typeface="Noto Sans"/>
-                        </a:defRPr>
-                      </a:pPr>
-                      <a:r>
-                        <a:rPr sz="2000" b="0" lang="ja-JP" altLang="en-US">
-                          <a:solidFill>
-                            <a:srgbClr val="303437"/>
-                          </a:solidFill>
-                          <a:latin typeface="Noto Sans"/>
-                          <a:ea typeface="Noto Sans CJK JP"/>
-                          <a:cs typeface="Noto Sans"/>
-                        </a:rPr>
-                        <a:t>18</a:t>
-                      </a:r>
-                    </a:p>
-                  </a:txBody>
-                  <a:tcPr marL="63500" marR="63500" marT="38100" marB="38100" anchor="ctr">
-                    <a:lnL w="7620">
-                      <a:noFill/>
-                    </a:lnL>
-                    <a:lnR w="7620">
-                      <a:noFill/>
-                    </a:lnR>
-                    <a:lnT w="7620">
-                      <a:noFill/>
-                    </a:lnT>
-                    <a:lnB w="7620">
-                      <a:noFill/>
-                    </a:lnB>
-                    <a:solidFill>
-                      <a:srgbClr val="FFFEF8"/>
-                    </a:solidFill>
-                  </a:tcPr>
-                </a:tc>
-                <a:tc>
-                  <a:txBody>
-                    <a:bodyPr wrap="square">
-                      <a:noAutofit/>
-                    </a:bodyPr>
-                    <a:lstStyle/>
-                    <a:p>
-                      <a:pPr algn="r">
-                        <a:lnSpc>
-                          <a:spcPts val="2300"/>
-                        </a:lnSpc>
-                        <a:buNone/>
-                        <a:defRPr sz="2000" b="0">
-                          <a:solidFill>
-                            <a:srgbClr val="303437"/>
-                          </a:solidFill>
-                          <a:latin typeface="Noto Sans"/>
-                        </a:defRPr>
-                      </a:pPr>
-                      <a:r>
-                        <a:rPr sz="2000" b="0" lang="ja-JP" altLang="en-US">
-                          <a:solidFill>
-                            <a:srgbClr val="303437"/>
-                          </a:solidFill>
-                          <a:latin typeface="Noto Sans"/>
-                          <a:ea typeface="Noto Sans CJK JP"/>
-                          <a:cs typeface="Noto Sans"/>
-                        </a:rPr>
-                        <a:t>14</a:t>
-                      </a:r>
-                    </a:p>
-                  </a:txBody>
-                  <a:tcPr marL="63500" marR="63500" marT="38100" marB="38100" anchor="ctr">
-                    <a:lnL w="7620">
-                      <a:noFill/>
-                    </a:lnL>
-                    <a:lnR w="7620">
-                      <a:noFill/>
-                    </a:lnR>
-                    <a:lnT w="7620">
-                      <a:noFill/>
-                    </a:lnT>
-                    <a:lnB w="7620">
-                      <a:noFill/>
-                    </a:lnB>
-                    <a:solidFill>
-                      <a:srgbClr val="FFFEF8"/>
-                    </a:solidFill>
-                  </a:tcPr>
-                </a:tc>
-              </a:tr>
-              <a:tr h="406400">
-                <a:tc>
-                  <a:txBody>
-                    <a:bodyPr wrap="square">
-                      <a:noAutofit/>
-                    </a:bodyPr>
-                    <a:lstStyle/>
-                    <a:p>
-                      <a:pPr algn="l">
-                        <a:lnSpc>
-                          <a:spcPts val="2300"/>
-                        </a:lnSpc>
-                        <a:buNone/>
-                        <a:defRPr sz="2000" b="0">
-                          <a:solidFill>
-                            <a:srgbClr val="303437"/>
-                          </a:solidFill>
-                          <a:latin typeface="Noto Sans"/>
-                        </a:defRPr>
-                      </a:pPr>
-                      <a:r>
-                        <a:rPr sz="2000" b="0" lang="ja-JP" altLang="en-US">
-                          <a:solidFill>
-                            <a:srgbClr val="303437"/>
-                          </a:solidFill>
-                          <a:latin typeface="Noto Sans"/>
-                          <a:ea typeface="Noto Sans CJK JP"/>
-                          <a:cs typeface="Noto Sans"/>
-                        </a:rPr>
-                        <a:t>dev_3.json</a:t>
-                      </a:r>
-                    </a:p>
-                  </a:txBody>
-                  <a:tcPr marL="63500" marR="63500" marT="38100" marB="38100" anchor="ctr">
-                    <a:lnL w="7620">
-                      <a:noFill/>
-                    </a:lnL>
-                    <a:lnR w="7620">
-                      <a:noFill/>
-                    </a:lnR>
-                    <a:lnT w="7620">
-                      <a:noFill/>
-                    </a:lnT>
-                    <a:lnB w="7620">
-                      <a:noFill/>
-                    </a:lnB>
-                    <a:solidFill>
-                      <a:srgbClr val="FFFEF8"/>
-                    </a:solidFill>
-                  </a:tcPr>
-                </a:tc>
-                <a:tc>
-                  <a:txBody>
-                    <a:bodyPr wrap="square">
-                      <a:noAutofit/>
-                    </a:bodyPr>
-                    <a:lstStyle/>
-                    <a:p>
-                      <a:pPr algn="r">
-                        <a:lnSpc>
-                          <a:spcPts val="2300"/>
-                        </a:lnSpc>
-                        <a:buNone/>
-                        <a:defRPr sz="2000" b="0">
-                          <a:solidFill>
-                            <a:srgbClr val="303437"/>
-                          </a:solidFill>
-                          <a:latin typeface="Noto Sans"/>
-                        </a:defRPr>
-                      </a:pPr>
-                      <a:r>
-                        <a:rPr sz="2000" b="0" lang="ja-JP" altLang="en-US">
-                          <a:solidFill>
-                            <a:srgbClr val="303437"/>
-                          </a:solidFill>
-                          <a:latin typeface="Noto Sans"/>
-                          <a:ea typeface="Noto Sans CJK JP"/>
-                          <a:cs typeface="Noto Sans"/>
-                        </a:rPr>
-                        <a:t>14</a:t>
-                      </a:r>
-                    </a:p>
-                  </a:txBody>
-                  <a:tcPr marL="63500" marR="63500" marT="38100" marB="38100" anchor="ctr">
-                    <a:lnL w="7620">
-                      <a:noFill/>
-                    </a:lnL>
-                    <a:lnR w="7620">
-                      <a:noFill/>
-                    </a:lnR>
-                    <a:lnT w="7620">
-                      <a:noFill/>
-                    </a:lnT>
-                    <a:lnB w="7620">
-                      <a:noFill/>
-                    </a:lnB>
-                    <a:solidFill>
-                      <a:srgbClr val="FFFEF8"/>
-                    </a:solidFill>
-                  </a:tcPr>
-                </a:tc>
-                <a:tc>
-                  <a:txBody>
-                    <a:bodyPr wrap="square">
-                      <a:noAutofit/>
-                    </a:bodyPr>
-                    <a:lstStyle/>
-                    <a:p>
-                      <a:pPr algn="r">
-                        <a:lnSpc>
-                          <a:spcPts val="2300"/>
-                        </a:lnSpc>
-                        <a:buNone/>
-                        <a:defRPr sz="2000" b="0">
-                          <a:solidFill>
-                            <a:srgbClr val="303437"/>
-                          </a:solidFill>
-                          <a:latin typeface="Noto Sans"/>
-                        </a:defRPr>
-                      </a:pPr>
-                      <a:r>
-                        <a:rPr sz="2000" b="0" lang="ja-JP" altLang="en-US">
-                          <a:solidFill>
-                            <a:srgbClr val="303437"/>
-                          </a:solidFill>
-                          <a:latin typeface="Noto Sans"/>
-                          <a:ea typeface="Noto Sans CJK JP"/>
-                          <a:cs typeface="Noto Sans"/>
-                        </a:rPr>
-                        <a:t>18</a:t>
-                      </a:r>
-                    </a:p>
-                  </a:txBody>
-                  <a:tcPr marL="63500" marR="63500" marT="38100" marB="38100" anchor="ctr">
-                    <a:lnL w="7620">
-                      <a:noFill/>
-                    </a:lnL>
-                    <a:lnR w="7620">
-                      <a:noFill/>
-                    </a:lnR>
-                    <a:lnT w="7620">
-                      <a:noFill/>
-                    </a:lnT>
-                    <a:lnB w="7620">
-                      <a:noFill/>
-                    </a:lnB>
-                    <a:solidFill>
-                      <a:srgbClr val="FFFEF8"/>
-                    </a:solidFill>
-                  </a:tcPr>
-                </a:tc>
-              </a:tr>
-              <a:tr h="406400">
-                <a:tc>
-                  <a:txBody>
-                    <a:bodyPr wrap="square">
-                      <a:noAutofit/>
-                    </a:bodyPr>
-                    <a:lstStyle/>
-                    <a:p>
-                      <a:pPr algn="l">
-                        <a:lnSpc>
-                          <a:spcPts val="2300"/>
-                        </a:lnSpc>
-                        <a:buNone/>
-                        <a:defRPr sz="2000" b="0">
-                          <a:solidFill>
-                            <a:srgbClr val="303437"/>
-                          </a:solidFill>
-                          <a:latin typeface="Noto Sans"/>
-                        </a:defRPr>
-                      </a:pPr>
-                      <a:r>
-                        <a:rPr sz="2000" b="0" lang="ja-JP" altLang="en-US">
-                          <a:solidFill>
-                            <a:srgbClr val="303437"/>
-                          </a:solidFill>
-                          <a:latin typeface="Noto Sans"/>
-                          <a:ea typeface="Noto Sans CJK JP"/>
-                          <a:cs typeface="Noto Sans"/>
-                        </a:rPr>
-                        <a:t>dev_4.json</a:t>
-                      </a:r>
-                    </a:p>
-                  </a:txBody>
-                  <a:tcPr marL="63500" marR="63500" marT="38100" marB="38100" anchor="ctr">
-                    <a:lnL w="7620">
-                      <a:noFill/>
-                    </a:lnL>
-                    <a:lnR w="7620">
-                      <a:noFill/>
-                    </a:lnR>
-                    <a:lnT w="7620">
-                      <a:noFill/>
-                    </a:lnT>
-                    <a:lnB w="15240">
-                      <a:solidFill>
-                        <a:srgbClr val="626669"/>
-                      </a:solidFill>
-                      <a:prstDash val="solid"/>
-                    </a:lnB>
-                    <a:solidFill>
-                      <a:srgbClr val="FFFEF8"/>
-                    </a:solidFill>
-                  </a:tcPr>
-                </a:tc>
-                <a:tc>
-                  <a:txBody>
-                    <a:bodyPr wrap="square">
-                      <a:noAutofit/>
-                    </a:bodyPr>
-                    <a:lstStyle/>
-                    <a:p>
-                      <a:pPr algn="r">
-                        <a:lnSpc>
-                          <a:spcPts val="2300"/>
-                        </a:lnSpc>
-                        <a:buNone/>
-                        <a:defRPr sz="2000" b="0">
-                          <a:solidFill>
-                            <a:srgbClr val="303437"/>
-                          </a:solidFill>
-                          <a:latin typeface="Noto Sans"/>
-                        </a:defRPr>
-                      </a:pPr>
-                      <a:r>
-                        <a:rPr sz="2000" b="0" lang="ja-JP" altLang="en-US">
-                          <a:solidFill>
-                            <a:srgbClr val="303437"/>
-                          </a:solidFill>
-                          <a:latin typeface="Noto Sans"/>
-                          <a:ea typeface="Noto Sans CJK JP"/>
-                          <a:cs typeface="Noto Sans"/>
-                        </a:rPr>
-                        <a:t>19</a:t>
-                      </a:r>
-                    </a:p>
-                  </a:txBody>
-                  <a:tcPr marL="63500" marR="63500" marT="38100" marB="38100" anchor="ctr">
-                    <a:lnL w="7620">
-                      <a:noFill/>
-                    </a:lnL>
-                    <a:lnR w="7620">
-                      <a:noFill/>
-                    </a:lnR>
-                    <a:lnT w="7620">
-                      <a:noFill/>
-                    </a:lnT>
-                    <a:lnB w="15240">
-                      <a:solidFill>
-                        <a:srgbClr val="626669"/>
-                      </a:solidFill>
-                      <a:prstDash val="solid"/>
-                    </a:lnB>
-                    <a:solidFill>
-                      <a:srgbClr val="FFFEF8"/>
-                    </a:solidFill>
-                  </a:tcPr>
-                </a:tc>
-                <a:tc>
-                  <a:txBody>
-                    <a:bodyPr wrap="square">
-                      <a:noAutofit/>
-                    </a:bodyPr>
-                    <a:lstStyle/>
-                    <a:p>
-                      <a:pPr algn="r">
-                        <a:lnSpc>
-                          <a:spcPts val="2300"/>
-                        </a:lnSpc>
-                        <a:buNone/>
-                        <a:defRPr sz="2000" b="0">
-                          <a:solidFill>
-                            <a:srgbClr val="303437"/>
-                          </a:solidFill>
-                          <a:latin typeface="Noto Sans"/>
-                        </a:defRPr>
-                      </a:pPr>
-                      <a:r>
-                        <a:rPr sz="2000" b="0" lang="ja-JP" altLang="en-US">
-                          <a:solidFill>
-                            <a:srgbClr val="303437"/>
-                          </a:solidFill>
-                          <a:latin typeface="Noto Sans"/>
-                          <a:ea typeface="Noto Sans CJK JP"/>
-                          <a:cs typeface="Noto Sans"/>
-                        </a:rPr>
-                        <a:t>13</a:t>
-                      </a:r>
-                    </a:p>
-                  </a:txBody>
-                  <a:tcPr marL="63500" marR="63500" marT="38100" marB="38100" anchor="ctr">
-                    <a:lnL w="7620">
-                      <a:noFill/>
-                    </a:lnL>
-                    <a:lnR w="7620">
-                      <a:noFill/>
-                    </a:lnR>
-                    <a:lnT w="7620">
-                      <a:noFill/>
-                    </a:lnT>
-                    <a:lnB w="15240">
-                      <a:solidFill>
-                        <a:srgbClr val="626669"/>
-                      </a:solidFill>
-                      <a:prstDash val="solid"/>
-                    </a:lnB>
-                    <a:solidFill>
-                      <a:srgbClr val="FFFEF8"/>
-                    </a:solidFill>
-                  </a:tcPr>
-                </a:tc>
-              </a:tr>
-            </a:tbl>
-          </a:graphicData>
-        </a:graphic>
-      </p:graphicFrame>
-      <p:sp>
-        <p:nvSpPr>
-          <p:cNvPr id="5" name="TextBox 4"/>
-          <p:cNvSpPr txBox="1"/>
-          <p:nvPr/>
-        </p:nvSpPr>
-        <p:spPr>
-          <a:xfrm>
-            <a:off x="594360" y="4075175"/>
-            <a:ext cx="7955279" cy="658368"/>
-          </a:xfrm>
-          <a:prstGeom prst="rect">
-            <a:avLst/>
-          </a:prstGeom>
-          <a:noFill/>
-        </p:spPr>
-        <p:txBody>
-          <a:bodyPr wrap="square" lIns="0" rIns="0" tIns="0" bIns="0">
-            <a:noAutofit/>
-          </a:bodyPr>
-          <a:lstStyle/>
-          <a:p>
-            <a:pPr algn="l">
-              <a:lnSpc>
-                <a:spcPts val="1813"/>
-              </a:lnSpc>
-              <a:spcBef>
-                <a:spcPts val="0"/>
-              </a:spcBef>
-              <a:spcAft>
-                <a:spcPts val="0"/>
-              </a:spcAft>
-              <a:buNone/>
-              <a:defRPr sz="1550" b="0">
-                <a:solidFill>
-                  <a:srgbClr val="303437"/>
-                </a:solidFill>
-                <a:latin typeface="Noto Sans"/>
-              </a:defRPr>
-            </a:pPr>
-            <a:r>
-              <a:rPr sz="1550" b="0" lang="ja-JP" altLang="en-US">
-                <a:solidFill>
-                  <a:srgbClr val="303437"/>
-                </a:solidFill>
-                <a:latin typeface="Noto Sans"/>
-                <a:ea typeface="Noto Sans CJK JP"/>
-                <a:cs typeface="Noto Sans"/>
-              </a:rPr>
-              <a:t>各ファイル32行・32種類。小集合のラベル比率は組ごとに異なる。</a:t>
-            </a:r>
-          </a:p>
-        </p:txBody>
-      </p:sp>
-      <p:sp>
-        <p:nvSpPr>
-          <p:cNvPr id="6" name="sources"/>
-          <p:cNvSpPr txBox="1"/>
-          <p:nvPr/>
-        </p:nvSpPr>
-        <p:spPr>
-          <a:xfrm>
-            <a:off x="502920" y="4700016"/>
-            <a:ext cx="8183879" cy="530352"/>
-          </a:xfrm>
-          <a:prstGeom prst="rect">
-            <a:avLst/>
-          </a:prstGeom>
-          <a:noFill/>
-        </p:spPr>
-        <p:txBody>
-          <a:bodyPr wrap="square" lIns="0" rIns="0" tIns="0" bIns="0">
-            <a:noAutofit/>
-          </a:bodyPr>
-          <a:lstStyle/>
-          <a:p>
-            <a:pPr algn="l">
-              <a:lnSpc>
-                <a:spcPts val="940"/>
-              </a:lnSpc>
-              <a:spcBef>
-                <a:spcPts val="0"/>
-              </a:spcBef>
-              <a:spcAft>
-                <a:spcPts val="140"/>
-              </a:spcAft>
-              <a:buNone/>
-              <a:defRPr sz="810" b="0">
-                <a:solidFill>
-                  <a:srgbClr val="303437"/>
-                </a:solidFill>
-                <a:latin typeface="Noto Sans"/>
-              </a:defRPr>
-            </a:pPr>
-            <a:r>
-              <a:rPr sz="810" b="0" lang="ja-JP" altLang="en-US">
-                <a:solidFill>
-                  <a:srgbClr val="626669"/>
-                </a:solidFill>
-                <a:latin typeface="Noto Sans"/>
-                <a:ea typeface="Noto Sans CJK JP"/>
-                <a:cs typeface="Noto Sans"/>
-              </a:rPr>
-              <a:t>[1] CLUE team. FewCLUE / BUSTM 公式配布、commit 62a02c6f31cf32814cfe522f78ef088228840f8d、2026-10-18参照。</a:t>
-            </a:r>
-          </a:p>
-          <a:p>
-            <a:pPr>
-              <a:lnSpc>
-                <a:spcPts val="940"/>
-              </a:lnSpc>
-              <a:buNone/>
-              <a:defRPr sz="810" b="0">
-                <a:solidFill>
-                  <a:srgbClr val="303437"/>
-                </a:solidFill>
-                <a:latin typeface="Noto Sans"/>
-              </a:defRPr>
-            </a:pPr>
-            <a:r>
-              <a:rPr sz="810" b="0" lang="ja-JP" altLang="en-US">
-                <a:solidFill>
-                  <a:srgbClr val="626669"/>
-                </a:solidFill>
-                <a:latin typeface="Noto Sans"/>
-                <a:ea typeface="Noto Sans CJK JP"/>
-                <a:cs typeface="Noto Sans"/>
-                <a:hlinkClick r:id="rId2"/>
-              </a:rPr>
-              <a:t>https://github.com/CLUEbenchmark/FewCLUE/tree/62a02c6f31cf32814cfe522f78ef088228840f8d/datasets/bustm</a:t>
-            </a:r>
-          </a:p>
-        </p:txBody>
-      </p:sp>
-    </p:spTree>
-  </p:cSld>
-  <p:clrMapOvr>
-    <a:masterClrMapping/>
-  </p:clrMapOvr>
-</p:sld>
-</file>
-
-<file path=ppt/slides/slide45.xml><?xml version="1.0" encoding="utf-8"?>
-<p:sld xmlns:a="http://schemas.openxmlformats.org/drawingml/2006/main" xmlns:p="http://schemas.openxmlformats.org/presentationml/2006/main" xmlns:r="http://schemas.openxmlformats.org/officeDocument/2006/relationships">
-  <p:cSld>
-    <p:spTree>
-      <p:nvGrpSpPr>
-        <p:cNvPr id="1" name=""/>
-        <p:cNvGrpSpPr/>
-        <p:nvPr/>
-      </p:nvGrpSpPr>
-      <p:grpSpPr/>
-      <p:sp>
-        <p:nvSpPr>
-          <p:cNvPr id="2" name="Title 1"/>
-          <p:cNvSpPr>
-            <a:spLocks noGrp="1"/>
-          </p:cNvSpPr>
-          <p:nvPr>
-            <p:ph type="title"/>
-          </p:nvPr>
-        </p:nvSpPr>
-        <p:spPr>
-          <a:xfrm>
-            <a:off x="468172" y="650138"/>
-            <a:ext cx="8206740" cy="616305"/>
-          </a:xfrm>
-        </p:spPr>
-        <p:txBody>
-          <a:bodyPr wrap="square" lIns="0" rIns="0" tIns="0" bIns="0">
-            <a:noAutofit/>
-          </a:bodyPr>
-          <a:lstStyle/>
-          <a:p>
-            <a:pPr algn="l">
-              <a:lnSpc>
-                <a:spcPct val="110000"/>
-              </a:lnSpc>
-              <a:buNone/>
-              <a:defRPr sz="2800" b="0">
-                <a:solidFill>
-                  <a:srgbClr val="303437"/>
-                </a:solidFill>
-                <a:latin typeface="Noto Sans"/>
-              </a:defRPr>
-            </a:pPr>
-            <a:r>
-              <a:rPr sz="2800" b="1" lang="ja-JP" altLang="en-US">
-                <a:solidFill>
-                  <a:srgbClr val="303437"/>
-                </a:solidFill>
-                <a:latin typeface="Noto Sans"/>
-                <a:ea typeface="Noto Sans CJK JP"/>
-                <a:cs typeface="Noto Sans"/>
-              </a:rPr>
-              <a:t>集約・評価・未ラベルの五つのファイル</a:t>
-            </a:r>
-          </a:p>
-        </p:txBody>
-      </p:sp>
-      <p:sp>
-        <p:nvSpPr>
-          <p:cNvPr id="3" name="Title 2"/>
-          <p:cNvSpPr>
-            <a:spLocks noGrp="1"/>
-          </p:cNvSpPr>
-          <p:nvPr>
-            <p:ph type="title" idx="2"/>
-          </p:nvPr>
-        </p:nvSpPr>
-        <p:spPr>
-          <a:xfrm>
-            <a:off x="75895" y="0"/>
-            <a:ext cx="8115300" cy="480060"/>
-          </a:xfrm>
-        </p:spPr>
-        <p:txBody>
-          <a:bodyPr wrap="square" lIns="0" rIns="0" tIns="0" bIns="0" anchor="ctr">
-            <a:noAutofit/>
-          </a:bodyPr>
-          <a:lstStyle/>
-          <a:p>
-            <a:pPr algn="l">
-              <a:lnSpc>
-                <a:spcPct val="110000"/>
-              </a:lnSpc>
-              <a:buNone/>
-              <a:defRPr sz="1400" b="0">
-                <a:solidFill>
-                  <a:srgbClr val="303437"/>
-                </a:solidFill>
-                <a:latin typeface="Noto Sans"/>
-              </a:defRPr>
-            </a:pPr>
-            <a:r>
-              <a:rPr sz="1400" b="1" lang="ja-JP" altLang="en-US">
-                <a:solidFill>
-                  <a:srgbClr val="FFFEF8"/>
-                </a:solidFill>
-                <a:latin typeface="Noto Sans"/>
-                <a:ea typeface="Noto Sans CJK JP"/>
-                <a:cs typeface="Noto Sans"/>
-              </a:rPr>
-              <a:t>Appendix: 2. 全ファイル・重複・形式の補足</a:t>
-            </a:r>
-          </a:p>
-        </p:txBody>
-      </p:sp>
-      <p:graphicFrame>
-        <p:nvGraphicFramePr>
-          <p:cNvPr id="4" name="Table 3"/>
-          <p:cNvGraphicFramePr>
-            <a:graphicFrameLocks noGrp="1"/>
-          </p:cNvGraphicFramePr>
-          <p:nvPr/>
-        </p:nvGraphicFramePr>
-        <p:xfrm>
-          <a:off x="548640" y="1508760"/>
-          <a:ext cx="8046720" cy="2350770"/>
-        </p:xfrm>
-        <a:graphic>
-          <a:graphicData uri="http://schemas.openxmlformats.org/drawingml/2006/table">
-            <a:tbl>
-              <a:tblPr firstRow="0" bandRow="0"/>
-              <a:tblGrid>
-                <a:gridCol w="3840480"/>
-                <a:gridCol w="2011680"/>
-                <a:gridCol w="2194560"/>
-              </a:tblGrid>
-              <a:tr h="391795">
-                <a:tc>
-                  <a:txBody>
-                    <a:bodyPr wrap="square">
-                      <a:noAutofit/>
-                    </a:bodyPr>
-                    <a:lstStyle/>
-                    <a:p>
-                      <a:pPr algn="l">
-                        <a:lnSpc>
-                          <a:spcPts val="2185"/>
-                        </a:lnSpc>
-                        <a:buNone/>
-                        <a:defRPr sz="1900" b="0">
-                          <a:solidFill>
-                            <a:srgbClr val="303437"/>
-                          </a:solidFill>
-                          <a:latin typeface="Noto Sans"/>
-                        </a:defRPr>
-                      </a:pPr>
-                      <a:r>
-                        <a:rPr sz="1900" b="0" lang="ja-JP" altLang="en-US">
-                          <a:solidFill>
-                            <a:srgbClr val="303437"/>
-                          </a:solidFill>
-                          <a:latin typeface="Noto Sans"/>
-                          <a:ea typeface="Noto Sans CJK JP"/>
-                          <a:cs typeface="Noto Sans"/>
-                        </a:rPr>
-                        <a:t>ファイル</a:t>
-                      </a:r>
-                    </a:p>
-                  </a:txBody>
-                  <a:tcPr marL="63500" marR="63500" marT="38100" marB="38100" anchor="ctr">
-                    <a:lnL w="7620">
-                      <a:noFill/>
-                    </a:lnL>
-                    <a:lnR w="7620">
-                      <a:noFill/>
-                    </a:lnR>
-                    <a:lnT w="15240">
-                      <a:solidFill>
-                        <a:srgbClr val="626669"/>
-                      </a:solidFill>
-                      <a:prstDash val="solid"/>
-                    </a:lnT>
-                    <a:lnB w="7620">
-                      <a:solidFill>
-                        <a:srgbClr val="626669"/>
-                      </a:solidFill>
-                      <a:prstDash val="solid"/>
-                    </a:lnB>
-                    <a:solidFill>
-                      <a:srgbClr val="FFFEF8"/>
-                    </a:solidFill>
-                  </a:tcPr>
-                </a:tc>
-                <a:tc>
-                  <a:txBody>
-                    <a:bodyPr wrap="square">
-                      <a:noAutofit/>
-                    </a:bodyPr>
-                    <a:lstStyle/>
-                    <a:p>
-                      <a:pPr algn="r">
-                        <a:lnSpc>
-                          <a:spcPts val="2185"/>
-                        </a:lnSpc>
-                        <a:buNone/>
-                        <a:defRPr sz="1900" b="0">
-                          <a:solidFill>
-                            <a:srgbClr val="303437"/>
-                          </a:solidFill>
-                          <a:latin typeface="Noto Sans"/>
-                        </a:defRPr>
-                      </a:pPr>
-                      <a:r>
-                        <a:rPr sz="1900" b="0" lang="ja-JP" altLang="en-US">
-                          <a:solidFill>
-                            <a:srgbClr val="303437"/>
-                          </a:solidFill>
-                          <a:latin typeface="Noto Sans"/>
-                          <a:ea typeface="Noto Sans CJK JP"/>
-                          <a:cs typeface="Noto Sans"/>
-                        </a:rPr>
-                        <a:t>行数</a:t>
-                      </a:r>
-                    </a:p>
-                  </a:txBody>
-                  <a:tcPr marL="63500" marR="63500" marT="38100" marB="38100" anchor="ctr">
-                    <a:lnL w="7620">
-                      <a:noFill/>
-                    </a:lnL>
-                    <a:lnR w="7620">
-                      <a:noFill/>
-                    </a:lnR>
-                    <a:lnT w="15240">
-                      <a:solidFill>
-                        <a:srgbClr val="626669"/>
-                      </a:solidFill>
-                      <a:prstDash val="solid"/>
-                    </a:lnT>
-                    <a:lnB w="7620">
-                      <a:solidFill>
-                        <a:srgbClr val="626669"/>
-                      </a:solidFill>
-                      <a:prstDash val="solid"/>
-                    </a:lnB>
-                    <a:solidFill>
-                      <a:srgbClr val="FFFEF8"/>
-                    </a:solidFill>
-                  </a:tcPr>
-                </a:tc>
-                <a:tc>
-                  <a:txBody>
-                    <a:bodyPr wrap="square">
-                      <a:noAutofit/>
-                    </a:bodyPr>
-                    <a:lstStyle/>
-                    <a:p>
-                      <a:pPr algn="r">
-                        <a:lnSpc>
-                          <a:spcPts val="2185"/>
-                        </a:lnSpc>
-                        <a:buNone/>
-                        <a:defRPr sz="1900" b="0">
-                          <a:solidFill>
-                            <a:srgbClr val="303437"/>
-                          </a:solidFill>
-                          <a:latin typeface="Noto Sans"/>
-                        </a:defRPr>
-                      </a:pPr>
-                      <a:r>
-                        <a:rPr sz="1900" b="0" lang="ja-JP" altLang="en-US">
-                          <a:solidFill>
-                            <a:srgbClr val="303437"/>
-                          </a:solidFill>
-                          <a:latin typeface="Noto Sans"/>
-                          <a:ea typeface="Noto Sans CJK JP"/>
-                          <a:cs typeface="Noto Sans"/>
-                        </a:rPr>
-                        <a:t>発話対の種類数</a:t>
-                      </a:r>
-                    </a:p>
-                  </a:txBody>
-                  <a:tcPr marL="63500" marR="63500" marT="38100" marB="38100" anchor="ctr">
-                    <a:lnL w="7620">
-                      <a:noFill/>
-                    </a:lnL>
-                    <a:lnR w="7620">
-                      <a:noFill/>
-                    </a:lnR>
-                    <a:lnT w="15240">
-                      <a:solidFill>
-                        <a:srgbClr val="626669"/>
-                      </a:solidFill>
-                      <a:prstDash val="solid"/>
-                    </a:lnT>
-                    <a:lnB w="7620">
-                      <a:solidFill>
-                        <a:srgbClr val="626669"/>
-                      </a:solidFill>
-                      <a:prstDash val="solid"/>
-                    </a:lnB>
-                    <a:solidFill>
-                      <a:srgbClr val="FFFEF8"/>
-                    </a:solidFill>
-                  </a:tcPr>
-                </a:tc>
-              </a:tr>
-              <a:tr h="391795">
-                <a:tc>
-                  <a:txBody>
-                    <a:bodyPr wrap="square">
-                      <a:noAutofit/>
-                    </a:bodyPr>
-                    <a:lstStyle/>
-                    <a:p>
-                      <a:pPr algn="l">
-                        <a:lnSpc>
-                          <a:spcPts val="2185"/>
-                        </a:lnSpc>
-                        <a:buNone/>
-                        <a:defRPr sz="1900" b="0">
-                          <a:solidFill>
-                            <a:srgbClr val="303437"/>
-                          </a:solidFill>
-                          <a:latin typeface="Noto Sans"/>
-                        </a:defRPr>
-                      </a:pPr>
-                      <a:r>
-                        <a:rPr sz="1900" b="0" lang="ja-JP" altLang="en-US">
-                          <a:solidFill>
-                            <a:srgbClr val="303437"/>
-                          </a:solidFill>
-                          <a:latin typeface="Noto Sans"/>
-                          <a:ea typeface="Noto Sans CJK JP"/>
-                          <a:cs typeface="Noto Sans"/>
-                        </a:rPr>
-                        <a:t>train_few_all.json</a:t>
-                      </a:r>
-                    </a:p>
-                  </a:txBody>
-                  <a:tcPr marL="63500" marR="63500" marT="38100" marB="38100" anchor="ctr">
-                    <a:lnL w="7620">
-                      <a:noFill/>
-                    </a:lnL>
-                    <a:lnR w="7620">
-                      <a:noFill/>
-                    </a:lnR>
-                    <a:lnT w="7620">
-                      <a:solidFill>
-                        <a:srgbClr val="626669"/>
-                      </a:solidFill>
-                      <a:prstDash val="solid"/>
-                    </a:lnT>
-                    <a:lnB w="7620">
-                      <a:noFill/>
-                    </a:lnB>
-                    <a:solidFill>
-                      <a:srgbClr val="FFFEF8"/>
-                    </a:solidFill>
-                  </a:tcPr>
-                </a:tc>
-                <a:tc>
-                  <a:txBody>
-                    <a:bodyPr wrap="square">
-                      <a:noAutofit/>
-                    </a:bodyPr>
-                    <a:lstStyle/>
-                    <a:p>
-                      <a:pPr algn="r">
-                        <a:lnSpc>
-                          <a:spcPts val="2185"/>
-                        </a:lnSpc>
-                        <a:buNone/>
-                        <a:defRPr sz="1900" b="0">
-                          <a:solidFill>
-                            <a:srgbClr val="303437"/>
-                          </a:solidFill>
-                          <a:latin typeface="Noto Sans"/>
-                        </a:defRPr>
-                      </a:pPr>
-                      <a:r>
-                        <a:rPr sz="1900" b="0" lang="ja-JP" altLang="en-US">
-                          <a:solidFill>
-                            <a:srgbClr val="303437"/>
-                          </a:solidFill>
-                          <a:latin typeface="Noto Sans"/>
-                          <a:ea typeface="Noto Sans CJK JP"/>
-                          <a:cs typeface="Noto Sans"/>
-                        </a:rPr>
-                        <a:t>160</a:t>
-                      </a:r>
-                    </a:p>
-                  </a:txBody>
-                  <a:tcPr marL="63500" marR="63500" marT="38100" marB="38100" anchor="ctr">
-                    <a:lnL w="7620">
-                      <a:noFill/>
-                    </a:lnL>
-                    <a:lnR w="7620">
-                      <a:noFill/>
-                    </a:lnR>
-                    <a:lnT w="7620">
-                      <a:solidFill>
-                        <a:srgbClr val="626669"/>
-                      </a:solidFill>
-                      <a:prstDash val="solid"/>
-                    </a:lnT>
-                    <a:lnB w="7620">
-                      <a:noFill/>
-                    </a:lnB>
-                    <a:solidFill>
-                      <a:srgbClr val="FFFEF8"/>
-                    </a:solidFill>
-                  </a:tcPr>
-                </a:tc>
-                <a:tc>
-                  <a:txBody>
-                    <a:bodyPr wrap="square">
-                      <a:noAutofit/>
-                    </a:bodyPr>
-                    <a:lstStyle/>
-                    <a:p>
-                      <a:pPr algn="r">
-                        <a:lnSpc>
-                          <a:spcPts val="2185"/>
-                        </a:lnSpc>
-                        <a:buNone/>
-                        <a:defRPr sz="1900" b="0">
-                          <a:solidFill>
-                            <a:srgbClr val="303437"/>
-                          </a:solidFill>
-                          <a:latin typeface="Noto Sans"/>
-                        </a:defRPr>
-                      </a:pPr>
-                      <a:r>
-                        <a:rPr sz="1900" b="0" lang="ja-JP" altLang="en-US">
-                          <a:solidFill>
-                            <a:srgbClr val="303437"/>
-                          </a:solidFill>
-                          <a:latin typeface="Noto Sans"/>
-                          <a:ea typeface="Noto Sans CJK JP"/>
-                          <a:cs typeface="Noto Sans"/>
-                        </a:rPr>
-                        <a:t>156</a:t>
-                      </a:r>
-                    </a:p>
-                  </a:txBody>
-                  <a:tcPr marL="63500" marR="63500" marT="38100" marB="38100" anchor="ctr">
-                    <a:lnL w="7620">
-                      <a:noFill/>
-                    </a:lnL>
-                    <a:lnR w="7620">
-                      <a:noFill/>
-                    </a:lnR>
-                    <a:lnT w="7620">
-                      <a:solidFill>
-                        <a:srgbClr val="626669"/>
-                      </a:solidFill>
-                      <a:prstDash val="solid"/>
-                    </a:lnT>
-                    <a:lnB w="7620">
-                      <a:noFill/>
-                    </a:lnB>
-                    <a:solidFill>
-                      <a:srgbClr val="FFFEF8"/>
-                    </a:solidFill>
-                  </a:tcPr>
-                </a:tc>
-              </a:tr>
-              <a:tr h="391795">
-                <a:tc>
-                  <a:txBody>
-                    <a:bodyPr wrap="square">
-                      <a:noAutofit/>
-                    </a:bodyPr>
-                    <a:lstStyle/>
-                    <a:p>
-                      <a:pPr algn="l">
-                        <a:lnSpc>
-                          <a:spcPts val="2185"/>
-                        </a:lnSpc>
-                        <a:buNone/>
-                        <a:defRPr sz="1900" b="0">
-                          <a:solidFill>
-                            <a:srgbClr val="303437"/>
-                          </a:solidFill>
-                          <a:latin typeface="Noto Sans"/>
-                        </a:defRPr>
-                      </a:pPr>
-                      <a:r>
-                        <a:rPr sz="1900" b="0" lang="ja-JP" altLang="en-US">
-                          <a:solidFill>
-                            <a:srgbClr val="303437"/>
-                          </a:solidFill>
-                          <a:latin typeface="Noto Sans"/>
-                          <a:ea typeface="Noto Sans CJK JP"/>
-                          <a:cs typeface="Noto Sans"/>
-                        </a:rPr>
-                        <a:t>dev_few_all.json</a:t>
-                      </a:r>
-                    </a:p>
-                  </a:txBody>
-                  <a:tcPr marL="63500" marR="63500" marT="38100" marB="38100" anchor="ctr">
-                    <a:lnL w="7620">
-                      <a:noFill/>
-                    </a:lnL>
-                    <a:lnR w="7620">
-                      <a:noFill/>
-                    </a:lnR>
-                    <a:lnT w="7620">
-                      <a:noFill/>
-                    </a:lnT>
-                    <a:lnB w="7620">
-                      <a:noFill/>
-                    </a:lnB>
-                    <a:solidFill>
-                      <a:srgbClr val="FFFEF8"/>
-                    </a:solidFill>
-                  </a:tcPr>
-                </a:tc>
-                <a:tc>
-                  <a:txBody>
-                    <a:bodyPr wrap="square">
-                      <a:noAutofit/>
-                    </a:bodyPr>
-                    <a:lstStyle/>
-                    <a:p>
-                      <a:pPr algn="r">
-                        <a:lnSpc>
-                          <a:spcPts val="2185"/>
-                        </a:lnSpc>
-                        <a:buNone/>
-                        <a:defRPr sz="1900" b="0">
-                          <a:solidFill>
-                            <a:srgbClr val="303437"/>
-                          </a:solidFill>
-                          <a:latin typeface="Noto Sans"/>
-                        </a:defRPr>
-                      </a:pPr>
-                      <a:r>
-                        <a:rPr sz="1900" b="0" lang="ja-JP" altLang="en-US">
-                          <a:solidFill>
-                            <a:srgbClr val="303437"/>
-                          </a:solidFill>
-                          <a:latin typeface="Noto Sans"/>
-                          <a:ea typeface="Noto Sans CJK JP"/>
-                          <a:cs typeface="Noto Sans"/>
-                        </a:rPr>
-                        <a:t>160</a:t>
-                      </a:r>
-                    </a:p>
-                  </a:txBody>
-                  <a:tcPr marL="63500" marR="63500" marT="38100" marB="38100" anchor="ctr">
-                    <a:lnL w="7620">
-                      <a:noFill/>
-                    </a:lnL>
-                    <a:lnR w="7620">
-                      <a:noFill/>
-                    </a:lnR>
-                    <a:lnT w="7620">
-                      <a:noFill/>
-                    </a:lnT>
-                    <a:lnB w="7620">
-                      <a:noFill/>
-                    </a:lnB>
-                    <a:solidFill>
-                      <a:srgbClr val="FFFEF8"/>
-                    </a:solidFill>
-                  </a:tcPr>
-                </a:tc>
-                <a:tc>
-                  <a:txBody>
-                    <a:bodyPr wrap="square">
-                      <a:noAutofit/>
-                    </a:bodyPr>
-                    <a:lstStyle/>
-                    <a:p>
-                      <a:pPr algn="r">
-                        <a:lnSpc>
-                          <a:spcPts val="2185"/>
-                        </a:lnSpc>
-                        <a:buNone/>
-                        <a:defRPr sz="1900" b="0">
-                          <a:solidFill>
-                            <a:srgbClr val="303437"/>
-                          </a:solidFill>
-                          <a:latin typeface="Noto Sans"/>
-                        </a:defRPr>
-                      </a:pPr>
-                      <a:r>
-                        <a:rPr sz="1900" b="0" lang="ja-JP" altLang="en-US">
-                          <a:solidFill>
-                            <a:srgbClr val="303437"/>
-                          </a:solidFill>
-                          <a:latin typeface="Noto Sans"/>
-                          <a:ea typeface="Noto Sans CJK JP"/>
-                          <a:cs typeface="Noto Sans"/>
-                        </a:rPr>
-                        <a:t>156</a:t>
-                      </a:r>
-                    </a:p>
-                  </a:txBody>
-                  <a:tcPr marL="63500" marR="63500" marT="38100" marB="38100" anchor="ctr">
-                    <a:lnL w="7620">
-                      <a:noFill/>
-                    </a:lnL>
-                    <a:lnR w="7620">
-                      <a:noFill/>
-                    </a:lnR>
-                    <a:lnT w="7620">
-                      <a:noFill/>
-                    </a:lnT>
-                    <a:lnB w="7620">
-                      <a:noFill/>
-                    </a:lnB>
-                    <a:solidFill>
-                      <a:srgbClr val="FFFEF8"/>
-                    </a:solidFill>
-                  </a:tcPr>
-                </a:tc>
-              </a:tr>
-              <a:tr h="391795">
-                <a:tc>
-                  <a:txBody>
-                    <a:bodyPr wrap="square">
-                      <a:noAutofit/>
-                    </a:bodyPr>
-                    <a:lstStyle/>
-                    <a:p>
-                      <a:pPr algn="l">
-                        <a:lnSpc>
-                          <a:spcPts val="2185"/>
-                        </a:lnSpc>
-                        <a:buNone/>
-                        <a:defRPr sz="1900" b="0">
-                          <a:solidFill>
-                            <a:srgbClr val="303437"/>
-                          </a:solidFill>
-                          <a:latin typeface="Noto Sans"/>
-                        </a:defRPr>
-                      </a:pPr>
-                      <a:r>
-                        <a:rPr sz="1900" b="0" lang="ja-JP" altLang="en-US">
-                          <a:solidFill>
-                            <a:srgbClr val="303437"/>
-                          </a:solidFill>
-                          <a:latin typeface="Noto Sans"/>
-                          <a:ea typeface="Noto Sans CJK JP"/>
-                          <a:cs typeface="Noto Sans"/>
-                        </a:rPr>
-                        <a:t>test_public.json</a:t>
-                      </a:r>
-                    </a:p>
-                  </a:txBody>
-                  <a:tcPr marL="63500" marR="63500" marT="38100" marB="38100" anchor="ctr">
-                    <a:lnL w="7620">
-                      <a:noFill/>
-                    </a:lnL>
-                    <a:lnR w="7620">
-                      <a:noFill/>
-                    </a:lnR>
-                    <a:lnT w="7620">
-                      <a:noFill/>
-                    </a:lnT>
-                    <a:lnB w="7620">
-                      <a:noFill/>
-                    </a:lnB>
-                    <a:solidFill>
-                      <a:srgbClr val="FFFEF8"/>
-                    </a:solidFill>
-                  </a:tcPr>
-                </a:tc>
-                <a:tc>
-                  <a:txBody>
-                    <a:bodyPr wrap="square">
-                      <a:noAutofit/>
-                    </a:bodyPr>
-                    <a:lstStyle/>
-                    <a:p>
-                      <a:pPr algn="r">
-                        <a:lnSpc>
-                          <a:spcPts val="2185"/>
-                        </a:lnSpc>
-                        <a:buNone/>
-                        <a:defRPr sz="1900" b="0">
-                          <a:solidFill>
-                            <a:srgbClr val="303437"/>
-                          </a:solidFill>
-                          <a:latin typeface="Noto Sans"/>
-                        </a:defRPr>
-                      </a:pPr>
-                      <a:r>
-                        <a:rPr sz="1900" b="0" lang="ja-JP" altLang="en-US">
-                          <a:solidFill>
-                            <a:srgbClr val="303437"/>
-                          </a:solidFill>
-                          <a:latin typeface="Noto Sans"/>
-                          <a:ea typeface="Noto Sans CJK JP"/>
-                          <a:cs typeface="Noto Sans"/>
-                        </a:rPr>
-                        <a:t>1,772</a:t>
-                      </a:r>
-                    </a:p>
-                  </a:txBody>
-                  <a:tcPr marL="63500" marR="63500" marT="38100" marB="38100" anchor="ctr">
-                    <a:lnL w="7620">
-                      <a:noFill/>
-                    </a:lnL>
-                    <a:lnR w="7620">
-                      <a:noFill/>
-                    </a:lnR>
-                    <a:lnT w="7620">
-                      <a:noFill/>
-                    </a:lnT>
-                    <a:lnB w="7620">
-                      <a:noFill/>
-                    </a:lnB>
-                    <a:solidFill>
-                      <a:srgbClr val="FFFEF8"/>
-                    </a:solidFill>
-                  </a:tcPr>
-                </a:tc>
-                <a:tc>
-                  <a:txBody>
-                    <a:bodyPr wrap="square">
-                      <a:noAutofit/>
-                    </a:bodyPr>
-                    <a:lstStyle/>
-                    <a:p>
-                      <a:pPr algn="r">
-                        <a:lnSpc>
-                          <a:spcPts val="2185"/>
-                        </a:lnSpc>
-                        <a:buNone/>
-                        <a:defRPr sz="1900" b="0">
-                          <a:solidFill>
-                            <a:srgbClr val="303437"/>
-                          </a:solidFill>
-                          <a:latin typeface="Noto Sans"/>
-                        </a:defRPr>
-                      </a:pPr>
-                      <a:r>
-                        <a:rPr sz="1900" b="0" lang="ja-JP" altLang="en-US">
-                          <a:solidFill>
-                            <a:srgbClr val="303437"/>
-                          </a:solidFill>
-                          <a:latin typeface="Noto Sans"/>
-                          <a:ea typeface="Noto Sans CJK JP"/>
-                          <a:cs typeface="Noto Sans"/>
-                        </a:rPr>
-                        <a:t>1,772</a:t>
-                      </a:r>
-                    </a:p>
-                  </a:txBody>
-                  <a:tcPr marL="63500" marR="63500" marT="38100" marB="38100" anchor="ctr">
-                    <a:lnL w="7620">
-                      <a:noFill/>
-                    </a:lnL>
-                    <a:lnR w="7620">
-                      <a:noFill/>
-                    </a:lnR>
-                    <a:lnT w="7620">
-                      <a:noFill/>
-                    </a:lnT>
-                    <a:lnB w="7620">
-                      <a:noFill/>
-                    </a:lnB>
-                    <a:solidFill>
-                      <a:srgbClr val="FFFEF8"/>
-                    </a:solidFill>
-                  </a:tcPr>
-                </a:tc>
-              </a:tr>
-              <a:tr h="391795">
-                <a:tc>
-                  <a:txBody>
-                    <a:bodyPr wrap="square">
-                      <a:noAutofit/>
-                    </a:bodyPr>
-                    <a:lstStyle/>
-                    <a:p>
-                      <a:pPr algn="l">
-                        <a:lnSpc>
-                          <a:spcPts val="2185"/>
-                        </a:lnSpc>
-                        <a:buNone/>
-                        <a:defRPr sz="1900" b="0">
-                          <a:solidFill>
-                            <a:srgbClr val="303437"/>
-                          </a:solidFill>
-                          <a:latin typeface="Noto Sans"/>
-                        </a:defRPr>
-                      </a:pPr>
-                      <a:r>
-                        <a:rPr sz="1900" b="0" lang="ja-JP" altLang="en-US">
-                          <a:solidFill>
-                            <a:srgbClr val="303437"/>
-                          </a:solidFill>
-                          <a:latin typeface="Noto Sans"/>
-                          <a:ea typeface="Noto Sans CJK JP"/>
-                          <a:cs typeface="Noto Sans"/>
-                        </a:rPr>
-                        <a:t>test.json</a:t>
-                      </a:r>
-                    </a:p>
-                  </a:txBody>
-                  <a:tcPr marL="63500" marR="63500" marT="38100" marB="38100" anchor="ctr">
-                    <a:lnL w="7620">
-                      <a:noFill/>
-                    </a:lnL>
-                    <a:lnR w="7620">
-                      <a:noFill/>
-                    </a:lnR>
-                    <a:lnT w="7620">
-                      <a:noFill/>
-                    </a:lnT>
-                    <a:lnB w="7620">
-                      <a:noFill/>
-                    </a:lnB>
-                    <a:solidFill>
-                      <a:srgbClr val="FFFEF8"/>
-                    </a:solidFill>
-                  </a:tcPr>
-                </a:tc>
-                <a:tc>
-                  <a:txBody>
-                    <a:bodyPr wrap="square">
-                      <a:noAutofit/>
-                    </a:bodyPr>
-                    <a:lstStyle/>
-                    <a:p>
-                      <a:pPr algn="r">
-                        <a:lnSpc>
-                          <a:spcPts val="2185"/>
-                        </a:lnSpc>
-                        <a:buNone/>
-                        <a:defRPr sz="1900" b="0">
-                          <a:solidFill>
-                            <a:srgbClr val="303437"/>
-                          </a:solidFill>
-                          <a:latin typeface="Noto Sans"/>
-                        </a:defRPr>
-                      </a:pPr>
-                      <a:r>
-                        <a:rPr sz="1900" b="0" lang="ja-JP" altLang="en-US">
-                          <a:solidFill>
-                            <a:srgbClr val="303437"/>
-                          </a:solidFill>
-                          <a:latin typeface="Noto Sans"/>
-                          <a:ea typeface="Noto Sans CJK JP"/>
-                          <a:cs typeface="Noto Sans"/>
-                        </a:rPr>
-                        <a:t>2,000</a:t>
-                      </a:r>
-                    </a:p>
-                  </a:txBody>
-                  <a:tcPr marL="63500" marR="63500" marT="38100" marB="38100" anchor="ctr">
-                    <a:lnL w="7620">
-                      <a:noFill/>
-                    </a:lnL>
-                    <a:lnR w="7620">
-                      <a:noFill/>
-                    </a:lnR>
-                    <a:lnT w="7620">
-                      <a:noFill/>
-                    </a:lnT>
-                    <a:lnB w="7620">
-                      <a:noFill/>
-                    </a:lnB>
-                    <a:solidFill>
-                      <a:srgbClr val="FFFEF8"/>
-                    </a:solidFill>
-                  </a:tcPr>
-                </a:tc>
-                <a:tc>
-                  <a:txBody>
-                    <a:bodyPr wrap="square">
-                      <a:noAutofit/>
-                    </a:bodyPr>
-                    <a:lstStyle/>
-                    <a:p>
-                      <a:pPr algn="r">
-                        <a:lnSpc>
-                          <a:spcPts val="2185"/>
-                        </a:lnSpc>
-                        <a:buNone/>
-                        <a:defRPr sz="1900" b="0">
-                          <a:solidFill>
-                            <a:srgbClr val="303437"/>
-                          </a:solidFill>
-                          <a:latin typeface="Noto Sans"/>
-                        </a:defRPr>
-                      </a:pPr>
-                      <a:r>
-                        <a:rPr sz="1900" b="0" lang="ja-JP" altLang="en-US">
-                          <a:solidFill>
-                            <a:srgbClr val="303437"/>
-                          </a:solidFill>
-                          <a:latin typeface="Noto Sans"/>
-                          <a:ea typeface="Noto Sans CJK JP"/>
-                          <a:cs typeface="Noto Sans"/>
-                        </a:rPr>
-                        <a:t>2,000</a:t>
-                      </a:r>
-                    </a:p>
-                  </a:txBody>
-                  <a:tcPr marL="63500" marR="63500" marT="38100" marB="38100" anchor="ctr">
-                    <a:lnL w="7620">
-                      <a:noFill/>
-                    </a:lnL>
-                    <a:lnR w="7620">
-                      <a:noFill/>
-                    </a:lnR>
-                    <a:lnT w="7620">
-                      <a:noFill/>
-                    </a:lnT>
-                    <a:lnB w="7620">
-                      <a:noFill/>
-                    </a:lnB>
-                    <a:solidFill>
-                      <a:srgbClr val="FFFEF8"/>
-                    </a:solidFill>
-                  </a:tcPr>
-                </a:tc>
-              </a:tr>
-              <a:tr h="391795">
-                <a:tc>
-                  <a:txBody>
-                    <a:bodyPr wrap="square">
-                      <a:noAutofit/>
-                    </a:bodyPr>
-                    <a:lstStyle/>
-                    <a:p>
-                      <a:pPr algn="l">
-                        <a:lnSpc>
-                          <a:spcPts val="2185"/>
-                        </a:lnSpc>
-                        <a:buNone/>
-                        <a:defRPr sz="1900" b="0">
-                          <a:solidFill>
-                            <a:srgbClr val="303437"/>
-                          </a:solidFill>
-                          <a:latin typeface="Noto Sans"/>
-                        </a:defRPr>
-                      </a:pPr>
-                      <a:r>
-                        <a:rPr sz="1900" b="0" lang="ja-JP" altLang="en-US">
-                          <a:solidFill>
-                            <a:srgbClr val="303437"/>
-                          </a:solidFill>
-                          <a:latin typeface="Noto Sans"/>
-                          <a:ea typeface="Noto Sans CJK JP"/>
-                          <a:cs typeface="Noto Sans"/>
-                        </a:rPr>
-                        <a:t>unlabeled.json</a:t>
-                      </a:r>
-                    </a:p>
-                  </a:txBody>
-                  <a:tcPr marL="63500" marR="63500" marT="38100" marB="38100" anchor="ctr">
-                    <a:lnL w="7620">
-                      <a:noFill/>
-                    </a:lnL>
-                    <a:lnR w="7620">
-                      <a:noFill/>
-                    </a:lnR>
-                    <a:lnT w="7620">
-                      <a:noFill/>
-                    </a:lnT>
-                    <a:lnB w="15240">
-                      <a:solidFill>
-                        <a:srgbClr val="626669"/>
-                      </a:solidFill>
-                      <a:prstDash val="solid"/>
-                    </a:lnB>
-                    <a:solidFill>
-                      <a:srgbClr val="FFFEF8"/>
-                    </a:solidFill>
-                  </a:tcPr>
-                </a:tc>
-                <a:tc>
-                  <a:txBody>
-                    <a:bodyPr wrap="square">
-                      <a:noAutofit/>
-                    </a:bodyPr>
-                    <a:lstStyle/>
-                    <a:p>
-                      <a:pPr algn="r">
-                        <a:lnSpc>
-                          <a:spcPts val="2185"/>
-                        </a:lnSpc>
-                        <a:buNone/>
-                        <a:defRPr sz="1900" b="0">
-                          <a:solidFill>
-                            <a:srgbClr val="303437"/>
-                          </a:solidFill>
-                          <a:latin typeface="Noto Sans"/>
-                        </a:defRPr>
-                      </a:pPr>
-                      <a:r>
-                        <a:rPr sz="1900" b="0" lang="ja-JP" altLang="en-US">
-                          <a:solidFill>
-                            <a:srgbClr val="303437"/>
-                          </a:solidFill>
-                          <a:latin typeface="Noto Sans"/>
-                          <a:ea typeface="Noto Sans CJK JP"/>
-                          <a:cs typeface="Noto Sans"/>
-                        </a:rPr>
-                        <a:t>4,251</a:t>
-                      </a:r>
-                    </a:p>
-                  </a:txBody>
-                  <a:tcPr marL="63500" marR="63500" marT="38100" marB="38100" anchor="ctr">
-                    <a:lnL w="7620">
-                      <a:noFill/>
-                    </a:lnL>
-                    <a:lnR w="7620">
-                      <a:noFill/>
-                    </a:lnR>
-                    <a:lnT w="7620">
-                      <a:noFill/>
-                    </a:lnT>
-                    <a:lnB w="15240">
-                      <a:solidFill>
-                        <a:srgbClr val="626669"/>
-                      </a:solidFill>
-                      <a:prstDash val="solid"/>
-                    </a:lnB>
-                    <a:solidFill>
-                      <a:srgbClr val="FFFEF8"/>
-                    </a:solidFill>
-                  </a:tcPr>
-                </a:tc>
-                <a:tc>
-                  <a:txBody>
-                    <a:bodyPr wrap="square">
-                      <a:noAutofit/>
-                    </a:bodyPr>
-                    <a:lstStyle/>
-                    <a:p>
-                      <a:pPr algn="r">
-                        <a:lnSpc>
-                          <a:spcPts val="2185"/>
-                        </a:lnSpc>
-                        <a:buNone/>
-                        <a:defRPr sz="1900" b="0">
-                          <a:solidFill>
-                            <a:srgbClr val="303437"/>
-                          </a:solidFill>
-                          <a:latin typeface="Noto Sans"/>
-                        </a:defRPr>
-                      </a:pPr>
-                      <a:r>
-                        <a:rPr sz="1900" b="0" lang="ja-JP" altLang="en-US">
-                          <a:solidFill>
-                            <a:srgbClr val="303437"/>
-                          </a:solidFill>
-                          <a:latin typeface="Noto Sans"/>
-                          <a:ea typeface="Noto Sans CJK JP"/>
-                          <a:cs typeface="Noto Sans"/>
-                        </a:rPr>
-                        <a:t>4,251</a:t>
-                      </a:r>
-                    </a:p>
-                  </a:txBody>
-                  <a:tcPr marL="63500" marR="63500" marT="38100" marB="38100" anchor="ctr">
-                    <a:lnL w="7620">
-                      <a:noFill/>
-                    </a:lnL>
-                    <a:lnR w="7620">
-                      <a:noFill/>
-                    </a:lnR>
-                    <a:lnT w="7620">
-                      <a:noFill/>
-                    </a:lnT>
-                    <a:lnB w="15240">
-                      <a:solidFill>
-                        <a:srgbClr val="626669"/>
-                      </a:solidFill>
-                      <a:prstDash val="solid"/>
-                    </a:lnB>
-                    <a:solidFill>
-                      <a:srgbClr val="FFFEF8"/>
-                    </a:solidFill>
-                  </a:tcPr>
-                </a:tc>
-              </a:tr>
-            </a:tbl>
-          </a:graphicData>
-        </a:graphic>
-      </p:graphicFrame>
-      <p:sp>
-        <p:nvSpPr>
-          <p:cNvPr id="5" name="TextBox 4"/>
-          <p:cNvSpPr txBox="1"/>
-          <p:nvPr/>
-        </p:nvSpPr>
-        <p:spPr>
-          <a:xfrm>
-            <a:off x="594360" y="3987545"/>
-            <a:ext cx="7955279" cy="658368"/>
-          </a:xfrm>
-          <a:prstGeom prst="rect">
-            <a:avLst/>
-          </a:prstGeom>
-          <a:noFill/>
-        </p:spPr>
-        <p:txBody>
-          <a:bodyPr wrap="square" lIns="0" rIns="0" tIns="0" bIns="0">
-            <a:noAutofit/>
-          </a:bodyPr>
-          <a:lstStyle/>
-          <a:p>
-            <a:pPr algn="l">
-              <a:lnSpc>
-                <a:spcPts val="1813"/>
-              </a:lnSpc>
-              <a:spcBef>
-                <a:spcPts val="0"/>
-              </a:spcBef>
-              <a:spcAft>
-                <a:spcPts val="0"/>
-              </a:spcAft>
-              <a:buNone/>
-              <a:defRPr sz="1550" b="0">
-                <a:solidFill>
-                  <a:srgbClr val="303437"/>
-                </a:solidFill>
-                <a:latin typeface="Noto Sans"/>
-              </a:defRPr>
-            </a:pPr>
-            <a:r>
-              <a:rPr sz="1550" b="0" lang="ja-JP" altLang="en-US">
-                <a:solidFill>
-                  <a:srgbClr val="303437"/>
-                </a:solidFill>
-                <a:latin typeface="Noto Sans"/>
-                <a:ea typeface="Noto Sans CJK JP"/>
-                <a:cs typeface="Noto Sans"/>
-              </a:rPr>
-              <a:t>「種類」はsentence1とsentence2を順序付きで比較した数。train/devの集約は、五つの小集合を重複込みでつないだ内容と一致。</a:t>
-            </a:r>
-          </a:p>
-        </p:txBody>
-      </p:sp>
-      <p:sp>
-        <p:nvSpPr>
-          <p:cNvPr id="6" name="sources"/>
-          <p:cNvSpPr txBox="1"/>
-          <p:nvPr/>
-        </p:nvSpPr>
-        <p:spPr>
-          <a:xfrm>
-            <a:off x="502920" y="4700016"/>
-            <a:ext cx="8183879" cy="530352"/>
-          </a:xfrm>
-          <a:prstGeom prst="rect">
-            <a:avLst/>
-          </a:prstGeom>
-          <a:noFill/>
-        </p:spPr>
-        <p:txBody>
-          <a:bodyPr wrap="square" lIns="0" rIns="0" tIns="0" bIns="0">
-            <a:noAutofit/>
-          </a:bodyPr>
-          <a:lstStyle/>
-          <a:p>
-            <a:pPr algn="l">
-              <a:lnSpc>
-                <a:spcPts val="940"/>
-              </a:lnSpc>
-              <a:spcBef>
-                <a:spcPts val="0"/>
-              </a:spcBef>
-              <a:spcAft>
-                <a:spcPts val="140"/>
-              </a:spcAft>
-              <a:buNone/>
-              <a:defRPr sz="810" b="0">
-                <a:solidFill>
-                  <a:srgbClr val="303437"/>
-                </a:solidFill>
-                <a:latin typeface="Noto Sans"/>
-              </a:defRPr>
-            </a:pPr>
-            <a:r>
-              <a:rPr sz="810" b="0" lang="ja-JP" altLang="en-US">
-                <a:solidFill>
-                  <a:srgbClr val="626669"/>
-                </a:solidFill>
-                <a:latin typeface="Noto Sans"/>
-                <a:ea typeface="Noto Sans CJK JP"/>
-                <a:cs typeface="Noto Sans"/>
-              </a:rPr>
-              <a:t>[1] CLUE team. FewCLUE / BUSTM 公式配布、commit 62a02c6f31cf32814cfe522f78ef088228840f8d、2026-10-18参照。</a:t>
-            </a:r>
-          </a:p>
-          <a:p>
-            <a:pPr>
-              <a:lnSpc>
-                <a:spcPts val="940"/>
-              </a:lnSpc>
-              <a:buNone/>
-              <a:defRPr sz="810" b="0">
-                <a:solidFill>
-                  <a:srgbClr val="303437"/>
-                </a:solidFill>
-                <a:latin typeface="Noto Sans"/>
-              </a:defRPr>
-            </a:pPr>
-            <a:r>
-              <a:rPr sz="810" b="0" lang="ja-JP" altLang="en-US">
-                <a:solidFill>
-                  <a:srgbClr val="626669"/>
-                </a:solidFill>
-                <a:latin typeface="Noto Sans"/>
-                <a:ea typeface="Noto Sans CJK JP"/>
-                <a:cs typeface="Noto Sans"/>
-                <a:hlinkClick r:id="rId2"/>
-              </a:rPr>
-              <a:t>https://github.com/CLUEbenchmark/FewCLUE/tree/62a02c6f31cf32814cfe522f78ef088228840f8d/datasets/bustm</a:t>
-            </a:r>
-          </a:p>
-        </p:txBody>
-      </p:sp>
-    </p:spTree>
-  </p:cSld>
-  <p:clrMapOvr>
-    <a:masterClrMapping/>
-  </p:clrMapOvr>
-</p:sld>
-</file>
-
-<file path=ppt/slides/slide46.xml><?xml version="1.0" encoding="utf-8"?>
-<p:sld xmlns:a="http://schemas.openxmlformats.org/drawingml/2006/main" xmlns:p="http://schemas.openxmlformats.org/presentationml/2006/main" xmlns:r="http://schemas.openxmlformats.org/officeDocument/2006/relationships">
-  <p:cSld>
-    <p:spTree>
-      <p:nvGrpSpPr>
-        <p:cNvPr id="1" name=""/>
-        <p:cNvGrpSpPr/>
-        <p:nvPr/>
-      </p:nvGrpSpPr>
-      <p:grpSpPr/>
-      <p:sp>
-        <p:nvSpPr>
-          <p:cNvPr id="2" name="Title 1"/>
-          <p:cNvSpPr>
-            <a:spLocks noGrp="1"/>
-          </p:cNvSpPr>
-          <p:nvPr>
-            <p:ph type="title"/>
-          </p:nvPr>
-        </p:nvSpPr>
-        <p:spPr>
-          <a:xfrm>
-            <a:off x="468172" y="650138"/>
-            <a:ext cx="8206740" cy="616305"/>
-          </a:xfrm>
-        </p:spPr>
-        <p:txBody>
-          <a:bodyPr wrap="square" lIns="0" rIns="0" tIns="0" bIns="0">
-            <a:noAutofit/>
-          </a:bodyPr>
-          <a:lstStyle/>
-          <a:p>
-            <a:pPr algn="l">
-              <a:lnSpc>
-                <a:spcPct val="110000"/>
-              </a:lnSpc>
-              <a:buNone/>
-              <a:defRPr sz="2800" b="0">
-                <a:solidFill>
-                  <a:srgbClr val="303437"/>
-                </a:solidFill>
-                <a:latin typeface="Noto Sans"/>
-              </a:defRPr>
-            </a:pPr>
-            <a:r>
-              <a:rPr sz="2800" b="1" lang="ja-JP" altLang="en-US">
-                <a:solidFill>
-                  <a:srgbClr val="303437"/>
-                </a:solidFill>
-                <a:latin typeface="Noto Sans"/>
-                <a:ea typeface="Noto Sans CJK JP"/>
-                <a:cs typeface="Noto Sans"/>
-              </a:rPr>
-              <a:t>集約内の重複と、集合間の一致を区別する</a:t>
-            </a:r>
-          </a:p>
-        </p:txBody>
-      </p:sp>
-      <p:sp>
-        <p:nvSpPr>
-          <p:cNvPr id="3" name="Text Placeholder 2"/>
-          <p:cNvSpPr>
-            <a:spLocks noGrp="1"/>
-          </p:cNvSpPr>
-          <p:nvPr>
-            <p:ph type="body" idx="1"/>
-          </p:nvPr>
-        </p:nvSpPr>
-        <p:spPr>
-          <a:xfrm>
-            <a:off x="594360" y="1463040"/>
-            <a:ext cx="7955279" cy="3044952"/>
-          </a:xfrm>
-        </p:spPr>
-        <p:txBody>
-          <a:bodyPr wrap="square" tIns="91440" bIns="91440">
-            <a:noAutofit/>
-          </a:bodyPr>
-          <a:lstStyle/>
-          <a:p>
-            <a:pPr marL="457200" indent="-355600">
-              <a:lnSpc>
-                <a:spcPts val="2320"/>
-              </a:lnSpc>
-              <a:spcAft>
-                <a:spcPts val="700"/>
-              </a:spcAft>
-              <a:buSzPct val="68205"/>
-              <a:buFont typeface="Noto Sans CJK JP"/>
-              <a:buChar char="●"/>
-              <a:defRPr sz="1950" b="0">
-                <a:solidFill>
-                  <a:srgbClr val="303437"/>
-                </a:solidFill>
-                <a:latin typeface="Noto Sans"/>
-              </a:defRPr>
-            </a:pPr>
-            <a:r>
-              <a:rPr sz="1950" b="0" lang="ja-JP" altLang="en-US">
-                <a:solidFill>
-                  <a:srgbClr val="303437"/>
-                </a:solidFill>
-                <a:latin typeface="Noto Sans"/>
-                <a:ea typeface="Noto Sans CJK JP"/>
-                <a:cs typeface="Noto Sans"/>
-              </a:rPr>
-              <a:t>train_few_allとdev_few_allは各160行で、同一の順序付き発話対をまとめると各156種類になる。複数の小集合で選ばれた同じ対を、独立した新しい問題とは数えない。</a:t>
-            </a:r>
-          </a:p>
-          <a:p>
-            <a:pPr marL="457200" indent="-355600">
-              <a:lnSpc>
-                <a:spcPts val="2320"/>
-              </a:lnSpc>
-              <a:spcAft>
-                <a:spcPts val="0"/>
-              </a:spcAft>
-              <a:buSzPct val="68205"/>
-              <a:buFont typeface="Noto Sans CJK JP"/>
-              <a:buChar char="●"/>
-              <a:defRPr sz="1950" b="0">
-                <a:solidFill>
-                  <a:srgbClr val="303437"/>
-                </a:solidFill>
-                <a:latin typeface="Noto Sans"/>
-              </a:defRPr>
-            </a:pPr>
-            <a:r>
-              <a:rPr sz="1950" b="0" lang="ja-JP" altLang="en-US">
-                <a:solidFill>
-                  <a:srgbClr val="303437"/>
-                </a:solidFill>
-                <a:latin typeface="Noto Sans"/>
-                <a:ea typeface="Noto Sans CJK JP"/>
-                <a:cs typeface="Noto Sans"/>
-              </a:rPr>
-              <a:t>train_few_all、dev_few_all、test_public、test、unlabeledの全10組み合わせで、順序付き発話対の文字列完全一致は0だった。意味が近い表現まで分割間に存在しないことを示す検査ではない。</a:t>
-            </a:r>
-          </a:p>
-        </p:txBody>
-      </p:sp>
-      <p:sp>
-        <p:nvSpPr>
-          <p:cNvPr id="4" name="Title 3"/>
-          <p:cNvSpPr>
-            <a:spLocks noGrp="1"/>
-          </p:cNvSpPr>
-          <p:nvPr>
-            <p:ph type="title" idx="2"/>
-          </p:nvPr>
-        </p:nvSpPr>
-        <p:spPr>
-          <a:xfrm>
-            <a:off x="75895" y="0"/>
-            <a:ext cx="8115300" cy="480060"/>
-          </a:xfrm>
-        </p:spPr>
-        <p:txBody>
-          <a:bodyPr wrap="square" lIns="0" rIns="0" tIns="0" bIns="0" anchor="ctr">
-            <a:noAutofit/>
-          </a:bodyPr>
-          <a:lstStyle/>
-          <a:p>
-            <a:pPr algn="l">
-              <a:lnSpc>
-                <a:spcPct val="110000"/>
-              </a:lnSpc>
-              <a:buNone/>
-              <a:defRPr sz="1400" b="0">
-                <a:solidFill>
-                  <a:srgbClr val="303437"/>
-                </a:solidFill>
-                <a:latin typeface="Noto Sans"/>
-              </a:defRPr>
-            </a:pPr>
-            <a:r>
-              <a:rPr sz="1400" b="1" lang="ja-JP" altLang="en-US">
-                <a:solidFill>
-                  <a:srgbClr val="FFFEF8"/>
-                </a:solidFill>
-                <a:latin typeface="Noto Sans"/>
-                <a:ea typeface="Noto Sans CJK JP"/>
-                <a:cs typeface="Noto Sans"/>
-              </a:rPr>
-              <a:t>Appendix: 2. 全ファイル・重複・形式の補足</a:t>
-            </a:r>
-          </a:p>
-        </p:txBody>
-      </p:sp>
-      <p:sp>
-        <p:nvSpPr>
-          <p:cNvPr id="5" name="sources"/>
-          <p:cNvSpPr txBox="1"/>
-          <p:nvPr/>
-        </p:nvSpPr>
-        <p:spPr>
-          <a:xfrm>
-            <a:off x="502920" y="4700016"/>
-            <a:ext cx="8183879" cy="530352"/>
-          </a:xfrm>
-          <a:prstGeom prst="rect">
-            <a:avLst/>
-          </a:prstGeom>
-          <a:noFill/>
-        </p:spPr>
-        <p:txBody>
-          <a:bodyPr wrap="square" lIns="0" rIns="0" tIns="0" bIns="0">
-            <a:noAutofit/>
-          </a:bodyPr>
-          <a:lstStyle/>
-          <a:p>
-            <a:pPr algn="l">
-              <a:lnSpc>
-                <a:spcPts val="940"/>
-              </a:lnSpc>
-              <a:spcBef>
-                <a:spcPts val="0"/>
-              </a:spcBef>
-              <a:spcAft>
-                <a:spcPts val="140"/>
-              </a:spcAft>
-              <a:buNone/>
-              <a:defRPr sz="810" b="0">
-                <a:solidFill>
-                  <a:srgbClr val="303437"/>
-                </a:solidFill>
-                <a:latin typeface="Noto Sans"/>
-              </a:defRPr>
-            </a:pPr>
-            <a:r>
-              <a:rPr sz="810" b="0" lang="ja-JP" altLang="en-US">
-                <a:solidFill>
-                  <a:srgbClr val="626669"/>
-                </a:solidFill>
-                <a:latin typeface="Noto Sans"/>
-                <a:ea typeface="Noto Sans CJK JP"/>
-                <a:cs typeface="Noto Sans"/>
-              </a:rPr>
-              <a:t>[1] CLUE team. FewCLUE / BUSTM 公式配布、commit 62a02c6f31cf32814cfe522f78ef088228840f8d、2026-10-18参照。</a:t>
-            </a:r>
-          </a:p>
-          <a:p>
-            <a:pPr>
-              <a:lnSpc>
-                <a:spcPts val="940"/>
-              </a:lnSpc>
-              <a:buNone/>
-              <a:defRPr sz="810" b="0">
-                <a:solidFill>
-                  <a:srgbClr val="303437"/>
-                </a:solidFill>
-                <a:latin typeface="Noto Sans"/>
-              </a:defRPr>
-            </a:pPr>
-            <a:r>
-              <a:rPr sz="810" b="0" lang="ja-JP" altLang="en-US">
-                <a:solidFill>
-                  <a:srgbClr val="626669"/>
-                </a:solidFill>
-                <a:latin typeface="Noto Sans"/>
-                <a:ea typeface="Noto Sans CJK JP"/>
-                <a:cs typeface="Noto Sans"/>
-                <a:hlinkClick r:id="rId2"/>
-              </a:rPr>
-              <a:t>https://github.com/CLUEbenchmark/FewCLUE/tree/62a02c6f31cf32814cfe522f78ef088228840f8d/datasets/bustm</a:t>
+              <a:t>Appendix: 2. 入力の読み方と二択への変換</a:t>
             </a:r>
           </a:p>
         </p:txBody>
@@ -29356,7 +23451,7 @@
                 <a:ea typeface="Noto Sans CJK JP"/>
                 <a:cs typeface="Noto Sans"/>
               </a:rPr>
-              <a:t>公開テストの発話は、1件あたり平均7.37文字</a:t>
+              <a:t>JSONLから二つの発話と正解を読み出す</a:t>
             </a:r>
           </a:p>
         </p:txBody>
@@ -29404,1347 +23499,7 @@
                 <a:ea typeface="Noto Sans CJK JP"/>
                 <a:cs typeface="Noto Sans"/>
               </a:rPr>
-              <a:t>Appendix: 2. 全ファイル・重複・形式の補足</a:t>
-            </a:r>
-          </a:p>
-        </p:txBody>
-      </p:sp>
-      <p:graphicFrame>
-        <p:nvGraphicFramePr>
-          <p:cNvPr id="4" name="Table 3"/>
-          <p:cNvGraphicFramePr>
-            <a:graphicFrameLocks noGrp="1"/>
-          </p:cNvGraphicFramePr>
-          <p:nvPr/>
-        </p:nvGraphicFramePr>
-        <p:xfrm>
-          <a:off x="548640" y="1508760"/>
-          <a:ext cx="8046720" cy="2304288"/>
-        </p:xfrm>
-        <a:graphic>
-          <a:graphicData uri="http://schemas.openxmlformats.org/drawingml/2006/table">
-            <a:tbl>
-              <a:tblPr firstRow="0" bandRow="0"/>
-              <a:tblGrid>
-                <a:gridCol w="3383280"/>
-                <a:gridCol w="1554480"/>
-                <a:gridCol w="1554480"/>
-                <a:gridCol w="1554480"/>
-              </a:tblGrid>
-              <a:tr h="384048">
-                <a:tc>
-                  <a:txBody>
-                    <a:bodyPr wrap="square">
-                      <a:noAutofit/>
-                    </a:bodyPr>
-                    <a:lstStyle/>
-                    <a:p>
-                      <a:pPr algn="l">
-                        <a:lnSpc>
-                          <a:spcPts val="2070"/>
-                        </a:lnSpc>
-                        <a:buNone/>
-                        <a:defRPr sz="1800" b="0">
-                          <a:solidFill>
-                            <a:srgbClr val="303437"/>
-                          </a:solidFill>
-                          <a:latin typeface="Noto Sans"/>
-                        </a:defRPr>
-                      </a:pPr>
-                      <a:r>
-                        <a:rPr sz="1800" b="0" lang="ja-JP" altLang="en-US">
-                          <a:solidFill>
-                            <a:srgbClr val="303437"/>
-                          </a:solidFill>
-                          <a:latin typeface="Noto Sans"/>
-                          <a:ea typeface="Noto Sans CJK JP"/>
-                          <a:cs typeface="Noto Sans"/>
-                        </a:rPr>
-                        <a:t>対象</a:t>
-                      </a:r>
-                    </a:p>
-                  </a:txBody>
-                  <a:tcPr marL="63500" marR="63500" marT="38100" marB="38100" anchor="ctr">
-                    <a:lnL w="7620">
-                      <a:noFill/>
-                    </a:lnL>
-                    <a:lnR w="7620">
-                      <a:noFill/>
-                    </a:lnR>
-                    <a:lnT w="15240">
-                      <a:solidFill>
-                        <a:srgbClr val="626669"/>
-                      </a:solidFill>
-                      <a:prstDash val="solid"/>
-                    </a:lnT>
-                    <a:lnB w="7620">
-                      <a:solidFill>
-                        <a:srgbClr val="626669"/>
-                      </a:solidFill>
-                      <a:prstDash val="solid"/>
-                    </a:lnB>
-                    <a:solidFill>
-                      <a:srgbClr val="FFFEF8"/>
-                    </a:solidFill>
-                  </a:tcPr>
-                </a:tc>
-                <a:tc>
-                  <a:txBody>
-                    <a:bodyPr wrap="square">
-                      <a:noAutofit/>
-                    </a:bodyPr>
-                    <a:lstStyle/>
-                    <a:p>
-                      <a:pPr algn="r">
-                        <a:lnSpc>
-                          <a:spcPts val="2070"/>
-                        </a:lnSpc>
-                        <a:buNone/>
-                        <a:defRPr sz="1800" b="0">
-                          <a:solidFill>
-                            <a:srgbClr val="303437"/>
-                          </a:solidFill>
-                          <a:latin typeface="Noto Sans"/>
-                        </a:defRPr>
-                      </a:pPr>
-                      <a:r>
-                        <a:rPr sz="1800" b="0" lang="ja-JP" altLang="en-US">
-                          <a:solidFill>
-                            <a:srgbClr val="303437"/>
-                          </a:solidFill>
-                          <a:latin typeface="Noto Sans"/>
-                          <a:ea typeface="Noto Sans CJK JP"/>
-                          <a:cs typeface="Noto Sans"/>
-                        </a:rPr>
-                        <a:t>最短</a:t>
-                      </a:r>
-                    </a:p>
-                  </a:txBody>
-                  <a:tcPr marL="63500" marR="63500" marT="38100" marB="38100" anchor="ctr">
-                    <a:lnL w="7620">
-                      <a:noFill/>
-                    </a:lnL>
-                    <a:lnR w="7620">
-                      <a:noFill/>
-                    </a:lnR>
-                    <a:lnT w="15240">
-                      <a:solidFill>
-                        <a:srgbClr val="626669"/>
-                      </a:solidFill>
-                      <a:prstDash val="solid"/>
-                    </a:lnT>
-                    <a:lnB w="7620">
-                      <a:solidFill>
-                        <a:srgbClr val="626669"/>
-                      </a:solidFill>
-                      <a:prstDash val="solid"/>
-                    </a:lnB>
-                    <a:solidFill>
-                      <a:srgbClr val="FFFEF8"/>
-                    </a:solidFill>
-                  </a:tcPr>
-                </a:tc>
-                <a:tc>
-                  <a:txBody>
-                    <a:bodyPr wrap="square">
-                      <a:noAutofit/>
-                    </a:bodyPr>
-                    <a:lstStyle/>
-                    <a:p>
-                      <a:pPr algn="r">
-                        <a:lnSpc>
-                          <a:spcPts val="2070"/>
-                        </a:lnSpc>
-                        <a:buNone/>
-                        <a:defRPr sz="1800" b="0">
-                          <a:solidFill>
-                            <a:srgbClr val="303437"/>
-                          </a:solidFill>
-                          <a:latin typeface="Noto Sans"/>
-                        </a:defRPr>
-                      </a:pPr>
-                      <a:r>
-                        <a:rPr sz="1800" b="0" lang="ja-JP" altLang="en-US">
-                          <a:solidFill>
-                            <a:srgbClr val="303437"/>
-                          </a:solidFill>
-                          <a:latin typeface="Noto Sans"/>
-                          <a:ea typeface="Noto Sans CJK JP"/>
-                          <a:cs typeface="Noto Sans"/>
-                        </a:rPr>
-                        <a:t>最長</a:t>
-                      </a:r>
-                    </a:p>
-                  </a:txBody>
-                  <a:tcPr marL="63500" marR="63500" marT="38100" marB="38100" anchor="ctr">
-                    <a:lnL w="7620">
-                      <a:noFill/>
-                    </a:lnL>
-                    <a:lnR w="7620">
-                      <a:noFill/>
-                    </a:lnR>
-                    <a:lnT w="15240">
-                      <a:solidFill>
-                        <a:srgbClr val="626669"/>
-                      </a:solidFill>
-                      <a:prstDash val="solid"/>
-                    </a:lnT>
-                    <a:lnB w="7620">
-                      <a:solidFill>
-                        <a:srgbClr val="626669"/>
-                      </a:solidFill>
-                      <a:prstDash val="solid"/>
-                    </a:lnB>
-                    <a:solidFill>
-                      <a:srgbClr val="FFFEF8"/>
-                    </a:solidFill>
-                  </a:tcPr>
-                </a:tc>
-                <a:tc>
-                  <a:txBody>
-                    <a:bodyPr wrap="square">
-                      <a:noAutofit/>
-                    </a:bodyPr>
-                    <a:lstStyle/>
-                    <a:p>
-                      <a:pPr algn="r">
-                        <a:lnSpc>
-                          <a:spcPts val="2070"/>
-                        </a:lnSpc>
-                        <a:buNone/>
-                        <a:defRPr sz="1800" b="0">
-                          <a:solidFill>
-                            <a:srgbClr val="303437"/>
-                          </a:solidFill>
-                          <a:latin typeface="Noto Sans"/>
-                        </a:defRPr>
-                      </a:pPr>
-                      <a:r>
-                        <a:rPr sz="1800" b="0" lang="ja-JP" altLang="en-US">
-                          <a:solidFill>
-                            <a:srgbClr val="303437"/>
-                          </a:solidFill>
-                          <a:latin typeface="Noto Sans"/>
-                          <a:ea typeface="Noto Sans CJK JP"/>
-                          <a:cs typeface="Noto Sans"/>
-                        </a:rPr>
-                        <a:t>平均</a:t>
-                      </a:r>
-                    </a:p>
-                  </a:txBody>
-                  <a:tcPr marL="63500" marR="63500" marT="38100" marB="38100" anchor="ctr">
-                    <a:lnL w="7620">
-                      <a:noFill/>
-                    </a:lnL>
-                    <a:lnR w="7620">
-                      <a:noFill/>
-                    </a:lnR>
-                    <a:lnT w="15240">
-                      <a:solidFill>
-                        <a:srgbClr val="626669"/>
-                      </a:solidFill>
-                      <a:prstDash val="solid"/>
-                    </a:lnT>
-                    <a:lnB w="7620">
-                      <a:solidFill>
-                        <a:srgbClr val="626669"/>
-                      </a:solidFill>
-                      <a:prstDash val="solid"/>
-                    </a:lnB>
-                    <a:solidFill>
-                      <a:srgbClr val="FFFEF8"/>
-                    </a:solidFill>
-                  </a:tcPr>
-                </a:tc>
-              </a:tr>
-              <a:tr h="384048">
-                <a:tc>
-                  <a:txBody>
-                    <a:bodyPr wrap="square">
-                      <a:noAutofit/>
-                    </a:bodyPr>
-                    <a:lstStyle/>
-                    <a:p>
-                      <a:pPr algn="l">
-                        <a:lnSpc>
-                          <a:spcPts val="2070"/>
-                        </a:lnSpc>
-                        <a:buNone/>
-                        <a:defRPr sz="1800" b="0">
-                          <a:solidFill>
-                            <a:srgbClr val="303437"/>
-                          </a:solidFill>
-                          <a:latin typeface="Noto Sans"/>
-                        </a:defRPr>
-                      </a:pPr>
-                      <a:r>
-                        <a:rPr sz="1800" b="0" lang="ja-JP" altLang="en-US">
-                          <a:solidFill>
-                            <a:srgbClr val="303437"/>
-                          </a:solidFill>
-                          <a:latin typeface="Noto Sans"/>
-                          <a:ea typeface="Noto Sans CJK JP"/>
-                          <a:cs typeface="Noto Sans"/>
-                        </a:rPr>
-                        <a:t>train_few_all</a:t>
-                      </a:r>
-                    </a:p>
-                  </a:txBody>
-                  <a:tcPr marL="63500" marR="63500" marT="38100" marB="38100" anchor="ctr">
-                    <a:lnL w="7620">
-                      <a:noFill/>
-                    </a:lnL>
-                    <a:lnR w="7620">
-                      <a:noFill/>
-                    </a:lnR>
-                    <a:lnT w="7620">
-                      <a:solidFill>
-                        <a:srgbClr val="626669"/>
-                      </a:solidFill>
-                      <a:prstDash val="solid"/>
-                    </a:lnT>
-                    <a:lnB w="7620">
-                      <a:noFill/>
-                    </a:lnB>
-                    <a:solidFill>
-                      <a:srgbClr val="FFFEF8"/>
-                    </a:solidFill>
-                  </a:tcPr>
-                </a:tc>
-                <a:tc>
-                  <a:txBody>
-                    <a:bodyPr wrap="square">
-                      <a:noAutofit/>
-                    </a:bodyPr>
-                    <a:lstStyle/>
-                    <a:p>
-                      <a:pPr algn="r">
-                        <a:lnSpc>
-                          <a:spcPts val="2070"/>
-                        </a:lnSpc>
-                        <a:buNone/>
-                        <a:defRPr sz="1800" b="0">
-                          <a:solidFill>
-                            <a:srgbClr val="303437"/>
-                          </a:solidFill>
-                          <a:latin typeface="Noto Sans"/>
-                        </a:defRPr>
-                      </a:pPr>
-                      <a:r>
-                        <a:rPr sz="1800" b="0" lang="ja-JP" altLang="en-US">
-                          <a:solidFill>
-                            <a:srgbClr val="303437"/>
-                          </a:solidFill>
-                          <a:latin typeface="Noto Sans"/>
-                          <a:ea typeface="Noto Sans CJK JP"/>
-                          <a:cs typeface="Noto Sans"/>
-                        </a:rPr>
-                        <a:t>3</a:t>
-                      </a:r>
-                    </a:p>
-                  </a:txBody>
-                  <a:tcPr marL="63500" marR="63500" marT="38100" marB="38100" anchor="ctr">
-                    <a:lnL w="7620">
-                      <a:noFill/>
-                    </a:lnL>
-                    <a:lnR w="7620">
-                      <a:noFill/>
-                    </a:lnR>
-                    <a:lnT w="7620">
-                      <a:solidFill>
-                        <a:srgbClr val="626669"/>
-                      </a:solidFill>
-                      <a:prstDash val="solid"/>
-                    </a:lnT>
-                    <a:lnB w="7620">
-                      <a:noFill/>
-                    </a:lnB>
-                    <a:solidFill>
-                      <a:srgbClr val="FFFEF8"/>
-                    </a:solidFill>
-                  </a:tcPr>
-                </a:tc>
-                <a:tc>
-                  <a:txBody>
-                    <a:bodyPr wrap="square">
-                      <a:noAutofit/>
-                    </a:bodyPr>
-                    <a:lstStyle/>
-                    <a:p>
-                      <a:pPr algn="r">
-                        <a:lnSpc>
-                          <a:spcPts val="2070"/>
-                        </a:lnSpc>
-                        <a:buNone/>
-                        <a:defRPr sz="1800" b="0">
-                          <a:solidFill>
-                            <a:srgbClr val="303437"/>
-                          </a:solidFill>
-                          <a:latin typeface="Noto Sans"/>
-                        </a:defRPr>
-                      </a:pPr>
-                      <a:r>
-                        <a:rPr sz="1800" b="0" lang="ja-JP" altLang="en-US">
-                          <a:solidFill>
-                            <a:srgbClr val="303437"/>
-                          </a:solidFill>
-                          <a:latin typeface="Noto Sans"/>
-                          <a:ea typeface="Noto Sans CJK JP"/>
-                          <a:cs typeface="Noto Sans"/>
-                        </a:rPr>
-                        <a:t>15</a:t>
-                      </a:r>
-                    </a:p>
-                  </a:txBody>
-                  <a:tcPr marL="63500" marR="63500" marT="38100" marB="38100" anchor="ctr">
-                    <a:lnL w="7620">
-                      <a:noFill/>
-                    </a:lnL>
-                    <a:lnR w="7620">
-                      <a:noFill/>
-                    </a:lnR>
-                    <a:lnT w="7620">
-                      <a:solidFill>
-                        <a:srgbClr val="626669"/>
-                      </a:solidFill>
-                      <a:prstDash val="solid"/>
-                    </a:lnT>
-                    <a:lnB w="7620">
-                      <a:noFill/>
-                    </a:lnB>
-                    <a:solidFill>
-                      <a:srgbClr val="FFFEF8"/>
-                    </a:solidFill>
-                  </a:tcPr>
-                </a:tc>
-                <a:tc>
-                  <a:txBody>
-                    <a:bodyPr wrap="square">
-                      <a:noAutofit/>
-                    </a:bodyPr>
-                    <a:lstStyle/>
-                    <a:p>
-                      <a:pPr algn="r">
-                        <a:lnSpc>
-                          <a:spcPts val="2070"/>
-                        </a:lnSpc>
-                        <a:buNone/>
-                        <a:defRPr sz="1800" b="0">
-                          <a:solidFill>
-                            <a:srgbClr val="303437"/>
-                          </a:solidFill>
-                          <a:latin typeface="Noto Sans"/>
-                        </a:defRPr>
-                      </a:pPr>
-                      <a:r>
-                        <a:rPr sz="1800" b="0" lang="ja-JP" altLang="en-US">
-                          <a:solidFill>
-                            <a:srgbClr val="303437"/>
-                          </a:solidFill>
-                          <a:latin typeface="Noto Sans"/>
-                          <a:ea typeface="Noto Sans CJK JP"/>
-                          <a:cs typeface="Noto Sans"/>
-                        </a:rPr>
-                        <a:t>7.33</a:t>
-                      </a:r>
-                    </a:p>
-                  </a:txBody>
-                  <a:tcPr marL="63500" marR="63500" marT="38100" marB="38100" anchor="ctr">
-                    <a:lnL w="7620">
-                      <a:noFill/>
-                    </a:lnL>
-                    <a:lnR w="7620">
-                      <a:noFill/>
-                    </a:lnR>
-                    <a:lnT w="7620">
-                      <a:solidFill>
-                        <a:srgbClr val="626669"/>
-                      </a:solidFill>
-                      <a:prstDash val="solid"/>
-                    </a:lnT>
-                    <a:lnB w="7620">
-                      <a:noFill/>
-                    </a:lnB>
-                    <a:solidFill>
-                      <a:srgbClr val="FFFEF8"/>
-                    </a:solidFill>
-                  </a:tcPr>
-                </a:tc>
-              </a:tr>
-              <a:tr h="384048">
-                <a:tc>
-                  <a:txBody>
-                    <a:bodyPr wrap="square">
-                      <a:noAutofit/>
-                    </a:bodyPr>
-                    <a:lstStyle/>
-                    <a:p>
-                      <a:pPr algn="l">
-                        <a:lnSpc>
-                          <a:spcPts val="2070"/>
-                        </a:lnSpc>
-                        <a:buNone/>
-                        <a:defRPr sz="1800" b="0">
-                          <a:solidFill>
-                            <a:srgbClr val="303437"/>
-                          </a:solidFill>
-                          <a:latin typeface="Noto Sans"/>
-                        </a:defRPr>
-                      </a:pPr>
-                      <a:r>
-                        <a:rPr sz="1800" b="0" lang="ja-JP" altLang="en-US">
-                          <a:solidFill>
-                            <a:srgbClr val="303437"/>
-                          </a:solidFill>
-                          <a:latin typeface="Noto Sans"/>
-                          <a:ea typeface="Noto Sans CJK JP"/>
-                          <a:cs typeface="Noto Sans"/>
-                        </a:rPr>
-                        <a:t>dev_few_all</a:t>
-                      </a:r>
-                    </a:p>
-                  </a:txBody>
-                  <a:tcPr marL="63500" marR="63500" marT="38100" marB="38100" anchor="ctr">
-                    <a:lnL w="7620">
-                      <a:noFill/>
-                    </a:lnL>
-                    <a:lnR w="7620">
-                      <a:noFill/>
-                    </a:lnR>
-                    <a:lnT w="7620">
-                      <a:noFill/>
-                    </a:lnT>
-                    <a:lnB w="7620">
-                      <a:noFill/>
-                    </a:lnB>
-                    <a:solidFill>
-                      <a:srgbClr val="FFFEF8"/>
-                    </a:solidFill>
-                  </a:tcPr>
-                </a:tc>
-                <a:tc>
-                  <a:txBody>
-                    <a:bodyPr wrap="square">
-                      <a:noAutofit/>
-                    </a:bodyPr>
-                    <a:lstStyle/>
-                    <a:p>
-                      <a:pPr algn="r">
-                        <a:lnSpc>
-                          <a:spcPts val="2070"/>
-                        </a:lnSpc>
-                        <a:buNone/>
-                        <a:defRPr sz="1800" b="0">
-                          <a:solidFill>
-                            <a:srgbClr val="303437"/>
-                          </a:solidFill>
-                          <a:latin typeface="Noto Sans"/>
-                        </a:defRPr>
-                      </a:pPr>
-                      <a:r>
-                        <a:rPr sz="1800" b="0" lang="ja-JP" altLang="en-US">
-                          <a:solidFill>
-                            <a:srgbClr val="303437"/>
-                          </a:solidFill>
-                          <a:latin typeface="Noto Sans"/>
-                          <a:ea typeface="Noto Sans CJK JP"/>
-                          <a:cs typeface="Noto Sans"/>
-                        </a:rPr>
-                        <a:t>4</a:t>
-                      </a:r>
-                    </a:p>
-                  </a:txBody>
-                  <a:tcPr marL="63500" marR="63500" marT="38100" marB="38100" anchor="ctr">
-                    <a:lnL w="7620">
-                      <a:noFill/>
-                    </a:lnL>
-                    <a:lnR w="7620">
-                      <a:noFill/>
-                    </a:lnR>
-                    <a:lnT w="7620">
-                      <a:noFill/>
-                    </a:lnT>
-                    <a:lnB w="7620">
-                      <a:noFill/>
-                    </a:lnB>
-                    <a:solidFill>
-                      <a:srgbClr val="FFFEF8"/>
-                    </a:solidFill>
-                  </a:tcPr>
-                </a:tc>
-                <a:tc>
-                  <a:txBody>
-                    <a:bodyPr wrap="square">
-                      <a:noAutofit/>
-                    </a:bodyPr>
-                    <a:lstStyle/>
-                    <a:p>
-                      <a:pPr algn="r">
-                        <a:lnSpc>
-                          <a:spcPts val="2070"/>
-                        </a:lnSpc>
-                        <a:buNone/>
-                        <a:defRPr sz="1800" b="0">
-                          <a:solidFill>
-                            <a:srgbClr val="303437"/>
-                          </a:solidFill>
-                          <a:latin typeface="Noto Sans"/>
-                        </a:defRPr>
-                      </a:pPr>
-                      <a:r>
-                        <a:rPr sz="1800" b="0" lang="ja-JP" altLang="en-US">
-                          <a:solidFill>
-                            <a:srgbClr val="303437"/>
-                          </a:solidFill>
-                          <a:latin typeface="Noto Sans"/>
-                          <a:ea typeface="Noto Sans CJK JP"/>
-                          <a:cs typeface="Noto Sans"/>
-                        </a:rPr>
-                        <a:t>18</a:t>
-                      </a:r>
-                    </a:p>
-                  </a:txBody>
-                  <a:tcPr marL="63500" marR="63500" marT="38100" marB="38100" anchor="ctr">
-                    <a:lnL w="7620">
-                      <a:noFill/>
-                    </a:lnL>
-                    <a:lnR w="7620">
-                      <a:noFill/>
-                    </a:lnR>
-                    <a:lnT w="7620">
-                      <a:noFill/>
-                    </a:lnT>
-                    <a:lnB w="7620">
-                      <a:noFill/>
-                    </a:lnB>
-                    <a:solidFill>
-                      <a:srgbClr val="FFFEF8"/>
-                    </a:solidFill>
-                  </a:tcPr>
-                </a:tc>
-                <a:tc>
-                  <a:txBody>
-                    <a:bodyPr wrap="square">
-                      <a:noAutofit/>
-                    </a:bodyPr>
-                    <a:lstStyle/>
-                    <a:p>
-                      <a:pPr algn="r">
-                        <a:lnSpc>
-                          <a:spcPts val="2070"/>
-                        </a:lnSpc>
-                        <a:buNone/>
-                        <a:defRPr sz="1800" b="0">
-                          <a:solidFill>
-                            <a:srgbClr val="303437"/>
-                          </a:solidFill>
-                          <a:latin typeface="Noto Sans"/>
-                        </a:defRPr>
-                      </a:pPr>
-                      <a:r>
-                        <a:rPr sz="1800" b="0" lang="ja-JP" altLang="en-US">
-                          <a:solidFill>
-                            <a:srgbClr val="303437"/>
-                          </a:solidFill>
-                          <a:latin typeface="Noto Sans"/>
-                          <a:ea typeface="Noto Sans CJK JP"/>
-                          <a:cs typeface="Noto Sans"/>
-                        </a:rPr>
-                        <a:t>7.38</a:t>
-                      </a:r>
-                    </a:p>
-                  </a:txBody>
-                  <a:tcPr marL="63500" marR="63500" marT="38100" marB="38100" anchor="ctr">
-                    <a:lnL w="7620">
-                      <a:noFill/>
-                    </a:lnL>
-                    <a:lnR w="7620">
-                      <a:noFill/>
-                    </a:lnR>
-                    <a:lnT w="7620">
-                      <a:noFill/>
-                    </a:lnT>
-                    <a:lnB w="7620">
-                      <a:noFill/>
-                    </a:lnB>
-                    <a:solidFill>
-                      <a:srgbClr val="FFFEF8"/>
-                    </a:solidFill>
-                  </a:tcPr>
-                </a:tc>
-              </a:tr>
-              <a:tr h="384048">
-                <a:tc>
-                  <a:txBody>
-                    <a:bodyPr wrap="square">
-                      <a:noAutofit/>
-                    </a:bodyPr>
-                    <a:lstStyle/>
-                    <a:p>
-                      <a:pPr algn="l">
-                        <a:lnSpc>
-                          <a:spcPts val="2070"/>
-                        </a:lnSpc>
-                        <a:buNone/>
-                        <a:defRPr sz="1800" b="0">
-                          <a:solidFill>
-                            <a:srgbClr val="303437"/>
-                          </a:solidFill>
-                          <a:latin typeface="Noto Sans"/>
-                        </a:defRPr>
-                      </a:pPr>
-                      <a:r>
-                        <a:rPr sz="1800" b="0" lang="ja-JP" altLang="en-US">
-                          <a:solidFill>
-                            <a:srgbClr val="303437"/>
-                          </a:solidFill>
-                          <a:latin typeface="Noto Sans"/>
-                          <a:ea typeface="Noto Sans CJK JP"/>
-                          <a:cs typeface="Noto Sans"/>
-                        </a:rPr>
-                        <a:t>test_public</a:t>
-                      </a:r>
-                    </a:p>
-                  </a:txBody>
-                  <a:tcPr marL="63500" marR="63500" marT="38100" marB="38100" anchor="ctr">
-                    <a:lnL w="7620">
-                      <a:noFill/>
-                    </a:lnL>
-                    <a:lnR w="7620">
-                      <a:noFill/>
-                    </a:lnR>
-                    <a:lnT w="7620">
-                      <a:noFill/>
-                    </a:lnT>
-                    <a:lnB w="7620">
-                      <a:noFill/>
-                    </a:lnB>
-                    <a:solidFill>
-                      <a:srgbClr val="FFFEF8"/>
-                    </a:solidFill>
-                  </a:tcPr>
-                </a:tc>
-                <a:tc>
-                  <a:txBody>
-                    <a:bodyPr wrap="square">
-                      <a:noAutofit/>
-                    </a:bodyPr>
-                    <a:lstStyle/>
-                    <a:p>
-                      <a:pPr algn="r">
-                        <a:lnSpc>
-                          <a:spcPts val="2070"/>
-                        </a:lnSpc>
-                        <a:buNone/>
-                        <a:defRPr sz="1800" b="0">
-                          <a:solidFill>
-                            <a:srgbClr val="303437"/>
-                          </a:solidFill>
-                          <a:latin typeface="Noto Sans"/>
-                        </a:defRPr>
-                      </a:pPr>
-                      <a:r>
-                        <a:rPr sz="1800" b="0" lang="ja-JP" altLang="en-US">
-                          <a:solidFill>
-                            <a:srgbClr val="303437"/>
-                          </a:solidFill>
-                          <a:latin typeface="Noto Sans"/>
-                          <a:ea typeface="Noto Sans CJK JP"/>
-                          <a:cs typeface="Noto Sans"/>
-                        </a:rPr>
-                        <a:t>2</a:t>
-                      </a:r>
-                    </a:p>
-                  </a:txBody>
-                  <a:tcPr marL="63500" marR="63500" marT="38100" marB="38100" anchor="ctr">
-                    <a:lnL w="7620">
-                      <a:noFill/>
-                    </a:lnL>
-                    <a:lnR w="7620">
-                      <a:noFill/>
-                    </a:lnR>
-                    <a:lnT w="7620">
-                      <a:noFill/>
-                    </a:lnT>
-                    <a:lnB w="7620">
-                      <a:noFill/>
-                    </a:lnB>
-                    <a:solidFill>
-                      <a:srgbClr val="FFFEF8"/>
-                    </a:solidFill>
-                  </a:tcPr>
-                </a:tc>
-                <a:tc>
-                  <a:txBody>
-                    <a:bodyPr wrap="square">
-                      <a:noAutofit/>
-                    </a:bodyPr>
-                    <a:lstStyle/>
-                    <a:p>
-                      <a:pPr algn="r">
-                        <a:lnSpc>
-                          <a:spcPts val="2070"/>
-                        </a:lnSpc>
-                        <a:buNone/>
-                        <a:defRPr sz="1800" b="0">
-                          <a:solidFill>
-                            <a:srgbClr val="303437"/>
-                          </a:solidFill>
-                          <a:latin typeface="Noto Sans"/>
-                        </a:defRPr>
-                      </a:pPr>
-                      <a:r>
-                        <a:rPr sz="1800" b="0" lang="ja-JP" altLang="en-US">
-                          <a:solidFill>
-                            <a:srgbClr val="303437"/>
-                          </a:solidFill>
-                          <a:latin typeface="Noto Sans"/>
-                          <a:ea typeface="Noto Sans CJK JP"/>
-                          <a:cs typeface="Noto Sans"/>
-                        </a:rPr>
-                        <a:t>25</a:t>
-                      </a:r>
-                    </a:p>
-                  </a:txBody>
-                  <a:tcPr marL="63500" marR="63500" marT="38100" marB="38100" anchor="ctr">
-                    <a:lnL w="7620">
-                      <a:noFill/>
-                    </a:lnL>
-                    <a:lnR w="7620">
-                      <a:noFill/>
-                    </a:lnR>
-                    <a:lnT w="7620">
-                      <a:noFill/>
-                    </a:lnT>
-                    <a:lnB w="7620">
-                      <a:noFill/>
-                    </a:lnB>
-                    <a:solidFill>
-                      <a:srgbClr val="FFFEF8"/>
-                    </a:solidFill>
-                  </a:tcPr>
-                </a:tc>
-                <a:tc>
-                  <a:txBody>
-                    <a:bodyPr wrap="square">
-                      <a:noAutofit/>
-                    </a:bodyPr>
-                    <a:lstStyle/>
-                    <a:p>
-                      <a:pPr algn="r">
-                        <a:lnSpc>
-                          <a:spcPts val="2070"/>
-                        </a:lnSpc>
-                        <a:buNone/>
-                        <a:defRPr sz="1800" b="0">
-                          <a:solidFill>
-                            <a:srgbClr val="303437"/>
-                          </a:solidFill>
-                          <a:latin typeface="Noto Sans"/>
-                        </a:defRPr>
-                      </a:pPr>
-                      <a:r>
-                        <a:rPr sz="1800" b="0" lang="ja-JP" altLang="en-US">
-                          <a:solidFill>
-                            <a:srgbClr val="303437"/>
-                          </a:solidFill>
-                          <a:latin typeface="Noto Sans"/>
-                          <a:ea typeface="Noto Sans CJK JP"/>
-                          <a:cs typeface="Noto Sans"/>
-                        </a:rPr>
-                        <a:t>7.37</a:t>
-                      </a:r>
-                    </a:p>
-                  </a:txBody>
-                  <a:tcPr marL="63500" marR="63500" marT="38100" marB="38100" anchor="ctr">
-                    <a:lnL w="7620">
-                      <a:noFill/>
-                    </a:lnL>
-                    <a:lnR w="7620">
-                      <a:noFill/>
-                    </a:lnR>
-                    <a:lnT w="7620">
-                      <a:noFill/>
-                    </a:lnT>
-                    <a:lnB w="7620">
-                      <a:noFill/>
-                    </a:lnB>
-                    <a:solidFill>
-                      <a:srgbClr val="FFFEF8"/>
-                    </a:solidFill>
-                  </a:tcPr>
-                </a:tc>
-              </a:tr>
-              <a:tr h="384048">
-                <a:tc>
-                  <a:txBody>
-                    <a:bodyPr wrap="square">
-                      <a:noAutofit/>
-                    </a:bodyPr>
-                    <a:lstStyle/>
-                    <a:p>
-                      <a:pPr algn="l">
-                        <a:lnSpc>
-                          <a:spcPts val="2070"/>
-                        </a:lnSpc>
-                        <a:buNone/>
-                        <a:defRPr sz="1800" b="0">
-                          <a:solidFill>
-                            <a:srgbClr val="303437"/>
-                          </a:solidFill>
-                          <a:latin typeface="Noto Sans"/>
-                        </a:defRPr>
-                      </a:pPr>
-                      <a:r>
-                        <a:rPr sz="1800" b="0" lang="ja-JP" altLang="en-US">
-                          <a:solidFill>
-                            <a:srgbClr val="303437"/>
-                          </a:solidFill>
-                          <a:latin typeface="Noto Sans"/>
-                          <a:ea typeface="Noto Sans CJK JP"/>
-                          <a:cs typeface="Noto Sans"/>
-                        </a:rPr>
-                        <a:t>test</a:t>
-                      </a:r>
-                    </a:p>
-                  </a:txBody>
-                  <a:tcPr marL="63500" marR="63500" marT="38100" marB="38100" anchor="ctr">
-                    <a:lnL w="7620">
-                      <a:noFill/>
-                    </a:lnL>
-                    <a:lnR w="7620">
-                      <a:noFill/>
-                    </a:lnR>
-                    <a:lnT w="7620">
-                      <a:noFill/>
-                    </a:lnT>
-                    <a:lnB w="7620">
-                      <a:noFill/>
-                    </a:lnB>
-                    <a:solidFill>
-                      <a:srgbClr val="FFFEF8"/>
-                    </a:solidFill>
-                  </a:tcPr>
-                </a:tc>
-                <a:tc>
-                  <a:txBody>
-                    <a:bodyPr wrap="square">
-                      <a:noAutofit/>
-                    </a:bodyPr>
-                    <a:lstStyle/>
-                    <a:p>
-                      <a:pPr algn="r">
-                        <a:lnSpc>
-                          <a:spcPts val="2070"/>
-                        </a:lnSpc>
-                        <a:buNone/>
-                        <a:defRPr sz="1800" b="0">
-                          <a:solidFill>
-                            <a:srgbClr val="303437"/>
-                          </a:solidFill>
-                          <a:latin typeface="Noto Sans"/>
-                        </a:defRPr>
-                      </a:pPr>
-                      <a:r>
-                        <a:rPr sz="1800" b="0" lang="ja-JP" altLang="en-US">
-                          <a:solidFill>
-                            <a:srgbClr val="303437"/>
-                          </a:solidFill>
-                          <a:latin typeface="Noto Sans"/>
-                          <a:ea typeface="Noto Sans CJK JP"/>
-                          <a:cs typeface="Noto Sans"/>
-                        </a:rPr>
-                        <a:t>3</a:t>
-                      </a:r>
-                    </a:p>
-                  </a:txBody>
-                  <a:tcPr marL="63500" marR="63500" marT="38100" marB="38100" anchor="ctr">
-                    <a:lnL w="7620">
-                      <a:noFill/>
-                    </a:lnL>
-                    <a:lnR w="7620">
-                      <a:noFill/>
-                    </a:lnR>
-                    <a:lnT w="7620">
-                      <a:noFill/>
-                    </a:lnT>
-                    <a:lnB w="7620">
-                      <a:noFill/>
-                    </a:lnB>
-                    <a:solidFill>
-                      <a:srgbClr val="FFFEF8"/>
-                    </a:solidFill>
-                  </a:tcPr>
-                </a:tc>
-                <a:tc>
-                  <a:txBody>
-                    <a:bodyPr wrap="square">
-                      <a:noAutofit/>
-                    </a:bodyPr>
-                    <a:lstStyle/>
-                    <a:p>
-                      <a:pPr algn="r">
-                        <a:lnSpc>
-                          <a:spcPts val="2070"/>
-                        </a:lnSpc>
-                        <a:buNone/>
-                        <a:defRPr sz="1800" b="0">
-                          <a:solidFill>
-                            <a:srgbClr val="303437"/>
-                          </a:solidFill>
-                          <a:latin typeface="Noto Sans"/>
-                        </a:defRPr>
-                      </a:pPr>
-                      <a:r>
-                        <a:rPr sz="1800" b="0" lang="ja-JP" altLang="en-US">
-                          <a:solidFill>
-                            <a:srgbClr val="303437"/>
-                          </a:solidFill>
-                          <a:latin typeface="Noto Sans"/>
-                          <a:ea typeface="Noto Sans CJK JP"/>
-                          <a:cs typeface="Noto Sans"/>
-                        </a:rPr>
-                        <a:t>26</a:t>
-                      </a:r>
-                    </a:p>
-                  </a:txBody>
-                  <a:tcPr marL="63500" marR="63500" marT="38100" marB="38100" anchor="ctr">
-                    <a:lnL w="7620">
-                      <a:noFill/>
-                    </a:lnL>
-                    <a:lnR w="7620">
-                      <a:noFill/>
-                    </a:lnR>
-                    <a:lnT w="7620">
-                      <a:noFill/>
-                    </a:lnT>
-                    <a:lnB w="7620">
-                      <a:noFill/>
-                    </a:lnB>
-                    <a:solidFill>
-                      <a:srgbClr val="FFFEF8"/>
-                    </a:solidFill>
-                  </a:tcPr>
-                </a:tc>
-                <a:tc>
-                  <a:txBody>
-                    <a:bodyPr wrap="square">
-                      <a:noAutofit/>
-                    </a:bodyPr>
-                    <a:lstStyle/>
-                    <a:p>
-                      <a:pPr algn="r">
-                        <a:lnSpc>
-                          <a:spcPts val="2070"/>
-                        </a:lnSpc>
-                        <a:buNone/>
-                        <a:defRPr sz="1800" b="0">
-                          <a:solidFill>
-                            <a:srgbClr val="303437"/>
-                          </a:solidFill>
-                          <a:latin typeface="Noto Sans"/>
-                        </a:defRPr>
-                      </a:pPr>
-                      <a:r>
-                        <a:rPr sz="1800" b="0" lang="ja-JP" altLang="en-US">
-                          <a:solidFill>
-                            <a:srgbClr val="303437"/>
-                          </a:solidFill>
-                          <a:latin typeface="Noto Sans"/>
-                          <a:ea typeface="Noto Sans CJK JP"/>
-                          <a:cs typeface="Noto Sans"/>
-                        </a:rPr>
-                        <a:t>7.4</a:t>
-                      </a:r>
-                    </a:p>
-                  </a:txBody>
-                  <a:tcPr marL="63500" marR="63500" marT="38100" marB="38100" anchor="ctr">
-                    <a:lnL w="7620">
-                      <a:noFill/>
-                    </a:lnL>
-                    <a:lnR w="7620">
-                      <a:noFill/>
-                    </a:lnR>
-                    <a:lnT w="7620">
-                      <a:noFill/>
-                    </a:lnT>
-                    <a:lnB w="7620">
-                      <a:noFill/>
-                    </a:lnB>
-                    <a:solidFill>
-                      <a:srgbClr val="FFFEF8"/>
-                    </a:solidFill>
-                  </a:tcPr>
-                </a:tc>
-              </a:tr>
-              <a:tr h="384048">
-                <a:tc>
-                  <a:txBody>
-                    <a:bodyPr wrap="square">
-                      <a:noAutofit/>
-                    </a:bodyPr>
-                    <a:lstStyle/>
-                    <a:p>
-                      <a:pPr algn="l">
-                        <a:lnSpc>
-                          <a:spcPts val="2070"/>
-                        </a:lnSpc>
-                        <a:buNone/>
-                        <a:defRPr sz="1800" b="0">
-                          <a:solidFill>
-                            <a:srgbClr val="303437"/>
-                          </a:solidFill>
-                          <a:latin typeface="Noto Sans"/>
-                        </a:defRPr>
-                      </a:pPr>
-                      <a:r>
-                        <a:rPr sz="1800" b="0" lang="ja-JP" altLang="en-US">
-                          <a:solidFill>
-                            <a:srgbClr val="303437"/>
-                          </a:solidFill>
-                          <a:latin typeface="Noto Sans"/>
-                          <a:ea typeface="Noto Sans CJK JP"/>
-                          <a:cs typeface="Noto Sans"/>
-                        </a:rPr>
-                        <a:t>unlabeled</a:t>
-                      </a:r>
-                    </a:p>
-                  </a:txBody>
-                  <a:tcPr marL="63500" marR="63500" marT="38100" marB="38100" anchor="ctr">
-                    <a:lnL w="7620">
-                      <a:noFill/>
-                    </a:lnL>
-                    <a:lnR w="7620">
-                      <a:noFill/>
-                    </a:lnR>
-                    <a:lnT w="7620">
-                      <a:noFill/>
-                    </a:lnT>
-                    <a:lnB w="15240">
-                      <a:solidFill>
-                        <a:srgbClr val="626669"/>
-                      </a:solidFill>
-                      <a:prstDash val="solid"/>
-                    </a:lnB>
-                    <a:solidFill>
-                      <a:srgbClr val="FFFEF8"/>
-                    </a:solidFill>
-                  </a:tcPr>
-                </a:tc>
-                <a:tc>
-                  <a:txBody>
-                    <a:bodyPr wrap="square">
-                      <a:noAutofit/>
-                    </a:bodyPr>
-                    <a:lstStyle/>
-                    <a:p>
-                      <a:pPr algn="r">
-                        <a:lnSpc>
-                          <a:spcPts val="2070"/>
-                        </a:lnSpc>
-                        <a:buNone/>
-                        <a:defRPr sz="1800" b="0">
-                          <a:solidFill>
-                            <a:srgbClr val="303437"/>
-                          </a:solidFill>
-                          <a:latin typeface="Noto Sans"/>
-                        </a:defRPr>
-                      </a:pPr>
-                      <a:r>
-                        <a:rPr sz="1800" b="0" lang="ja-JP" altLang="en-US">
-                          <a:solidFill>
-                            <a:srgbClr val="303437"/>
-                          </a:solidFill>
-                          <a:latin typeface="Noto Sans"/>
-                          <a:ea typeface="Noto Sans CJK JP"/>
-                          <a:cs typeface="Noto Sans"/>
-                        </a:rPr>
-                        <a:t>2</a:t>
-                      </a:r>
-                    </a:p>
-                  </a:txBody>
-                  <a:tcPr marL="63500" marR="63500" marT="38100" marB="38100" anchor="ctr">
-                    <a:lnL w="7620">
-                      <a:noFill/>
-                    </a:lnL>
-                    <a:lnR w="7620">
-                      <a:noFill/>
-                    </a:lnR>
-                    <a:lnT w="7620">
-                      <a:noFill/>
-                    </a:lnT>
-                    <a:lnB w="15240">
-                      <a:solidFill>
-                        <a:srgbClr val="626669"/>
-                      </a:solidFill>
-                      <a:prstDash val="solid"/>
-                    </a:lnB>
-                    <a:solidFill>
-                      <a:srgbClr val="FFFEF8"/>
-                    </a:solidFill>
-                  </a:tcPr>
-                </a:tc>
-                <a:tc>
-                  <a:txBody>
-                    <a:bodyPr wrap="square">
-                      <a:noAutofit/>
-                    </a:bodyPr>
-                    <a:lstStyle/>
-                    <a:p>
-                      <a:pPr algn="r">
-                        <a:lnSpc>
-                          <a:spcPts val="2070"/>
-                        </a:lnSpc>
-                        <a:buNone/>
-                        <a:defRPr sz="1800" b="0">
-                          <a:solidFill>
-                            <a:srgbClr val="303437"/>
-                          </a:solidFill>
-                          <a:latin typeface="Noto Sans"/>
-                        </a:defRPr>
-                      </a:pPr>
-                      <a:r>
-                        <a:rPr sz="1800" b="0" lang="ja-JP" altLang="en-US">
-                          <a:solidFill>
-                            <a:srgbClr val="303437"/>
-                          </a:solidFill>
-                          <a:latin typeface="Noto Sans"/>
-                          <a:ea typeface="Noto Sans CJK JP"/>
-                          <a:cs typeface="Noto Sans"/>
-                        </a:rPr>
-                        <a:t>29</a:t>
-                      </a:r>
-                    </a:p>
-                  </a:txBody>
-                  <a:tcPr marL="63500" marR="63500" marT="38100" marB="38100" anchor="ctr">
-                    <a:lnL w="7620">
-                      <a:noFill/>
-                    </a:lnL>
-                    <a:lnR w="7620">
-                      <a:noFill/>
-                    </a:lnR>
-                    <a:lnT w="7620">
-                      <a:noFill/>
-                    </a:lnT>
-                    <a:lnB w="15240">
-                      <a:solidFill>
-                        <a:srgbClr val="626669"/>
-                      </a:solidFill>
-                      <a:prstDash val="solid"/>
-                    </a:lnB>
-                    <a:solidFill>
-                      <a:srgbClr val="FFFEF8"/>
-                    </a:solidFill>
-                  </a:tcPr>
-                </a:tc>
-                <a:tc>
-                  <a:txBody>
-                    <a:bodyPr wrap="square">
-                      <a:noAutofit/>
-                    </a:bodyPr>
-                    <a:lstStyle/>
-                    <a:p>
-                      <a:pPr algn="r">
-                        <a:lnSpc>
-                          <a:spcPts val="2070"/>
-                        </a:lnSpc>
-                        <a:buNone/>
-                        <a:defRPr sz="1800" b="0">
-                          <a:solidFill>
-                            <a:srgbClr val="303437"/>
-                          </a:solidFill>
-                          <a:latin typeface="Noto Sans"/>
-                        </a:defRPr>
-                      </a:pPr>
-                      <a:r>
-                        <a:rPr sz="1800" b="0" lang="ja-JP" altLang="en-US">
-                          <a:solidFill>
-                            <a:srgbClr val="303437"/>
-                          </a:solidFill>
-                          <a:latin typeface="Noto Sans"/>
-                          <a:ea typeface="Noto Sans CJK JP"/>
-                          <a:cs typeface="Noto Sans"/>
-                        </a:rPr>
-                        <a:t>7.44</a:t>
-                      </a:r>
-                    </a:p>
-                  </a:txBody>
-                  <a:tcPr marL="63500" marR="63500" marT="38100" marB="38100" anchor="ctr">
-                    <a:lnL w="7620">
-                      <a:noFill/>
-                    </a:lnL>
-                    <a:lnR w="7620">
-                      <a:noFill/>
-                    </a:lnR>
-                    <a:lnT w="7620">
-                      <a:noFill/>
-                    </a:lnT>
-                    <a:lnB w="15240">
-                      <a:solidFill>
-                        <a:srgbClr val="626669"/>
-                      </a:solidFill>
-                      <a:prstDash val="solid"/>
-                    </a:lnB>
-                    <a:solidFill>
-                      <a:srgbClr val="FFFEF8"/>
-                    </a:solidFill>
-                  </a:tcPr>
-                </a:tc>
-              </a:tr>
-            </a:tbl>
-          </a:graphicData>
-        </a:graphic>
-      </p:graphicFrame>
-      <p:sp>
-        <p:nvSpPr>
-          <p:cNvPr id="5" name="TextBox 4"/>
-          <p:cNvSpPr txBox="1"/>
-          <p:nvPr/>
-        </p:nvSpPr>
-        <p:spPr>
-          <a:xfrm>
-            <a:off x="594360" y="3941063"/>
-            <a:ext cx="7955279" cy="658368"/>
-          </a:xfrm>
-          <a:prstGeom prst="rect">
-            <a:avLst/>
-          </a:prstGeom>
-          <a:noFill/>
-        </p:spPr>
-        <p:txBody>
-          <a:bodyPr wrap="square" lIns="0" rIns="0" tIns="0" bIns="0">
-            <a:noAutofit/>
-          </a:bodyPr>
-          <a:lstStyle/>
-          <a:p>
-            <a:pPr algn="l">
-              <a:lnSpc>
-                <a:spcPts val="1813"/>
-              </a:lnSpc>
-              <a:spcBef>
-                <a:spcPts val="0"/>
-              </a:spcBef>
-              <a:spcAft>
-                <a:spcPts val="0"/>
-              </a:spcAft>
-              <a:buNone/>
-              <a:defRPr sz="1550" b="0">
-                <a:solidFill>
-                  <a:srgbClr val="303437"/>
-                </a:solidFill>
-                <a:latin typeface="Noto Sans"/>
-              </a:defRPr>
-            </a:pPr>
-            <a:r>
-              <a:rPr sz="1550" b="0" lang="ja-JP" altLang="en-US">
-                <a:solidFill>
-                  <a:srgbClr val="303437"/>
-                </a:solidFill>
-                <a:latin typeface="Noto Sans"/>
-                <a:ea typeface="Noto Sans CJK JP"/>
-                <a:cs typeface="Noto Sans"/>
-              </a:rPr>
-              <a:t>二つの発話を別々に数えたUnicode文字数。空白・句読点を含み、トークン数とは異なる。</a:t>
+              <a:t>Appendix: 2. 入力の読み方と二択への変換</a:t>
             </a:r>
           </a:p>
         </p:txBody>
@@ -30798,33 +23553,155 @@
                 <a:ea typeface="Noto Sans CJK JP"/>
                 <a:cs typeface="Noto Sans"/>
               </a:rPr>
-              <a:t>[1] CLUE team. FewCLUE / BUSTM 公式配布、commit 62a02c6f31cf32814cfe522f78ef088228840f8d、2026-10-18参照。</a:t>
-            </a:r>
-          </a:p>
+              <a:t>[1] CLUE team (2021). FewCLUE — BUSTM.  </a:t>
+            </a:r>
+            <a:r>
+              <a:rPr sz="810" b="0" lang="ja-JP" altLang="en-US">
+                <a:solidFill>
+                  <a:srgbClr val="626669"/>
+                </a:solidFill>
+                <a:latin typeface="Noto Sans"/>
+                <a:ea typeface="Noto Sans CJK JP"/>
+                <a:cs typeface="Noto Sans"/>
+                <a:hlinkClick r:id="rId3"/>
+              </a:rPr>
+              <a:t>https://github.com/CLUEbenchmark/FewCLUE/tree/main/datasets/bustm</a:t>
+            </a:r>
+          </a:p>
+        </p:txBody>
+      </p:sp>
+      <p:sp>
+        <p:nvSpPr>
+          <p:cNvPr id="7" name="code-frame"/>
+          <p:cNvSpPr txBox="1"/>
+          <p:nvPr/>
+        </p:nvSpPr>
+        <p:spPr>
+          <a:xfrm>
+            <a:off x="594360" y="1568069"/>
+            <a:ext cx="8046720" cy="1979803"/>
+          </a:xfrm>
+          <a:prstGeom prst="rect">
+            <a:avLst/>
+          </a:prstGeom>
+          <a:solidFill>
+            <a:srgbClr val="EBEDEB"/>
+          </a:solidFill>
+        </p:spPr>
+        <p:txBody>
+          <a:bodyPr wrap="none" lIns="152400" rIns="152400" tIns="54991" bIns="114300">
+            <a:spAutoFit/>
+          </a:bodyPr>
+          <a:lstStyle/>
           <a:p>
             <a:pPr>
               <a:lnSpc>
-                <a:spcPts val="940"/>
-              </a:lnSpc>
-              <a:buNone/>
-              <a:defRPr sz="810" b="0">
-                <a:solidFill>
-                  <a:srgbClr val="303437"/>
-                </a:solidFill>
-                <a:latin typeface="Noto Sans"/>
-              </a:defRPr>
-            </a:pPr>
-            <a:r>
-              <a:rPr sz="810" b="0" lang="ja-JP" altLang="en-US">
-                <a:solidFill>
-                  <a:srgbClr val="626669"/>
-                </a:solidFill>
-                <a:latin typeface="Noto Sans"/>
-                <a:ea typeface="Noto Sans CJK JP"/>
-                <a:cs typeface="Noto Sans"/>
-                <a:hlinkClick r:id="rId2"/>
-              </a:rPr>
-              <a:t>https://github.com/CLUEbenchmark/FewCLUE/tree/62a02c6f31cf32814cfe522f78ef088228840f8d/datasets/bustm</a:t>
+                <a:spcPct val="115000"/>
+              </a:lnSpc>
+              <a:defRPr sz="1700">
+                <a:latin typeface="Noto Sans Mono CJK JP"/>
+              </a:defRPr>
+            </a:pPr>
+            <a:r>
+              <a:t>import json</a:t>
+            </a:r>
+          </a:p>
+          <a:p>
+            <a:pPr>
+              <a:lnSpc>
+                <a:spcPct val="115000"/>
+              </a:lnSpc>
+              <a:defRPr sz="1700">
+                <a:latin typeface="Noto Sans Mono CJK JP"/>
+              </a:defRPr>
+            </a:pPr>
+            <a:r>
+              <a:t>with open("train_0.json", encoding="utf-8") as f:</a:t>
+            </a:r>
+          </a:p>
+          <a:p>
+            <a:pPr>
+              <a:lnSpc>
+                <a:spcPct val="115000"/>
+              </a:lnSpc>
+              <a:defRPr sz="1700">
+                <a:latin typeface="Noto Sans Mono CJK JP"/>
+              </a:defRPr>
+            </a:pPr>
+            <a:r>
+              <a:t>    pair = json.loads(next(f))</a:t>
+            </a:r>
+          </a:p>
+          <a:p>
+            <a:pPr>
+              <a:lnSpc>
+                <a:spcPct val="115000"/>
+              </a:lnSpc>
+              <a:defRPr sz="1700">
+                <a:latin typeface="Noto Sans Mono CJK JP"/>
+              </a:defRPr>
+            </a:pPr>
+            <a:r>
+              <a:t>print(pair["sentence1"])</a:t>
+            </a:r>
+          </a:p>
+          <a:p>
+            <a:pPr>
+              <a:lnSpc>
+                <a:spcPct val="115000"/>
+              </a:lnSpc>
+              <a:defRPr sz="1700">
+                <a:latin typeface="Noto Sans Mono CJK JP"/>
+              </a:defRPr>
+            </a:pPr>
+            <a:r>
+              <a:t>print(pair["sentence2"])</a:t>
+            </a:r>
+          </a:p>
+          <a:p>
+            <a:pPr>
+              <a:lnSpc>
+                <a:spcPct val="115000"/>
+              </a:lnSpc>
+              <a:defRPr sz="1700">
+                <a:latin typeface="Noto Sans Mono CJK JP"/>
+              </a:defRPr>
+            </a:pPr>
+            <a:r>
+              <a:t>print("正解:", pair["label"])</a:t>
+            </a:r>
+          </a:p>
+        </p:txBody>
+      </p:sp>
+      <p:sp>
+        <p:nvSpPr>
+          <p:cNvPr id="8" name="TextBox 7"/>
+          <p:cNvSpPr txBox="1"/>
+          <p:nvPr/>
+        </p:nvSpPr>
+        <p:spPr>
+          <a:xfrm>
+            <a:off x="594360" y="3749039"/>
+            <a:ext cx="7955279" cy="594360"/>
+          </a:xfrm>
+          <a:prstGeom prst="rect">
+            <a:avLst/>
+          </a:prstGeom>
+          <a:noFill/>
+        </p:spPr>
+        <p:txBody>
+          <a:bodyPr wrap="none">
+            <a:spAutoFit/>
+          </a:bodyPr>
+          <a:lstStyle/>
+          <a:p>
+            <a:pPr>
+              <a:defRPr sz="1750">
+                <a:latin typeface="Noto Sans CJK JP"/>
+              </a:defRPr>
+            </a:pPr>
+            <a:r>
+              <a:t>train_0.jsonは1行に1対のJSONを収める。最初の発話対と、その正解ラベルを表示する。</a:t>
             </a:r>
           </a:p>
         </p:txBody>
@@ -30890,7 +23767,7 @@
                 <a:ea typeface="Noto Sans CJK JP"/>
                 <a:cs typeface="Noto Sans"/>
               </a:rPr>
-              <a:t>HELMの説明例は、近い表現でも正解A</a:t>
+              <a:t>二択形式では「いいえ」「はい」から答える</a:t>
             </a:r>
           </a:p>
         </p:txBody>
@@ -30938,7 +23815,7 @@
                 <a:ea typeface="Noto Sans CJK JP"/>
                 <a:cs typeface="Noto Sans"/>
               </a:rPr>
-              <a:t>Appendix: 2. 全ファイル・重複・形式の補足</a:t>
+              <a:t>Appendix: 2. 入力の読み方と二択への変換</a:t>
             </a:r>
           </a:p>
         </p:txBody>
@@ -31543,283 +24420,6 @@
 </p:sld>
 </file>
 
-<file path=ppt/slides/slide49.xml><?xml version="1.0" encoding="utf-8"?>
-<p:sld xmlns:a="http://schemas.openxmlformats.org/drawingml/2006/main" xmlns:p="http://schemas.openxmlformats.org/presentationml/2006/main" xmlns:r="http://schemas.openxmlformats.org/officeDocument/2006/relationships">
-  <p:cSld>
-    <p:spTree>
-      <p:nvGrpSpPr>
-        <p:cNvPr id="1" name=""/>
-        <p:cNvGrpSpPr/>
-        <p:nvPr/>
-      </p:nvGrpSpPr>
-      <p:grpSpPr/>
-      <p:sp>
-        <p:nvSpPr>
-          <p:cNvPr id="2" name="Title 1"/>
-          <p:cNvSpPr>
-            <a:spLocks noGrp="1"/>
-          </p:cNvSpPr>
-          <p:nvPr>
-            <p:ph type="title"/>
-          </p:nvPr>
-        </p:nvSpPr>
-        <p:spPr>
-          <a:xfrm>
-            <a:off x="468172" y="650138"/>
-            <a:ext cx="8206740" cy="616305"/>
-          </a:xfrm>
-        </p:spPr>
-        <p:txBody>
-          <a:bodyPr wrap="square" lIns="0" rIns="0" tIns="0" bIns="0">
-            <a:noAutofit/>
-          </a:bodyPr>
-          <a:lstStyle/>
-          <a:p>
-            <a:pPr algn="l">
-              <a:lnSpc>
-                <a:spcPct val="110000"/>
-              </a:lnSpc>
-              <a:buNone/>
-              <a:defRPr sz="2800" b="0">
-                <a:solidFill>
-                  <a:srgbClr val="303437"/>
-                </a:solidFill>
-                <a:latin typeface="Noto Sans"/>
-              </a:defRPr>
-            </a:pPr>
-            <a:r>
-              <a:rPr sz="2800" b="1" lang="ja-JP" altLang="en-US">
-                <a:solidFill>
-                  <a:srgbClr val="303437"/>
-                </a:solidFill>
-                <a:latin typeface="Noto Sans"/>
-                <a:ea typeface="Noto Sans CJK JP"/>
-                <a:cs typeface="Noto Sans"/>
-              </a:rPr>
-              <a:t>正解理由が付かない対は、文脈を補わずに読む</a:t>
-            </a:r>
-          </a:p>
-        </p:txBody>
-      </p:sp>
-      <p:sp>
-        <p:nvSpPr>
-          <p:cNvPr id="3" name="Text Placeholder 2"/>
-          <p:cNvSpPr>
-            <a:spLocks noGrp="1"/>
-          </p:cNvSpPr>
-          <p:nvPr>
-            <p:ph type="body" idx="1"/>
-          </p:nvPr>
-        </p:nvSpPr>
-        <p:spPr>
-          <a:xfrm>
-            <a:off x="594360" y="1463040"/>
-            <a:ext cx="7955279" cy="3044952"/>
-          </a:xfrm>
-        </p:spPr>
-        <p:txBody>
-          <a:bodyPr wrap="square" tIns="91440" bIns="91440">
-            <a:noAutofit/>
-          </a:bodyPr>
-          <a:lstStyle/>
-          <a:p>
-            <a:pPr marL="457200" indent="-355600">
-              <a:lnSpc>
-                <a:spcPts val="2379"/>
-              </a:lnSpc>
-              <a:spcAft>
-                <a:spcPts val="700"/>
-              </a:spcAft>
-              <a:buSzPct val="66500"/>
-              <a:buFont typeface="Noto Sans CJK JP"/>
-              <a:buChar char="●"/>
-              <a:defRPr sz="2000" b="0">
-                <a:solidFill>
-                  <a:srgbClr val="303437"/>
-                </a:solidFill>
-                <a:latin typeface="Noto Sans"/>
-              </a:defRPr>
-            </a:pPr>
-            <a:r>
-              <a:rPr sz="2000" b="0" lang="ja-JP" altLang="en-US">
-                <a:solidFill>
-                  <a:srgbClr val="303437"/>
-                </a:solidFill>
-                <a:latin typeface="Noto Sans"/>
-                <a:ea typeface="Noto Sans CJK JP"/>
-                <a:cs typeface="Noto Sans"/>
-              </a:rPr>
-              <a:t>実例4の二つの発話は、どちらも好意と相手への問いを含む。しかし、配布ラベルは0で、追加の対話履歴や個別の注釈理由は含まれていない。</a:t>
-            </a:r>
-          </a:p>
-          <a:p>
-            <a:pPr marL="457200" indent="-355600">
-              <a:lnSpc>
-                <a:spcPts val="2379"/>
-              </a:lnSpc>
-              <a:spcAft>
-                <a:spcPts val="0"/>
-              </a:spcAft>
-              <a:buSzPct val="66500"/>
-              <a:buFont typeface="Noto Sans CJK JP"/>
-              <a:buChar char="●"/>
-              <a:defRPr sz="2000" b="0">
-                <a:solidFill>
-                  <a:srgbClr val="303437"/>
-                </a:solidFill>
-                <a:latin typeface="Noto Sans"/>
-              </a:defRPr>
-            </a:pPr>
-            <a:r>
-              <a:rPr sz="2000" b="0" lang="ja-JP" altLang="en-US">
-                <a:solidFill>
-                  <a:srgbClr val="303437"/>
-                </a:solidFill>
-                <a:latin typeface="Noto Sans"/>
-                <a:ea typeface="Noto Sans CJK JP"/>
-                <a:cs typeface="Noto Sans"/>
-              </a:rPr>
-              <a:t>この資料では元ラベルを保持し、なぜ0になったかを推測で説明しない。ラベルの解釈や品質を調べる場合にも、元の発話対と正解を参照できる形が必要になる。</a:t>
-            </a:r>
-          </a:p>
-        </p:txBody>
-      </p:sp>
-      <p:sp>
-        <p:nvSpPr>
-          <p:cNvPr id="4" name="Title 3"/>
-          <p:cNvSpPr>
-            <a:spLocks noGrp="1"/>
-          </p:cNvSpPr>
-          <p:nvPr>
-            <p:ph type="title" idx="2"/>
-          </p:nvPr>
-        </p:nvSpPr>
-        <p:spPr>
-          <a:xfrm>
-            <a:off x="75895" y="0"/>
-            <a:ext cx="8115300" cy="480060"/>
-          </a:xfrm>
-        </p:spPr>
-        <p:txBody>
-          <a:bodyPr wrap="square" lIns="0" rIns="0" tIns="0" bIns="0" anchor="ctr">
-            <a:noAutofit/>
-          </a:bodyPr>
-          <a:lstStyle/>
-          <a:p>
-            <a:pPr algn="l">
-              <a:lnSpc>
-                <a:spcPct val="110000"/>
-              </a:lnSpc>
-              <a:buNone/>
-              <a:defRPr sz="1400" b="0">
-                <a:solidFill>
-                  <a:srgbClr val="303437"/>
-                </a:solidFill>
-                <a:latin typeface="Noto Sans"/>
-              </a:defRPr>
-            </a:pPr>
-            <a:r>
-              <a:rPr sz="1400" b="1" lang="ja-JP" altLang="en-US">
-                <a:solidFill>
-                  <a:srgbClr val="FFFEF8"/>
-                </a:solidFill>
-                <a:latin typeface="Noto Sans"/>
-                <a:ea typeface="Noto Sans CJK JP"/>
-                <a:cs typeface="Noto Sans"/>
-              </a:rPr>
-              <a:t>Appendix: 2. 全ファイル・重複・形式の補足</a:t>
-            </a:r>
-          </a:p>
-        </p:txBody>
-      </p:sp>
-      <p:sp>
-        <p:nvSpPr>
-          <p:cNvPr id="5" name="sources"/>
-          <p:cNvSpPr txBox="1"/>
-          <p:nvPr/>
-        </p:nvSpPr>
-        <p:spPr>
-          <a:xfrm>
-            <a:off x="502920" y="4700016"/>
-            <a:ext cx="8183879" cy="530352"/>
-          </a:xfrm>
-          <a:prstGeom prst="rect">
-            <a:avLst/>
-          </a:prstGeom>
-          <a:noFill/>
-        </p:spPr>
-        <p:txBody>
-          <a:bodyPr wrap="square" lIns="0" rIns="0" tIns="0" bIns="0">
-            <a:noAutofit/>
-          </a:bodyPr>
-          <a:lstStyle/>
-          <a:p>
-            <a:pPr algn="l">
-              <a:lnSpc>
-                <a:spcPts val="940"/>
-              </a:lnSpc>
-              <a:spcBef>
-                <a:spcPts val="0"/>
-              </a:spcBef>
-              <a:spcAft>
-                <a:spcPts val="140"/>
-              </a:spcAft>
-              <a:buNone/>
-              <a:defRPr sz="810" b="0">
-                <a:solidFill>
-                  <a:srgbClr val="303437"/>
-                </a:solidFill>
-                <a:latin typeface="Noto Sans"/>
-              </a:defRPr>
-            </a:pPr>
-            <a:r>
-              <a:rPr sz="810" b="0" lang="ja-JP" altLang="en-US">
-                <a:solidFill>
-                  <a:srgbClr val="626669"/>
-                </a:solidFill>
-                <a:latin typeface="Noto Sans"/>
-                <a:ea typeface="Noto Sans CJK JP"/>
-                <a:cs typeface="Noto Sans"/>
-              </a:rPr>
-              <a:t>[1] CLUE team. FewCLUE / BUSTM 公式配布、commit 62a02c6f31cf32814cfe522f78ef088228840f8d、2026-10-18参照。</a:t>
-            </a:r>
-          </a:p>
-          <a:p>
-            <a:pPr>
-              <a:lnSpc>
-                <a:spcPts val="940"/>
-              </a:lnSpc>
-              <a:buNone/>
-              <a:defRPr sz="810" b="0">
-                <a:solidFill>
-                  <a:srgbClr val="303437"/>
-                </a:solidFill>
-                <a:latin typeface="Noto Sans"/>
-              </a:defRPr>
-            </a:pPr>
-            <a:r>
-              <a:rPr sz="810" b="0" lang="ja-JP" altLang="en-US">
-                <a:solidFill>
-                  <a:srgbClr val="626669"/>
-                </a:solidFill>
-                <a:latin typeface="Noto Sans"/>
-                <a:ea typeface="Noto Sans CJK JP"/>
-                <a:cs typeface="Noto Sans"/>
-                <a:hlinkClick r:id="rId2"/>
-              </a:rPr>
-              <a:t>https://github.com/CLUEbenchmark/FewCLUE/tree/62a02c6f31cf32814cfe522f78ef088228840f8d/datasets/bustm</a:t>
-            </a:r>
-          </a:p>
-        </p:txBody>
-      </p:sp>
-    </p:spTree>
-  </p:cSld>
-  <p:clrMapOvr>
-    <a:masterClrMapping/>
-  </p:clrMapOvr>
-</p:sld>
-</file>
-
 <file path=ppt/slides/slide5.xml><?xml version="1.0" encoding="utf-8"?>
 <p:sld xmlns:a="http://schemas.openxmlformats.org/drawingml/2006/main" xmlns:p="http://schemas.openxmlformats.org/presentationml/2006/main" xmlns:r="http://schemas.openxmlformats.org/officeDocument/2006/relationships">
   <p:cSld>
@@ -31926,7 +24526,7 @@
                 <a:ea typeface="Noto Sans CJK JP"/>
                 <a:cs typeface="Noto Sans"/>
               </a:rPr>
-              <a:t>BUSTMは、OPPOの音声アシスタント「小布助手」で使う短文の意味照合データ。口語の二つの発話を読み、意味が一致するなら1、一致しないなら0を返す。</a:t>
+              <a:t>BUSTMは、OPPOの音声アシスタント「小布助手」に由来する、短文の意味照合データ。口語の二つの発話を読み、意味が一致するなら1、一致しないなら0を返す。</a:t>
             </a:r>
           </a:p>
           <a:p>
@@ -31956,7 +24556,7 @@
                 <a:ea typeface="Noto Sans CJK JP"/>
                 <a:cs typeface="Noto Sans"/>
               </a:rPr>
-              <a:t>同じ操作の言い換えを見分けることは、利用者の意図を認識するために役立つ。話題や語句が似ているだけでは、同じ依頼・質問とは限らない。</a:t>
+              <a:t>同じ操作の言い換えを見分けることは、利用者の意図を認識するために役立つ。話題や語句が似た発話から、依頼や質問の違いを読み取る。</a:t>
             </a:r>
           </a:p>
         </p:txBody>
@@ -32323,7 +24923,7 @@
         <p:spPr>
           <a:xfrm>
             <a:off x="548640" y="1463040"/>
-            <a:ext cx="8046720" cy="1345819"/>
+            <a:ext cx="8046720" cy="1574419"/>
           </a:xfrm>
           <a:prstGeom prst="rect">
             <a:avLst/>
@@ -32471,7 +25071,7 @@
         <p:spPr>
           <a:xfrm>
             <a:off x="548640" y="3040507"/>
-            <a:ext cx="8046720" cy="1526794"/>
+            <a:ext cx="8046720" cy="1755394"/>
           </a:xfrm>
           <a:prstGeom prst="rect">
             <a:avLst/>
@@ -32733,7 +25333,7 @@
         <p:spPr>
           <a:xfrm>
             <a:off x="548640" y="1463040"/>
-            <a:ext cx="8046720" cy="1345819"/>
+            <a:ext cx="8046720" cy="1574419"/>
           </a:xfrm>
           <a:prstGeom prst="rect">
             <a:avLst/>
@@ -32804,7 +25404,7 @@
                 <a:ea typeface="Noto Sans CJK JP"/>
                 <a:cs typeface="Noto Sans"/>
               </a:rPr>
-              <a:t>CLUE team · 固定commit 62a02c6f31cf32814cfe522f78ef088228840f8d</a:t>
+              <a:t>CLUE team · 2021 · 公式配布</a:t>
             </a:r>
           </a:p>
           <a:p>
@@ -32867,7 +25467,7 @@
                 <a:cs typeface="Noto Sans"/>
                 <a:hlinkClick r:id="rId2"/>
               </a:rPr>
-              <a:t>https://github.com/CLUEbenchmark/FewCLUE/tree/62a02c6f31cf32814cfe522f78ef088228840f8d/datasets/bustm</a:t>
+              <a:t>https://github.com/CLUEbenchmark/FewCLUE/tree/main/datasets/bustm</a:t>
             </a:r>
           </a:p>
         </p:txBody>
@@ -32881,7 +25481,7 @@
         <p:spPr>
           <a:xfrm>
             <a:off x="548640" y="3040507"/>
-            <a:ext cx="8046720" cy="1345819"/>
+            <a:ext cx="8046720" cy="1574419"/>
           </a:xfrm>
           <a:prstGeom prst="rect">
             <a:avLst/>
@@ -33015,7 +25615,7 @@
                 <a:cs typeface="Noto Sans"/>
                 <a:hlinkClick r:id="rId3"/>
               </a:rPr>
-              <a:t>https://github.com/CLUEbenchmark/FewCLUE/blob/62a02c6f31cf32814cfe522f78ef088228840f8d/README.md</a:t>
+              <a:t>https://github.com/CLUEbenchmark/FewCLUE/blob/main/README.md</a:t>
             </a:r>
           </a:p>
         </p:txBody>
@@ -33143,7 +25743,7 @@
         <p:spPr>
           <a:xfrm>
             <a:off x="548640" y="1463040"/>
-            <a:ext cx="8046720" cy="1345819"/>
+            <a:ext cx="8046720" cy="1574419"/>
           </a:xfrm>
           <a:prstGeom prst="rect">
             <a:avLst/>
@@ -33291,7 +25891,7 @@
         <p:spPr>
           <a:xfrm>
             <a:off x="548640" y="3040507"/>
-            <a:ext cx="8046720" cy="1345819"/>
+            <a:ext cx="8046720" cy="1574419"/>
           </a:xfrm>
           <a:prstGeom prst="rect">
             <a:avLst/>
@@ -33553,7 +26153,7 @@
         <p:spPr>
           <a:xfrm>
             <a:off x="548640" y="1463040"/>
-            <a:ext cx="8046720" cy="1345819"/>
+            <a:ext cx="8046720" cy="1574419"/>
           </a:xfrm>
           <a:prstGeom prst="rect">
             <a:avLst/>
@@ -33688,154 +26288,6 @@
                 <a:hlinkClick r:id="rId2"/>
               </a:rPr>
               <a:t>https://github.com/CLUEbenchmark/FewCLUE/blob/main/baselines/models_keras/pet/pet_bustm.py</a:t>
-            </a:r>
-          </a:p>
-        </p:txBody>
-      </p:sp>
-      <p:sp>
-        <p:nvSpPr>
-          <p:cNvPr id="5" name="文献 2: run_specs_cleva_v1.conf"/>
-          <p:cNvSpPr txBox="1"/>
-          <p:nvPr/>
-        </p:nvSpPr>
-        <p:spPr>
-          <a:xfrm>
-            <a:off x="548640" y="3040507"/>
-            <a:ext cx="8046720" cy="1345819"/>
-          </a:xfrm>
-          <a:prstGeom prst="rect">
-            <a:avLst/>
-          </a:prstGeom>
-          <a:noFill/>
-        </p:spPr>
-        <p:txBody>
-          <a:bodyPr wrap="square" lIns="0" rIns="0" tIns="0" bIns="0">
-            <a:noAutofit/>
-          </a:bodyPr>
-          <a:lstStyle/>
-          <a:p>
-            <a:pPr algn="l">
-              <a:lnSpc>
-                <a:spcPct val="114000"/>
-              </a:lnSpc>
-              <a:spcBef>
-                <a:spcPts val="0"/>
-              </a:spcBef>
-              <a:spcAft>
-                <a:spcPts val="400"/>
-              </a:spcAft>
-              <a:buNone/>
-              <a:defRPr sz="1850" b="0">
-                <a:solidFill>
-                  <a:srgbClr val="303437"/>
-                </a:solidFill>
-                <a:latin typeface="Noto Sans"/>
-              </a:defRPr>
-            </a:pPr>
-            <a:r>
-              <a:rPr sz="1850" b="1" lang="ja-JP" altLang="en-US">
-                <a:solidFill>
-                  <a:srgbClr val="303437"/>
-                </a:solidFill>
-                <a:latin typeface="Noto Sans"/>
-                <a:ea typeface="Noto Sans CJK JP"/>
-                <a:cs typeface="Noto Sans"/>
-              </a:rPr>
-              <a:t>run_specs_cleva_v1.conf</a:t>
-            </a:r>
-          </a:p>
-          <a:p>
-            <a:pPr algn="l">
-              <a:lnSpc>
-                <a:spcPct val="114000"/>
-              </a:lnSpc>
-              <a:spcBef>
-                <a:spcPts val="0"/>
-              </a:spcBef>
-              <a:spcAft>
-                <a:spcPts val="500"/>
-              </a:spcAft>
-              <a:buNone/>
-              <a:defRPr sz="1250" b="0">
-                <a:solidFill>
-                  <a:srgbClr val="303437"/>
-                </a:solidFill>
-                <a:latin typeface="Noto Sans"/>
-              </a:defRPr>
-            </a:pPr>
-            <a:r>
-              <a:rPr sz="1250" b="0" lang="ja-JP" altLang="en-US">
-                <a:solidFill>
-                  <a:srgbClr val="626669"/>
-                </a:solidFill>
-                <a:latin typeface="Noto Sans"/>
-                <a:ea typeface="Noto Sans CJK JP"/>
-                <a:cs typeface="Noto Sans"/>
-              </a:rPr>
-              <a:t>Stanford CRFM · HELM v0.4.0 · CLEVA設定</a:t>
-            </a:r>
-          </a:p>
-          <a:p>
-            <a:pPr algn="l">
-              <a:lnSpc>
-                <a:spcPct val="114000"/>
-              </a:lnSpc>
-              <a:spcBef>
-                <a:spcPts val="0"/>
-              </a:spcBef>
-              <a:spcAft>
-                <a:spcPts val="400"/>
-              </a:spcAft>
-              <a:buNone/>
-              <a:defRPr sz="1750" b="0">
-                <a:solidFill>
-                  <a:srgbClr val="303437"/>
-                </a:solidFill>
-                <a:latin typeface="Noto Sans"/>
-              </a:defRPr>
-            </a:pPr>
-            <a:r>
-              <a:rPr sz="1750" b="0" lang="ja-JP" altLang="en-US">
-                <a:solidFill>
-                  <a:srgbClr val="303437"/>
-                </a:solidFill>
-                <a:latin typeface="Noto Sans"/>
-                <a:ea typeface="Noto Sans CJK JP"/>
-                <a:cs typeface="Noto Sans"/>
-              </a:rPr>
-              <a:t>短い発話対の下位課題short_utteranceについて、0〜5の六つのprompt IDを登録する。</a:t>
-            </a:r>
-          </a:p>
-          <a:p>
-            <a:pPr algn="l">
-              <a:lnSpc>
-                <a:spcPct val="114000"/>
-              </a:lnSpc>
-              <a:spcBef>
-                <a:spcPts val="0"/>
-              </a:spcBef>
-              <a:spcAft>
-                <a:spcPts val="0"/>
-              </a:spcAft>
-              <a:buNone/>
-              <a:defRPr sz="1050" b="0">
-                <a:solidFill>
-                  <a:srgbClr val="303437"/>
-                </a:solidFill>
-                <a:latin typeface="Noto Sans"/>
-              </a:defRPr>
-            </a:pPr>
-            <a:r>
-              <a:rPr sz="1050" b="0" lang="ja-JP" altLang="en-US">
-                <a:solidFill>
-                  <a:srgbClr val="626669"/>
-                </a:solidFill>
-                <a:latin typeface="Noto Sans"/>
-                <a:ea typeface="Noto Sans CJK JP"/>
-                <a:cs typeface="Noto Sans"/>
-                <a:hlinkClick r:id="rId3"/>
-              </a:rPr>
-              <a:t>https://github.com/stanford-crfm/helm/blob/v0.4.0/src/helm/benchmark/presentation/run_specs_cleva_v1.conf</a:t>
             </a:r>
           </a:p>
         </p:txBody>
@@ -34491,22 +26943,8 @@
                 <a:ea typeface="Noto Sans CJK JP"/>
                 <a:cs typeface="Noto Sans"/>
               </a:rPr>
-              <a:t>[1] CLUE team. FewCLUE / BUSTM 公式配布、commit 62a02c6f31cf32814cfe522f78ef088228840f8d、2026-10-18参照。 train_few_all.json:36行 / id=35</a:t>
-            </a:r>
-          </a:p>
-          <a:p>
-            <a:pPr>
-              <a:lnSpc>
-                <a:spcPts val="940"/>
-              </a:lnSpc>
-              <a:buNone/>
-              <a:defRPr sz="810" b="0">
-                <a:solidFill>
-                  <a:srgbClr val="303437"/>
-                </a:solidFill>
-                <a:latin typeface="Noto Sans"/>
-              </a:defRPr>
-            </a:pPr>
+              <a:t>[1] CLUE team (2021). FewCLUE — BUSTM.  </a:t>
+            </a:r>
             <a:r>
               <a:rPr sz="810" b="0" lang="ja-JP" altLang="en-US">
                 <a:solidFill>
@@ -34515,9 +26953,9 @@
                 <a:latin typeface="Noto Sans"/>
                 <a:ea typeface="Noto Sans CJK JP"/>
                 <a:cs typeface="Noto Sans"/>
-                <a:hlinkClick r:id="rId2"/>
-              </a:rPr>
-              <a:t>https://github.com/CLUEbenchmark/FewCLUE/tree/62a02c6f31cf32814cfe522f78ef088228840f8d/datasets/bustm</a:t>
+                <a:hlinkClick r:id="rId3"/>
+              </a:rPr>
+              <a:t>https://github.com/CLUEbenchmark/FewCLUE/tree/main/datasets/bustm</a:t>
             </a:r>
           </a:p>
         </p:txBody>
@@ -35173,22 +27611,8 @@
                 <a:ea typeface="Noto Sans CJK JP"/>
                 <a:cs typeface="Noto Sans"/>
               </a:rPr>
-              <a:t>[1] CLUE team. FewCLUE / BUSTM 公式配布、commit 62a02c6f31cf32814cfe522f78ef088228840f8d、2026-10-18参照。 test_public.json:11行 / id=479</a:t>
-            </a:r>
-          </a:p>
-          <a:p>
-            <a:pPr>
-              <a:lnSpc>
-                <a:spcPts val="940"/>
-              </a:lnSpc>
-              <a:buNone/>
-              <a:defRPr sz="810" b="0">
-                <a:solidFill>
-                  <a:srgbClr val="303437"/>
-                </a:solidFill>
-                <a:latin typeface="Noto Sans"/>
-              </a:defRPr>
-            </a:pPr>
+              <a:t>[1] CLUE team (2021). FewCLUE — BUSTM.  </a:t>
+            </a:r>
             <a:r>
               <a:rPr sz="810" b="0" lang="ja-JP" altLang="en-US">
                 <a:solidFill>
@@ -35197,9 +27621,9 @@
                 <a:latin typeface="Noto Sans"/>
                 <a:ea typeface="Noto Sans CJK JP"/>
                 <a:cs typeface="Noto Sans"/>
-                <a:hlinkClick r:id="rId2"/>
-              </a:rPr>
-              <a:t>https://github.com/CLUEbenchmark/FewCLUE/tree/62a02c6f31cf32814cfe522f78ef088228840f8d/datasets/bustm</a:t>
+                <a:hlinkClick r:id="rId3"/>
+              </a:rPr>
+              <a:t>https://github.com/CLUEbenchmark/FewCLUE/tree/main/datasets/bustm</a:t>
             </a:r>
           </a:p>
         </p:txBody>
@@ -35855,22 +28279,8 @@
                 <a:ea typeface="Noto Sans CJK JP"/>
                 <a:cs typeface="Noto Sans"/>
               </a:rPr>
-              <a:t>[1] CLUE team. FewCLUE / BUSTM 公式配布、commit 62a02c6f31cf32814cfe522f78ef088228840f8d、2026-10-18参照。 test_public.json:17行 / id=2363</a:t>
-            </a:r>
-          </a:p>
-          <a:p>
-            <a:pPr>
-              <a:lnSpc>
-                <a:spcPts val="940"/>
-              </a:lnSpc>
-              <a:buNone/>
-              <a:defRPr sz="810" b="0">
-                <a:solidFill>
-                  <a:srgbClr val="303437"/>
-                </a:solidFill>
-                <a:latin typeface="Noto Sans"/>
-              </a:defRPr>
-            </a:pPr>
+              <a:t>[1] CLUE team (2021). FewCLUE — BUSTM.  </a:t>
+            </a:r>
             <a:r>
               <a:rPr sz="810" b="0" lang="ja-JP" altLang="en-US">
                 <a:solidFill>
@@ -35879,9 +28289,9 @@
                 <a:latin typeface="Noto Sans"/>
                 <a:ea typeface="Noto Sans CJK JP"/>
                 <a:cs typeface="Noto Sans"/>
-                <a:hlinkClick r:id="rId2"/>
-              </a:rPr>
-              <a:t>https://github.com/CLUEbenchmark/FewCLUE/tree/62a02c6f31cf32814cfe522f78ef088228840f8d/datasets/bustm</a:t>
+                <a:hlinkClick r:id="rId3"/>
+              </a:rPr>
+              <a:t>https://github.com/CLUEbenchmark/FewCLUE/tree/main/datasets/bustm</a:t>
             </a:r>
           </a:p>
         </p:txBody>
@@ -36030,7 +28440,7 @@
                 <a:ea typeface="Noto Sans CJK JP"/>
                 <a:cs typeface="Noto Sans"/>
               </a:rPr>
-              <a:t>入力には語順の崩れ、繰り返し、短い名詞句もある。文法の整った文だけを比較する課題とは異なり、口語の意図を短い文字列から読み取る。</a:t>
+              <a:t>入力には語順の崩れ、繰り返し、短い名詞句もある。口語の意図を、短い文字列から読み取る課題である。</a:t>
             </a:r>
           </a:p>
         </p:txBody>
@@ -36132,22 +28542,8 @@
                 <a:ea typeface="Noto Sans CJK JP"/>
                 <a:cs typeface="Noto Sans"/>
               </a:rPr>
-              <a:t>[1] CLUE team. FewCLUE / BUSTM 公式配布、commit 62a02c6f31cf32814cfe522f78ef088228840f8d、2026-10-18参照。</a:t>
-            </a:r>
-          </a:p>
-          <a:p>
-            <a:pPr>
-              <a:lnSpc>
-                <a:spcPts val="940"/>
-              </a:lnSpc>
-              <a:buNone/>
-              <a:defRPr sz="810" b="0">
-                <a:solidFill>
-                  <a:srgbClr val="303437"/>
-                </a:solidFill>
-                <a:latin typeface="Noto Sans"/>
-              </a:defRPr>
-            </a:pPr>
+              <a:t>[1] CLUE team (2021). FewCLUE — BUSTM.  </a:t>
+            </a:r>
             <a:r>
               <a:rPr sz="810" b="0" lang="ja-JP" altLang="en-US">
                 <a:solidFill>
@@ -36156,9 +28552,9 @@
                 <a:latin typeface="Noto Sans"/>
                 <a:ea typeface="Noto Sans CJK JP"/>
                 <a:cs typeface="Noto Sans"/>
-                <a:hlinkClick r:id="rId2"/>
-              </a:rPr>
-              <a:t>https://github.com/CLUEbenchmark/FewCLUE/tree/62a02c6f31cf32814cfe522f78ef088228840f8d/datasets/bustm</a:t>
+                <a:hlinkClick r:id="rId3"/>
+              </a:rPr>
+              <a:t>https://github.com/CLUEbenchmark/FewCLUE/tree/main/datasets/bustm</a:t>
             </a:r>
           </a:p>
         </p:txBody>

--- a/slides/datasets-in-10-minutes-bustm.pptx
+++ b/slides/datasets-in-10-minutes-bustm.pptx
@@ -29,7 +29,6 @@
     <p:sldId id="277" r:id="rId27"/>
     <p:sldId id="278" r:id="rId28"/>
     <p:sldId id="279" r:id="rId29"/>
-    <p:sldId id="280" r:id="rId30"/>
     <p:sldId id="283" r:id="rId33"/>
     <p:sldId id="284" r:id="rId34"/>
     <p:sldId id="285" r:id="rId35"/>
@@ -50,7 +49,6 @@
     <p:sldId id="305" r:id="rId55"/>
     <p:sldId id="306" r:id="rId56"/>
     <p:sldId id="307" r:id="rId57"/>
-    <p:sldId id="308" r:id="rId58"/>
     <p:sldId id="309" r:id="rId59"/>
   </p:sldIdLst>
   <p:sldSz cx="9144000" cy="5143500" type="screen16x9"/>
@@ -14899,7 +14897,7 @@
                 <a:ea typeface="Noto Sans CJK JP"/>
                 <a:cs typeface="Noto Sans"/>
               </a:rPr>
-              <a:t>CLEVAでの利用と公開範囲</a:t>
+              <a:t>公開配布と利用条件</a:t>
             </a:r>
           </a:p>
         </p:txBody>
@@ -14947,7 +14945,7 @@
                 <a:ea typeface="Noto Sans CJK JP"/>
                 <a:cs typeface="Noto Sans"/>
               </a:rPr>
-              <a:t>4. CLEVAでの利用と公開範囲</a:t>
+              <a:t>4. 公開配布と利用条件</a:t>
             </a:r>
           </a:p>
         </p:txBody>
@@ -14960,7 +14958,7 @@
 </p:sld>
 </file>
 
-<file path=ppt/slides/slide25.xml><?xml version="1.0" encoding="utf-8"?>
+<file path=ppt/slides/slide26.xml><?xml version="1.0" encoding="utf-8"?>
 <p:sld xmlns:a="http://schemas.openxmlformats.org/drawingml/2006/main" xmlns:p="http://schemas.openxmlformats.org/presentationml/2006/main" xmlns:r="http://schemas.openxmlformats.org/officeDocument/2006/relationships">
   <p:cSld>
     <p:spTree>
@@ -15013,7 +15011,7 @@
                 <a:ea typeface="Noto Sans CJK JP"/>
                 <a:cs typeface="Noto Sans"/>
               </a:rPr>
-              <a:t>CLEVAは、短い発話の言い換え判定へ採用した</a:t>
+              <a:t>公式配布から入手でき、利用条件の確認が必要</a:t>
             </a:r>
           </a:p>
         </p:txBody>
@@ -15042,91 +15040,61 @@
           <a:p>
             <a:pPr marL="457200" indent="-355600">
               <a:lnSpc>
-                <a:spcPts val="2379"/>
+                <a:spcPts val="2320"/>
               </a:lnSpc>
               <a:spcAft>
                 <a:spcPts val="700"/>
               </a:spcAft>
-              <a:buSzPct val="66500"/>
+              <a:buSzPct val="68205"/>
               <a:buFont typeface="Noto Sans CJK JP"/>
               <a:buChar char="●"/>
-              <a:defRPr sz="2000" b="0">
-                <a:solidFill>
-                  <a:srgbClr val="303437"/>
-                </a:solidFill>
-                <a:latin typeface="Noto Sans"/>
-              </a:defRPr>
-            </a:pPr>
-            <a:r>
-              <a:rPr sz="2000" b="0" lang="ja-JP" altLang="en-US">
-                <a:solidFill>
-                  <a:srgbClr val="303437"/>
-                </a:solidFill>
-                <a:latin typeface="Noto Sans"/>
-                <a:ea typeface="Noto Sans CJK JP"/>
-                <a:cs typeface="Noto Sans"/>
-              </a:rPr>
-              <a:t>2023年のCLEVAは、CLUEとFewCLUEの発話対を二択形式に直し、同じことを述べているかを正解率で評価する。短い発話の課題にBUSTMを用いる。</a:t>
+              <a:defRPr sz="1950" b="0">
+                <a:solidFill>
+                  <a:srgbClr val="303437"/>
+                </a:solidFill>
+                <a:latin typeface="Noto Sans"/>
+              </a:defRPr>
+            </a:pPr>
+            <a:r>
+              <a:rPr sz="1950" b="0" lang="ja-JP" altLang="en-US">
+                <a:solidFill>
+                  <a:srgbClr val="303437"/>
+                </a:solidFill>
+                <a:latin typeface="Noto Sans"/>
+                <a:ea typeface="Noto Sans CJK JP"/>
+                <a:cs typeface="Noto Sans"/>
+              </a:rPr>
+              <a:t>OPPOの公式リポジトリは、FewCLUEでのBUSTM配布を案内し、2021年のデータセットの引用方法を示している。</a:t>
             </a:r>
           </a:p>
           <a:p>
             <a:pPr marL="457200" indent="-355600">
               <a:lnSpc>
-                <a:spcPts val="2379"/>
-              </a:lnSpc>
-              <a:spcAft>
-                <a:spcPts val="0"/>
-              </a:spcAft>
-              <a:buSzPct val="66500"/>
+                <a:spcPts val="2320"/>
+              </a:lnSpc>
+              <a:spcAft>
+                <a:spcPts val="0"/>
+              </a:spcAft>
+              <a:buSzPct val="68205"/>
               <a:buFont typeface="Noto Sans CJK JP"/>
               <a:buChar char="●"/>
-              <a:defRPr sz="2000" b="0">
-                <a:solidFill>
-                  <a:srgbClr val="303437"/>
-                </a:solidFill>
-                <a:latin typeface="Noto Sans"/>
-              </a:defRPr>
-            </a:pPr>
-            <a:r>
-              <a:rPr sz="2000" b="0" lang="ja-JP" altLang="en-US">
-                <a:solidFill>
-                  <a:srgbClr val="303437"/>
-                </a:solidFill>
-                <a:latin typeface="Noto Sans"/>
-                <a:ea typeface="Noto Sans CJK JP"/>
-                <a:cs typeface="Noto Sans"/>
-              </a:rPr>
-              <a:t>実例1の「怒りっぽいか」を尋ねる二つの発話は、CLEVA論文にも掲載されている。HELMにも同課題の評価実装が公開されている。</a:t>
-            </a:r>
-          </a:p>
-          <a:p>
-            <a:pPr marL="457200" indent="-355600">
-              <a:lnSpc>
-                <a:spcPts val="2379"/>
-              </a:lnSpc>
-              <a:spcAft>
-                <a:spcPts val="0"/>
-              </a:spcAft>
-              <a:buSzPct val="66500"/>
-              <a:buFont typeface="Noto Sans CJK JP"/>
-              <a:buChar char="●"/>
-              <a:defRPr sz="2000" b="0">
-                <a:solidFill>
-                  <a:srgbClr val="303437"/>
-                </a:solidFill>
-                <a:latin typeface="Noto Sans"/>
-              </a:defRPr>
-            </a:pPr>
-            <a:r>
-              <a:rPr sz="2000" b="0" lang="ja-JP" altLang="en-US">
-                <a:solidFill>
-                  <a:srgbClr val="303437"/>
-                </a:solidFill>
-                <a:latin typeface="Noto Sans"/>
-                <a:ea typeface="Noto Sans CJK JP"/>
-                <a:cs typeface="Noto Sans"/>
-              </a:rPr>
-              <a:t>CLEVAが評価に使ったBUSTMの問題数は、公開説明には記されていない。</a:t>
+              <a:defRPr sz="1950" b="0">
+                <a:solidFill>
+                  <a:srgbClr val="303437"/>
+                </a:solidFill>
+                <a:latin typeface="Noto Sans"/>
+              </a:defRPr>
+            </a:pPr>
+            <a:r>
+              <a:rPr sz="1950" b="0" lang="ja-JP" altLang="en-US">
+                <a:solidFill>
+                  <a:srgbClr val="303437"/>
+                </a:solidFill>
+                <a:latin typeface="Noto Sans"/>
+                <a:ea typeface="Noto Sans CJK JP"/>
+                <a:cs typeface="Noto Sans"/>
+              </a:rPr>
+              <a:t>OPPOのリポジトリにはライセンスが明示されていない。FewCLUEのREADMEでも、ライセンス欄は「追加中」とされている。再利用・再配布の条件は配布元へ確認する。</a:t>
             </a:r>
           </a:p>
         </p:txBody>
@@ -15174,7 +15142,310 @@
                 <a:ea typeface="Noto Sans CJK JP"/>
                 <a:cs typeface="Noto Sans"/>
               </a:rPr>
-              <a:t>4. CLEVAでの利用と公開範囲</a:t>
+              <a:t>4. 公開配布と利用条件</a:t>
+            </a:r>
+          </a:p>
+        </p:txBody>
+      </p:sp>
+      <p:sp>
+        <p:nvSpPr>
+          <p:cNvPr id="5" name="sources"/>
+          <p:cNvSpPr txBox="1"/>
+          <p:nvPr/>
+        </p:nvSpPr>
+        <p:spPr>
+          <a:xfrm>
+            <a:off x="502920" y="4517136"/>
+            <a:ext cx="8183879" cy="530352"/>
+          </a:xfrm>
+          <a:prstGeom prst="rect">
+            <a:avLst/>
+          </a:prstGeom>
+          <a:noFill/>
+        </p:spPr>
+        <p:txBody>
+          <a:bodyPr wrap="square" lIns="0" rIns="0" tIns="0" bIns="0">
+            <a:noAutofit/>
+          </a:bodyPr>
+          <a:lstStyle/>
+          <a:p>
+            <a:pPr algn="l">
+              <a:lnSpc>
+                <a:spcPts val="940"/>
+              </a:lnSpc>
+              <a:spcBef>
+                <a:spcPts val="0"/>
+              </a:spcBef>
+              <a:spcAft>
+                <a:spcPts val="140"/>
+              </a:spcAft>
+              <a:buNone/>
+              <a:defRPr sz="810" b="0">
+                <a:solidFill>
+                  <a:srgbClr val="303437"/>
+                </a:solidFill>
+                <a:latin typeface="Noto Sans"/>
+              </a:defRPr>
+            </a:pPr>
+            <a:r>
+              <a:rPr sz="810" b="0" lang="ja-JP" altLang="en-US">
+                <a:solidFill>
+                  <a:srgbClr val="626669"/>
+                </a:solidFill>
+                <a:latin typeface="Noto Sans"/>
+                <a:ea typeface="Noto Sans CJK JP"/>
+                <a:cs typeface="Noto Sans"/>
+              </a:rPr>
+              <a:t>[1] OPPO XiaoBu Conversational-AI Center (2021). BUSTM: OPPO XiaoBu Dialogue Short Text Matching Dataset.  </a:t>
+            </a:r>
+            <a:r>
+              <a:rPr sz="810" b="0" lang="ja-JP" altLang="en-US">
+                <a:solidFill>
+                  <a:srgbClr val="626669"/>
+                </a:solidFill>
+                <a:latin typeface="Noto Sans"/>
+                <a:ea typeface="Noto Sans CJK JP"/>
+                <a:cs typeface="Noto Sans"/>
+                <a:hlinkClick r:id="rId2"/>
+              </a:rPr>
+              <a:t>https://github.com/xiaobu-coai/BUSTM</a:t>
+            </a:r>
+          </a:p>
+          <a:p>
+            <a:pPr>
+              <a:lnSpc>
+                <a:spcPts val="940"/>
+              </a:lnSpc>
+              <a:spcAft>
+                <a:spcPts val="140"/>
+              </a:spcAft>
+              <a:buNone/>
+              <a:defRPr sz="810" b="0">
+                <a:solidFill>
+                  <a:srgbClr val="303437"/>
+                </a:solidFill>
+                <a:latin typeface="Noto Sans"/>
+              </a:defRPr>
+            </a:pPr>
+            <a:r>
+              <a:rPr sz="810" b="0" lang="ja-JP" altLang="en-US">
+                <a:solidFill>
+                  <a:srgbClr val="626669"/>
+                </a:solidFill>
+                <a:latin typeface="Noto Sans"/>
+                <a:ea typeface="Noto Sans CJK JP"/>
+                <a:cs typeface="Noto Sans"/>
+              </a:rPr>
+              <a:t>[2] CLUE team (2021). FewCLUE — README.  </a:t>
+            </a:r>
+            <a:r>
+              <a:rPr sz="810" b="0" lang="ja-JP" altLang="en-US">
+                <a:solidFill>
+                  <a:srgbClr val="626669"/>
+                </a:solidFill>
+                <a:latin typeface="Noto Sans"/>
+                <a:ea typeface="Noto Sans CJK JP"/>
+                <a:cs typeface="Noto Sans"/>
+                <a:hlinkClick r:id="rId4"/>
+              </a:rPr>
+              <a:t>https://github.com/CLUEbenchmark/FewCLUE/blob/main/README.md</a:t>
+            </a:r>
+          </a:p>
+        </p:txBody>
+      </p:sp>
+    </p:spTree>
+  </p:cSld>
+  <p:clrMapOvr>
+    <a:masterClrMapping/>
+  </p:clrMapOvr>
+</p:sld>
+</file>
+
+<file path=ppt/slides/slide27.xml><?xml version="1.0" encoding="utf-8"?>
+<p:sld xmlns:a="http://schemas.openxmlformats.org/drawingml/2006/main" xmlns:p="http://schemas.openxmlformats.org/presentationml/2006/main" xmlns:r="http://schemas.openxmlformats.org/officeDocument/2006/relationships">
+  <p:cSld>
+    <p:spTree>
+      <p:nvGrpSpPr>
+        <p:cNvPr id="1" name=""/>
+        <p:cNvGrpSpPr/>
+        <p:nvPr/>
+      </p:nvGrpSpPr>
+      <p:grpSpPr/>
+      <p:sp>
+        <p:nvSpPr>
+          <p:cNvPr id="2" name="Title 1"/>
+          <p:cNvSpPr>
+            <a:spLocks noGrp="1"/>
+          </p:cNvSpPr>
+          <p:nvPr>
+            <p:ph type="title"/>
+          </p:nvPr>
+        </p:nvSpPr>
+        <p:spPr>
+          <a:xfrm>
+            <a:off x="468172" y="650138"/>
+            <a:ext cx="8206740" cy="616305"/>
+          </a:xfrm>
+        </p:spPr>
+        <p:txBody>
+          <a:bodyPr wrap="square" lIns="0" rIns="0" tIns="0" bIns="0">
+            <a:noAutofit/>
+          </a:bodyPr>
+          <a:lstStyle/>
+          <a:p>
+            <a:pPr algn="l">
+              <a:lnSpc>
+                <a:spcPct val="110000"/>
+              </a:lnSpc>
+              <a:buNone/>
+              <a:defRPr sz="2800" b="0">
+                <a:solidFill>
+                  <a:srgbClr val="303437"/>
+                </a:solidFill>
+                <a:latin typeface="Noto Sans"/>
+              </a:defRPr>
+            </a:pPr>
+            <a:r>
+              <a:rPr sz="2800" b="1" lang="ja-JP" altLang="en-US">
+                <a:solidFill>
+                  <a:srgbClr val="303437"/>
+                </a:solidFill>
+                <a:latin typeface="Noto Sans"/>
+                <a:ea typeface="Noto Sans CJK JP"/>
+                <a:cs typeface="Noto Sans"/>
+              </a:rPr>
+              <a:t>まとめ：口語の意味を、少数例で照合する</a:t>
+            </a:r>
+          </a:p>
+        </p:txBody>
+      </p:sp>
+      <p:sp>
+        <p:nvSpPr>
+          <p:cNvPr id="3" name="Text Placeholder 2"/>
+          <p:cNvSpPr>
+            <a:spLocks noGrp="1"/>
+          </p:cNvSpPr>
+          <p:nvPr>
+            <p:ph type="body" idx="1"/>
+          </p:nvPr>
+        </p:nvSpPr>
+        <p:spPr>
+          <a:xfrm>
+            <a:off x="594360" y="1463040"/>
+            <a:ext cx="7955279" cy="3044952"/>
+          </a:xfrm>
+        </p:spPr>
+        <p:txBody>
+          <a:bodyPr wrap="square" tIns="91440" bIns="91440">
+            <a:noAutofit/>
+          </a:bodyPr>
+          <a:lstStyle/>
+          <a:p>
+            <a:pPr marL="457200" indent="-355600">
+              <a:lnSpc>
+                <a:spcPts val="2379"/>
+              </a:lnSpc>
+              <a:spcAft>
+                <a:spcPts val="700"/>
+              </a:spcAft>
+              <a:buSzPct val="66500"/>
+              <a:buFont typeface="Noto Sans CJK JP"/>
+              <a:buChar char="●"/>
+              <a:defRPr sz="2000" b="0">
+                <a:solidFill>
+                  <a:srgbClr val="303437"/>
+                </a:solidFill>
+                <a:latin typeface="Noto Sans"/>
+              </a:defRPr>
+            </a:pPr>
+            <a:r>
+              <a:rPr sz="2000" b="0" lang="ja-JP" altLang="en-US">
+                <a:solidFill>
+                  <a:srgbClr val="303437"/>
+                </a:solidFill>
+                <a:latin typeface="Noto Sans"/>
+                <a:ea typeface="Noto Sans CJK JP"/>
+                <a:cs typeface="Noto Sans"/>
+              </a:rPr>
+              <a:t>BUSTMは、小布助手に由来する短い中国語発話対の二値判定データ。言い換え、異なる操作、時点や欲求の違いを扱い、学習・開発を各32件から始める。</a:t>
+            </a:r>
+          </a:p>
+          <a:p>
+            <a:pPr marL="457200" indent="-355600">
+              <a:lnSpc>
+                <a:spcPts val="2379"/>
+              </a:lnSpc>
+              <a:spcAft>
+                <a:spcPts val="0"/>
+              </a:spcAft>
+              <a:buSzPct val="66500"/>
+              <a:buFont typeface="Noto Sans CJK JP"/>
+              <a:buChar char="●"/>
+              <a:defRPr sz="2000" b="0">
+                <a:solidFill>
+                  <a:srgbClr val="303437"/>
+                </a:solidFill>
+                <a:latin typeface="Noto Sans"/>
+              </a:defRPr>
+            </a:pPr>
+            <a:r>
+              <a:rPr sz="2000" b="0" lang="ja-JP" altLang="en-US">
+                <a:solidFill>
+                  <a:srgbClr val="303437"/>
+                </a:solidFill>
+                <a:latin typeface="Noto Sans"/>
+                <a:ea typeface="Noto Sans CJK JP"/>
+                <a:cs typeface="Noto Sans"/>
+              </a:rPr>
+              <a:t>FewCLUEの公開テストは1,772件。2021年のEFLの報告正解率は71.8%で、各100問を解いた人間評価は88%。</a:t>
+            </a:r>
+          </a:p>
+        </p:txBody>
+      </p:sp>
+      <p:sp>
+        <p:nvSpPr>
+          <p:cNvPr id="4" name="Title 3"/>
+          <p:cNvSpPr>
+            <a:spLocks noGrp="1"/>
+          </p:cNvSpPr>
+          <p:nvPr>
+            <p:ph type="title" idx="2"/>
+          </p:nvPr>
+        </p:nvSpPr>
+        <p:spPr>
+          <a:xfrm>
+            <a:off x="75895" y="0"/>
+            <a:ext cx="8115300" cy="480060"/>
+          </a:xfrm>
+        </p:spPr>
+        <p:txBody>
+          <a:bodyPr wrap="square" lIns="0" rIns="0" tIns="0" bIns="0" anchor="ctr">
+            <a:noAutofit/>
+          </a:bodyPr>
+          <a:lstStyle/>
+          <a:p>
+            <a:pPr algn="l">
+              <a:lnSpc>
+                <a:spcPct val="110000"/>
+              </a:lnSpc>
+              <a:buNone/>
+              <a:defRPr sz="1400" b="0">
+                <a:solidFill>
+                  <a:srgbClr val="303437"/>
+                </a:solidFill>
+                <a:latin typeface="Noto Sans"/>
+              </a:defRPr>
+            </a:pPr>
+            <a:r>
+              <a:rPr sz="1400" b="1" lang="ja-JP" altLang="en-US">
+                <a:solidFill>
+                  <a:srgbClr val="FFFEF8"/>
+                </a:solidFill>
+                <a:latin typeface="Noto Sans"/>
+                <a:ea typeface="Noto Sans CJK JP"/>
+                <a:cs typeface="Noto Sans"/>
+              </a:rPr>
+              <a:t>4. 公開配布と利用条件</a:t>
             </a:r>
           </a:p>
         </p:txBody>
@@ -15228,7 +15499,7 @@
                 <a:ea typeface="Noto Sans CJK JP"/>
                 <a:cs typeface="Noto Sans"/>
               </a:rPr>
-              <a:t>[1] Li et al. (2023). CLEVA: Chinese Language Models EVAluation Platform. EMNLP: System Demonstrations.</a:t>
+              <a:t>[1] Xu et al. (2021). FewCLUE: A Chinese Few-shot Learning Evaluation Benchmark. arXiv:2107.07498v2. </a:t>
             </a:r>
             <a:r>
               <a:rPr sz="810" b="0" lang="ja-JP" altLang="en-US">
@@ -15238,20 +15509,9 @@
                 <a:latin typeface="Noto Sans"/>
                 <a:ea typeface="Noto Sans CJK JP"/>
                 <a:cs typeface="Noto Sans"/>
-              </a:rPr>
-              <a:t>  </a:t>
-            </a:r>
-            <a:r>
-              <a:rPr sz="810" b="0" lang="ja-JP" altLang="en-US">
-                <a:solidFill>
-                  <a:srgbClr val="626669"/>
-                </a:solidFill>
-                <a:latin typeface="Noto Sans"/>
-                <a:ea typeface="Noto Sans CJK JP"/>
-                <a:cs typeface="Noto Sans"/>
                 <a:hlinkClick r:id="rId2"/>
               </a:rPr>
-              <a:t>https://aclanthology.org/2023.emnlp-demo.17/</a:t>
+              <a:t>https://arxiv.org/abs/2107.07498</a:t>
             </a:r>
           </a:p>
         </p:txBody>
@@ -15286,128 +15546,45 @@
         </p:nvSpPr>
         <p:spPr>
           <a:xfrm>
-            <a:off x="468172" y="650138"/>
-            <a:ext cx="8206740" cy="616305"/>
+            <a:off x="548640" y="2484835"/>
+            <a:ext cx="8046720" cy="585216"/>
           </a:xfrm>
         </p:spPr>
         <p:txBody>
-          <a:bodyPr wrap="square" lIns="0" rIns="0" tIns="0" bIns="0">
+          <a:bodyPr wrap="square" lIns="0" rIns="0" tIns="0" bIns="0" anchor="ctr">
             <a:noAutofit/>
           </a:bodyPr>
           <a:lstStyle/>
           <a:p>
-            <a:pPr algn="l">
+            <a:pPr algn="ctr">
               <a:lnSpc>
                 <a:spcPct val="110000"/>
               </a:lnSpc>
               <a:buNone/>
-              <a:defRPr sz="2800" b="0">
-                <a:solidFill>
-                  <a:srgbClr val="303437"/>
-                </a:solidFill>
-                <a:latin typeface="Noto Sans"/>
-              </a:defRPr>
-            </a:pPr>
-            <a:r>
-              <a:rPr sz="2800" b="1" lang="ja-JP" altLang="en-US">
-                <a:solidFill>
-                  <a:srgbClr val="303437"/>
-                </a:solidFill>
-                <a:latin typeface="Noto Sans"/>
-                <a:ea typeface="Noto Sans CJK JP"/>
-                <a:cs typeface="Noto Sans"/>
-              </a:rPr>
-              <a:t>公式配布から入手でき、利用条件の確認が必要</a:t>
+              <a:defRPr sz="3600" b="0">
+                <a:solidFill>
+                  <a:srgbClr val="303437"/>
+                </a:solidFill>
+                <a:latin typeface="Noto Sans"/>
+              </a:defRPr>
+            </a:pPr>
+            <a:r>
+              <a:rPr sz="3600" b="1" lang="ja-JP" altLang="en-US">
+                <a:solidFill>
+                  <a:srgbClr val="303437"/>
+                </a:solidFill>
+                <a:latin typeface="Noto Sans"/>
+                <a:ea typeface="Noto Sans CJK JP"/>
+                <a:cs typeface="Noto Sans"/>
+              </a:rPr>
+              <a:t>Appendix</a:t>
             </a:r>
           </a:p>
         </p:txBody>
       </p:sp>
       <p:sp>
         <p:nvSpPr>
-          <p:cNvPr id="3" name="Text Placeholder 2"/>
-          <p:cNvSpPr>
-            <a:spLocks noGrp="1"/>
-          </p:cNvSpPr>
-          <p:nvPr>
-            <p:ph type="body" idx="1"/>
-          </p:nvPr>
-        </p:nvSpPr>
-        <p:spPr>
-          <a:xfrm>
-            <a:off x="594360" y="1463040"/>
-            <a:ext cx="7955279" cy="3044952"/>
-          </a:xfrm>
-        </p:spPr>
-        <p:txBody>
-          <a:bodyPr wrap="square" tIns="91440" bIns="91440">
-            <a:noAutofit/>
-          </a:bodyPr>
-          <a:lstStyle/>
-          <a:p>
-            <a:pPr marL="457200" indent="-355600">
-              <a:lnSpc>
-                <a:spcPts val="2320"/>
-              </a:lnSpc>
-              <a:spcAft>
-                <a:spcPts val="700"/>
-              </a:spcAft>
-              <a:buSzPct val="68205"/>
-              <a:buFont typeface="Noto Sans CJK JP"/>
-              <a:buChar char="●"/>
-              <a:defRPr sz="1950" b="0">
-                <a:solidFill>
-                  <a:srgbClr val="303437"/>
-                </a:solidFill>
-                <a:latin typeface="Noto Sans"/>
-              </a:defRPr>
-            </a:pPr>
-            <a:r>
-              <a:rPr sz="1950" b="0" lang="ja-JP" altLang="en-US">
-                <a:solidFill>
-                  <a:srgbClr val="303437"/>
-                </a:solidFill>
-                <a:latin typeface="Noto Sans"/>
-                <a:ea typeface="Noto Sans CJK JP"/>
-                <a:cs typeface="Noto Sans"/>
-              </a:rPr>
-              <a:t>OPPOの公式リポジトリは、FewCLUEでのBUSTM配布を案内し、2021年のデータセットの引用方法を示している。</a:t>
-            </a:r>
-          </a:p>
-          <a:p>
-            <a:pPr marL="457200" indent="-355600">
-              <a:lnSpc>
-                <a:spcPts val="2320"/>
-              </a:lnSpc>
-              <a:spcAft>
-                <a:spcPts val="0"/>
-              </a:spcAft>
-              <a:buSzPct val="68205"/>
-              <a:buFont typeface="Noto Sans CJK JP"/>
-              <a:buChar char="●"/>
-              <a:defRPr sz="1950" b="0">
-                <a:solidFill>
-                  <a:srgbClr val="303437"/>
-                </a:solidFill>
-                <a:latin typeface="Noto Sans"/>
-              </a:defRPr>
-            </a:pPr>
-            <a:r>
-              <a:rPr sz="1950" b="0" lang="ja-JP" altLang="en-US">
-                <a:solidFill>
-                  <a:srgbClr val="303437"/>
-                </a:solidFill>
-                <a:latin typeface="Noto Sans"/>
-                <a:ea typeface="Noto Sans CJK JP"/>
-                <a:cs typeface="Noto Sans"/>
-              </a:rPr>
-              <a:t>OPPOのリポジトリにはライセンスが明示されていない。FewCLUEのREADMEでも、ライセンス欄は「追加中」とされている。再利用・再配布の条件は配布元へ確認する。</a:t>
-            </a:r>
-          </a:p>
-        </p:txBody>
-      </p:sp>
-      <p:sp>
-        <p:nvSpPr>
-          <p:cNvPr id="4" name="Title 3"/>
+          <p:cNvPr id="3" name="Title 2"/>
           <p:cNvSpPr>
             <a:spLocks noGrp="1"/>
           </p:cNvSpPr>
@@ -15448,113 +15625,7 @@
                 <a:ea typeface="Noto Sans CJK JP"/>
                 <a:cs typeface="Noto Sans"/>
               </a:rPr>
-              <a:t>4. CLEVAでの利用と公開範囲</a:t>
-            </a:r>
-          </a:p>
-        </p:txBody>
-      </p:sp>
-      <p:sp>
-        <p:nvSpPr>
-          <p:cNvPr id="5" name="sources"/>
-          <p:cNvSpPr txBox="1"/>
-          <p:nvPr/>
-        </p:nvSpPr>
-        <p:spPr>
-          <a:xfrm>
-            <a:off x="502920" y="4517136"/>
-            <a:ext cx="8183879" cy="530352"/>
-          </a:xfrm>
-          <a:prstGeom prst="rect">
-            <a:avLst/>
-          </a:prstGeom>
-          <a:noFill/>
-        </p:spPr>
-        <p:txBody>
-          <a:bodyPr wrap="square" lIns="0" rIns="0" tIns="0" bIns="0">
-            <a:noAutofit/>
-          </a:bodyPr>
-          <a:lstStyle/>
-          <a:p>
-            <a:pPr algn="l">
-              <a:lnSpc>
-                <a:spcPts val="940"/>
-              </a:lnSpc>
-              <a:spcBef>
-                <a:spcPts val="0"/>
-              </a:spcBef>
-              <a:spcAft>
-                <a:spcPts val="140"/>
-              </a:spcAft>
-              <a:buNone/>
-              <a:defRPr sz="810" b="0">
-                <a:solidFill>
-                  <a:srgbClr val="303437"/>
-                </a:solidFill>
-                <a:latin typeface="Noto Sans"/>
-              </a:defRPr>
-            </a:pPr>
-            <a:r>
-              <a:rPr sz="810" b="0" lang="ja-JP" altLang="en-US">
-                <a:solidFill>
-                  <a:srgbClr val="626669"/>
-                </a:solidFill>
-                <a:latin typeface="Noto Sans"/>
-                <a:ea typeface="Noto Sans CJK JP"/>
-                <a:cs typeface="Noto Sans"/>
-              </a:rPr>
-              <a:t>[1] OPPO XiaoBu Conversational-AI Center (2021). BUSTM: OPPO XiaoBu Dialogue Short Text Matching Dataset.  </a:t>
-            </a:r>
-            <a:r>
-              <a:rPr sz="810" b="0" lang="ja-JP" altLang="en-US">
-                <a:solidFill>
-                  <a:srgbClr val="626669"/>
-                </a:solidFill>
-                <a:latin typeface="Noto Sans"/>
-                <a:ea typeface="Noto Sans CJK JP"/>
-                <a:cs typeface="Noto Sans"/>
-                <a:hlinkClick r:id="rId2"/>
-              </a:rPr>
-              <a:t>https://github.com/xiaobu-coai/BUSTM</a:t>
-            </a:r>
-          </a:p>
-          <a:p>
-            <a:pPr>
-              <a:lnSpc>
-                <a:spcPts val="940"/>
-              </a:lnSpc>
-              <a:spcAft>
-                <a:spcPts val="140"/>
-              </a:spcAft>
-              <a:buNone/>
-              <a:defRPr sz="810" b="0">
-                <a:solidFill>
-                  <a:srgbClr val="303437"/>
-                </a:solidFill>
-                <a:latin typeface="Noto Sans"/>
-              </a:defRPr>
-            </a:pPr>
-            <a:r>
-              <a:rPr sz="810" b="0" lang="ja-JP" altLang="en-US">
-                <a:solidFill>
-                  <a:srgbClr val="626669"/>
-                </a:solidFill>
-                <a:latin typeface="Noto Sans"/>
-                <a:ea typeface="Noto Sans CJK JP"/>
-                <a:cs typeface="Noto Sans"/>
-              </a:rPr>
-              <a:t>[2] CLUE team (2021). FewCLUE — README.  </a:t>
-            </a:r>
-            <a:r>
-              <a:rPr sz="810" b="0" lang="ja-JP" altLang="en-US">
-                <a:solidFill>
-                  <a:srgbClr val="626669"/>
-                </a:solidFill>
-                <a:latin typeface="Noto Sans"/>
-                <a:ea typeface="Noto Sans CJK JP"/>
-                <a:cs typeface="Noto Sans"/>
-                <a:hlinkClick r:id="rId4"/>
-              </a:rPr>
-              <a:t>https://github.com/CLUEbenchmark/FewCLUE/blob/main/README.md</a:t>
+              <a:t>Appendix</a:t>
             </a:r>
           </a:p>
         </p:txBody>
@@ -15620,7 +15691,7 @@
                 <a:ea typeface="Noto Sans CJK JP"/>
                 <a:cs typeface="Noto Sans"/>
               </a:rPr>
-              <a:t>まとめ：口語の意味を、少数例で照合する</a:t>
+              <a:t/>
             </a:r>
           </a:p>
         </p:txBody>
@@ -15637,73 +15708,103 @@
         </p:nvSpPr>
         <p:spPr>
           <a:xfrm>
-            <a:off x="594360" y="1463040"/>
-            <a:ext cx="7955279" cy="3044952"/>
+            <a:off x="640080" y="1972511"/>
+            <a:ext cx="7863840" cy="1744980"/>
           </a:xfrm>
         </p:spPr>
         <p:txBody>
-          <a:bodyPr wrap="square" tIns="91440" bIns="91440">
+          <a:bodyPr lIns="0" rIns="0" tIns="0" bIns="0">
             <a:noAutofit/>
           </a:bodyPr>
           <a:lstStyle/>
           <a:p>
-            <a:pPr marL="457200" indent="-355600">
-              <a:lnSpc>
-                <a:spcPts val="2379"/>
-              </a:lnSpc>
-              <a:spcAft>
-                <a:spcPts val="700"/>
-              </a:spcAft>
-              <a:buSzPct val="66500"/>
+            <a:pPr marL="457200" indent="-457200">
+              <a:lnSpc>
+                <a:spcPts val="3660"/>
+              </a:lnSpc>
+              <a:spcAft>
+                <a:spcPts val="1200"/>
+              </a:spcAft>
+              <a:buSzPct val="100000"/>
               <a:buFont typeface="Noto Sans CJK JP"/>
-              <a:buChar char="●"/>
-              <a:defRPr sz="2000" b="0">
-                <a:solidFill>
-                  <a:srgbClr val="303437"/>
-                </a:solidFill>
-                <a:latin typeface="Noto Sans"/>
-              </a:defRPr>
-            </a:pPr>
-            <a:r>
-              <a:rPr sz="2000" b="0" lang="ja-JP" altLang="en-US">
-                <a:solidFill>
-                  <a:srgbClr val="303437"/>
-                </a:solidFill>
-                <a:latin typeface="Noto Sans"/>
-                <a:ea typeface="Noto Sans CJK JP"/>
-                <a:cs typeface="Noto Sans"/>
-              </a:rPr>
-              <a:t>BUSTMは、小布助手に由来する短い中国語発話対の二値判定データ。言い換え、異なる操作、時点や欲求の違いを扱い、学習・開発を各32件から始める。</a:t>
-            </a:r>
-          </a:p>
-          <a:p>
-            <a:pPr marL="457200" indent="-355600">
-              <a:lnSpc>
-                <a:spcPts val="2379"/>
-              </a:lnSpc>
-              <a:spcAft>
-                <a:spcPts val="0"/>
-              </a:spcAft>
-              <a:buSzPct val="66500"/>
+              <a:buAutoNum type="arabicPeriod" startAt="1"/>
+              <a:defRPr sz="3000" b="1">
+                <a:solidFill>
+                  <a:srgbClr val="303437"/>
+                </a:solidFill>
+                <a:latin typeface="Noto Sans"/>
+              </a:defRPr>
+            </a:pPr>
+            <a:r>
+              <a:rPr sz="3000" b="1" lang="ja-JP" altLang="en-US">
+                <a:solidFill>
+                  <a:srgbClr val="303437"/>
+                </a:solidFill>
+                <a:latin typeface="Noto Sans"/>
+                <a:ea typeface="Noto Sans CJK JP"/>
+                <a:cs typeface="Noto Sans"/>
+              </a:rPr>
+              <a:t>追加10対の原文と日本語訳</a:t>
+            </a:r>
+          </a:p>
+          <a:p>
+            <a:pPr marL="457200" indent="-457200">
+              <a:lnSpc>
+                <a:spcPts val="3660"/>
+              </a:lnSpc>
+              <a:spcAft>
+                <a:spcPts val="1200"/>
+              </a:spcAft>
+              <a:buSzPct val="100000"/>
               <a:buFont typeface="Noto Sans CJK JP"/>
-              <a:buChar char="●"/>
-              <a:defRPr sz="2000" b="0">
-                <a:solidFill>
-                  <a:srgbClr val="303437"/>
-                </a:solidFill>
-                <a:latin typeface="Noto Sans"/>
-              </a:defRPr>
-            </a:pPr>
-            <a:r>
-              <a:rPr sz="2000" b="0" lang="ja-JP" altLang="en-US">
-                <a:solidFill>
-                  <a:srgbClr val="303437"/>
-                </a:solidFill>
-                <a:latin typeface="Noto Sans"/>
-                <a:ea typeface="Noto Sans CJK JP"/>
-                <a:cs typeface="Noto Sans"/>
-              </a:rPr>
-              <a:t>FewCLUEの公開テストは1,772件。2021年のEFLの報告正解率は71.8%で、各100問を解いた人間評価は88%。後にCLEVAの短い発話の言い換え判定にも採用された。</a:t>
+              <a:buAutoNum type="arabicPeriod" startAt="2"/>
+              <a:defRPr sz="3000" b="1">
+                <a:solidFill>
+                  <a:srgbClr val="303437"/>
+                </a:solidFill>
+                <a:latin typeface="Noto Sans"/>
+              </a:defRPr>
+            </a:pPr>
+            <a:r>
+              <a:rPr sz="3000" b="1" lang="ja-JP" altLang="en-US">
+                <a:solidFill>
+                  <a:srgbClr val="303437"/>
+                </a:solidFill>
+                <a:latin typeface="Noto Sans"/>
+                <a:ea typeface="Noto Sans CJK JP"/>
+                <a:cs typeface="Noto Sans"/>
+              </a:rPr>
+              <a:t>入力の読み方と利用例</a:t>
+            </a:r>
+          </a:p>
+          <a:p>
+            <a:pPr marL="457200" indent="-457200">
+              <a:lnSpc>
+                <a:spcPts val="3660"/>
+              </a:lnSpc>
+              <a:spcAft>
+                <a:spcPts val="0"/>
+              </a:spcAft>
+              <a:buSzPct val="100000"/>
+              <a:buFont typeface="Noto Sans CJK JP"/>
+              <a:buAutoNum type="arabicPeriod" startAt="3"/>
+              <a:defRPr sz="3000" b="1">
+                <a:solidFill>
+                  <a:srgbClr val="303437"/>
+                </a:solidFill>
+                <a:latin typeface="Noto Sans"/>
+              </a:defRPr>
+            </a:pPr>
+            <a:r>
+              <a:rPr sz="3000" b="1" lang="ja-JP" altLang="en-US">
+                <a:solidFill>
+                  <a:srgbClr val="303437"/>
+                </a:solidFill>
+                <a:latin typeface="Noto Sans"/>
+                <a:ea typeface="Noto Sans CJK JP"/>
+                <a:cs typeface="Noto Sans"/>
+              </a:rPr>
+              <a:t>参考文献</a:t>
             </a:r>
           </a:p>
         </p:txBody>
@@ -15751,135 +15852,7 @@
                 <a:ea typeface="Noto Sans CJK JP"/>
                 <a:cs typeface="Noto Sans"/>
               </a:rPr>
-              <a:t>4. CLEVAでの利用と公開範囲</a:t>
-            </a:r>
-          </a:p>
-        </p:txBody>
-      </p:sp>
-      <p:sp>
-        <p:nvSpPr>
-          <p:cNvPr id="5" name="sources"/>
-          <p:cNvSpPr txBox="1"/>
-          <p:nvPr/>
-        </p:nvSpPr>
-        <p:spPr>
-          <a:xfrm>
-            <a:off x="502920" y="4700016"/>
-            <a:ext cx="8183879" cy="530352"/>
-          </a:xfrm>
-          <a:prstGeom prst="rect">
-            <a:avLst/>
-          </a:prstGeom>
-          <a:noFill/>
-        </p:spPr>
-        <p:txBody>
-          <a:bodyPr wrap="square" lIns="0" rIns="0" tIns="0" bIns="0">
-            <a:noAutofit/>
-          </a:bodyPr>
-          <a:lstStyle/>
-          <a:p>
-            <a:pPr algn="l">
-              <a:lnSpc>
-                <a:spcPts val="940"/>
-              </a:lnSpc>
-              <a:spcBef>
-                <a:spcPts val="0"/>
-              </a:spcBef>
-              <a:spcAft>
-                <a:spcPts val="140"/>
-              </a:spcAft>
-              <a:buNone/>
-              <a:defRPr sz="810" b="0">
-                <a:solidFill>
-                  <a:srgbClr val="303437"/>
-                </a:solidFill>
-                <a:latin typeface="Noto Sans"/>
-              </a:defRPr>
-            </a:pPr>
-            <a:r>
-              <a:rPr sz="810" b="0" lang="ja-JP" altLang="en-US">
-                <a:solidFill>
-                  <a:srgbClr val="626669"/>
-                </a:solidFill>
-                <a:latin typeface="Noto Sans"/>
-                <a:ea typeface="Noto Sans CJK JP"/>
-                <a:cs typeface="Noto Sans"/>
-              </a:rPr>
-              <a:t>[1] Xu et al. (2021). FewCLUE: A Chinese Few-shot Learning Evaluation Benchmark. arXiv:2107.07498v2.</a:t>
-            </a:r>
-            <a:r>
-              <a:rPr sz="810" b="0" lang="ja-JP" altLang="en-US">
-                <a:solidFill>
-                  <a:srgbClr val="626669"/>
-                </a:solidFill>
-                <a:latin typeface="Noto Sans"/>
-                <a:ea typeface="Noto Sans CJK JP"/>
-                <a:cs typeface="Noto Sans"/>
-              </a:rPr>
-              <a:t>  </a:t>
-            </a:r>
-            <a:r>
-              <a:rPr sz="810" b="0" lang="ja-JP" altLang="en-US">
-                <a:solidFill>
-                  <a:srgbClr val="626669"/>
-                </a:solidFill>
-                <a:latin typeface="Noto Sans"/>
-                <a:ea typeface="Noto Sans CJK JP"/>
-                <a:cs typeface="Noto Sans"/>
-                <a:hlinkClick r:id="rId2"/>
-              </a:rPr>
-              <a:t>https://arxiv.org/abs/2107.07498</a:t>
-            </a:r>
-          </a:p>
-          <a:p>
-            <a:pPr>
-              <a:lnSpc>
-                <a:spcPts val="940"/>
-              </a:lnSpc>
-              <a:spcAft>
-                <a:spcPts val="140"/>
-              </a:spcAft>
-              <a:buNone/>
-              <a:defRPr sz="810" b="0">
-                <a:solidFill>
-                  <a:srgbClr val="303437"/>
-                </a:solidFill>
-                <a:latin typeface="Noto Sans"/>
-              </a:defRPr>
-            </a:pPr>
-            <a:r>
-              <a:rPr sz="810" b="0" lang="ja-JP" altLang="en-US">
-                <a:solidFill>
-                  <a:srgbClr val="626669"/>
-                </a:solidFill>
-                <a:latin typeface="Noto Sans"/>
-                <a:ea typeface="Noto Sans CJK JP"/>
-                <a:cs typeface="Noto Sans"/>
-              </a:rPr>
-              <a:t>[2] Li et al. (2023). CLEVA: Chinese Language Models EVAluation Platform. EMNLP: System Demonstrations.</a:t>
-            </a:r>
-            <a:r>
-              <a:rPr sz="810" b="0" lang="ja-JP" altLang="en-US">
-                <a:solidFill>
-                  <a:srgbClr val="626669"/>
-                </a:solidFill>
-                <a:latin typeface="Noto Sans"/>
-                <a:ea typeface="Noto Sans CJK JP"/>
-                <a:cs typeface="Noto Sans"/>
-              </a:rPr>
-              <a:t>  </a:t>
-            </a:r>
-            <a:r>
-              <a:rPr sz="810" b="0" lang="ja-JP" altLang="en-US">
-                <a:solidFill>
-                  <a:srgbClr val="626669"/>
-                </a:solidFill>
-                <a:latin typeface="Noto Sans"/>
-                <a:ea typeface="Noto Sans CJK JP"/>
-                <a:cs typeface="Noto Sans"/>
-                <a:hlinkClick r:id="rId3"/>
-              </a:rPr>
-              <a:t>https://aclanthology.org/2023.emnlp-demo.17/</a:t>
+              <a:t>Appendix: 目次</a:t>
             </a:r>
           </a:p>
         </p:txBody>
@@ -16088,7 +16061,7 @@
                 <a:ea typeface="Noto Sans CJK JP"/>
                 <a:cs typeface="Noto Sans"/>
               </a:rPr>
-              <a:t>CLEVAでの利用と公開範囲</a:t>
+              <a:t>公開配布と利用条件</a:t>
             </a:r>
           </a:p>
         </p:txBody>
@@ -16150,347 +16123,6 @@
 </file>
 
 <file path=ppt/slides/slide30.xml><?xml version="1.0" encoding="utf-8"?>
-<p:sld xmlns:a="http://schemas.openxmlformats.org/drawingml/2006/main" xmlns:p="http://schemas.openxmlformats.org/presentationml/2006/main" xmlns:r="http://schemas.openxmlformats.org/officeDocument/2006/relationships">
-  <p:cSld>
-    <p:spTree>
-      <p:nvGrpSpPr>
-        <p:cNvPr id="1" name=""/>
-        <p:cNvGrpSpPr/>
-        <p:nvPr/>
-      </p:nvGrpSpPr>
-      <p:grpSpPr/>
-      <p:sp>
-        <p:nvSpPr>
-          <p:cNvPr id="2" name="Title 1"/>
-          <p:cNvSpPr>
-            <a:spLocks noGrp="1"/>
-          </p:cNvSpPr>
-          <p:nvPr>
-            <p:ph type="title"/>
-          </p:nvPr>
-        </p:nvSpPr>
-        <p:spPr>
-          <a:xfrm>
-            <a:off x="548640" y="2484835"/>
-            <a:ext cx="8046720" cy="585216"/>
-          </a:xfrm>
-        </p:spPr>
-        <p:txBody>
-          <a:bodyPr wrap="square" lIns="0" rIns="0" tIns="0" bIns="0" anchor="ctr">
-            <a:noAutofit/>
-          </a:bodyPr>
-          <a:lstStyle/>
-          <a:p>
-            <a:pPr algn="ctr">
-              <a:lnSpc>
-                <a:spcPct val="110000"/>
-              </a:lnSpc>
-              <a:buNone/>
-              <a:defRPr sz="3600" b="0">
-                <a:solidFill>
-                  <a:srgbClr val="303437"/>
-                </a:solidFill>
-                <a:latin typeface="Noto Sans"/>
-              </a:defRPr>
-            </a:pPr>
-            <a:r>
-              <a:rPr sz="3600" b="1" lang="ja-JP" altLang="en-US">
-                <a:solidFill>
-                  <a:srgbClr val="303437"/>
-                </a:solidFill>
-                <a:latin typeface="Noto Sans"/>
-                <a:ea typeface="Noto Sans CJK JP"/>
-                <a:cs typeface="Noto Sans"/>
-              </a:rPr>
-              <a:t>Appendix</a:t>
-            </a:r>
-          </a:p>
-        </p:txBody>
-      </p:sp>
-      <p:sp>
-        <p:nvSpPr>
-          <p:cNvPr id="3" name="Title 2"/>
-          <p:cNvSpPr>
-            <a:spLocks noGrp="1"/>
-          </p:cNvSpPr>
-          <p:nvPr>
-            <p:ph type="title" idx="2"/>
-          </p:nvPr>
-        </p:nvSpPr>
-        <p:spPr>
-          <a:xfrm>
-            <a:off x="75895" y="0"/>
-            <a:ext cx="8115300" cy="480060"/>
-          </a:xfrm>
-        </p:spPr>
-        <p:txBody>
-          <a:bodyPr wrap="square" lIns="0" rIns="0" tIns="0" bIns="0" anchor="ctr">
-            <a:noAutofit/>
-          </a:bodyPr>
-          <a:lstStyle/>
-          <a:p>
-            <a:pPr algn="l">
-              <a:lnSpc>
-                <a:spcPct val="110000"/>
-              </a:lnSpc>
-              <a:buNone/>
-              <a:defRPr sz="1400" b="0">
-                <a:solidFill>
-                  <a:srgbClr val="303437"/>
-                </a:solidFill>
-                <a:latin typeface="Noto Sans"/>
-              </a:defRPr>
-            </a:pPr>
-            <a:r>
-              <a:rPr sz="1400" b="1" lang="ja-JP" altLang="en-US">
-                <a:solidFill>
-                  <a:srgbClr val="FFFEF8"/>
-                </a:solidFill>
-                <a:latin typeface="Noto Sans"/>
-                <a:ea typeface="Noto Sans CJK JP"/>
-                <a:cs typeface="Noto Sans"/>
-              </a:rPr>
-              <a:t>Appendix</a:t>
-            </a:r>
-          </a:p>
-        </p:txBody>
-      </p:sp>
-    </p:spTree>
-  </p:cSld>
-  <p:clrMapOvr>
-    <a:masterClrMapping/>
-  </p:clrMapOvr>
-</p:sld>
-</file>
-
-<file path=ppt/slides/slide31.xml><?xml version="1.0" encoding="utf-8"?>
-<p:sld xmlns:a="http://schemas.openxmlformats.org/drawingml/2006/main" xmlns:p="http://schemas.openxmlformats.org/presentationml/2006/main" xmlns:r="http://schemas.openxmlformats.org/officeDocument/2006/relationships">
-  <p:cSld>
-    <p:spTree>
-      <p:nvGrpSpPr>
-        <p:cNvPr id="1" name=""/>
-        <p:cNvGrpSpPr/>
-        <p:nvPr/>
-      </p:nvGrpSpPr>
-      <p:grpSpPr/>
-      <p:sp>
-        <p:nvSpPr>
-          <p:cNvPr id="2" name="Title 1"/>
-          <p:cNvSpPr>
-            <a:spLocks noGrp="1"/>
-          </p:cNvSpPr>
-          <p:nvPr>
-            <p:ph type="title"/>
-          </p:nvPr>
-        </p:nvSpPr>
-        <p:spPr>
-          <a:xfrm>
-            <a:off x="468172" y="650138"/>
-            <a:ext cx="8206740" cy="616305"/>
-          </a:xfrm>
-        </p:spPr>
-        <p:txBody>
-          <a:bodyPr wrap="square" lIns="0" rIns="0" tIns="0" bIns="0">
-            <a:noAutofit/>
-          </a:bodyPr>
-          <a:lstStyle/>
-          <a:p>
-            <a:pPr algn="l">
-              <a:lnSpc>
-                <a:spcPct val="110000"/>
-              </a:lnSpc>
-              <a:buNone/>
-              <a:defRPr sz="2800" b="0">
-                <a:solidFill>
-                  <a:srgbClr val="303437"/>
-                </a:solidFill>
-                <a:latin typeface="Noto Sans"/>
-              </a:defRPr>
-            </a:pPr>
-            <a:r>
-              <a:rPr sz="2800" b="1" lang="ja-JP" altLang="en-US">
-                <a:solidFill>
-                  <a:srgbClr val="303437"/>
-                </a:solidFill>
-                <a:latin typeface="Noto Sans"/>
-                <a:ea typeface="Noto Sans CJK JP"/>
-                <a:cs typeface="Noto Sans"/>
-              </a:rPr>
-              <a:t/>
-            </a:r>
-          </a:p>
-        </p:txBody>
-      </p:sp>
-      <p:sp>
-        <p:nvSpPr>
-          <p:cNvPr id="3" name="Text Placeholder 2"/>
-          <p:cNvSpPr>
-            <a:spLocks noGrp="1"/>
-          </p:cNvSpPr>
-          <p:nvPr>
-            <p:ph type="body" idx="1"/>
-          </p:nvPr>
-        </p:nvSpPr>
-        <p:spPr>
-          <a:xfrm>
-            <a:off x="640080" y="1972511"/>
-            <a:ext cx="7863840" cy="1744980"/>
-          </a:xfrm>
-        </p:spPr>
-        <p:txBody>
-          <a:bodyPr lIns="0" rIns="0" tIns="0" bIns="0">
-            <a:noAutofit/>
-          </a:bodyPr>
-          <a:lstStyle/>
-          <a:p>
-            <a:pPr marL="457200" indent="-457200">
-              <a:lnSpc>
-                <a:spcPts val="3660"/>
-              </a:lnSpc>
-              <a:spcAft>
-                <a:spcPts val="1200"/>
-              </a:spcAft>
-              <a:buSzPct val="100000"/>
-              <a:buFont typeface="Noto Sans CJK JP"/>
-              <a:buAutoNum type="arabicPeriod" startAt="1"/>
-              <a:defRPr sz="3000" b="1">
-                <a:solidFill>
-                  <a:srgbClr val="303437"/>
-                </a:solidFill>
-                <a:latin typeface="Noto Sans"/>
-              </a:defRPr>
-            </a:pPr>
-            <a:r>
-              <a:rPr sz="3000" b="1" lang="ja-JP" altLang="en-US">
-                <a:solidFill>
-                  <a:srgbClr val="303437"/>
-                </a:solidFill>
-                <a:latin typeface="Noto Sans"/>
-                <a:ea typeface="Noto Sans CJK JP"/>
-                <a:cs typeface="Noto Sans"/>
-              </a:rPr>
-              <a:t>追加10対の原文と日本語訳</a:t>
-            </a:r>
-          </a:p>
-          <a:p>
-            <a:pPr marL="457200" indent="-457200">
-              <a:lnSpc>
-                <a:spcPts val="3660"/>
-              </a:lnSpc>
-              <a:spcAft>
-                <a:spcPts val="1200"/>
-              </a:spcAft>
-              <a:buSzPct val="100000"/>
-              <a:buFont typeface="Noto Sans CJK JP"/>
-              <a:buAutoNum type="arabicPeriod" startAt="2"/>
-              <a:defRPr sz="3000" b="1">
-                <a:solidFill>
-                  <a:srgbClr val="303437"/>
-                </a:solidFill>
-                <a:latin typeface="Noto Sans"/>
-              </a:defRPr>
-            </a:pPr>
-            <a:r>
-              <a:rPr sz="3000" b="1" lang="ja-JP" altLang="en-US">
-                <a:solidFill>
-                  <a:srgbClr val="303437"/>
-                </a:solidFill>
-                <a:latin typeface="Noto Sans"/>
-                <a:ea typeface="Noto Sans CJK JP"/>
-                <a:cs typeface="Noto Sans"/>
-              </a:rPr>
-              <a:t>入力の読み方と二択への変換</a:t>
-            </a:r>
-          </a:p>
-          <a:p>
-            <a:pPr marL="457200" indent="-457200">
-              <a:lnSpc>
-                <a:spcPts val="3660"/>
-              </a:lnSpc>
-              <a:spcAft>
-                <a:spcPts val="0"/>
-              </a:spcAft>
-              <a:buSzPct val="100000"/>
-              <a:buFont typeface="Noto Sans CJK JP"/>
-              <a:buAutoNum type="arabicPeriod" startAt="3"/>
-              <a:defRPr sz="3000" b="1">
-                <a:solidFill>
-                  <a:srgbClr val="303437"/>
-                </a:solidFill>
-                <a:latin typeface="Noto Sans"/>
-              </a:defRPr>
-            </a:pPr>
-            <a:r>
-              <a:rPr sz="3000" b="1" lang="ja-JP" altLang="en-US">
-                <a:solidFill>
-                  <a:srgbClr val="303437"/>
-                </a:solidFill>
-                <a:latin typeface="Noto Sans"/>
-                <a:ea typeface="Noto Sans CJK JP"/>
-                <a:cs typeface="Noto Sans"/>
-              </a:rPr>
-              <a:t>参考文献</a:t>
-            </a:r>
-          </a:p>
-        </p:txBody>
-      </p:sp>
-      <p:sp>
-        <p:nvSpPr>
-          <p:cNvPr id="4" name="Title 3"/>
-          <p:cNvSpPr>
-            <a:spLocks noGrp="1"/>
-          </p:cNvSpPr>
-          <p:nvPr>
-            <p:ph type="title" idx="2"/>
-          </p:nvPr>
-        </p:nvSpPr>
-        <p:spPr>
-          <a:xfrm>
-            <a:off x="75895" y="0"/>
-            <a:ext cx="8115300" cy="480060"/>
-          </a:xfrm>
-        </p:spPr>
-        <p:txBody>
-          <a:bodyPr wrap="square" lIns="0" rIns="0" tIns="0" bIns="0" anchor="ctr">
-            <a:noAutofit/>
-          </a:bodyPr>
-          <a:lstStyle/>
-          <a:p>
-            <a:pPr algn="l">
-              <a:lnSpc>
-                <a:spcPct val="110000"/>
-              </a:lnSpc>
-              <a:buNone/>
-              <a:defRPr sz="1400" b="0">
-                <a:solidFill>
-                  <a:srgbClr val="303437"/>
-                </a:solidFill>
-                <a:latin typeface="Noto Sans"/>
-              </a:defRPr>
-            </a:pPr>
-            <a:r>
-              <a:rPr sz="1400" b="1" lang="ja-JP" altLang="en-US">
-                <a:solidFill>
-                  <a:srgbClr val="FFFEF8"/>
-                </a:solidFill>
-                <a:latin typeface="Noto Sans"/>
-                <a:ea typeface="Noto Sans CJK JP"/>
-                <a:cs typeface="Noto Sans"/>
-              </a:rPr>
-              <a:t>Appendix: 目次</a:t>
-            </a:r>
-          </a:p>
-        </p:txBody>
-      </p:sp>
-    </p:spTree>
-  </p:cSld>
-  <p:clrMapOvr>
-    <a:masterClrMapping/>
-  </p:clrMapOvr>
-</p:sld>
-</file>
-
-<file path=ppt/slides/slide32.xml><?xml version="1.0" encoding="utf-8"?>
 <p:sld xmlns:a="http://schemas.openxmlformats.org/drawingml/2006/main" xmlns:p="http://schemas.openxmlformats.org/presentationml/2006/main" xmlns:r="http://schemas.openxmlformats.org/officeDocument/2006/relationships">
   <p:cSld>
     <p:spTree>
@@ -17158,7 +16790,7 @@
 </p:sld>
 </file>
 
-<file path=ppt/slides/slide33.xml><?xml version="1.0" encoding="utf-8"?>
+<file path=ppt/slides/slide31.xml><?xml version="1.0" encoding="utf-8"?>
 <p:sld xmlns:a="http://schemas.openxmlformats.org/drawingml/2006/main" xmlns:p="http://schemas.openxmlformats.org/presentationml/2006/main" xmlns:r="http://schemas.openxmlformats.org/officeDocument/2006/relationships">
   <p:cSld>
     <p:spTree>
@@ -17826,7 +17458,7 @@
 </p:sld>
 </file>
 
-<file path=ppt/slides/slide34.xml><?xml version="1.0" encoding="utf-8"?>
+<file path=ppt/slides/slide32.xml><?xml version="1.0" encoding="utf-8"?>
 <p:sld xmlns:a="http://schemas.openxmlformats.org/drawingml/2006/main" xmlns:p="http://schemas.openxmlformats.org/presentationml/2006/main" xmlns:r="http://schemas.openxmlformats.org/officeDocument/2006/relationships">
   <p:cSld>
     <p:spTree>
@@ -18494,7 +18126,7 @@
 </p:sld>
 </file>
 
-<file path=ppt/slides/slide35.xml><?xml version="1.0" encoding="utf-8"?>
+<file path=ppt/slides/slide33.xml><?xml version="1.0" encoding="utf-8"?>
 <p:sld xmlns:a="http://schemas.openxmlformats.org/drawingml/2006/main" xmlns:p="http://schemas.openxmlformats.org/presentationml/2006/main" xmlns:r="http://schemas.openxmlformats.org/officeDocument/2006/relationships">
   <p:cSld>
     <p:spTree>
@@ -19162,7 +18794,7 @@
 </p:sld>
 </file>
 
-<file path=ppt/slides/slide36.xml><?xml version="1.0" encoding="utf-8"?>
+<file path=ppt/slides/slide34.xml><?xml version="1.0" encoding="utf-8"?>
 <p:sld xmlns:a="http://schemas.openxmlformats.org/drawingml/2006/main" xmlns:p="http://schemas.openxmlformats.org/presentationml/2006/main" xmlns:r="http://schemas.openxmlformats.org/officeDocument/2006/relationships">
   <p:cSld>
     <p:spTree>
@@ -19830,7 +19462,7 @@
 </p:sld>
 </file>
 
-<file path=ppt/slides/slide37.xml><?xml version="1.0" encoding="utf-8"?>
+<file path=ppt/slides/slide35.xml><?xml version="1.0" encoding="utf-8"?>
 <p:sld xmlns:a="http://schemas.openxmlformats.org/drawingml/2006/main" xmlns:p="http://schemas.openxmlformats.org/presentationml/2006/main" xmlns:r="http://schemas.openxmlformats.org/officeDocument/2006/relationships">
   <p:cSld>
     <p:spTree>
@@ -20498,7 +20130,7 @@
 </p:sld>
 </file>
 
-<file path=ppt/slides/slide38.xml><?xml version="1.0" encoding="utf-8"?>
+<file path=ppt/slides/slide36.xml><?xml version="1.0" encoding="utf-8"?>
 <p:sld xmlns:a="http://schemas.openxmlformats.org/drawingml/2006/main" xmlns:p="http://schemas.openxmlformats.org/presentationml/2006/main" xmlns:r="http://schemas.openxmlformats.org/officeDocument/2006/relationships">
   <p:cSld>
     <p:spTree>
@@ -21166,7 +20798,7 @@
 </p:sld>
 </file>
 
-<file path=ppt/slides/slide39.xml><?xml version="1.0" encoding="utf-8"?>
+<file path=ppt/slides/slide37.xml><?xml version="1.0" encoding="utf-8"?>
 <p:sld xmlns:a="http://schemas.openxmlformats.org/drawingml/2006/main" xmlns:p="http://schemas.openxmlformats.org/presentationml/2006/main" xmlns:r="http://schemas.openxmlformats.org/officeDocument/2006/relationships">
   <p:cSld>
     <p:spTree>
@@ -21834,121 +21466,7 @@
 </p:sld>
 </file>
 
-<file path=ppt/slides/slide4.xml><?xml version="1.0" encoding="utf-8"?>
-<p:sld xmlns:a="http://schemas.openxmlformats.org/drawingml/2006/main" xmlns:p="http://schemas.openxmlformats.org/presentationml/2006/main" xmlns:r="http://schemas.openxmlformats.org/officeDocument/2006/relationships">
-  <p:cSld>
-    <p:spTree>
-      <p:nvGrpSpPr>
-        <p:cNvPr id="1" name=""/>
-        <p:cNvGrpSpPr/>
-        <p:nvPr/>
-      </p:nvGrpSpPr>
-      <p:grpSpPr/>
-      <p:sp>
-        <p:nvSpPr>
-          <p:cNvPr id="2" name="Title 1"/>
-          <p:cNvSpPr>
-            <a:spLocks noGrp="1"/>
-          </p:cNvSpPr>
-          <p:nvPr>
-            <p:ph type="title"/>
-          </p:nvPr>
-        </p:nvSpPr>
-        <p:spPr>
-          <a:xfrm>
-            <a:off x="548640" y="2506875"/>
-            <a:ext cx="8046720" cy="585216"/>
-          </a:xfrm>
-        </p:spPr>
-        <p:txBody>
-          <a:bodyPr wrap="square" lIns="0" rIns="0" tIns="0" bIns="0" anchor="ctr">
-            <a:noAutofit/>
-          </a:bodyPr>
-          <a:lstStyle/>
-          <a:p>
-            <a:pPr algn="ctr">
-              <a:lnSpc>
-                <a:spcPct val="110000"/>
-              </a:lnSpc>
-              <a:buNone/>
-              <a:defRPr sz="3600" b="0">
-                <a:solidFill>
-                  <a:srgbClr val="303437"/>
-                </a:solidFill>
-                <a:latin typeface="Noto Sans"/>
-              </a:defRPr>
-            </a:pPr>
-            <a:r>
-              <a:rPr sz="3600" b="1" lang="ja-JP" altLang="en-US">
-                <a:solidFill>
-                  <a:srgbClr val="303437"/>
-                </a:solidFill>
-                <a:latin typeface="Noto Sans"/>
-                <a:ea typeface="Noto Sans CJK JP"/>
-                <a:cs typeface="Noto Sans"/>
-              </a:rPr>
-              <a:t>二つの発話が同じ意味かを判定する</a:t>
-            </a:r>
-          </a:p>
-        </p:txBody>
-      </p:sp>
-      <p:sp>
-        <p:nvSpPr>
-          <p:cNvPr id="3" name="Title 2"/>
-          <p:cNvSpPr>
-            <a:spLocks noGrp="1"/>
-          </p:cNvSpPr>
-          <p:nvPr>
-            <p:ph type="title" idx="2"/>
-          </p:nvPr>
-        </p:nvSpPr>
-        <p:spPr>
-          <a:xfrm>
-            <a:off x="75895" y="0"/>
-            <a:ext cx="8115300" cy="480060"/>
-          </a:xfrm>
-        </p:spPr>
-        <p:txBody>
-          <a:bodyPr wrap="square" lIns="0" rIns="0" tIns="0" bIns="0" anchor="ctr">
-            <a:noAutofit/>
-          </a:bodyPr>
-          <a:lstStyle/>
-          <a:p>
-            <a:pPr algn="l">
-              <a:lnSpc>
-                <a:spcPct val="110000"/>
-              </a:lnSpc>
-              <a:buNone/>
-              <a:defRPr sz="1400" b="0">
-                <a:solidFill>
-                  <a:srgbClr val="303437"/>
-                </a:solidFill>
-                <a:latin typeface="Noto Sans"/>
-              </a:defRPr>
-            </a:pPr>
-            <a:r>
-              <a:rPr sz="1400" b="1" lang="ja-JP" altLang="en-US">
-                <a:solidFill>
-                  <a:srgbClr val="FFFEF8"/>
-                </a:solidFill>
-                <a:latin typeface="Noto Sans"/>
-                <a:ea typeface="Noto Sans CJK JP"/>
-                <a:cs typeface="Noto Sans"/>
-              </a:rPr>
-              <a:t>1. 二つの発話が同じ意味かを判定する</a:t>
-            </a:r>
-          </a:p>
-        </p:txBody>
-      </p:sp>
-    </p:spTree>
-  </p:cSld>
-  <p:clrMapOvr>
-    <a:masterClrMapping/>
-  </p:clrMapOvr>
-</p:sld>
-</file>
-
-<file path=ppt/slides/slide40.xml><?xml version="1.0" encoding="utf-8"?>
+<file path=ppt/slides/slide38.xml><?xml version="1.0" encoding="utf-8"?>
 <p:sld xmlns:a="http://schemas.openxmlformats.org/drawingml/2006/main" xmlns:p="http://schemas.openxmlformats.org/presentationml/2006/main" xmlns:r="http://schemas.openxmlformats.org/officeDocument/2006/relationships">
   <p:cSld>
     <p:spTree>
@@ -22616,7 +22134,7 @@
 </p:sld>
 </file>
 
-<file path=ppt/slides/slide41.xml><?xml version="1.0" encoding="utf-8"?>
+<file path=ppt/slides/slide39.xml><?xml version="1.0" encoding="utf-8"?>
 <p:sld xmlns:a="http://schemas.openxmlformats.org/drawingml/2006/main" xmlns:p="http://schemas.openxmlformats.org/presentationml/2006/main" xmlns:r="http://schemas.openxmlformats.org/officeDocument/2006/relationships">
   <p:cSld>
     <p:spTree>
@@ -23284,7 +22802,7 @@
 </p:sld>
 </file>
 
-<file path=ppt/slides/slide42.xml><?xml version="1.0" encoding="utf-8"?>
+<file path=ppt/slides/slide4.xml><?xml version="1.0" encoding="utf-8"?>
 <p:sld xmlns:a="http://schemas.openxmlformats.org/drawingml/2006/main" xmlns:p="http://schemas.openxmlformats.org/presentationml/2006/main" xmlns:r="http://schemas.openxmlformats.org/officeDocument/2006/relationships">
   <p:cSld>
     <p:spTree>
@@ -23337,7 +22855,7 @@
                 <a:ea typeface="Noto Sans CJK JP"/>
                 <a:cs typeface="Noto Sans"/>
               </a:rPr>
-              <a:t>入力の読み方と二択への変換</a:t>
+              <a:t>二つの発話が同じ意味かを判定する</a:t>
             </a:r>
           </a:p>
         </p:txBody>
@@ -23385,7 +22903,7 @@
                 <a:ea typeface="Noto Sans CJK JP"/>
                 <a:cs typeface="Noto Sans"/>
               </a:rPr>
-              <a:t>Appendix: 2. 入力の読み方と二択への変換</a:t>
+              <a:t>1. 二つの発話が同じ意味かを判定する</a:t>
             </a:r>
           </a:p>
         </p:txBody>
@@ -23398,7 +22916,121 @@
 </p:sld>
 </file>
 
-<file path=ppt/slides/slide47.xml><?xml version="1.0" encoding="utf-8"?>
+<file path=ppt/slides/slide40.xml><?xml version="1.0" encoding="utf-8"?>
+<p:sld xmlns:a="http://schemas.openxmlformats.org/drawingml/2006/main" xmlns:p="http://schemas.openxmlformats.org/presentationml/2006/main" xmlns:r="http://schemas.openxmlformats.org/officeDocument/2006/relationships">
+  <p:cSld>
+    <p:spTree>
+      <p:nvGrpSpPr>
+        <p:cNvPr id="1" name=""/>
+        <p:cNvGrpSpPr/>
+        <p:nvPr/>
+      </p:nvGrpSpPr>
+      <p:grpSpPr/>
+      <p:sp>
+        <p:nvSpPr>
+          <p:cNvPr id="2" name="Title 1"/>
+          <p:cNvSpPr>
+            <a:spLocks noGrp="1"/>
+          </p:cNvSpPr>
+          <p:nvPr>
+            <p:ph type="title"/>
+          </p:nvPr>
+        </p:nvSpPr>
+        <p:spPr>
+          <a:xfrm>
+            <a:off x="548640" y="2506875"/>
+            <a:ext cx="8046720" cy="585216"/>
+          </a:xfrm>
+        </p:spPr>
+        <p:txBody>
+          <a:bodyPr wrap="square" lIns="0" rIns="0" tIns="0" bIns="0" anchor="ctr">
+            <a:noAutofit/>
+          </a:bodyPr>
+          <a:lstStyle/>
+          <a:p>
+            <a:pPr algn="ctr">
+              <a:lnSpc>
+                <a:spcPct val="110000"/>
+              </a:lnSpc>
+              <a:buNone/>
+              <a:defRPr sz="3600" b="0">
+                <a:solidFill>
+                  <a:srgbClr val="303437"/>
+                </a:solidFill>
+                <a:latin typeface="Noto Sans"/>
+              </a:defRPr>
+            </a:pPr>
+            <a:r>
+              <a:rPr sz="3600" b="1" lang="ja-JP" altLang="en-US">
+                <a:solidFill>
+                  <a:srgbClr val="303437"/>
+                </a:solidFill>
+                <a:latin typeface="Noto Sans"/>
+                <a:ea typeface="Noto Sans CJK JP"/>
+                <a:cs typeface="Noto Sans"/>
+              </a:rPr>
+              <a:t>入力の読み方と利用例</a:t>
+            </a:r>
+          </a:p>
+        </p:txBody>
+      </p:sp>
+      <p:sp>
+        <p:nvSpPr>
+          <p:cNvPr id="3" name="Title 2"/>
+          <p:cNvSpPr>
+            <a:spLocks noGrp="1"/>
+          </p:cNvSpPr>
+          <p:nvPr>
+            <p:ph type="title" idx="2"/>
+          </p:nvPr>
+        </p:nvSpPr>
+        <p:spPr>
+          <a:xfrm>
+            <a:off x="75895" y="0"/>
+            <a:ext cx="8115300" cy="480060"/>
+          </a:xfrm>
+        </p:spPr>
+        <p:txBody>
+          <a:bodyPr wrap="square" lIns="0" rIns="0" tIns="0" bIns="0" anchor="ctr">
+            <a:noAutofit/>
+          </a:bodyPr>
+          <a:lstStyle/>
+          <a:p>
+            <a:pPr algn="l">
+              <a:lnSpc>
+                <a:spcPct val="110000"/>
+              </a:lnSpc>
+              <a:buNone/>
+              <a:defRPr sz="1400" b="0">
+                <a:solidFill>
+                  <a:srgbClr val="303437"/>
+                </a:solidFill>
+                <a:latin typeface="Noto Sans"/>
+              </a:defRPr>
+            </a:pPr>
+            <a:r>
+              <a:rPr sz="1400" b="1" lang="ja-JP" altLang="en-US">
+                <a:solidFill>
+                  <a:srgbClr val="FFFEF8"/>
+                </a:solidFill>
+                <a:latin typeface="Noto Sans"/>
+                <a:ea typeface="Noto Sans CJK JP"/>
+                <a:cs typeface="Noto Sans"/>
+              </a:rPr>
+              <a:t>Appendix: 2. 入力の読み方と利用例</a:t>
+            </a:r>
+          </a:p>
+        </p:txBody>
+      </p:sp>
+    </p:spTree>
+  </p:cSld>
+  <p:clrMapOvr>
+    <a:masterClrMapping/>
+  </p:clrMapOvr>
+</p:sld>
+</file>
+
+<file path=ppt/slides/slide41.xml><?xml version="1.0" encoding="utf-8"?>
 <p:sld xmlns:a="http://schemas.openxmlformats.org/drawingml/2006/main" xmlns:p="http://schemas.openxmlformats.org/presentationml/2006/main" xmlns:r="http://schemas.openxmlformats.org/officeDocument/2006/relationships">
   <p:cSld>
     <p:spTree>
@@ -23499,7 +23131,7 @@
                 <a:ea typeface="Noto Sans CJK JP"/>
                 <a:cs typeface="Noto Sans"/>
               </a:rPr>
-              <a:t>Appendix: 2. 入力の読み方と二択への変換</a:t>
+              <a:t>Appendix: 2. 入力の読み方と利用例</a:t>
             </a:r>
           </a:p>
         </p:txBody>
@@ -23714,7 +23346,7 @@
 </p:sld>
 </file>
 
-<file path=ppt/slides/slide48.xml><?xml version="1.0" encoding="utf-8"?>
+<file path=ppt/slides/slide42.xml><?xml version="1.0" encoding="utf-8"?>
 <p:sld xmlns:a="http://schemas.openxmlformats.org/drawingml/2006/main" xmlns:p="http://schemas.openxmlformats.org/presentationml/2006/main" xmlns:r="http://schemas.openxmlformats.org/officeDocument/2006/relationships">
   <p:cSld>
     <p:spTree>
@@ -23767,7 +23399,7 @@
                 <a:ea typeface="Noto Sans CJK JP"/>
                 <a:cs typeface="Noto Sans"/>
               </a:rPr>
-              <a:t>二択形式では「いいえ」「はい」から答える</a:t>
+              <a:t>応用例：二つの発話を二択で尋ねる</a:t>
             </a:r>
           </a:p>
         </p:txBody>
@@ -23815,7 +23447,7 @@
                 <a:ea typeface="Noto Sans CJK JP"/>
                 <a:cs typeface="Noto Sans"/>
               </a:rPr>
-              <a:t>Appendix: 2. 入力の読み方と二択への変換</a:t>
+              <a:t>Appendix: 2. 入力の読み方と利用例</a:t>
             </a:r>
           </a:p>
         </p:txBody>
@@ -24420,6 +24052,1202 @@
 </p:sld>
 </file>
 
+<file path=ppt/slides/slide43.xml><?xml version="1.0" encoding="utf-8"?>
+<p:sld xmlns:a="http://schemas.openxmlformats.org/drawingml/2006/main" xmlns:p="http://schemas.openxmlformats.org/presentationml/2006/main" xmlns:r="http://schemas.openxmlformats.org/officeDocument/2006/relationships">
+  <p:cSld>
+    <p:spTree>
+      <p:nvGrpSpPr>
+        <p:cNvPr id="1" name=""/>
+        <p:cNvGrpSpPr/>
+        <p:nvPr/>
+      </p:nvGrpSpPr>
+      <p:grpSpPr/>
+      <p:sp>
+        <p:nvSpPr>
+          <p:cNvPr id="2" name="Title 1"/>
+          <p:cNvSpPr>
+            <a:spLocks noGrp="1"/>
+          </p:cNvSpPr>
+          <p:nvPr>
+            <p:ph type="title"/>
+          </p:nvPr>
+        </p:nvSpPr>
+        <p:spPr>
+          <a:xfrm>
+            <a:off x="548640" y="2506875"/>
+            <a:ext cx="8046720" cy="585216"/>
+          </a:xfrm>
+        </p:spPr>
+        <p:txBody>
+          <a:bodyPr wrap="square" lIns="0" rIns="0" tIns="0" bIns="0" anchor="ctr">
+            <a:noAutofit/>
+          </a:bodyPr>
+          <a:lstStyle/>
+          <a:p>
+            <a:pPr algn="ctr">
+              <a:lnSpc>
+                <a:spcPct val="110000"/>
+              </a:lnSpc>
+              <a:buNone/>
+              <a:defRPr sz="3600" b="0">
+                <a:solidFill>
+                  <a:srgbClr val="303437"/>
+                </a:solidFill>
+                <a:latin typeface="Noto Sans"/>
+              </a:defRPr>
+            </a:pPr>
+            <a:r>
+              <a:rPr sz="3600" b="1" lang="ja-JP" altLang="en-US">
+                <a:solidFill>
+                  <a:srgbClr val="303437"/>
+                </a:solidFill>
+                <a:latin typeface="Noto Sans"/>
+                <a:ea typeface="Noto Sans CJK JP"/>
+                <a:cs typeface="Noto Sans"/>
+              </a:rPr>
+              <a:t>参考文献</a:t>
+            </a:r>
+          </a:p>
+        </p:txBody>
+      </p:sp>
+      <p:sp>
+        <p:nvSpPr>
+          <p:cNvPr id="3" name="Title 2"/>
+          <p:cNvSpPr>
+            <a:spLocks noGrp="1"/>
+          </p:cNvSpPr>
+          <p:nvPr>
+            <p:ph type="title" idx="2"/>
+          </p:nvPr>
+        </p:nvSpPr>
+        <p:spPr>
+          <a:xfrm>
+            <a:off x="75895" y="0"/>
+            <a:ext cx="8115300" cy="480060"/>
+          </a:xfrm>
+        </p:spPr>
+        <p:txBody>
+          <a:bodyPr wrap="square" lIns="0" rIns="0" tIns="0" bIns="0" anchor="ctr">
+            <a:noAutofit/>
+          </a:bodyPr>
+          <a:lstStyle/>
+          <a:p>
+            <a:pPr algn="l">
+              <a:lnSpc>
+                <a:spcPct val="110000"/>
+              </a:lnSpc>
+              <a:buNone/>
+              <a:defRPr sz="1400" b="0">
+                <a:solidFill>
+                  <a:srgbClr val="303437"/>
+                </a:solidFill>
+                <a:latin typeface="Noto Sans"/>
+              </a:defRPr>
+            </a:pPr>
+            <a:r>
+              <a:rPr sz="1400" b="1" lang="ja-JP" altLang="en-US">
+                <a:solidFill>
+                  <a:srgbClr val="FFFEF8"/>
+                </a:solidFill>
+                <a:latin typeface="Noto Sans"/>
+                <a:ea typeface="Noto Sans CJK JP"/>
+                <a:cs typeface="Noto Sans"/>
+              </a:rPr>
+              <a:t>Appendix: 3. 参考文献</a:t>
+            </a:r>
+          </a:p>
+        </p:txBody>
+      </p:sp>
+    </p:spTree>
+  </p:cSld>
+  <p:clrMapOvr>
+    <a:masterClrMapping/>
+  </p:clrMapOvr>
+</p:sld>
+</file>
+
+<file path=ppt/slides/slide44.xml><?xml version="1.0" encoding="utf-8"?>
+<p:sld xmlns:a="http://schemas.openxmlformats.org/drawingml/2006/main" xmlns:p="http://schemas.openxmlformats.org/presentationml/2006/main" xmlns:r="http://schemas.openxmlformats.org/officeDocument/2006/relationships">
+  <p:cSld>
+    <p:spTree>
+      <p:nvGrpSpPr>
+        <p:cNvPr id="1" name=""/>
+        <p:cNvGrpSpPr/>
+        <p:nvPr/>
+      </p:nvGrpSpPr>
+      <p:grpSpPr/>
+      <p:sp>
+        <p:nvSpPr>
+          <p:cNvPr id="2" name="Title 1"/>
+          <p:cNvSpPr>
+            <a:spLocks noGrp="1"/>
+          </p:cNvSpPr>
+          <p:nvPr>
+            <p:ph type="title"/>
+          </p:nvPr>
+        </p:nvSpPr>
+        <p:spPr>
+          <a:xfrm>
+            <a:off x="468172" y="650138"/>
+            <a:ext cx="8206740" cy="616305"/>
+          </a:xfrm>
+        </p:spPr>
+        <p:txBody>
+          <a:bodyPr wrap="square" lIns="0" rIns="0" tIns="0" bIns="0">
+            <a:noAutofit/>
+          </a:bodyPr>
+          <a:lstStyle/>
+          <a:p>
+            <a:pPr algn="l">
+              <a:lnSpc>
+                <a:spcPct val="110000"/>
+              </a:lnSpc>
+              <a:buNone/>
+              <a:defRPr sz="2800" b="0">
+                <a:solidFill>
+                  <a:srgbClr val="303437"/>
+                </a:solidFill>
+                <a:latin typeface="Noto Sans"/>
+              </a:defRPr>
+            </a:pPr>
+            <a:r>
+              <a:rPr sz="2800" b="1" lang="ja-JP" altLang="en-US">
+                <a:solidFill>
+                  <a:srgbClr val="303437"/>
+                </a:solidFill>
+                <a:latin typeface="Noto Sans"/>
+                <a:ea typeface="Noto Sans CJK JP"/>
+                <a:cs typeface="Noto Sans"/>
+              </a:rPr>
+              <a:t>参考文献</a:t>
+            </a:r>
+          </a:p>
+        </p:txBody>
+      </p:sp>
+      <p:sp>
+        <p:nvSpPr>
+          <p:cNvPr id="3" name="Title 2"/>
+          <p:cNvSpPr>
+            <a:spLocks noGrp="1"/>
+          </p:cNvSpPr>
+          <p:nvPr>
+            <p:ph type="title" idx="2"/>
+          </p:nvPr>
+        </p:nvSpPr>
+        <p:spPr>
+          <a:xfrm>
+            <a:off x="75895" y="0"/>
+            <a:ext cx="8115300" cy="480060"/>
+          </a:xfrm>
+        </p:spPr>
+        <p:txBody>
+          <a:bodyPr wrap="square" lIns="0" rIns="0" tIns="0" bIns="0" anchor="ctr">
+            <a:noAutofit/>
+          </a:bodyPr>
+          <a:lstStyle/>
+          <a:p>
+            <a:pPr algn="l">
+              <a:lnSpc>
+                <a:spcPct val="110000"/>
+              </a:lnSpc>
+              <a:buNone/>
+              <a:defRPr sz="1400" b="0">
+                <a:solidFill>
+                  <a:srgbClr val="303437"/>
+                </a:solidFill>
+                <a:latin typeface="Noto Sans"/>
+              </a:defRPr>
+            </a:pPr>
+            <a:r>
+              <a:rPr sz="1400" b="1" lang="ja-JP" altLang="en-US">
+                <a:solidFill>
+                  <a:srgbClr val="FFFEF8"/>
+                </a:solidFill>
+                <a:latin typeface="Noto Sans"/>
+                <a:ea typeface="Noto Sans CJK JP"/>
+                <a:cs typeface="Noto Sans"/>
+              </a:rPr>
+              <a:t>Appendix: 3. 参考文献</a:t>
+            </a:r>
+          </a:p>
+        </p:txBody>
+      </p:sp>
+      <p:sp>
+        <p:nvSpPr>
+          <p:cNvPr id="4" name="文献 1: BUSTM: OPPO XiaoBu Dialogue Short Text Matching Dataset"/>
+          <p:cNvSpPr txBox="1"/>
+          <p:nvPr/>
+        </p:nvSpPr>
+        <p:spPr>
+          <a:xfrm>
+            <a:off x="548640" y="1463040"/>
+            <a:ext cx="8046720" cy="1574419"/>
+          </a:xfrm>
+          <a:prstGeom prst="rect">
+            <a:avLst/>
+          </a:prstGeom>
+          <a:noFill/>
+        </p:spPr>
+        <p:txBody>
+          <a:bodyPr wrap="square" lIns="0" rIns="0" tIns="0" bIns="0">
+            <a:noAutofit/>
+          </a:bodyPr>
+          <a:lstStyle/>
+          <a:p>
+            <a:pPr algn="l">
+              <a:lnSpc>
+                <a:spcPct val="114000"/>
+              </a:lnSpc>
+              <a:spcBef>
+                <a:spcPts val="0"/>
+              </a:spcBef>
+              <a:spcAft>
+                <a:spcPts val="400"/>
+              </a:spcAft>
+              <a:buNone/>
+              <a:defRPr sz="1850" b="0">
+                <a:solidFill>
+                  <a:srgbClr val="303437"/>
+                </a:solidFill>
+                <a:latin typeface="Noto Sans"/>
+              </a:defRPr>
+            </a:pPr>
+            <a:r>
+              <a:rPr sz="1850" b="1" lang="ja-JP" altLang="en-US">
+                <a:solidFill>
+                  <a:srgbClr val="303437"/>
+                </a:solidFill>
+                <a:latin typeface="Noto Sans"/>
+                <a:ea typeface="Noto Sans CJK JP"/>
+                <a:cs typeface="Noto Sans"/>
+              </a:rPr>
+              <a:t>BUSTM: OPPO XiaoBu Dialogue Short Text Matching Dataset</a:t>
+            </a:r>
+          </a:p>
+          <a:p>
+            <a:pPr algn="l">
+              <a:lnSpc>
+                <a:spcPct val="114000"/>
+              </a:lnSpc>
+              <a:spcBef>
+                <a:spcPts val="0"/>
+              </a:spcBef>
+              <a:spcAft>
+                <a:spcPts val="500"/>
+              </a:spcAft>
+              <a:buNone/>
+              <a:defRPr sz="1250" b="0">
+                <a:solidFill>
+                  <a:srgbClr val="303437"/>
+                </a:solidFill>
+                <a:latin typeface="Noto Sans"/>
+              </a:defRPr>
+            </a:pPr>
+            <a:r>
+              <a:rPr sz="1250" b="0" lang="ja-JP" altLang="en-US">
+                <a:solidFill>
+                  <a:srgbClr val="626669"/>
+                </a:solidFill>
+                <a:latin typeface="Noto Sans"/>
+                <a:ea typeface="Noto Sans CJK JP"/>
+                <a:cs typeface="Noto Sans"/>
+              </a:rPr>
+              <a:t>OPPO XiaoBu Conversational-AI Center · 2021 · 公式公開</a:t>
+            </a:r>
+          </a:p>
+          <a:p>
+            <a:pPr algn="l">
+              <a:lnSpc>
+                <a:spcPct val="114000"/>
+              </a:lnSpc>
+              <a:spcBef>
+                <a:spcPts val="0"/>
+              </a:spcBef>
+              <a:spcAft>
+                <a:spcPts val="400"/>
+              </a:spcAft>
+              <a:buNone/>
+              <a:defRPr sz="1750" b="0">
+                <a:solidFill>
+                  <a:srgbClr val="303437"/>
+                </a:solidFill>
+                <a:latin typeface="Noto Sans"/>
+              </a:defRPr>
+            </a:pPr>
+            <a:r>
+              <a:rPr sz="1750" b="0" lang="ja-JP" altLang="en-US">
+                <a:solidFill>
+                  <a:srgbClr val="303437"/>
+                </a:solidFill>
+                <a:latin typeface="Noto Sans"/>
+                <a:ea typeface="Noto Sans CJK JP"/>
+                <a:cs typeface="Noto Sans"/>
+              </a:rPr>
+              <a:t>スマートフォンとIoT機器向けアシスタントの短文意味照合データ。FewCLUE配布へのリンクと引用方法を示す。</a:t>
+            </a:r>
+          </a:p>
+          <a:p>
+            <a:pPr algn="l">
+              <a:lnSpc>
+                <a:spcPct val="114000"/>
+              </a:lnSpc>
+              <a:spcBef>
+                <a:spcPts val="0"/>
+              </a:spcBef>
+              <a:spcAft>
+                <a:spcPts val="0"/>
+              </a:spcAft>
+              <a:buNone/>
+              <a:defRPr sz="1050" b="0">
+                <a:solidFill>
+                  <a:srgbClr val="303437"/>
+                </a:solidFill>
+                <a:latin typeface="Noto Sans"/>
+              </a:defRPr>
+            </a:pPr>
+            <a:r>
+              <a:rPr sz="1050" b="0" lang="ja-JP" altLang="en-US">
+                <a:solidFill>
+                  <a:srgbClr val="626669"/>
+                </a:solidFill>
+                <a:latin typeface="Noto Sans"/>
+                <a:ea typeface="Noto Sans CJK JP"/>
+                <a:cs typeface="Noto Sans"/>
+                <a:hlinkClick r:id="rId2"/>
+              </a:rPr>
+              <a:t>https://github.com/xiaobu-coai/BUSTM</a:t>
+            </a:r>
+          </a:p>
+        </p:txBody>
+      </p:sp>
+      <p:sp>
+        <p:nvSpPr>
+          <p:cNvPr id="5" name="文献 2: FewCLUE: A Chinese Few-shot Learning Evaluation Benchmark"/>
+          <p:cNvSpPr txBox="1"/>
+          <p:nvPr/>
+        </p:nvSpPr>
+        <p:spPr>
+          <a:xfrm>
+            <a:off x="548640" y="3040507"/>
+            <a:ext cx="8046720" cy="1755394"/>
+          </a:xfrm>
+          <a:prstGeom prst="rect">
+            <a:avLst/>
+          </a:prstGeom>
+          <a:noFill/>
+        </p:spPr>
+        <p:txBody>
+          <a:bodyPr wrap="square" lIns="0" rIns="0" tIns="0" bIns="0">
+            <a:noAutofit/>
+          </a:bodyPr>
+          <a:lstStyle/>
+          <a:p>
+            <a:pPr algn="l">
+              <a:lnSpc>
+                <a:spcPct val="114000"/>
+              </a:lnSpc>
+              <a:spcBef>
+                <a:spcPts val="0"/>
+              </a:spcBef>
+              <a:spcAft>
+                <a:spcPts val="400"/>
+              </a:spcAft>
+              <a:buNone/>
+              <a:defRPr sz="1850" b="0">
+                <a:solidFill>
+                  <a:srgbClr val="303437"/>
+                </a:solidFill>
+                <a:latin typeface="Noto Sans"/>
+              </a:defRPr>
+            </a:pPr>
+            <a:r>
+              <a:rPr sz="1850" b="1" lang="ja-JP" altLang="en-US">
+                <a:solidFill>
+                  <a:srgbClr val="303437"/>
+                </a:solidFill>
+                <a:latin typeface="Noto Sans"/>
+                <a:ea typeface="Noto Sans CJK JP"/>
+                <a:cs typeface="Noto Sans"/>
+              </a:rPr>
+              <a:t>FewCLUE: A Chinese Few-shot Learning Evaluation Benchmark</a:t>
+            </a:r>
+          </a:p>
+          <a:p>
+            <a:pPr algn="l">
+              <a:lnSpc>
+                <a:spcPct val="114000"/>
+              </a:lnSpc>
+              <a:spcBef>
+                <a:spcPts val="0"/>
+              </a:spcBef>
+              <a:spcAft>
+                <a:spcPts val="500"/>
+              </a:spcAft>
+              <a:buNone/>
+              <a:defRPr sz="1250" b="0">
+                <a:solidFill>
+                  <a:srgbClr val="303437"/>
+                </a:solidFill>
+                <a:latin typeface="Noto Sans"/>
+              </a:defRPr>
+            </a:pPr>
+            <a:r>
+              <a:rPr sz="1250" b="0" lang="ja-JP" altLang="en-US">
+                <a:solidFill>
+                  <a:srgbClr val="626669"/>
+                </a:solidFill>
+                <a:latin typeface="Noto Sans"/>
+                <a:ea typeface="Noto Sans CJK JP"/>
+                <a:cs typeface="Noto Sans"/>
+              </a:rPr>
+              <a:t>Liang Xu, Xiaojing Lu, Chenyang Yuan, Xuanwei Zhang, Huilin Xu, Hu Yuan, Guoao Wei, Xiang Pan, Xin Tian, Libo Qin, Hai Hu · 2021 · arXiv:2107.07498v2</a:t>
+            </a:r>
+          </a:p>
+          <a:p>
+            <a:pPr algn="l">
+              <a:lnSpc>
+                <a:spcPct val="114000"/>
+              </a:lnSpc>
+              <a:spcBef>
+                <a:spcPts val="0"/>
+              </a:spcBef>
+              <a:spcAft>
+                <a:spcPts val="400"/>
+              </a:spcAft>
+              <a:buNone/>
+              <a:defRPr sz="1750" b="0">
+                <a:solidFill>
+                  <a:srgbClr val="303437"/>
+                </a:solidFill>
+                <a:latin typeface="Noto Sans"/>
+              </a:defRPr>
+            </a:pPr>
+            <a:r>
+              <a:rPr sz="1750" b="0" lang="ja-JP" altLang="en-US">
+                <a:solidFill>
+                  <a:srgbClr val="303437"/>
+                </a:solidFill>
+                <a:latin typeface="Noto Sans"/>
+                <a:ea typeface="Noto Sans CJK JP"/>
+                <a:cs typeface="Noto Sans"/>
+              </a:rPr>
+              <a:t>中国語の九つの少数例学習課題と、直接微調整・穴埋め形式・含意判定などの比較を報告する。</a:t>
+            </a:r>
+          </a:p>
+          <a:p>
+            <a:pPr algn="l">
+              <a:lnSpc>
+                <a:spcPct val="114000"/>
+              </a:lnSpc>
+              <a:spcBef>
+                <a:spcPts val="0"/>
+              </a:spcBef>
+              <a:spcAft>
+                <a:spcPts val="0"/>
+              </a:spcAft>
+              <a:buNone/>
+              <a:defRPr sz="1050" b="0">
+                <a:solidFill>
+                  <a:srgbClr val="303437"/>
+                </a:solidFill>
+                <a:latin typeface="Noto Sans"/>
+              </a:defRPr>
+            </a:pPr>
+            <a:r>
+              <a:rPr sz="1050" b="0" lang="ja-JP" altLang="en-US">
+                <a:solidFill>
+                  <a:srgbClr val="626669"/>
+                </a:solidFill>
+                <a:latin typeface="Noto Sans"/>
+                <a:ea typeface="Noto Sans CJK JP"/>
+                <a:cs typeface="Noto Sans"/>
+                <a:hlinkClick r:id="rId3"/>
+              </a:rPr>
+              <a:t>https://arxiv.org/abs/2107.07498</a:t>
+            </a:r>
+          </a:p>
+        </p:txBody>
+      </p:sp>
+    </p:spTree>
+  </p:cSld>
+  <p:clrMapOvr>
+    <a:masterClrMapping/>
+  </p:clrMapOvr>
+</p:sld>
+</file>
+
+<file path=ppt/slides/slide45.xml><?xml version="1.0" encoding="utf-8"?>
+<p:sld xmlns:a="http://schemas.openxmlformats.org/drawingml/2006/main" xmlns:p="http://schemas.openxmlformats.org/presentationml/2006/main" xmlns:r="http://schemas.openxmlformats.org/officeDocument/2006/relationships">
+  <p:cSld>
+    <p:spTree>
+      <p:nvGrpSpPr>
+        <p:cNvPr id="1" name=""/>
+        <p:cNvGrpSpPr/>
+        <p:nvPr/>
+      </p:nvGrpSpPr>
+      <p:grpSpPr/>
+      <p:sp>
+        <p:nvSpPr>
+          <p:cNvPr id="2" name="Title 1"/>
+          <p:cNvSpPr>
+            <a:spLocks noGrp="1"/>
+          </p:cNvSpPr>
+          <p:nvPr>
+            <p:ph type="title"/>
+          </p:nvPr>
+        </p:nvSpPr>
+        <p:spPr>
+          <a:xfrm>
+            <a:off x="468172" y="650138"/>
+            <a:ext cx="8206740" cy="616305"/>
+          </a:xfrm>
+        </p:spPr>
+        <p:txBody>
+          <a:bodyPr wrap="square" lIns="0" rIns="0" tIns="0" bIns="0">
+            <a:noAutofit/>
+          </a:bodyPr>
+          <a:lstStyle/>
+          <a:p>
+            <a:pPr algn="l">
+              <a:lnSpc>
+                <a:spcPct val="110000"/>
+              </a:lnSpc>
+              <a:buNone/>
+              <a:defRPr sz="2800" b="0">
+                <a:solidFill>
+                  <a:srgbClr val="303437"/>
+                </a:solidFill>
+                <a:latin typeface="Noto Sans"/>
+              </a:defRPr>
+            </a:pPr>
+            <a:r>
+              <a:rPr sz="2800" b="1" lang="ja-JP" altLang="en-US">
+                <a:solidFill>
+                  <a:srgbClr val="303437"/>
+                </a:solidFill>
+                <a:latin typeface="Noto Sans"/>
+                <a:ea typeface="Noto Sans CJK JP"/>
+                <a:cs typeface="Noto Sans"/>
+              </a:rPr>
+              <a:t>参考文献</a:t>
+            </a:r>
+          </a:p>
+        </p:txBody>
+      </p:sp>
+      <p:sp>
+        <p:nvSpPr>
+          <p:cNvPr id="3" name="Title 2"/>
+          <p:cNvSpPr>
+            <a:spLocks noGrp="1"/>
+          </p:cNvSpPr>
+          <p:nvPr>
+            <p:ph type="title" idx="2"/>
+          </p:nvPr>
+        </p:nvSpPr>
+        <p:spPr>
+          <a:xfrm>
+            <a:off x="75895" y="0"/>
+            <a:ext cx="8115300" cy="480060"/>
+          </a:xfrm>
+        </p:spPr>
+        <p:txBody>
+          <a:bodyPr wrap="square" lIns="0" rIns="0" tIns="0" bIns="0" anchor="ctr">
+            <a:noAutofit/>
+          </a:bodyPr>
+          <a:lstStyle/>
+          <a:p>
+            <a:pPr algn="l">
+              <a:lnSpc>
+                <a:spcPct val="110000"/>
+              </a:lnSpc>
+              <a:buNone/>
+              <a:defRPr sz="1400" b="0">
+                <a:solidFill>
+                  <a:srgbClr val="303437"/>
+                </a:solidFill>
+                <a:latin typeface="Noto Sans"/>
+              </a:defRPr>
+            </a:pPr>
+            <a:r>
+              <a:rPr sz="1400" b="1" lang="ja-JP" altLang="en-US">
+                <a:solidFill>
+                  <a:srgbClr val="FFFEF8"/>
+                </a:solidFill>
+                <a:latin typeface="Noto Sans"/>
+                <a:ea typeface="Noto Sans CJK JP"/>
+                <a:cs typeface="Noto Sans"/>
+              </a:rPr>
+              <a:t>Appendix: 3. 参考文献</a:t>
+            </a:r>
+          </a:p>
+        </p:txBody>
+      </p:sp>
+      <p:sp>
+        <p:nvSpPr>
+          <p:cNvPr id="4" name="文献 1: FewCLUE — Official Dataset Distribution"/>
+          <p:cNvSpPr txBox="1"/>
+          <p:nvPr/>
+        </p:nvSpPr>
+        <p:spPr>
+          <a:xfrm>
+            <a:off x="548640" y="1463040"/>
+            <a:ext cx="8046720" cy="1574419"/>
+          </a:xfrm>
+          <a:prstGeom prst="rect">
+            <a:avLst/>
+          </a:prstGeom>
+          <a:noFill/>
+        </p:spPr>
+        <p:txBody>
+          <a:bodyPr wrap="square" lIns="0" rIns="0" tIns="0" bIns="0">
+            <a:noAutofit/>
+          </a:bodyPr>
+          <a:lstStyle/>
+          <a:p>
+            <a:pPr algn="l">
+              <a:lnSpc>
+                <a:spcPct val="114000"/>
+              </a:lnSpc>
+              <a:spcBef>
+                <a:spcPts val="0"/>
+              </a:spcBef>
+              <a:spcAft>
+                <a:spcPts val="400"/>
+              </a:spcAft>
+              <a:buNone/>
+              <a:defRPr sz="1850" b="0">
+                <a:solidFill>
+                  <a:srgbClr val="303437"/>
+                </a:solidFill>
+                <a:latin typeface="Noto Sans"/>
+              </a:defRPr>
+            </a:pPr>
+            <a:r>
+              <a:rPr sz="1850" b="1" lang="ja-JP" altLang="en-US">
+                <a:solidFill>
+                  <a:srgbClr val="303437"/>
+                </a:solidFill>
+                <a:latin typeface="Noto Sans"/>
+                <a:ea typeface="Noto Sans CJK JP"/>
+                <a:cs typeface="Noto Sans"/>
+              </a:rPr>
+              <a:t>FewCLUE — Official Dataset Distribution</a:t>
+            </a:r>
+          </a:p>
+          <a:p>
+            <a:pPr algn="l">
+              <a:lnSpc>
+                <a:spcPct val="114000"/>
+              </a:lnSpc>
+              <a:spcBef>
+                <a:spcPts val="0"/>
+              </a:spcBef>
+              <a:spcAft>
+                <a:spcPts val="500"/>
+              </a:spcAft>
+              <a:buNone/>
+              <a:defRPr sz="1250" b="0">
+                <a:solidFill>
+                  <a:srgbClr val="303437"/>
+                </a:solidFill>
+                <a:latin typeface="Noto Sans"/>
+              </a:defRPr>
+            </a:pPr>
+            <a:r>
+              <a:rPr sz="1250" b="0" lang="ja-JP" altLang="en-US">
+                <a:solidFill>
+                  <a:srgbClr val="626669"/>
+                </a:solidFill>
+                <a:latin typeface="Noto Sans"/>
+                <a:ea typeface="Noto Sans CJK JP"/>
+                <a:cs typeface="Noto Sans"/>
+              </a:rPr>
+              <a:t>CLUE team · 2021 · 公式配布</a:t>
+            </a:r>
+          </a:p>
+          <a:p>
+            <a:pPr algn="l">
+              <a:lnSpc>
+                <a:spcPct val="114000"/>
+              </a:lnSpc>
+              <a:spcBef>
+                <a:spcPts val="0"/>
+              </a:spcBef>
+              <a:spcAft>
+                <a:spcPts val="400"/>
+              </a:spcAft>
+              <a:buNone/>
+              <a:defRPr sz="1750" b="0">
+                <a:solidFill>
+                  <a:srgbClr val="303437"/>
+                </a:solidFill>
+                <a:latin typeface="Noto Sans"/>
+              </a:defRPr>
+            </a:pPr>
+            <a:r>
+              <a:rPr sz="1750" b="0" lang="ja-JP" altLang="en-US">
+                <a:solidFill>
+                  <a:srgbClr val="303437"/>
+                </a:solidFill>
+                <a:latin typeface="Noto Sans"/>
+                <a:ea typeface="Noto Sans CJK JP"/>
+                <a:cs typeface="Noto Sans"/>
+              </a:rPr>
+              <a:t>32件ずつの学習・開発組、公開正解付きテスト、提出用入力、未ラベル対をJSONL形式で公開する。</a:t>
+            </a:r>
+          </a:p>
+          <a:p>
+            <a:pPr algn="l">
+              <a:lnSpc>
+                <a:spcPct val="114000"/>
+              </a:lnSpc>
+              <a:spcBef>
+                <a:spcPts val="0"/>
+              </a:spcBef>
+              <a:spcAft>
+                <a:spcPts val="0"/>
+              </a:spcAft>
+              <a:buNone/>
+              <a:defRPr sz="1050" b="0">
+                <a:solidFill>
+                  <a:srgbClr val="303437"/>
+                </a:solidFill>
+                <a:latin typeface="Noto Sans"/>
+              </a:defRPr>
+            </a:pPr>
+            <a:r>
+              <a:rPr sz="1050" b="0" lang="ja-JP" altLang="en-US">
+                <a:solidFill>
+                  <a:srgbClr val="626669"/>
+                </a:solidFill>
+                <a:latin typeface="Noto Sans"/>
+                <a:ea typeface="Noto Sans CJK JP"/>
+                <a:cs typeface="Noto Sans"/>
+                <a:hlinkClick r:id="rId2"/>
+              </a:rPr>
+              <a:t>https://github.com/CLUEbenchmark/FewCLUE/tree/main/datasets/bustm</a:t>
+            </a:r>
+          </a:p>
+        </p:txBody>
+      </p:sp>
+      <p:sp>
+        <p:nvSpPr>
+          <p:cNvPr id="5" name="文献 2: FewCLUE — README and Evaluation Protocol"/>
+          <p:cNvSpPr txBox="1"/>
+          <p:nvPr/>
+        </p:nvSpPr>
+        <p:spPr>
+          <a:xfrm>
+            <a:off x="548640" y="3040507"/>
+            <a:ext cx="8046720" cy="1574419"/>
+          </a:xfrm>
+          <a:prstGeom prst="rect">
+            <a:avLst/>
+          </a:prstGeom>
+          <a:noFill/>
+        </p:spPr>
+        <p:txBody>
+          <a:bodyPr wrap="square" lIns="0" rIns="0" tIns="0" bIns="0">
+            <a:noAutofit/>
+          </a:bodyPr>
+          <a:lstStyle/>
+          <a:p>
+            <a:pPr algn="l">
+              <a:lnSpc>
+                <a:spcPct val="114000"/>
+              </a:lnSpc>
+              <a:spcBef>
+                <a:spcPts val="0"/>
+              </a:spcBef>
+              <a:spcAft>
+                <a:spcPts val="400"/>
+              </a:spcAft>
+              <a:buNone/>
+              <a:defRPr sz="1850" b="0">
+                <a:solidFill>
+                  <a:srgbClr val="303437"/>
+                </a:solidFill>
+                <a:latin typeface="Noto Sans"/>
+              </a:defRPr>
+            </a:pPr>
+            <a:r>
+              <a:rPr sz="1850" b="1" lang="ja-JP" altLang="en-US">
+                <a:solidFill>
+                  <a:srgbClr val="303437"/>
+                </a:solidFill>
+                <a:latin typeface="Noto Sans"/>
+                <a:ea typeface="Noto Sans CJK JP"/>
+                <a:cs typeface="Noto Sans"/>
+              </a:rPr>
+              <a:t>FewCLUE — README and Evaluation Protocol</a:t>
+            </a:r>
+          </a:p>
+          <a:p>
+            <a:pPr algn="l">
+              <a:lnSpc>
+                <a:spcPct val="114000"/>
+              </a:lnSpc>
+              <a:spcBef>
+                <a:spcPts val="0"/>
+              </a:spcBef>
+              <a:spcAft>
+                <a:spcPts val="500"/>
+              </a:spcAft>
+              <a:buNone/>
+              <a:defRPr sz="1250" b="0">
+                <a:solidFill>
+                  <a:srgbClr val="303437"/>
+                </a:solidFill>
+                <a:latin typeface="Noto Sans"/>
+              </a:defRPr>
+            </a:pPr>
+            <a:r>
+              <a:rPr sz="1250" b="0" lang="ja-JP" altLang="en-US">
+                <a:solidFill>
+                  <a:srgbClr val="626669"/>
+                </a:solidFill>
+                <a:latin typeface="Noto Sans"/>
+                <a:ea typeface="Noto Sans CJK JP"/>
+                <a:cs typeface="Noto Sans"/>
+              </a:rPr>
+              <a:t>CLUE team · 2021年の実験・コンテスト条件</a:t>
+            </a:r>
+          </a:p>
+          <a:p>
+            <a:pPr algn="l">
+              <a:lnSpc>
+                <a:spcPct val="114000"/>
+              </a:lnSpc>
+              <a:spcBef>
+                <a:spcPts val="0"/>
+              </a:spcBef>
+              <a:spcAft>
+                <a:spcPts val="400"/>
+              </a:spcAft>
+              <a:buNone/>
+              <a:defRPr sz="1750" b="0">
+                <a:solidFill>
+                  <a:srgbClr val="303437"/>
+                </a:solidFill>
+                <a:latin typeface="Noto Sans"/>
+              </a:defRPr>
+            </a:pPr>
+            <a:r>
+              <a:rPr sz="1750" b="0" lang="ja-JP" altLang="en-US">
+                <a:solidFill>
+                  <a:srgbClr val="303437"/>
+                </a:solidFill>
+                <a:latin typeface="Noto Sans"/>
+                <a:ea typeface="Noto Sans CJK JP"/>
+                <a:cs typeface="Noto Sans"/>
+              </a:rPr>
+              <a:t>公開テストと提出用テストの役割、複数学習条件の提出、人間評価とモデル比較、ライセンス欄を示す。</a:t>
+            </a:r>
+          </a:p>
+          <a:p>
+            <a:pPr algn="l">
+              <a:lnSpc>
+                <a:spcPct val="114000"/>
+              </a:lnSpc>
+              <a:spcBef>
+                <a:spcPts val="0"/>
+              </a:spcBef>
+              <a:spcAft>
+                <a:spcPts val="0"/>
+              </a:spcAft>
+              <a:buNone/>
+              <a:defRPr sz="1050" b="0">
+                <a:solidFill>
+                  <a:srgbClr val="303437"/>
+                </a:solidFill>
+                <a:latin typeface="Noto Sans"/>
+              </a:defRPr>
+            </a:pPr>
+            <a:r>
+              <a:rPr sz="1050" b="0" lang="ja-JP" altLang="en-US">
+                <a:solidFill>
+                  <a:srgbClr val="626669"/>
+                </a:solidFill>
+                <a:latin typeface="Noto Sans"/>
+                <a:ea typeface="Noto Sans CJK JP"/>
+                <a:cs typeface="Noto Sans"/>
+                <a:hlinkClick r:id="rId3"/>
+              </a:rPr>
+              <a:t>https://github.com/CLUEbenchmark/FewCLUE/blob/main/README.md</a:t>
+            </a:r>
+          </a:p>
+        </p:txBody>
+      </p:sp>
+    </p:spTree>
+  </p:cSld>
+  <p:clrMapOvr>
+    <a:masterClrMapping/>
+  </p:clrMapOvr>
+</p:sld>
+</file>
+
+<file path=ppt/slides/slide47.xml><?xml version="1.0" encoding="utf-8"?>
+<p:sld xmlns:a="http://schemas.openxmlformats.org/drawingml/2006/main" xmlns:p="http://schemas.openxmlformats.org/presentationml/2006/main" xmlns:r="http://schemas.openxmlformats.org/officeDocument/2006/relationships">
+  <p:cSld>
+    <p:spTree>
+      <p:nvGrpSpPr>
+        <p:cNvPr id="1" name=""/>
+        <p:cNvGrpSpPr/>
+        <p:nvPr/>
+      </p:nvGrpSpPr>
+      <p:grpSpPr/>
+      <p:sp>
+        <p:nvSpPr>
+          <p:cNvPr id="2" name="Title 1"/>
+          <p:cNvSpPr>
+            <a:spLocks noGrp="1"/>
+          </p:cNvSpPr>
+          <p:nvPr>
+            <p:ph type="title"/>
+          </p:nvPr>
+        </p:nvSpPr>
+        <p:spPr>
+          <a:xfrm>
+            <a:off x="468172" y="650138"/>
+            <a:ext cx="8206740" cy="616305"/>
+          </a:xfrm>
+        </p:spPr>
+        <p:txBody>
+          <a:bodyPr wrap="square" lIns="0" rIns="0" tIns="0" bIns="0">
+            <a:noAutofit/>
+          </a:bodyPr>
+          <a:lstStyle/>
+          <a:p>
+            <a:pPr algn="l">
+              <a:lnSpc>
+                <a:spcPct val="110000"/>
+              </a:lnSpc>
+              <a:buNone/>
+              <a:defRPr sz="2800" b="0">
+                <a:solidFill>
+                  <a:srgbClr val="303437"/>
+                </a:solidFill>
+                <a:latin typeface="Noto Sans"/>
+              </a:defRPr>
+            </a:pPr>
+            <a:r>
+              <a:rPr sz="2800" b="1" lang="ja-JP" altLang="en-US">
+                <a:solidFill>
+                  <a:srgbClr val="303437"/>
+                </a:solidFill>
+                <a:latin typeface="Noto Sans"/>
+                <a:ea typeface="Noto Sans CJK JP"/>
+                <a:cs typeface="Noto Sans"/>
+              </a:rPr>
+              <a:t>参考文献</a:t>
+            </a:r>
+          </a:p>
+        </p:txBody>
+      </p:sp>
+      <p:sp>
+        <p:nvSpPr>
+          <p:cNvPr id="3" name="Title 2"/>
+          <p:cNvSpPr>
+            <a:spLocks noGrp="1"/>
+          </p:cNvSpPr>
+          <p:nvPr>
+            <p:ph type="title" idx="2"/>
+          </p:nvPr>
+        </p:nvSpPr>
+        <p:spPr>
+          <a:xfrm>
+            <a:off x="75895" y="0"/>
+            <a:ext cx="8115300" cy="480060"/>
+          </a:xfrm>
+        </p:spPr>
+        <p:txBody>
+          <a:bodyPr wrap="square" lIns="0" rIns="0" tIns="0" bIns="0" anchor="ctr">
+            <a:noAutofit/>
+          </a:bodyPr>
+          <a:lstStyle/>
+          <a:p>
+            <a:pPr algn="l">
+              <a:lnSpc>
+                <a:spcPct val="110000"/>
+              </a:lnSpc>
+              <a:buNone/>
+              <a:defRPr sz="1400" b="0">
+                <a:solidFill>
+                  <a:srgbClr val="303437"/>
+                </a:solidFill>
+                <a:latin typeface="Noto Sans"/>
+              </a:defRPr>
+            </a:pPr>
+            <a:r>
+              <a:rPr sz="1400" b="1" lang="ja-JP" altLang="en-US">
+                <a:solidFill>
+                  <a:srgbClr val="FFFEF8"/>
+                </a:solidFill>
+                <a:latin typeface="Noto Sans"/>
+                <a:ea typeface="Noto Sans CJK JP"/>
+                <a:cs typeface="Noto Sans"/>
+              </a:rPr>
+              <a:t>Appendix: 3. 参考文献</a:t>
+            </a:r>
+          </a:p>
+        </p:txBody>
+      </p:sp>
+      <p:sp>
+        <p:nvSpPr>
+          <p:cNvPr id="4" name="文献 1: pet_bustm.py"/>
+          <p:cNvSpPr txBox="1"/>
+          <p:nvPr/>
+        </p:nvSpPr>
+        <p:spPr>
+          <a:xfrm>
+            <a:off x="548640" y="1463040"/>
+            <a:ext cx="8046720" cy="1574419"/>
+          </a:xfrm>
+          <a:prstGeom prst="rect">
+            <a:avLst/>
+          </a:prstGeom>
+          <a:noFill/>
+        </p:spPr>
+        <p:txBody>
+          <a:bodyPr wrap="square" lIns="0" rIns="0" tIns="0" bIns="0">
+            <a:noAutofit/>
+          </a:bodyPr>
+          <a:lstStyle/>
+          <a:p>
+            <a:pPr algn="l">
+              <a:lnSpc>
+                <a:spcPct val="114000"/>
+              </a:lnSpc>
+              <a:spcBef>
+                <a:spcPts val="0"/>
+              </a:spcBef>
+              <a:spcAft>
+                <a:spcPts val="400"/>
+              </a:spcAft>
+              <a:buNone/>
+              <a:defRPr sz="1850" b="0">
+                <a:solidFill>
+                  <a:srgbClr val="303437"/>
+                </a:solidFill>
+                <a:latin typeface="Noto Sans"/>
+              </a:defRPr>
+            </a:pPr>
+            <a:r>
+              <a:rPr sz="1850" b="1" lang="ja-JP" altLang="en-US">
+                <a:solidFill>
+                  <a:srgbClr val="303437"/>
+                </a:solidFill>
+                <a:latin typeface="Noto Sans"/>
+                <a:ea typeface="Noto Sans CJK JP"/>
+                <a:cs typeface="Noto Sans"/>
+              </a:rPr>
+              <a:t>pet_bustm.py</a:t>
+            </a:r>
+          </a:p>
+          <a:p>
+            <a:pPr algn="l">
+              <a:lnSpc>
+                <a:spcPct val="114000"/>
+              </a:lnSpc>
+              <a:spcBef>
+                <a:spcPts val="0"/>
+              </a:spcBef>
+              <a:spcAft>
+                <a:spcPts val="500"/>
+              </a:spcAft>
+              <a:buNone/>
+              <a:defRPr sz="1250" b="0">
+                <a:solidFill>
+                  <a:srgbClr val="303437"/>
+                </a:solidFill>
+                <a:latin typeface="Noto Sans"/>
+              </a:defRPr>
+            </a:pPr>
+            <a:r>
+              <a:rPr sz="1250" b="0" lang="ja-JP" altLang="en-US">
+                <a:solidFill>
+                  <a:srgbClr val="626669"/>
+                </a:solidFill>
+                <a:latin typeface="Noto Sans"/>
+                <a:ea typeface="Noto Sans CJK JP"/>
+                <a:cs typeface="Noto Sans"/>
+              </a:rPr>
+              <a:t>CLUE team (n.d.). FewCLUE公式実装。参照2026-10-19。</a:t>
+            </a:r>
+          </a:p>
+          <a:p>
+            <a:pPr algn="l">
+              <a:lnSpc>
+                <a:spcPct val="114000"/>
+              </a:lnSpc>
+              <a:spcBef>
+                <a:spcPts val="0"/>
+              </a:spcBef>
+              <a:spcAft>
+                <a:spcPts val="400"/>
+              </a:spcAft>
+              <a:buNone/>
+              <a:defRPr sz="1750" b="0">
+                <a:solidFill>
+                  <a:srgbClr val="303437"/>
+                </a:solidFill>
+                <a:latin typeface="Noto Sans"/>
+              </a:defRPr>
+            </a:pPr>
+            <a:r>
+              <a:rPr sz="1750" b="0" lang="ja-JP" altLang="en-US">
+                <a:solidFill>
+                  <a:srgbClr val="303437"/>
+                </a:solidFill>
+                <a:latin typeface="Noto Sans"/>
+                <a:ea typeface="Noto Sans CJK JP"/>
+                <a:cs typeface="Noto Sans"/>
+              </a:rPr>
+              <a:t>発話対を穴埋め文に変え、「相」「不」のラベル語を予測する。学習・開発・公開テストの読込と採点を実装する。</a:t>
+            </a:r>
+          </a:p>
+          <a:p>
+            <a:pPr algn="l">
+              <a:lnSpc>
+                <a:spcPct val="114000"/>
+              </a:lnSpc>
+              <a:spcBef>
+                <a:spcPts val="0"/>
+              </a:spcBef>
+              <a:spcAft>
+                <a:spcPts val="0"/>
+              </a:spcAft>
+              <a:buNone/>
+              <a:defRPr sz="1050" b="0">
+                <a:solidFill>
+                  <a:srgbClr val="303437"/>
+                </a:solidFill>
+                <a:latin typeface="Noto Sans"/>
+              </a:defRPr>
+            </a:pPr>
+            <a:r>
+              <a:rPr sz="1050" b="0" lang="ja-JP" altLang="en-US">
+                <a:solidFill>
+                  <a:srgbClr val="626669"/>
+                </a:solidFill>
+                <a:latin typeface="Noto Sans"/>
+                <a:ea typeface="Noto Sans CJK JP"/>
+                <a:cs typeface="Noto Sans"/>
+                <a:hlinkClick r:id="rId2"/>
+              </a:rPr>
+              <a:t>https://github.com/CLUEbenchmark/FewCLUE/blob/main/baselines/models_keras/pet/pet_bustm.py</a:t>
+            </a:r>
+          </a:p>
+        </p:txBody>
+      </p:sp>
+    </p:spTree>
+  </p:cSld>
+  <p:clrMapOvr>
+    <a:masterClrMapping/>
+  </p:clrMapOvr>
+</p:sld>
+</file>
+
 <file path=ppt/slides/slide5.xml><?xml version="1.0" encoding="utf-8"?>
 <p:sld xmlns:a="http://schemas.openxmlformats.org/drawingml/2006/main" xmlns:p="http://schemas.openxmlformats.org/presentationml/2006/main" xmlns:r="http://schemas.openxmlformats.org/officeDocument/2006/relationships">
   <p:cSld>
@@ -24682,1612 +25510,6 @@
                 <a:hlinkClick r:id="rId2"/>
               </a:rPr>
               <a:t>https://github.com/xiaobu-coai/BUSTM</a:t>
-            </a:r>
-          </a:p>
-        </p:txBody>
-      </p:sp>
-    </p:spTree>
-  </p:cSld>
-  <p:clrMapOvr>
-    <a:masterClrMapping/>
-  </p:clrMapOvr>
-</p:sld>
-</file>
-
-<file path=ppt/slides/slide50.xml><?xml version="1.0" encoding="utf-8"?>
-<p:sld xmlns:a="http://schemas.openxmlformats.org/drawingml/2006/main" xmlns:p="http://schemas.openxmlformats.org/presentationml/2006/main" xmlns:r="http://schemas.openxmlformats.org/officeDocument/2006/relationships">
-  <p:cSld>
-    <p:spTree>
-      <p:nvGrpSpPr>
-        <p:cNvPr id="1" name=""/>
-        <p:cNvGrpSpPr/>
-        <p:nvPr/>
-      </p:nvGrpSpPr>
-      <p:grpSpPr/>
-      <p:sp>
-        <p:nvSpPr>
-          <p:cNvPr id="2" name="Title 1"/>
-          <p:cNvSpPr>
-            <a:spLocks noGrp="1"/>
-          </p:cNvSpPr>
-          <p:nvPr>
-            <p:ph type="title"/>
-          </p:nvPr>
-        </p:nvSpPr>
-        <p:spPr>
-          <a:xfrm>
-            <a:off x="548640" y="2506875"/>
-            <a:ext cx="8046720" cy="585216"/>
-          </a:xfrm>
-        </p:spPr>
-        <p:txBody>
-          <a:bodyPr wrap="square" lIns="0" rIns="0" tIns="0" bIns="0" anchor="ctr">
-            <a:noAutofit/>
-          </a:bodyPr>
-          <a:lstStyle/>
-          <a:p>
-            <a:pPr algn="ctr">
-              <a:lnSpc>
-                <a:spcPct val="110000"/>
-              </a:lnSpc>
-              <a:buNone/>
-              <a:defRPr sz="3600" b="0">
-                <a:solidFill>
-                  <a:srgbClr val="303437"/>
-                </a:solidFill>
-                <a:latin typeface="Noto Sans"/>
-              </a:defRPr>
-            </a:pPr>
-            <a:r>
-              <a:rPr sz="3600" b="1" lang="ja-JP" altLang="en-US">
-                <a:solidFill>
-                  <a:srgbClr val="303437"/>
-                </a:solidFill>
-                <a:latin typeface="Noto Sans"/>
-                <a:ea typeface="Noto Sans CJK JP"/>
-                <a:cs typeface="Noto Sans"/>
-              </a:rPr>
-              <a:t>参考文献</a:t>
-            </a:r>
-          </a:p>
-        </p:txBody>
-      </p:sp>
-      <p:sp>
-        <p:nvSpPr>
-          <p:cNvPr id="3" name="Title 2"/>
-          <p:cNvSpPr>
-            <a:spLocks noGrp="1"/>
-          </p:cNvSpPr>
-          <p:nvPr>
-            <p:ph type="title" idx="2"/>
-          </p:nvPr>
-        </p:nvSpPr>
-        <p:spPr>
-          <a:xfrm>
-            <a:off x="75895" y="0"/>
-            <a:ext cx="8115300" cy="480060"/>
-          </a:xfrm>
-        </p:spPr>
-        <p:txBody>
-          <a:bodyPr wrap="square" lIns="0" rIns="0" tIns="0" bIns="0" anchor="ctr">
-            <a:noAutofit/>
-          </a:bodyPr>
-          <a:lstStyle/>
-          <a:p>
-            <a:pPr algn="l">
-              <a:lnSpc>
-                <a:spcPct val="110000"/>
-              </a:lnSpc>
-              <a:buNone/>
-              <a:defRPr sz="1400" b="0">
-                <a:solidFill>
-                  <a:srgbClr val="303437"/>
-                </a:solidFill>
-                <a:latin typeface="Noto Sans"/>
-              </a:defRPr>
-            </a:pPr>
-            <a:r>
-              <a:rPr sz="1400" b="1" lang="ja-JP" altLang="en-US">
-                <a:solidFill>
-                  <a:srgbClr val="FFFEF8"/>
-                </a:solidFill>
-                <a:latin typeface="Noto Sans"/>
-                <a:ea typeface="Noto Sans CJK JP"/>
-                <a:cs typeface="Noto Sans"/>
-              </a:rPr>
-              <a:t>Appendix: 3. 参考文献</a:t>
-            </a:r>
-          </a:p>
-        </p:txBody>
-      </p:sp>
-    </p:spTree>
-  </p:cSld>
-  <p:clrMapOvr>
-    <a:masterClrMapping/>
-  </p:clrMapOvr>
-</p:sld>
-</file>
-
-<file path=ppt/slides/slide51.xml><?xml version="1.0" encoding="utf-8"?>
-<p:sld xmlns:a="http://schemas.openxmlformats.org/drawingml/2006/main" xmlns:p="http://schemas.openxmlformats.org/presentationml/2006/main" xmlns:r="http://schemas.openxmlformats.org/officeDocument/2006/relationships">
-  <p:cSld>
-    <p:spTree>
-      <p:nvGrpSpPr>
-        <p:cNvPr id="1" name=""/>
-        <p:cNvGrpSpPr/>
-        <p:nvPr/>
-      </p:nvGrpSpPr>
-      <p:grpSpPr/>
-      <p:sp>
-        <p:nvSpPr>
-          <p:cNvPr id="2" name="Title 1"/>
-          <p:cNvSpPr>
-            <a:spLocks noGrp="1"/>
-          </p:cNvSpPr>
-          <p:nvPr>
-            <p:ph type="title"/>
-          </p:nvPr>
-        </p:nvSpPr>
-        <p:spPr>
-          <a:xfrm>
-            <a:off x="468172" y="650138"/>
-            <a:ext cx="8206740" cy="616305"/>
-          </a:xfrm>
-        </p:spPr>
-        <p:txBody>
-          <a:bodyPr wrap="square" lIns="0" rIns="0" tIns="0" bIns="0">
-            <a:noAutofit/>
-          </a:bodyPr>
-          <a:lstStyle/>
-          <a:p>
-            <a:pPr algn="l">
-              <a:lnSpc>
-                <a:spcPct val="110000"/>
-              </a:lnSpc>
-              <a:buNone/>
-              <a:defRPr sz="2800" b="0">
-                <a:solidFill>
-                  <a:srgbClr val="303437"/>
-                </a:solidFill>
-                <a:latin typeface="Noto Sans"/>
-              </a:defRPr>
-            </a:pPr>
-            <a:r>
-              <a:rPr sz="2800" b="1" lang="ja-JP" altLang="en-US">
-                <a:solidFill>
-                  <a:srgbClr val="303437"/>
-                </a:solidFill>
-                <a:latin typeface="Noto Sans"/>
-                <a:ea typeface="Noto Sans CJK JP"/>
-                <a:cs typeface="Noto Sans"/>
-              </a:rPr>
-              <a:t>参考文献</a:t>
-            </a:r>
-          </a:p>
-        </p:txBody>
-      </p:sp>
-      <p:sp>
-        <p:nvSpPr>
-          <p:cNvPr id="3" name="Title 2"/>
-          <p:cNvSpPr>
-            <a:spLocks noGrp="1"/>
-          </p:cNvSpPr>
-          <p:nvPr>
-            <p:ph type="title" idx="2"/>
-          </p:nvPr>
-        </p:nvSpPr>
-        <p:spPr>
-          <a:xfrm>
-            <a:off x="75895" y="0"/>
-            <a:ext cx="8115300" cy="480060"/>
-          </a:xfrm>
-        </p:spPr>
-        <p:txBody>
-          <a:bodyPr wrap="square" lIns="0" rIns="0" tIns="0" bIns="0" anchor="ctr">
-            <a:noAutofit/>
-          </a:bodyPr>
-          <a:lstStyle/>
-          <a:p>
-            <a:pPr algn="l">
-              <a:lnSpc>
-                <a:spcPct val="110000"/>
-              </a:lnSpc>
-              <a:buNone/>
-              <a:defRPr sz="1400" b="0">
-                <a:solidFill>
-                  <a:srgbClr val="303437"/>
-                </a:solidFill>
-                <a:latin typeface="Noto Sans"/>
-              </a:defRPr>
-            </a:pPr>
-            <a:r>
-              <a:rPr sz="1400" b="1" lang="ja-JP" altLang="en-US">
-                <a:solidFill>
-                  <a:srgbClr val="FFFEF8"/>
-                </a:solidFill>
-                <a:latin typeface="Noto Sans"/>
-                <a:ea typeface="Noto Sans CJK JP"/>
-                <a:cs typeface="Noto Sans"/>
-              </a:rPr>
-              <a:t>Appendix: 3. 参考文献</a:t>
-            </a:r>
-          </a:p>
-        </p:txBody>
-      </p:sp>
-      <p:sp>
-        <p:nvSpPr>
-          <p:cNvPr id="4" name="文献 1: BUSTM: OPPO XiaoBu Dialogue Short Text Matching Dataset"/>
-          <p:cNvSpPr txBox="1"/>
-          <p:nvPr/>
-        </p:nvSpPr>
-        <p:spPr>
-          <a:xfrm>
-            <a:off x="548640" y="1463040"/>
-            <a:ext cx="8046720" cy="1574419"/>
-          </a:xfrm>
-          <a:prstGeom prst="rect">
-            <a:avLst/>
-          </a:prstGeom>
-          <a:noFill/>
-        </p:spPr>
-        <p:txBody>
-          <a:bodyPr wrap="square" lIns="0" rIns="0" tIns="0" bIns="0">
-            <a:noAutofit/>
-          </a:bodyPr>
-          <a:lstStyle/>
-          <a:p>
-            <a:pPr algn="l">
-              <a:lnSpc>
-                <a:spcPct val="114000"/>
-              </a:lnSpc>
-              <a:spcBef>
-                <a:spcPts val="0"/>
-              </a:spcBef>
-              <a:spcAft>
-                <a:spcPts val="400"/>
-              </a:spcAft>
-              <a:buNone/>
-              <a:defRPr sz="1850" b="0">
-                <a:solidFill>
-                  <a:srgbClr val="303437"/>
-                </a:solidFill>
-                <a:latin typeface="Noto Sans"/>
-              </a:defRPr>
-            </a:pPr>
-            <a:r>
-              <a:rPr sz="1850" b="1" lang="ja-JP" altLang="en-US">
-                <a:solidFill>
-                  <a:srgbClr val="303437"/>
-                </a:solidFill>
-                <a:latin typeface="Noto Sans"/>
-                <a:ea typeface="Noto Sans CJK JP"/>
-                <a:cs typeface="Noto Sans"/>
-              </a:rPr>
-              <a:t>BUSTM: OPPO XiaoBu Dialogue Short Text Matching Dataset</a:t>
-            </a:r>
-          </a:p>
-          <a:p>
-            <a:pPr algn="l">
-              <a:lnSpc>
-                <a:spcPct val="114000"/>
-              </a:lnSpc>
-              <a:spcBef>
-                <a:spcPts val="0"/>
-              </a:spcBef>
-              <a:spcAft>
-                <a:spcPts val="500"/>
-              </a:spcAft>
-              <a:buNone/>
-              <a:defRPr sz="1250" b="0">
-                <a:solidFill>
-                  <a:srgbClr val="303437"/>
-                </a:solidFill>
-                <a:latin typeface="Noto Sans"/>
-              </a:defRPr>
-            </a:pPr>
-            <a:r>
-              <a:rPr sz="1250" b="0" lang="ja-JP" altLang="en-US">
-                <a:solidFill>
-                  <a:srgbClr val="626669"/>
-                </a:solidFill>
-                <a:latin typeface="Noto Sans"/>
-                <a:ea typeface="Noto Sans CJK JP"/>
-                <a:cs typeface="Noto Sans"/>
-              </a:rPr>
-              <a:t>OPPO XiaoBu Conversational-AI Center · 2021 · 公式公開</a:t>
-            </a:r>
-          </a:p>
-          <a:p>
-            <a:pPr algn="l">
-              <a:lnSpc>
-                <a:spcPct val="114000"/>
-              </a:lnSpc>
-              <a:spcBef>
-                <a:spcPts val="0"/>
-              </a:spcBef>
-              <a:spcAft>
-                <a:spcPts val="400"/>
-              </a:spcAft>
-              <a:buNone/>
-              <a:defRPr sz="1750" b="0">
-                <a:solidFill>
-                  <a:srgbClr val="303437"/>
-                </a:solidFill>
-                <a:latin typeface="Noto Sans"/>
-              </a:defRPr>
-            </a:pPr>
-            <a:r>
-              <a:rPr sz="1750" b="0" lang="ja-JP" altLang="en-US">
-                <a:solidFill>
-                  <a:srgbClr val="303437"/>
-                </a:solidFill>
-                <a:latin typeface="Noto Sans"/>
-                <a:ea typeface="Noto Sans CJK JP"/>
-                <a:cs typeface="Noto Sans"/>
-              </a:rPr>
-              <a:t>スマートフォンとIoT機器向けアシスタントの短文意味照合データ。FewCLUE配布へのリンクと引用方法を示す。</a:t>
-            </a:r>
-          </a:p>
-          <a:p>
-            <a:pPr algn="l">
-              <a:lnSpc>
-                <a:spcPct val="114000"/>
-              </a:lnSpc>
-              <a:spcBef>
-                <a:spcPts val="0"/>
-              </a:spcBef>
-              <a:spcAft>
-                <a:spcPts val="0"/>
-              </a:spcAft>
-              <a:buNone/>
-              <a:defRPr sz="1050" b="0">
-                <a:solidFill>
-                  <a:srgbClr val="303437"/>
-                </a:solidFill>
-                <a:latin typeface="Noto Sans"/>
-              </a:defRPr>
-            </a:pPr>
-            <a:r>
-              <a:rPr sz="1050" b="0" lang="ja-JP" altLang="en-US">
-                <a:solidFill>
-                  <a:srgbClr val="626669"/>
-                </a:solidFill>
-                <a:latin typeface="Noto Sans"/>
-                <a:ea typeface="Noto Sans CJK JP"/>
-                <a:cs typeface="Noto Sans"/>
-                <a:hlinkClick r:id="rId2"/>
-              </a:rPr>
-              <a:t>https://github.com/xiaobu-coai/BUSTM</a:t>
-            </a:r>
-          </a:p>
-        </p:txBody>
-      </p:sp>
-      <p:sp>
-        <p:nvSpPr>
-          <p:cNvPr id="5" name="文献 2: FewCLUE: A Chinese Few-shot Learning Evaluation Benchmark"/>
-          <p:cNvSpPr txBox="1"/>
-          <p:nvPr/>
-        </p:nvSpPr>
-        <p:spPr>
-          <a:xfrm>
-            <a:off x="548640" y="3040507"/>
-            <a:ext cx="8046720" cy="1755394"/>
-          </a:xfrm>
-          <a:prstGeom prst="rect">
-            <a:avLst/>
-          </a:prstGeom>
-          <a:noFill/>
-        </p:spPr>
-        <p:txBody>
-          <a:bodyPr wrap="square" lIns="0" rIns="0" tIns="0" bIns="0">
-            <a:noAutofit/>
-          </a:bodyPr>
-          <a:lstStyle/>
-          <a:p>
-            <a:pPr algn="l">
-              <a:lnSpc>
-                <a:spcPct val="114000"/>
-              </a:lnSpc>
-              <a:spcBef>
-                <a:spcPts val="0"/>
-              </a:spcBef>
-              <a:spcAft>
-                <a:spcPts val="400"/>
-              </a:spcAft>
-              <a:buNone/>
-              <a:defRPr sz="1850" b="0">
-                <a:solidFill>
-                  <a:srgbClr val="303437"/>
-                </a:solidFill>
-                <a:latin typeface="Noto Sans"/>
-              </a:defRPr>
-            </a:pPr>
-            <a:r>
-              <a:rPr sz="1850" b="1" lang="ja-JP" altLang="en-US">
-                <a:solidFill>
-                  <a:srgbClr val="303437"/>
-                </a:solidFill>
-                <a:latin typeface="Noto Sans"/>
-                <a:ea typeface="Noto Sans CJK JP"/>
-                <a:cs typeface="Noto Sans"/>
-              </a:rPr>
-              <a:t>FewCLUE: A Chinese Few-shot Learning Evaluation Benchmark</a:t>
-            </a:r>
-          </a:p>
-          <a:p>
-            <a:pPr algn="l">
-              <a:lnSpc>
-                <a:spcPct val="114000"/>
-              </a:lnSpc>
-              <a:spcBef>
-                <a:spcPts val="0"/>
-              </a:spcBef>
-              <a:spcAft>
-                <a:spcPts val="500"/>
-              </a:spcAft>
-              <a:buNone/>
-              <a:defRPr sz="1250" b="0">
-                <a:solidFill>
-                  <a:srgbClr val="303437"/>
-                </a:solidFill>
-                <a:latin typeface="Noto Sans"/>
-              </a:defRPr>
-            </a:pPr>
-            <a:r>
-              <a:rPr sz="1250" b="0" lang="ja-JP" altLang="en-US">
-                <a:solidFill>
-                  <a:srgbClr val="626669"/>
-                </a:solidFill>
-                <a:latin typeface="Noto Sans"/>
-                <a:ea typeface="Noto Sans CJK JP"/>
-                <a:cs typeface="Noto Sans"/>
-              </a:rPr>
-              <a:t>Liang Xu, Xiaojing Lu, Chenyang Yuan, Xuanwei Zhang, Huilin Xu, Hu Yuan, Guoao Wei, Xiang Pan, Xin Tian, Libo Qin, Hai Hu · 2021 · arXiv:2107.07498v2</a:t>
-            </a:r>
-          </a:p>
-          <a:p>
-            <a:pPr algn="l">
-              <a:lnSpc>
-                <a:spcPct val="114000"/>
-              </a:lnSpc>
-              <a:spcBef>
-                <a:spcPts val="0"/>
-              </a:spcBef>
-              <a:spcAft>
-                <a:spcPts val="400"/>
-              </a:spcAft>
-              <a:buNone/>
-              <a:defRPr sz="1750" b="0">
-                <a:solidFill>
-                  <a:srgbClr val="303437"/>
-                </a:solidFill>
-                <a:latin typeface="Noto Sans"/>
-              </a:defRPr>
-            </a:pPr>
-            <a:r>
-              <a:rPr sz="1750" b="0" lang="ja-JP" altLang="en-US">
-                <a:solidFill>
-                  <a:srgbClr val="303437"/>
-                </a:solidFill>
-                <a:latin typeface="Noto Sans"/>
-                <a:ea typeface="Noto Sans CJK JP"/>
-                <a:cs typeface="Noto Sans"/>
-              </a:rPr>
-              <a:t>中国語の九つの少数例学習課題と、直接微調整・穴埋め形式・含意判定などの比較を報告する。</a:t>
-            </a:r>
-          </a:p>
-          <a:p>
-            <a:pPr algn="l">
-              <a:lnSpc>
-                <a:spcPct val="114000"/>
-              </a:lnSpc>
-              <a:spcBef>
-                <a:spcPts val="0"/>
-              </a:spcBef>
-              <a:spcAft>
-                <a:spcPts val="0"/>
-              </a:spcAft>
-              <a:buNone/>
-              <a:defRPr sz="1050" b="0">
-                <a:solidFill>
-                  <a:srgbClr val="303437"/>
-                </a:solidFill>
-                <a:latin typeface="Noto Sans"/>
-              </a:defRPr>
-            </a:pPr>
-            <a:r>
-              <a:rPr sz="1050" b="0" lang="ja-JP" altLang="en-US">
-                <a:solidFill>
-                  <a:srgbClr val="626669"/>
-                </a:solidFill>
-                <a:latin typeface="Noto Sans"/>
-                <a:ea typeface="Noto Sans CJK JP"/>
-                <a:cs typeface="Noto Sans"/>
-                <a:hlinkClick r:id="rId3"/>
-              </a:rPr>
-              <a:t>https://arxiv.org/abs/2107.07498</a:t>
-            </a:r>
-          </a:p>
-        </p:txBody>
-      </p:sp>
-    </p:spTree>
-  </p:cSld>
-  <p:clrMapOvr>
-    <a:masterClrMapping/>
-  </p:clrMapOvr>
-</p:sld>
-</file>
-
-<file path=ppt/slides/slide52.xml><?xml version="1.0" encoding="utf-8"?>
-<p:sld xmlns:a="http://schemas.openxmlformats.org/drawingml/2006/main" xmlns:p="http://schemas.openxmlformats.org/presentationml/2006/main" xmlns:r="http://schemas.openxmlformats.org/officeDocument/2006/relationships">
-  <p:cSld>
-    <p:spTree>
-      <p:nvGrpSpPr>
-        <p:cNvPr id="1" name=""/>
-        <p:cNvGrpSpPr/>
-        <p:nvPr/>
-      </p:nvGrpSpPr>
-      <p:grpSpPr/>
-      <p:sp>
-        <p:nvSpPr>
-          <p:cNvPr id="2" name="Title 1"/>
-          <p:cNvSpPr>
-            <a:spLocks noGrp="1"/>
-          </p:cNvSpPr>
-          <p:nvPr>
-            <p:ph type="title"/>
-          </p:nvPr>
-        </p:nvSpPr>
-        <p:spPr>
-          <a:xfrm>
-            <a:off x="468172" y="650138"/>
-            <a:ext cx="8206740" cy="616305"/>
-          </a:xfrm>
-        </p:spPr>
-        <p:txBody>
-          <a:bodyPr wrap="square" lIns="0" rIns="0" tIns="0" bIns="0">
-            <a:noAutofit/>
-          </a:bodyPr>
-          <a:lstStyle/>
-          <a:p>
-            <a:pPr algn="l">
-              <a:lnSpc>
-                <a:spcPct val="110000"/>
-              </a:lnSpc>
-              <a:buNone/>
-              <a:defRPr sz="2800" b="0">
-                <a:solidFill>
-                  <a:srgbClr val="303437"/>
-                </a:solidFill>
-                <a:latin typeface="Noto Sans"/>
-              </a:defRPr>
-            </a:pPr>
-            <a:r>
-              <a:rPr sz="2800" b="1" lang="ja-JP" altLang="en-US">
-                <a:solidFill>
-                  <a:srgbClr val="303437"/>
-                </a:solidFill>
-                <a:latin typeface="Noto Sans"/>
-                <a:ea typeface="Noto Sans CJK JP"/>
-                <a:cs typeface="Noto Sans"/>
-              </a:rPr>
-              <a:t>参考文献</a:t>
-            </a:r>
-          </a:p>
-        </p:txBody>
-      </p:sp>
-      <p:sp>
-        <p:nvSpPr>
-          <p:cNvPr id="3" name="Title 2"/>
-          <p:cNvSpPr>
-            <a:spLocks noGrp="1"/>
-          </p:cNvSpPr>
-          <p:nvPr>
-            <p:ph type="title" idx="2"/>
-          </p:nvPr>
-        </p:nvSpPr>
-        <p:spPr>
-          <a:xfrm>
-            <a:off x="75895" y="0"/>
-            <a:ext cx="8115300" cy="480060"/>
-          </a:xfrm>
-        </p:spPr>
-        <p:txBody>
-          <a:bodyPr wrap="square" lIns="0" rIns="0" tIns="0" bIns="0" anchor="ctr">
-            <a:noAutofit/>
-          </a:bodyPr>
-          <a:lstStyle/>
-          <a:p>
-            <a:pPr algn="l">
-              <a:lnSpc>
-                <a:spcPct val="110000"/>
-              </a:lnSpc>
-              <a:buNone/>
-              <a:defRPr sz="1400" b="0">
-                <a:solidFill>
-                  <a:srgbClr val="303437"/>
-                </a:solidFill>
-                <a:latin typeface="Noto Sans"/>
-              </a:defRPr>
-            </a:pPr>
-            <a:r>
-              <a:rPr sz="1400" b="1" lang="ja-JP" altLang="en-US">
-                <a:solidFill>
-                  <a:srgbClr val="FFFEF8"/>
-                </a:solidFill>
-                <a:latin typeface="Noto Sans"/>
-                <a:ea typeface="Noto Sans CJK JP"/>
-                <a:cs typeface="Noto Sans"/>
-              </a:rPr>
-              <a:t>Appendix: 3. 参考文献</a:t>
-            </a:r>
-          </a:p>
-        </p:txBody>
-      </p:sp>
-      <p:sp>
-        <p:nvSpPr>
-          <p:cNvPr id="4" name="文献 1: FewCLUE — Official Dataset Distribution"/>
-          <p:cNvSpPr txBox="1"/>
-          <p:nvPr/>
-        </p:nvSpPr>
-        <p:spPr>
-          <a:xfrm>
-            <a:off x="548640" y="1463040"/>
-            <a:ext cx="8046720" cy="1574419"/>
-          </a:xfrm>
-          <a:prstGeom prst="rect">
-            <a:avLst/>
-          </a:prstGeom>
-          <a:noFill/>
-        </p:spPr>
-        <p:txBody>
-          <a:bodyPr wrap="square" lIns="0" rIns="0" tIns="0" bIns="0">
-            <a:noAutofit/>
-          </a:bodyPr>
-          <a:lstStyle/>
-          <a:p>
-            <a:pPr algn="l">
-              <a:lnSpc>
-                <a:spcPct val="114000"/>
-              </a:lnSpc>
-              <a:spcBef>
-                <a:spcPts val="0"/>
-              </a:spcBef>
-              <a:spcAft>
-                <a:spcPts val="400"/>
-              </a:spcAft>
-              <a:buNone/>
-              <a:defRPr sz="1850" b="0">
-                <a:solidFill>
-                  <a:srgbClr val="303437"/>
-                </a:solidFill>
-                <a:latin typeface="Noto Sans"/>
-              </a:defRPr>
-            </a:pPr>
-            <a:r>
-              <a:rPr sz="1850" b="1" lang="ja-JP" altLang="en-US">
-                <a:solidFill>
-                  <a:srgbClr val="303437"/>
-                </a:solidFill>
-                <a:latin typeface="Noto Sans"/>
-                <a:ea typeface="Noto Sans CJK JP"/>
-                <a:cs typeface="Noto Sans"/>
-              </a:rPr>
-              <a:t>FewCLUE — Official Dataset Distribution</a:t>
-            </a:r>
-          </a:p>
-          <a:p>
-            <a:pPr algn="l">
-              <a:lnSpc>
-                <a:spcPct val="114000"/>
-              </a:lnSpc>
-              <a:spcBef>
-                <a:spcPts val="0"/>
-              </a:spcBef>
-              <a:spcAft>
-                <a:spcPts val="500"/>
-              </a:spcAft>
-              <a:buNone/>
-              <a:defRPr sz="1250" b="0">
-                <a:solidFill>
-                  <a:srgbClr val="303437"/>
-                </a:solidFill>
-                <a:latin typeface="Noto Sans"/>
-              </a:defRPr>
-            </a:pPr>
-            <a:r>
-              <a:rPr sz="1250" b="0" lang="ja-JP" altLang="en-US">
-                <a:solidFill>
-                  <a:srgbClr val="626669"/>
-                </a:solidFill>
-                <a:latin typeface="Noto Sans"/>
-                <a:ea typeface="Noto Sans CJK JP"/>
-                <a:cs typeface="Noto Sans"/>
-              </a:rPr>
-              <a:t>CLUE team · 2021 · 公式配布</a:t>
-            </a:r>
-          </a:p>
-          <a:p>
-            <a:pPr algn="l">
-              <a:lnSpc>
-                <a:spcPct val="114000"/>
-              </a:lnSpc>
-              <a:spcBef>
-                <a:spcPts val="0"/>
-              </a:spcBef>
-              <a:spcAft>
-                <a:spcPts val="400"/>
-              </a:spcAft>
-              <a:buNone/>
-              <a:defRPr sz="1750" b="0">
-                <a:solidFill>
-                  <a:srgbClr val="303437"/>
-                </a:solidFill>
-                <a:latin typeface="Noto Sans"/>
-              </a:defRPr>
-            </a:pPr>
-            <a:r>
-              <a:rPr sz="1750" b="0" lang="ja-JP" altLang="en-US">
-                <a:solidFill>
-                  <a:srgbClr val="303437"/>
-                </a:solidFill>
-                <a:latin typeface="Noto Sans"/>
-                <a:ea typeface="Noto Sans CJK JP"/>
-                <a:cs typeface="Noto Sans"/>
-              </a:rPr>
-              <a:t>32件ずつの学習・開発組、公開正解付きテスト、提出用入力、未ラベル対をJSONL形式で公開する。</a:t>
-            </a:r>
-          </a:p>
-          <a:p>
-            <a:pPr algn="l">
-              <a:lnSpc>
-                <a:spcPct val="114000"/>
-              </a:lnSpc>
-              <a:spcBef>
-                <a:spcPts val="0"/>
-              </a:spcBef>
-              <a:spcAft>
-                <a:spcPts val="0"/>
-              </a:spcAft>
-              <a:buNone/>
-              <a:defRPr sz="1050" b="0">
-                <a:solidFill>
-                  <a:srgbClr val="303437"/>
-                </a:solidFill>
-                <a:latin typeface="Noto Sans"/>
-              </a:defRPr>
-            </a:pPr>
-            <a:r>
-              <a:rPr sz="1050" b="0" lang="ja-JP" altLang="en-US">
-                <a:solidFill>
-                  <a:srgbClr val="626669"/>
-                </a:solidFill>
-                <a:latin typeface="Noto Sans"/>
-                <a:ea typeface="Noto Sans CJK JP"/>
-                <a:cs typeface="Noto Sans"/>
-                <a:hlinkClick r:id="rId2"/>
-              </a:rPr>
-              <a:t>https://github.com/CLUEbenchmark/FewCLUE/tree/main/datasets/bustm</a:t>
-            </a:r>
-          </a:p>
-        </p:txBody>
-      </p:sp>
-      <p:sp>
-        <p:nvSpPr>
-          <p:cNvPr id="5" name="文献 2: FewCLUE — README and Evaluation Protocol"/>
-          <p:cNvSpPr txBox="1"/>
-          <p:nvPr/>
-        </p:nvSpPr>
-        <p:spPr>
-          <a:xfrm>
-            <a:off x="548640" y="3040507"/>
-            <a:ext cx="8046720" cy="1574419"/>
-          </a:xfrm>
-          <a:prstGeom prst="rect">
-            <a:avLst/>
-          </a:prstGeom>
-          <a:noFill/>
-        </p:spPr>
-        <p:txBody>
-          <a:bodyPr wrap="square" lIns="0" rIns="0" tIns="0" bIns="0">
-            <a:noAutofit/>
-          </a:bodyPr>
-          <a:lstStyle/>
-          <a:p>
-            <a:pPr algn="l">
-              <a:lnSpc>
-                <a:spcPct val="114000"/>
-              </a:lnSpc>
-              <a:spcBef>
-                <a:spcPts val="0"/>
-              </a:spcBef>
-              <a:spcAft>
-                <a:spcPts val="400"/>
-              </a:spcAft>
-              <a:buNone/>
-              <a:defRPr sz="1850" b="0">
-                <a:solidFill>
-                  <a:srgbClr val="303437"/>
-                </a:solidFill>
-                <a:latin typeface="Noto Sans"/>
-              </a:defRPr>
-            </a:pPr>
-            <a:r>
-              <a:rPr sz="1850" b="1" lang="ja-JP" altLang="en-US">
-                <a:solidFill>
-                  <a:srgbClr val="303437"/>
-                </a:solidFill>
-                <a:latin typeface="Noto Sans"/>
-                <a:ea typeface="Noto Sans CJK JP"/>
-                <a:cs typeface="Noto Sans"/>
-              </a:rPr>
-              <a:t>FewCLUE — README and Evaluation Protocol</a:t>
-            </a:r>
-          </a:p>
-          <a:p>
-            <a:pPr algn="l">
-              <a:lnSpc>
-                <a:spcPct val="114000"/>
-              </a:lnSpc>
-              <a:spcBef>
-                <a:spcPts val="0"/>
-              </a:spcBef>
-              <a:spcAft>
-                <a:spcPts val="500"/>
-              </a:spcAft>
-              <a:buNone/>
-              <a:defRPr sz="1250" b="0">
-                <a:solidFill>
-                  <a:srgbClr val="303437"/>
-                </a:solidFill>
-                <a:latin typeface="Noto Sans"/>
-              </a:defRPr>
-            </a:pPr>
-            <a:r>
-              <a:rPr sz="1250" b="0" lang="ja-JP" altLang="en-US">
-                <a:solidFill>
-                  <a:srgbClr val="626669"/>
-                </a:solidFill>
-                <a:latin typeface="Noto Sans"/>
-                <a:ea typeface="Noto Sans CJK JP"/>
-                <a:cs typeface="Noto Sans"/>
-              </a:rPr>
-              <a:t>CLUE team · 2021年の実験・コンテスト条件</a:t>
-            </a:r>
-          </a:p>
-          <a:p>
-            <a:pPr algn="l">
-              <a:lnSpc>
-                <a:spcPct val="114000"/>
-              </a:lnSpc>
-              <a:spcBef>
-                <a:spcPts val="0"/>
-              </a:spcBef>
-              <a:spcAft>
-                <a:spcPts val="400"/>
-              </a:spcAft>
-              <a:buNone/>
-              <a:defRPr sz="1750" b="0">
-                <a:solidFill>
-                  <a:srgbClr val="303437"/>
-                </a:solidFill>
-                <a:latin typeface="Noto Sans"/>
-              </a:defRPr>
-            </a:pPr>
-            <a:r>
-              <a:rPr sz="1750" b="0" lang="ja-JP" altLang="en-US">
-                <a:solidFill>
-                  <a:srgbClr val="303437"/>
-                </a:solidFill>
-                <a:latin typeface="Noto Sans"/>
-                <a:ea typeface="Noto Sans CJK JP"/>
-                <a:cs typeface="Noto Sans"/>
-              </a:rPr>
-              <a:t>公開テストと提出用テストの役割、複数学習条件の提出、人間評価とモデル比較、ライセンス欄を示す。</a:t>
-            </a:r>
-          </a:p>
-          <a:p>
-            <a:pPr algn="l">
-              <a:lnSpc>
-                <a:spcPct val="114000"/>
-              </a:lnSpc>
-              <a:spcBef>
-                <a:spcPts val="0"/>
-              </a:spcBef>
-              <a:spcAft>
-                <a:spcPts val="0"/>
-              </a:spcAft>
-              <a:buNone/>
-              <a:defRPr sz="1050" b="0">
-                <a:solidFill>
-                  <a:srgbClr val="303437"/>
-                </a:solidFill>
-                <a:latin typeface="Noto Sans"/>
-              </a:defRPr>
-            </a:pPr>
-            <a:r>
-              <a:rPr sz="1050" b="0" lang="ja-JP" altLang="en-US">
-                <a:solidFill>
-                  <a:srgbClr val="626669"/>
-                </a:solidFill>
-                <a:latin typeface="Noto Sans"/>
-                <a:ea typeface="Noto Sans CJK JP"/>
-                <a:cs typeface="Noto Sans"/>
-                <a:hlinkClick r:id="rId3"/>
-              </a:rPr>
-              <a:t>https://github.com/CLUEbenchmark/FewCLUE/blob/main/README.md</a:t>
-            </a:r>
-          </a:p>
-        </p:txBody>
-      </p:sp>
-    </p:spTree>
-  </p:cSld>
-  <p:clrMapOvr>
-    <a:masterClrMapping/>
-  </p:clrMapOvr>
-</p:sld>
-</file>
-
-<file path=ppt/slides/slide53.xml><?xml version="1.0" encoding="utf-8"?>
-<p:sld xmlns:a="http://schemas.openxmlformats.org/drawingml/2006/main" xmlns:p="http://schemas.openxmlformats.org/presentationml/2006/main" xmlns:r="http://schemas.openxmlformats.org/officeDocument/2006/relationships">
-  <p:cSld>
-    <p:spTree>
-      <p:nvGrpSpPr>
-        <p:cNvPr id="1" name=""/>
-        <p:cNvGrpSpPr/>
-        <p:nvPr/>
-      </p:nvGrpSpPr>
-      <p:grpSpPr/>
-      <p:sp>
-        <p:nvSpPr>
-          <p:cNvPr id="2" name="Title 1"/>
-          <p:cNvSpPr>
-            <a:spLocks noGrp="1"/>
-          </p:cNvSpPr>
-          <p:nvPr>
-            <p:ph type="title"/>
-          </p:nvPr>
-        </p:nvSpPr>
-        <p:spPr>
-          <a:xfrm>
-            <a:off x="468172" y="650138"/>
-            <a:ext cx="8206740" cy="616305"/>
-          </a:xfrm>
-        </p:spPr>
-        <p:txBody>
-          <a:bodyPr wrap="square" lIns="0" rIns="0" tIns="0" bIns="0">
-            <a:noAutofit/>
-          </a:bodyPr>
-          <a:lstStyle/>
-          <a:p>
-            <a:pPr algn="l">
-              <a:lnSpc>
-                <a:spcPct val="110000"/>
-              </a:lnSpc>
-              <a:buNone/>
-              <a:defRPr sz="2800" b="0">
-                <a:solidFill>
-                  <a:srgbClr val="303437"/>
-                </a:solidFill>
-                <a:latin typeface="Noto Sans"/>
-              </a:defRPr>
-            </a:pPr>
-            <a:r>
-              <a:rPr sz="2800" b="1" lang="ja-JP" altLang="en-US">
-                <a:solidFill>
-                  <a:srgbClr val="303437"/>
-                </a:solidFill>
-                <a:latin typeface="Noto Sans"/>
-                <a:ea typeface="Noto Sans CJK JP"/>
-                <a:cs typeface="Noto Sans"/>
-              </a:rPr>
-              <a:t>参考文献</a:t>
-            </a:r>
-          </a:p>
-        </p:txBody>
-      </p:sp>
-      <p:sp>
-        <p:nvSpPr>
-          <p:cNvPr id="3" name="Title 2"/>
-          <p:cNvSpPr>
-            <a:spLocks noGrp="1"/>
-          </p:cNvSpPr>
-          <p:nvPr>
-            <p:ph type="title" idx="2"/>
-          </p:nvPr>
-        </p:nvSpPr>
-        <p:spPr>
-          <a:xfrm>
-            <a:off x="75895" y="0"/>
-            <a:ext cx="8115300" cy="480060"/>
-          </a:xfrm>
-        </p:spPr>
-        <p:txBody>
-          <a:bodyPr wrap="square" lIns="0" rIns="0" tIns="0" bIns="0" anchor="ctr">
-            <a:noAutofit/>
-          </a:bodyPr>
-          <a:lstStyle/>
-          <a:p>
-            <a:pPr algn="l">
-              <a:lnSpc>
-                <a:spcPct val="110000"/>
-              </a:lnSpc>
-              <a:buNone/>
-              <a:defRPr sz="1400" b="0">
-                <a:solidFill>
-                  <a:srgbClr val="303437"/>
-                </a:solidFill>
-                <a:latin typeface="Noto Sans"/>
-              </a:defRPr>
-            </a:pPr>
-            <a:r>
-              <a:rPr sz="1400" b="1" lang="ja-JP" altLang="en-US">
-                <a:solidFill>
-                  <a:srgbClr val="FFFEF8"/>
-                </a:solidFill>
-                <a:latin typeface="Noto Sans"/>
-                <a:ea typeface="Noto Sans CJK JP"/>
-                <a:cs typeface="Noto Sans"/>
-              </a:rPr>
-              <a:t>Appendix: 3. 参考文献</a:t>
-            </a:r>
-          </a:p>
-        </p:txBody>
-      </p:sp>
-      <p:sp>
-        <p:nvSpPr>
-          <p:cNvPr id="4" name="文献 1: CLEVA: Chinese Language Models EVAluation Platform"/>
-          <p:cNvSpPr txBox="1"/>
-          <p:nvPr/>
-        </p:nvSpPr>
-        <p:spPr>
-          <a:xfrm>
-            <a:off x="548640" y="1463040"/>
-            <a:ext cx="8046720" cy="1574419"/>
-          </a:xfrm>
-          <a:prstGeom prst="rect">
-            <a:avLst/>
-          </a:prstGeom>
-          <a:noFill/>
-        </p:spPr>
-        <p:txBody>
-          <a:bodyPr wrap="square" lIns="0" rIns="0" tIns="0" bIns="0">
-            <a:noAutofit/>
-          </a:bodyPr>
-          <a:lstStyle/>
-          <a:p>
-            <a:pPr algn="l">
-              <a:lnSpc>
-                <a:spcPct val="114000"/>
-              </a:lnSpc>
-              <a:spcBef>
-                <a:spcPts val="0"/>
-              </a:spcBef>
-              <a:spcAft>
-                <a:spcPts val="400"/>
-              </a:spcAft>
-              <a:buNone/>
-              <a:defRPr sz="1850" b="0">
-                <a:solidFill>
-                  <a:srgbClr val="303437"/>
-                </a:solidFill>
-                <a:latin typeface="Noto Sans"/>
-              </a:defRPr>
-            </a:pPr>
-            <a:r>
-              <a:rPr sz="1850" b="1" lang="ja-JP" altLang="en-US">
-                <a:solidFill>
-                  <a:srgbClr val="303437"/>
-                </a:solidFill>
-                <a:latin typeface="Noto Sans"/>
-                <a:ea typeface="Noto Sans CJK JP"/>
-                <a:cs typeface="Noto Sans"/>
-              </a:rPr>
-              <a:t>CLEVA: Chinese Language Models EVAluation Platform</a:t>
-            </a:r>
-          </a:p>
-          <a:p>
-            <a:pPr algn="l">
-              <a:lnSpc>
-                <a:spcPct val="114000"/>
-              </a:lnSpc>
-              <a:spcBef>
-                <a:spcPts val="0"/>
-              </a:spcBef>
-              <a:spcAft>
-                <a:spcPts val="500"/>
-              </a:spcAft>
-              <a:buNone/>
-              <a:defRPr sz="1250" b="0">
-                <a:solidFill>
-                  <a:srgbClr val="303437"/>
-                </a:solidFill>
-                <a:latin typeface="Noto Sans"/>
-              </a:defRPr>
-            </a:pPr>
-            <a:r>
-              <a:rPr sz="1250" b="0" lang="ja-JP" altLang="en-US">
-                <a:solidFill>
-                  <a:srgbClr val="626669"/>
-                </a:solidFill>
-                <a:latin typeface="Noto Sans"/>
-                <a:ea typeface="Noto Sans CJK JP"/>
-                <a:cs typeface="Noto Sans"/>
-              </a:rPr>
-              <a:t>Yanyang Li et al. · 2023 · EMNLP: System Demonstrations</a:t>
-            </a:r>
-          </a:p>
-          <a:p>
-            <a:pPr algn="l">
-              <a:lnSpc>
-                <a:spcPct val="114000"/>
-              </a:lnSpc>
-              <a:spcBef>
-                <a:spcPts val="0"/>
-              </a:spcBef>
-              <a:spcAft>
-                <a:spcPts val="400"/>
-              </a:spcAft>
-              <a:buNone/>
-              <a:defRPr sz="1750" b="0">
-                <a:solidFill>
-                  <a:srgbClr val="303437"/>
-                </a:solidFill>
-                <a:latin typeface="Noto Sans"/>
-              </a:defRPr>
-            </a:pPr>
-            <a:r>
-              <a:rPr sz="1750" b="0" lang="ja-JP" altLang="en-US">
-                <a:solidFill>
-                  <a:srgbClr val="303437"/>
-                </a:solidFill>
-                <a:latin typeface="Noto Sans"/>
-                <a:ea typeface="Noto Sans CJK JP"/>
-                <a:cs typeface="Noto Sans"/>
-              </a:rPr>
-              <a:t>中国語モデルを多様な課題で評価するプラットフォーム。短い発話対の言い換え判定に元データを採用する。</a:t>
-            </a:r>
-          </a:p>
-          <a:p>
-            <a:pPr algn="l">
-              <a:lnSpc>
-                <a:spcPct val="114000"/>
-              </a:lnSpc>
-              <a:spcBef>
-                <a:spcPts val="0"/>
-              </a:spcBef>
-              <a:spcAft>
-                <a:spcPts val="0"/>
-              </a:spcAft>
-              <a:buNone/>
-              <a:defRPr sz="1050" b="0">
-                <a:solidFill>
-                  <a:srgbClr val="303437"/>
-                </a:solidFill>
-                <a:latin typeface="Noto Sans"/>
-              </a:defRPr>
-            </a:pPr>
-            <a:r>
-              <a:rPr sz="1050" b="0" lang="ja-JP" altLang="en-US">
-                <a:solidFill>
-                  <a:srgbClr val="626669"/>
-                </a:solidFill>
-                <a:latin typeface="Noto Sans"/>
-                <a:ea typeface="Noto Sans CJK JP"/>
-                <a:cs typeface="Noto Sans"/>
-                <a:hlinkClick r:id="rId2"/>
-              </a:rPr>
-              <a:t>https://aclanthology.org/2023.emnlp-demo.17/</a:t>
-            </a:r>
-          </a:p>
-        </p:txBody>
-      </p:sp>
-      <p:sp>
-        <p:nvSpPr>
-          <p:cNvPr id="5" name="文献 2: CLEVAParaphraseIdentificationScenario / Converter"/>
-          <p:cNvSpPr txBox="1"/>
-          <p:nvPr/>
-        </p:nvSpPr>
-        <p:spPr>
-          <a:xfrm>
-            <a:off x="548640" y="3040507"/>
-            <a:ext cx="8046720" cy="1574419"/>
-          </a:xfrm>
-          <a:prstGeom prst="rect">
-            <a:avLst/>
-          </a:prstGeom>
-          <a:noFill/>
-        </p:spPr>
-        <p:txBody>
-          <a:bodyPr wrap="square" lIns="0" rIns="0" tIns="0" bIns="0">
-            <a:noAutofit/>
-          </a:bodyPr>
-          <a:lstStyle/>
-          <a:p>
-            <a:pPr algn="l">
-              <a:lnSpc>
-                <a:spcPct val="114000"/>
-              </a:lnSpc>
-              <a:spcBef>
-                <a:spcPts val="0"/>
-              </a:spcBef>
-              <a:spcAft>
-                <a:spcPts val="400"/>
-              </a:spcAft>
-              <a:buNone/>
-              <a:defRPr sz="1850" b="0">
-                <a:solidFill>
-                  <a:srgbClr val="303437"/>
-                </a:solidFill>
-                <a:latin typeface="Noto Sans"/>
-              </a:defRPr>
-            </a:pPr>
-            <a:r>
-              <a:rPr sz="1850" b="1" lang="ja-JP" altLang="en-US">
-                <a:solidFill>
-                  <a:srgbClr val="303437"/>
-                </a:solidFill>
-                <a:latin typeface="Noto Sans"/>
-                <a:ea typeface="Noto Sans CJK JP"/>
-                <a:cs typeface="Noto Sans"/>
-              </a:rPr>
-              <a:t>CLEVAParaphraseIdentificationScenario / Converter</a:t>
-            </a:r>
-          </a:p>
-          <a:p>
-            <a:pPr algn="l">
-              <a:lnSpc>
-                <a:spcPct val="114000"/>
-              </a:lnSpc>
-              <a:spcBef>
-                <a:spcPts val="0"/>
-              </a:spcBef>
-              <a:spcAft>
-                <a:spcPts val="500"/>
-              </a:spcAft>
-              <a:buNone/>
-              <a:defRPr sz="1250" b="0">
-                <a:solidFill>
-                  <a:srgbClr val="303437"/>
-                </a:solidFill>
-                <a:latin typeface="Noto Sans"/>
-              </a:defRPr>
-            </a:pPr>
-            <a:r>
-              <a:rPr sz="1250" b="0" lang="ja-JP" altLang="en-US">
-                <a:solidFill>
-                  <a:srgbClr val="626669"/>
-                </a:solidFill>
-                <a:latin typeface="Noto Sans"/>
-                <a:ea typeface="Noto Sans CJK JP"/>
-                <a:cs typeface="Noto Sans"/>
-              </a:rPr>
-              <a:t>Stanford CRFM · HELM v0.4.0 · Python実装</a:t>
-            </a:r>
-          </a:p>
-          <a:p>
-            <a:pPr algn="l">
-              <a:lnSpc>
-                <a:spcPct val="114000"/>
-              </a:lnSpc>
-              <a:spcBef>
-                <a:spcPts val="0"/>
-              </a:spcBef>
-              <a:spcAft>
-                <a:spcPts val="400"/>
-              </a:spcAft>
-              <a:buNone/>
-              <a:defRPr sz="1750" b="0">
-                <a:solidFill>
-                  <a:srgbClr val="303437"/>
-                </a:solidFill>
-                <a:latin typeface="Noto Sans"/>
-              </a:defRPr>
-            </a:pPr>
-            <a:r>
-              <a:rPr sz="1750" b="0" lang="ja-JP" altLang="en-US">
-                <a:solidFill>
-                  <a:srgbClr val="303437"/>
-                </a:solidFill>
-                <a:latin typeface="Noto Sans"/>
-                <a:ea typeface="Noto Sans CJK JP"/>
-                <a:cs typeface="Noto Sans"/>
-              </a:rPr>
-              <a:t>二つの発話を二択形式へ変換する課題。外部データ・テンプレートの読込と、正解参照の変換を実装する。</a:t>
-            </a:r>
-          </a:p>
-          <a:p>
-            <a:pPr algn="l">
-              <a:lnSpc>
-                <a:spcPct val="114000"/>
-              </a:lnSpc>
-              <a:spcBef>
-                <a:spcPts val="0"/>
-              </a:spcBef>
-              <a:spcAft>
-                <a:spcPts val="0"/>
-              </a:spcAft>
-              <a:buNone/>
-              <a:defRPr sz="1050" b="0">
-                <a:solidFill>
-                  <a:srgbClr val="303437"/>
-                </a:solidFill>
-                <a:latin typeface="Noto Sans"/>
-              </a:defRPr>
-            </a:pPr>
-            <a:r>
-              <a:rPr sz="1050" b="0" lang="ja-JP" altLang="en-US">
-                <a:solidFill>
-                  <a:srgbClr val="626669"/>
-                </a:solidFill>
-                <a:latin typeface="Noto Sans"/>
-                <a:ea typeface="Noto Sans CJK JP"/>
-                <a:cs typeface="Noto Sans"/>
-                <a:hlinkClick r:id="rId3"/>
-              </a:rPr>
-              <a:t>https://github.com/stanford-crfm/helm/blob/v0.4.0/src/helm/benchmark/scenarios/cleva_scenario.py</a:t>
-            </a:r>
-          </a:p>
-        </p:txBody>
-      </p:sp>
-    </p:spTree>
-  </p:cSld>
-  <p:clrMapOvr>
-    <a:masterClrMapping/>
-  </p:clrMapOvr>
-</p:sld>
-</file>
-
-<file path=ppt/slides/slide54.xml><?xml version="1.0" encoding="utf-8"?>
-<p:sld xmlns:a="http://schemas.openxmlformats.org/drawingml/2006/main" xmlns:p="http://schemas.openxmlformats.org/presentationml/2006/main" xmlns:r="http://schemas.openxmlformats.org/officeDocument/2006/relationships">
-  <p:cSld>
-    <p:spTree>
-      <p:nvGrpSpPr>
-        <p:cNvPr id="1" name=""/>
-        <p:cNvGrpSpPr/>
-        <p:nvPr/>
-      </p:nvGrpSpPr>
-      <p:grpSpPr/>
-      <p:sp>
-        <p:nvSpPr>
-          <p:cNvPr id="2" name="Title 1"/>
-          <p:cNvSpPr>
-            <a:spLocks noGrp="1"/>
-          </p:cNvSpPr>
-          <p:nvPr>
-            <p:ph type="title"/>
-          </p:nvPr>
-        </p:nvSpPr>
-        <p:spPr>
-          <a:xfrm>
-            <a:off x="468172" y="650138"/>
-            <a:ext cx="8206740" cy="616305"/>
-          </a:xfrm>
-        </p:spPr>
-        <p:txBody>
-          <a:bodyPr wrap="square" lIns="0" rIns="0" tIns="0" bIns="0">
-            <a:noAutofit/>
-          </a:bodyPr>
-          <a:lstStyle/>
-          <a:p>
-            <a:pPr algn="l">
-              <a:lnSpc>
-                <a:spcPct val="110000"/>
-              </a:lnSpc>
-              <a:buNone/>
-              <a:defRPr sz="2800" b="0">
-                <a:solidFill>
-                  <a:srgbClr val="303437"/>
-                </a:solidFill>
-                <a:latin typeface="Noto Sans"/>
-              </a:defRPr>
-            </a:pPr>
-            <a:r>
-              <a:rPr sz="2800" b="1" lang="ja-JP" altLang="en-US">
-                <a:solidFill>
-                  <a:srgbClr val="303437"/>
-                </a:solidFill>
-                <a:latin typeface="Noto Sans"/>
-                <a:ea typeface="Noto Sans CJK JP"/>
-                <a:cs typeface="Noto Sans"/>
-              </a:rPr>
-              <a:t>参考文献</a:t>
-            </a:r>
-          </a:p>
-        </p:txBody>
-      </p:sp>
-      <p:sp>
-        <p:nvSpPr>
-          <p:cNvPr id="3" name="Title 2"/>
-          <p:cNvSpPr>
-            <a:spLocks noGrp="1"/>
-          </p:cNvSpPr>
-          <p:nvPr>
-            <p:ph type="title" idx="2"/>
-          </p:nvPr>
-        </p:nvSpPr>
-        <p:spPr>
-          <a:xfrm>
-            <a:off x="75895" y="0"/>
-            <a:ext cx="8115300" cy="480060"/>
-          </a:xfrm>
-        </p:spPr>
-        <p:txBody>
-          <a:bodyPr wrap="square" lIns="0" rIns="0" tIns="0" bIns="0" anchor="ctr">
-            <a:noAutofit/>
-          </a:bodyPr>
-          <a:lstStyle/>
-          <a:p>
-            <a:pPr algn="l">
-              <a:lnSpc>
-                <a:spcPct val="110000"/>
-              </a:lnSpc>
-              <a:buNone/>
-              <a:defRPr sz="1400" b="0">
-                <a:solidFill>
-                  <a:srgbClr val="303437"/>
-                </a:solidFill>
-                <a:latin typeface="Noto Sans"/>
-              </a:defRPr>
-            </a:pPr>
-            <a:r>
-              <a:rPr sz="1400" b="1" lang="ja-JP" altLang="en-US">
-                <a:solidFill>
-                  <a:srgbClr val="FFFEF8"/>
-                </a:solidFill>
-                <a:latin typeface="Noto Sans"/>
-                <a:ea typeface="Noto Sans CJK JP"/>
-                <a:cs typeface="Noto Sans"/>
-              </a:rPr>
-              <a:t>Appendix: 3. 参考文献</a:t>
-            </a:r>
-          </a:p>
-        </p:txBody>
-      </p:sp>
-      <p:sp>
-        <p:nvSpPr>
-          <p:cNvPr id="4" name="文献 1: pet_bustm.py"/>
-          <p:cNvSpPr txBox="1"/>
-          <p:nvPr/>
-        </p:nvSpPr>
-        <p:spPr>
-          <a:xfrm>
-            <a:off x="548640" y="1463040"/>
-            <a:ext cx="8046720" cy="1574419"/>
-          </a:xfrm>
-          <a:prstGeom prst="rect">
-            <a:avLst/>
-          </a:prstGeom>
-          <a:noFill/>
-        </p:spPr>
-        <p:txBody>
-          <a:bodyPr wrap="square" lIns="0" rIns="0" tIns="0" bIns="0">
-            <a:noAutofit/>
-          </a:bodyPr>
-          <a:lstStyle/>
-          <a:p>
-            <a:pPr algn="l">
-              <a:lnSpc>
-                <a:spcPct val="114000"/>
-              </a:lnSpc>
-              <a:spcBef>
-                <a:spcPts val="0"/>
-              </a:spcBef>
-              <a:spcAft>
-                <a:spcPts val="400"/>
-              </a:spcAft>
-              <a:buNone/>
-              <a:defRPr sz="1850" b="0">
-                <a:solidFill>
-                  <a:srgbClr val="303437"/>
-                </a:solidFill>
-                <a:latin typeface="Noto Sans"/>
-              </a:defRPr>
-            </a:pPr>
-            <a:r>
-              <a:rPr sz="1850" b="1" lang="ja-JP" altLang="en-US">
-                <a:solidFill>
-                  <a:srgbClr val="303437"/>
-                </a:solidFill>
-                <a:latin typeface="Noto Sans"/>
-                <a:ea typeface="Noto Sans CJK JP"/>
-                <a:cs typeface="Noto Sans"/>
-              </a:rPr>
-              <a:t>pet_bustm.py</a:t>
-            </a:r>
-          </a:p>
-          <a:p>
-            <a:pPr algn="l">
-              <a:lnSpc>
-                <a:spcPct val="114000"/>
-              </a:lnSpc>
-              <a:spcBef>
-                <a:spcPts val="0"/>
-              </a:spcBef>
-              <a:spcAft>
-                <a:spcPts val="500"/>
-              </a:spcAft>
-              <a:buNone/>
-              <a:defRPr sz="1250" b="0">
-                <a:solidFill>
-                  <a:srgbClr val="303437"/>
-                </a:solidFill>
-                <a:latin typeface="Noto Sans"/>
-              </a:defRPr>
-            </a:pPr>
-            <a:r>
-              <a:rPr sz="1250" b="0" lang="ja-JP" altLang="en-US">
-                <a:solidFill>
-                  <a:srgbClr val="626669"/>
-                </a:solidFill>
-                <a:latin typeface="Noto Sans"/>
-                <a:ea typeface="Noto Sans CJK JP"/>
-                <a:cs typeface="Noto Sans"/>
-              </a:rPr>
-              <a:t>CLUE team · FewCLUE公式実装</a:t>
-            </a:r>
-          </a:p>
-          <a:p>
-            <a:pPr algn="l">
-              <a:lnSpc>
-                <a:spcPct val="114000"/>
-              </a:lnSpc>
-              <a:spcBef>
-                <a:spcPts val="0"/>
-              </a:spcBef>
-              <a:spcAft>
-                <a:spcPts val="400"/>
-              </a:spcAft>
-              <a:buNone/>
-              <a:defRPr sz="1750" b="0">
-                <a:solidFill>
-                  <a:srgbClr val="303437"/>
-                </a:solidFill>
-                <a:latin typeface="Noto Sans"/>
-              </a:defRPr>
-            </a:pPr>
-            <a:r>
-              <a:rPr sz="1750" b="0" lang="ja-JP" altLang="en-US">
-                <a:solidFill>
-                  <a:srgbClr val="303437"/>
-                </a:solidFill>
-                <a:latin typeface="Noto Sans"/>
-                <a:ea typeface="Noto Sans CJK JP"/>
-                <a:cs typeface="Noto Sans"/>
-              </a:rPr>
-              <a:t>発話対を穴埋め文に変え、「相」「不」のラベル語を予測する。学習・開発・公開テストの読込と採点を実装する。</a:t>
-            </a:r>
-          </a:p>
-          <a:p>
-            <a:pPr algn="l">
-              <a:lnSpc>
-                <a:spcPct val="114000"/>
-              </a:lnSpc>
-              <a:spcBef>
-                <a:spcPts val="0"/>
-              </a:spcBef>
-              <a:spcAft>
-                <a:spcPts val="0"/>
-              </a:spcAft>
-              <a:buNone/>
-              <a:defRPr sz="1050" b="0">
-                <a:solidFill>
-                  <a:srgbClr val="303437"/>
-                </a:solidFill>
-                <a:latin typeface="Noto Sans"/>
-              </a:defRPr>
-            </a:pPr>
-            <a:r>
-              <a:rPr sz="1050" b="0" lang="ja-JP" altLang="en-US">
-                <a:solidFill>
-                  <a:srgbClr val="626669"/>
-                </a:solidFill>
-                <a:latin typeface="Noto Sans"/>
-                <a:ea typeface="Noto Sans CJK JP"/>
-                <a:cs typeface="Noto Sans"/>
-                <a:hlinkClick r:id="rId2"/>
-              </a:rPr>
-              <a:t>https://github.com/CLUEbenchmark/FewCLUE/blob/main/baselines/models_keras/pet/pet_bustm.py</a:t>
             </a:r>
           </a:p>
         </p:txBody>
